--- a/onboarding/template_onboarding.pptx
+++ b/onboarding/template_onboarding.pptx
@@ -10,7 +10,7 @@
     <p:sldId id="258" r:id="rId4"/>
     <p:sldId id="269" r:id="rId5"/>
     <p:sldId id="268" r:id="rId6"/>
-    <p:sldId id="270" r:id="rId7"/>
+    <p:sldId id="271" r:id="rId7"/>
     <p:sldId id="262" r:id="rId8"/>
     <p:sldId id="266" r:id="rId9"/>
     <p:sldId id="264" r:id="rId10"/>
@@ -273,7 +273,7 @@
           <a:p>
             <a:fld id="{1D8BD707-D9CF-40AE-B4C6-C98DA3205C09}" type="datetimeFigureOut">
               <a:rPr lang="en-US"/>
-              <a:t>6/8/2026</a:t>
+              <a:t>6/10/2026</a:t>
             </a:fld>
             <a:endParaRPr lang="en-US"/>
           </a:p>
@@ -450,7 +450,7 @@
           <a:p>
             <a:fld id="{1D8BD707-D9CF-40AE-B4C6-C98DA3205C09}" type="datetimeFigureOut">
               <a:rPr lang="en-US"/>
-              <a:t>6/8/2026</a:t>
+              <a:t>6/10/2026</a:t>
             </a:fld>
             <a:endParaRPr lang="en-US"/>
           </a:p>
@@ -664,7 +664,7 @@
           <a:p>
             <a:fld id="{1D8BD707-D9CF-40AE-B4C6-C98DA3205C09}" type="datetimeFigureOut">
               <a:rPr lang="en-US"/>
-              <a:t>6/8/2026</a:t>
+              <a:t>6/10/2026</a:t>
             </a:fld>
             <a:endParaRPr lang="en-US"/>
           </a:p>
@@ -812,7 +812,7 @@
           <a:p>
             <a:fld id="{1D8BD707-D9CF-40AE-B4C6-C98DA3205C09}" type="datetimeFigureOut">
               <a:rPr lang="en-US"/>
-              <a:t>6/8/2026</a:t>
+              <a:t>6/10/2026</a:t>
             </a:fld>
             <a:endParaRPr lang="en-US"/>
           </a:p>
@@ -2829,7 +2829,7 @@
           <a:p>
             <a:fld id="{1D8BD707-D9CF-40AE-B4C6-C98DA3205C09}" type="datetimeFigureOut">
               <a:rPr lang="en-US"/>
-              <a:t>6/8/2026</a:t>
+              <a:t>6/10/2026</a:t>
             </a:fld>
             <a:endParaRPr lang="en-US"/>
           </a:p>
@@ -3076,7 +3076,7 @@
           <a:p>
             <a:fld id="{1D8BD707-D9CF-40AE-B4C6-C98DA3205C09}" type="datetimeFigureOut">
               <a:rPr lang="en-US"/>
-              <a:t>6/8/2026</a:t>
+              <a:t>6/10/2026</a:t>
             </a:fld>
             <a:endParaRPr lang="en-US"/>
           </a:p>
@@ -3410,16 +3410,6 @@
                 <a:cs typeface="Calibri"/>
               </a:rPr>
             </a:br>
-            <a:r>
-              <a:rPr lang="pt-BR" sz="3000" spc="-25" dirty="0">
-                <a:solidFill>
-                  <a:srgbClr val="FFFFFF"/>
-                </a:solidFill>
-                <a:latin typeface="Calibri"/>
-                <a:cs typeface="Calibri"/>
-              </a:rPr>
-              <a:t/>
-            </a:r>
             <a:br>
               <a:rPr lang="pt-BR" sz="3000" spc="-25" dirty="0">
                 <a:solidFill>
@@ -3430,7 +3420,7 @@
               </a:rPr>
             </a:br>
             <a:r>
-              <a:rPr lang="pt-BR" sz="3200" spc="-25" dirty="0" smtClean="0">
+              <a:rPr lang="pt-BR" sz="3200" spc="-25" dirty="0">
                 <a:solidFill>
                   <a:srgbClr val="FFFFFF"/>
                 </a:solidFill>
@@ -5463,7 +5453,7 @@
           <p:cNvPr id="43" name="object 36">
             <a:extLst>
               <a:ext uri="{FF2B5EF4-FFF2-40B4-BE49-F238E27FC236}">
-                <a16:creationId xmlns:a16="http://schemas.microsoft.com/office/drawing/2014/main" xmlns="" id="{0E7E3E3A-70D7-F87E-4BD0-D2792B478C8C}"/>
+                <a16:creationId xmlns:a16="http://schemas.microsoft.com/office/drawing/2014/main" id="{0E7E3E3A-70D7-F87E-4BD0-D2792B478C8C}"/>
               </a:ext>
             </a:extLst>
           </p:cNvPr>
@@ -5577,7 +5567,7 @@
           <p:cNvPr id="59" name="object 6">
             <a:extLst>
               <a:ext uri="{FF2B5EF4-FFF2-40B4-BE49-F238E27FC236}">
-                <a16:creationId xmlns:a16="http://schemas.microsoft.com/office/drawing/2014/main" xmlns="" id="{95C7757E-9759-47B6-CCAD-1419B7EF67EF}"/>
+                <a16:creationId xmlns:a16="http://schemas.microsoft.com/office/drawing/2014/main" id="{95C7757E-9759-47B6-CCAD-1419B7EF67EF}"/>
               </a:ext>
             </a:extLst>
           </p:cNvPr>
@@ -5597,7 +5587,7 @@
             <p:cNvPr id="60" name="object 7">
               <a:extLst>
                 <a:ext uri="{FF2B5EF4-FFF2-40B4-BE49-F238E27FC236}">
-                  <a16:creationId xmlns:a16="http://schemas.microsoft.com/office/drawing/2014/main" xmlns="" id="{89B8A6C7-980F-878B-37BD-EC9469C2ABF4}"/>
+                  <a16:creationId xmlns:a16="http://schemas.microsoft.com/office/drawing/2014/main" id="{89B8A6C7-980F-878B-37BD-EC9469C2ABF4}"/>
                 </a:ext>
               </a:extLst>
             </p:cNvPr>
@@ -5625,7 +5615,7 @@
             <p:cNvPr id="61" name="object 8">
               <a:extLst>
                 <a:ext uri="{FF2B5EF4-FFF2-40B4-BE49-F238E27FC236}">
-                  <a16:creationId xmlns:a16="http://schemas.microsoft.com/office/drawing/2014/main" xmlns="" id="{40325FD6-B40F-0368-F56B-46596D220FA5}"/>
+                  <a16:creationId xmlns:a16="http://schemas.microsoft.com/office/drawing/2014/main" id="{40325FD6-B40F-0368-F56B-46596D220FA5}"/>
                 </a:ext>
               </a:extLst>
             </p:cNvPr>
@@ -5653,7 +5643,7 @@
             <p:cNvPr id="62" name="object 9">
               <a:extLst>
                 <a:ext uri="{FF2B5EF4-FFF2-40B4-BE49-F238E27FC236}">
-                  <a16:creationId xmlns:a16="http://schemas.microsoft.com/office/drawing/2014/main" xmlns="" id="{823621DA-1708-D35C-CEB8-9CF458876242}"/>
+                  <a16:creationId xmlns:a16="http://schemas.microsoft.com/office/drawing/2014/main" id="{823621DA-1708-D35C-CEB8-9CF458876242}"/>
                 </a:ext>
               </a:extLst>
             </p:cNvPr>
@@ -5760,7 +5750,7 @@
           <p:cNvPr id="63" name="object 36">
             <a:extLst>
               <a:ext uri="{FF2B5EF4-FFF2-40B4-BE49-F238E27FC236}">
-                <a16:creationId xmlns:a16="http://schemas.microsoft.com/office/drawing/2014/main" xmlns="" id="{291368F5-588D-77F9-A721-A6535B42C01F}"/>
+                <a16:creationId xmlns:a16="http://schemas.microsoft.com/office/drawing/2014/main" id="{291368F5-588D-77F9-A721-A6535B42C01F}"/>
               </a:ext>
             </a:extLst>
           </p:cNvPr>
@@ -5838,7 +5828,7 @@
           <p:cNvPr id="65" name="object 37">
             <a:extLst>
               <a:ext uri="{FF2B5EF4-FFF2-40B4-BE49-F238E27FC236}">
-                <a16:creationId xmlns:a16="http://schemas.microsoft.com/office/drawing/2014/main" xmlns="" id="{ED39A315-CCDC-D646-EF51-F0F93561B662}"/>
+                <a16:creationId xmlns:a16="http://schemas.microsoft.com/office/drawing/2014/main" id="{ED39A315-CCDC-D646-EF51-F0F93561B662}"/>
               </a:ext>
             </a:extLst>
           </p:cNvPr>
@@ -5886,7 +5876,7 @@
           <p:cNvPr id="45" name="object 18">
             <a:extLst>
               <a:ext uri="{FF2B5EF4-FFF2-40B4-BE49-F238E27FC236}">
-                <a16:creationId xmlns:a16="http://schemas.microsoft.com/office/drawing/2014/main" xmlns="" id="{AD1008C5-BF2E-E89E-D25F-660D4E28A252}"/>
+                <a16:creationId xmlns:a16="http://schemas.microsoft.com/office/drawing/2014/main" id="{AD1008C5-BF2E-E89E-D25F-660D4E28A252}"/>
               </a:ext>
             </a:extLst>
           </p:cNvPr>
@@ -5906,7 +5896,7 @@
             <p:cNvPr id="46" name="object 19">
               <a:extLst>
                 <a:ext uri="{FF2B5EF4-FFF2-40B4-BE49-F238E27FC236}">
-                  <a16:creationId xmlns:a16="http://schemas.microsoft.com/office/drawing/2014/main" xmlns="" id="{17216AAE-C6B2-7136-3E8C-D64DCF75B73D}"/>
+                  <a16:creationId xmlns:a16="http://schemas.microsoft.com/office/drawing/2014/main" id="{17216AAE-C6B2-7136-3E8C-D64DCF75B73D}"/>
                 </a:ext>
               </a:extLst>
             </p:cNvPr>
@@ -5934,7 +5924,7 @@
             <p:cNvPr id="47" name="object 20">
               <a:extLst>
                 <a:ext uri="{FF2B5EF4-FFF2-40B4-BE49-F238E27FC236}">
-                  <a16:creationId xmlns:a16="http://schemas.microsoft.com/office/drawing/2014/main" xmlns="" id="{11D1A34D-01A6-49CE-4489-AE3F53F2A91F}"/>
+                  <a16:creationId xmlns:a16="http://schemas.microsoft.com/office/drawing/2014/main" id="{11D1A34D-01A6-49CE-4489-AE3F53F2A91F}"/>
                 </a:ext>
               </a:extLst>
             </p:cNvPr>
@@ -5962,7 +5952,7 @@
             <p:cNvPr id="48" name="object 21">
               <a:extLst>
                 <a:ext uri="{FF2B5EF4-FFF2-40B4-BE49-F238E27FC236}">
-                  <a16:creationId xmlns:a16="http://schemas.microsoft.com/office/drawing/2014/main" xmlns="" id="{97968AC2-2C0B-595D-AE9D-27494869EF4B}"/>
+                  <a16:creationId xmlns:a16="http://schemas.microsoft.com/office/drawing/2014/main" id="{97968AC2-2C0B-595D-AE9D-27494869EF4B}"/>
                 </a:ext>
               </a:extLst>
             </p:cNvPr>
@@ -6069,7 +6059,7 @@
           <p:cNvPr id="49" name="object 23">
             <a:extLst>
               <a:ext uri="{FF2B5EF4-FFF2-40B4-BE49-F238E27FC236}">
-                <a16:creationId xmlns:a16="http://schemas.microsoft.com/office/drawing/2014/main" xmlns="" id="{0AE0C4D8-4448-50B5-73B8-EB3AF3E9541C}"/>
+                <a16:creationId xmlns:a16="http://schemas.microsoft.com/office/drawing/2014/main" id="{0AE0C4D8-4448-50B5-73B8-EB3AF3E9541C}"/>
               </a:ext>
             </a:extLst>
           </p:cNvPr>
@@ -6194,7 +6184,7 @@
           <p:cNvPr id="50" name="object 33">
             <a:extLst>
               <a:ext uri="{FF2B5EF4-FFF2-40B4-BE49-F238E27FC236}">
-                <a16:creationId xmlns:a16="http://schemas.microsoft.com/office/drawing/2014/main" xmlns="" id="{0505C672-72BE-C25D-9B8F-187CD4B46457}"/>
+                <a16:creationId xmlns:a16="http://schemas.microsoft.com/office/drawing/2014/main" id="{0505C672-72BE-C25D-9B8F-187CD4B46457}"/>
               </a:ext>
             </a:extLst>
           </p:cNvPr>
@@ -14921,7 +14911,7 @@
           <p:cNvPr id="142" name="object 133">
             <a:extLst>
               <a:ext uri="{FF2B5EF4-FFF2-40B4-BE49-F238E27FC236}">
-                <a16:creationId xmlns:a16="http://schemas.microsoft.com/office/drawing/2014/main" xmlns="" id="{448646AE-D709-3061-3724-225DD48FA934}"/>
+                <a16:creationId xmlns:a16="http://schemas.microsoft.com/office/drawing/2014/main" id="{448646AE-D709-3061-3724-225DD48FA934}"/>
               </a:ext>
             </a:extLst>
           </p:cNvPr>
@@ -14993,94 +14983,14 @@
           <a:chExt cx="0" cy="0"/>
         </a:xfrm>
       </p:grpSpPr>
-      <p:sp>
-        <p:nvSpPr>
-          <p:cNvPr id="2" name="object 2"/>
-          <p:cNvSpPr txBox="1">
-            <a:spLocks noGrp="1"/>
-          </p:cNvSpPr>
-          <p:nvPr>
-            <p:ph type="title"/>
-          </p:nvPr>
-        </p:nvSpPr>
-        <p:spPr>
-          <a:prstGeom prst="rect">
-            <a:avLst/>
-          </a:prstGeom>
-        </p:spPr>
-        <p:txBody>
-          <a:bodyPr vert="horz" wrap="square" lIns="0" tIns="12700" rIns="0" bIns="0" rtlCol="0">
-            <a:spAutoFit/>
-          </a:bodyPr>
-          <a:lstStyle/>
-          <a:p>
-            <a:pPr marL="12700">
-              <a:lnSpc>
-                <a:spcPct val="100000"/>
-              </a:lnSpc>
-              <a:spcBef>
-                <a:spcPts val="100"/>
-              </a:spcBef>
-            </a:pPr>
-            <a:r>
-              <a:rPr spc="-20"/>
-              <a:t>Informações</a:t>
-            </a:r>
-            <a:r>
-              <a:rPr spc="-105"/>
-              <a:t> </a:t>
-            </a:r>
-            <a:r>
-              <a:t>sobre</a:t>
-            </a:r>
-            <a:r>
-              <a:rPr spc="-80"/>
-              <a:t> </a:t>
-            </a:r>
-            <a:r>
-              <a:t>seus</a:t>
-            </a:r>
-            <a:r>
-              <a:rPr spc="-60"/>
-              <a:t> </a:t>
-            </a:r>
-            <a:r>
-              <a:rPr spc="-10"/>
-              <a:t>acessos</a:t>
-            </a:r>
-          </a:p>
-        </p:txBody>
-      </p:sp>
       <p:pic>
         <p:nvPicPr>
-          <p:cNvPr id="3" name="object 3"/>
+          <p:cNvPr id="4" name="img_fluig"/>
           <p:cNvPicPr/>
           <p:nvPr/>
         </p:nvPicPr>
         <p:blipFill>
           <a:blip r:embed="rId2" cstate="print"/>
-          <a:stretch>
-            <a:fillRect/>
-          </a:stretch>
-        </p:blipFill>
-        <p:spPr>
-          <a:xfrm>
-            <a:off x="118871" y="908303"/>
-            <a:ext cx="4024924" cy="45720"/>
-          </a:xfrm>
-          <a:prstGeom prst="rect">
-            <a:avLst/>
-          </a:prstGeom>
-        </p:spPr>
-      </p:pic>
-      <p:pic>
-        <p:nvPicPr>
-          <p:cNvPr id="4" name="object 4"/>
-          <p:cNvPicPr/>
-          <p:nvPr/>
-        </p:nvPicPr>
-        <p:blipFill>
-          <a:blip r:embed="rId3" cstate="print"/>
           <a:stretch>
             <a:fillRect/>
           </a:stretch>
@@ -15097,7 +15007,7 @@
       </p:pic>
       <p:sp>
         <p:nvSpPr>
-          <p:cNvPr id="5" name="object 5"/>
+          <p:cNvPr id="5" name="ct_fluig"/>
           <p:cNvSpPr txBox="1"/>
           <p:nvPr/>
         </p:nvSpPr>
@@ -15127,7 +15037,7 @@
               </a:tabLst>
             </a:pPr>
             <a:r>
-              <a:rPr sz="1800" dirty="0" smtClean="0">
+              <a:rPr sz="1800" dirty="0">
                 <a:solidFill>
                   <a:srgbClr val="7D7D7D"/>
                 </a:solidFill>
@@ -15137,17 +15047,17 @@
               <a:t>Login</a:t>
             </a:r>
             <a:r>
-              <a:rPr sz="1800" spc="-40" dirty="0" smtClean="0">
-                <a:solidFill>
-                  <a:srgbClr val="7D7D7D"/>
-                </a:solidFill>
-                <a:latin typeface="Calibri"/>
-                <a:cs typeface="Calibri"/>
-              </a:rPr>
-              <a:t> </a:t>
-            </a:r>
-            <a:r>
-              <a:rPr sz="1800" dirty="0" smtClean="0">
+              <a:rPr sz="1800" spc="-40" dirty="0">
+                <a:solidFill>
+                  <a:srgbClr val="7D7D7D"/>
+                </a:solidFill>
+                <a:latin typeface="Calibri"/>
+                <a:cs typeface="Calibri"/>
+              </a:rPr>
+              <a:t> </a:t>
+            </a:r>
+            <a:r>
+              <a:rPr sz="1800" dirty="0">
                 <a:solidFill>
                   <a:srgbClr val="7D7D7D"/>
                 </a:solidFill>
@@ -15157,17 +15067,17 @@
               <a:t>do</a:t>
             </a:r>
             <a:r>
-              <a:rPr sz="1800" spc="-55" dirty="0" smtClean="0">
-                <a:solidFill>
-                  <a:srgbClr val="7D7D7D"/>
-                </a:solidFill>
-                <a:latin typeface="Calibri"/>
-                <a:cs typeface="Calibri"/>
-              </a:rPr>
-              <a:t> </a:t>
-            </a:r>
-            <a:r>
-              <a:rPr sz="1800" spc="-20" dirty="0" err="1" smtClean="0">
+              <a:rPr sz="1800" spc="-55" dirty="0">
+                <a:solidFill>
+                  <a:srgbClr val="7D7D7D"/>
+                </a:solidFill>
+                <a:latin typeface="Calibri"/>
+                <a:cs typeface="Calibri"/>
+              </a:rPr>
+              <a:t> </a:t>
+            </a:r>
+            <a:r>
+              <a:rPr sz="1800" spc="-20" dirty="0" err="1">
                 <a:solidFill>
                   <a:srgbClr val="7D7D7D"/>
                 </a:solidFill>
@@ -15177,7 +15087,7 @@
               <a:t>Fluig</a:t>
             </a:r>
             <a:r>
-              <a:rPr lang="pt-BR" sz="1800" spc="-20" dirty="0" smtClean="0">
+              <a:rPr lang="pt-BR" sz="1800" spc="-20" dirty="0">
                 <a:solidFill>
                   <a:srgbClr val="7D7D7D"/>
                 </a:solidFill>
@@ -15187,7 +15097,7 @@
               <a:t> (é sincronizado com seu </a:t>
             </a:r>
             <a:r>
-              <a:rPr lang="pt-BR" sz="1800" spc="-20" dirty="0" err="1" smtClean="0">
+              <a:rPr lang="pt-BR" sz="1800" spc="-20" dirty="0" err="1">
                 <a:solidFill>
                   <a:srgbClr val="7D7D7D"/>
                 </a:solidFill>
@@ -15197,7 +15107,7 @@
               <a:t>login</a:t>
             </a:r>
             <a:r>
-              <a:rPr lang="pt-BR" sz="1800" spc="-20" dirty="0" smtClean="0">
+              <a:rPr lang="pt-BR" sz="1800" spc="-20" dirty="0">
                 <a:solidFill>
                   <a:srgbClr val="7D7D7D"/>
                 </a:solidFill>
@@ -15206,7 +15116,7 @@
               </a:rPr>
               <a:t> de rede)</a:t>
             </a:r>
-            <a:endParaRPr sz="1800" dirty="0" smtClean="0">
+            <a:endParaRPr sz="1800" dirty="0">
               <a:latin typeface="Calibri"/>
               <a:cs typeface="Calibri"/>
             </a:endParaRPr>
@@ -15218,7 +15128,7 @@
               </a:lnSpc>
             </a:pPr>
             <a:r>
-              <a:rPr sz="1800" dirty="0" smtClean="0">
+              <a:rPr sz="1800" dirty="0">
                 <a:solidFill>
                   <a:srgbClr val="7D7D7D"/>
                 </a:solidFill>
@@ -15228,17 +15138,17 @@
               <a:t>O</a:t>
             </a:r>
             <a:r>
-              <a:rPr sz="1800" spc="-60" dirty="0" smtClean="0">
-                <a:solidFill>
-                  <a:srgbClr val="7D7D7D"/>
-                </a:solidFill>
-                <a:latin typeface="Calibri"/>
-                <a:cs typeface="Calibri"/>
-              </a:rPr>
-              <a:t> </a:t>
-            </a:r>
-            <a:r>
-              <a:rPr sz="1800" dirty="0" err="1" smtClean="0">
+              <a:rPr sz="1800" spc="-60" dirty="0">
+                <a:solidFill>
+                  <a:srgbClr val="7D7D7D"/>
+                </a:solidFill>
+                <a:latin typeface="Calibri"/>
+                <a:cs typeface="Calibri"/>
+              </a:rPr>
+              <a:t> </a:t>
+            </a:r>
+            <a:r>
+              <a:rPr sz="1800" dirty="0" err="1">
                 <a:solidFill>
                   <a:srgbClr val="7D7D7D"/>
                 </a:solidFill>
@@ -15248,17 +15158,17 @@
               <a:t>sistema</a:t>
             </a:r>
             <a:r>
-              <a:rPr sz="1800" spc="-55" dirty="0" smtClean="0">
-                <a:solidFill>
-                  <a:srgbClr val="7D7D7D"/>
-                </a:solidFill>
-                <a:latin typeface="Calibri"/>
-                <a:cs typeface="Calibri"/>
-              </a:rPr>
-              <a:t> </a:t>
-            </a:r>
-            <a:r>
-              <a:rPr sz="1800" dirty="0" err="1" smtClean="0">
+              <a:rPr sz="1800" spc="-55" dirty="0">
+                <a:solidFill>
+                  <a:srgbClr val="7D7D7D"/>
+                </a:solidFill>
+                <a:latin typeface="Calibri"/>
+                <a:cs typeface="Calibri"/>
+              </a:rPr>
+              <a:t> </a:t>
+            </a:r>
+            <a:r>
+              <a:rPr sz="1800" dirty="0" err="1">
                 <a:solidFill>
                   <a:srgbClr val="7D7D7D"/>
                 </a:solidFill>
@@ -15268,17 +15178,17 @@
               <a:t>pode</a:t>
             </a:r>
             <a:r>
-              <a:rPr sz="1800" spc="-25" dirty="0" smtClean="0">
-                <a:solidFill>
-                  <a:srgbClr val="7D7D7D"/>
-                </a:solidFill>
-                <a:latin typeface="Calibri"/>
-                <a:cs typeface="Calibri"/>
-              </a:rPr>
-              <a:t> </a:t>
-            </a:r>
-            <a:r>
-              <a:rPr sz="1800" dirty="0" err="1" smtClean="0">
+              <a:rPr sz="1800" spc="-25" dirty="0">
+                <a:solidFill>
+                  <a:srgbClr val="7D7D7D"/>
+                </a:solidFill>
+                <a:latin typeface="Calibri"/>
+                <a:cs typeface="Calibri"/>
+              </a:rPr>
+              <a:t> </a:t>
+            </a:r>
+            <a:r>
+              <a:rPr sz="1800" dirty="0" err="1">
                 <a:solidFill>
                   <a:srgbClr val="7D7D7D"/>
                 </a:solidFill>
@@ -15288,17 +15198,17 @@
               <a:t>ser</a:t>
             </a:r>
             <a:r>
-              <a:rPr sz="1800" spc="-55" dirty="0" smtClean="0">
-                <a:solidFill>
-                  <a:srgbClr val="7D7D7D"/>
-                </a:solidFill>
-                <a:latin typeface="Calibri"/>
-                <a:cs typeface="Calibri"/>
-              </a:rPr>
-              <a:t> </a:t>
-            </a:r>
-            <a:r>
-              <a:rPr sz="1800" dirty="0" err="1" smtClean="0">
+              <a:rPr sz="1800" spc="-55" dirty="0">
+                <a:solidFill>
+                  <a:srgbClr val="7D7D7D"/>
+                </a:solidFill>
+                <a:latin typeface="Calibri"/>
+                <a:cs typeface="Calibri"/>
+              </a:rPr>
+              <a:t> </a:t>
+            </a:r>
+            <a:r>
+              <a:rPr sz="1800" dirty="0" err="1">
                 <a:solidFill>
                   <a:srgbClr val="7D7D7D"/>
                 </a:solidFill>
@@ -15308,17 +15218,17 @@
               <a:t>acessado</a:t>
             </a:r>
             <a:r>
-              <a:rPr sz="1800" spc="-75" dirty="0" smtClean="0">
-                <a:solidFill>
-                  <a:srgbClr val="7D7D7D"/>
-                </a:solidFill>
-                <a:latin typeface="Calibri"/>
-                <a:cs typeface="Calibri"/>
-              </a:rPr>
-              <a:t> </a:t>
-            </a:r>
-            <a:r>
-              <a:rPr sz="1800" dirty="0" err="1" smtClean="0">
+              <a:rPr sz="1800" spc="-75" dirty="0">
+                <a:solidFill>
+                  <a:srgbClr val="7D7D7D"/>
+                </a:solidFill>
+                <a:latin typeface="Calibri"/>
+                <a:cs typeface="Calibri"/>
+              </a:rPr>
+              <a:t> </a:t>
+            </a:r>
+            <a:r>
+              <a:rPr sz="1800" dirty="0" err="1">
                 <a:solidFill>
                   <a:srgbClr val="7D7D7D"/>
                 </a:solidFill>
@@ -15328,17 +15238,17 @@
               <a:t>pelo</a:t>
             </a:r>
             <a:r>
-              <a:rPr sz="1800" spc="-35" dirty="0" smtClean="0">
-                <a:solidFill>
-                  <a:srgbClr val="7D7D7D"/>
-                </a:solidFill>
-                <a:latin typeface="Calibri"/>
-                <a:cs typeface="Calibri"/>
-              </a:rPr>
-              <a:t> </a:t>
-            </a:r>
-            <a:r>
-              <a:rPr sz="1800" dirty="0" smtClean="0">
+              <a:rPr sz="1800" spc="-35" dirty="0">
+                <a:solidFill>
+                  <a:srgbClr val="7D7D7D"/>
+                </a:solidFill>
+                <a:latin typeface="Calibri"/>
+                <a:cs typeface="Calibri"/>
+              </a:rPr>
+              <a:t> </a:t>
+            </a:r>
+            <a:r>
+              <a:rPr sz="1800" dirty="0">
                 <a:solidFill>
                   <a:srgbClr val="7D7D7D"/>
                 </a:solidFill>
@@ -15348,17 +15258,17 @@
               <a:t>link</a:t>
             </a:r>
             <a:r>
-              <a:rPr sz="1800" spc="-5" dirty="0" smtClean="0">
-                <a:solidFill>
-                  <a:srgbClr val="7D7D7D"/>
-                </a:solidFill>
-                <a:latin typeface="Calibri"/>
-                <a:cs typeface="Calibri"/>
-              </a:rPr>
-              <a:t> </a:t>
-            </a:r>
-            <a:r>
-              <a:rPr sz="1800" u="sng" spc="-10" dirty="0" smtClean="0">
+              <a:rPr sz="1800" spc="-5" dirty="0">
+                <a:solidFill>
+                  <a:srgbClr val="7D7D7D"/>
+                </a:solidFill>
+                <a:latin typeface="Calibri"/>
+                <a:cs typeface="Calibri"/>
+              </a:rPr>
+              <a:t> </a:t>
+            </a:r>
+            <a:r>
+              <a:rPr sz="1800" u="sng" spc="-10" dirty="0">
                 <a:solidFill>
                   <a:srgbClr val="0000FF"/>
                 </a:solidFill>
@@ -15369,11 +15279,11 @@
                 </a:uFill>
                 <a:latin typeface="Calibri"/>
                 <a:cs typeface="Calibri"/>
-                <a:hlinkClick r:id="rId4"/>
+                <a:hlinkClick r:id="rId3"/>
               </a:rPr>
               <a:t>fluig.itabom.com.br</a:t>
             </a:r>
-            <a:endParaRPr sz="1800" dirty="0" smtClean="0">
+            <a:endParaRPr sz="1800" dirty="0">
               <a:latin typeface="Calibri"/>
               <a:cs typeface="Calibri"/>
             </a:endParaRPr>
@@ -15390,7 +15300,7 @@
               </a:tabLst>
             </a:pPr>
             <a:r>
-              <a:rPr lang="pt-BR" spc="-10" dirty="0" smtClean="0">
+              <a:rPr lang="pt-BR" spc="-10" dirty="0">
                 <a:solidFill>
                   <a:srgbClr val="7D7D7D"/>
                 </a:solidFill>
@@ -15400,7 +15310,7 @@
               <a:t>Usuário: </a:t>
             </a:r>
             <a:r>
-              <a:rPr lang="pt-BR" dirty="0" smtClean="0">
+              <a:rPr lang="pt-BR" dirty="0">
                 <a:solidFill>
                   <a:srgbClr val="7D7D7D"/>
                 </a:solidFill>
@@ -15410,7 +15320,7 @@
               <a:t>{{USUARIO}}</a:t>
             </a:r>
             <a:r>
-              <a:rPr lang="pt-BR" spc="-10" dirty="0" smtClean="0">
+              <a:rPr lang="pt-BR" spc="-10" dirty="0">
                 <a:solidFill>
                   <a:srgbClr val="7D7D7D"/>
                 </a:solidFill>
@@ -15419,7 +15329,7 @@
               </a:rPr>
               <a:t>@itabom.com.br</a:t>
             </a:r>
-            <a:endParaRPr sz="1800" dirty="0" smtClean="0">
+            <a:endParaRPr sz="1800" dirty="0">
               <a:latin typeface="Calibri"/>
               <a:cs typeface="Calibri"/>
             </a:endParaRPr>
@@ -15436,7 +15346,7 @@
               </a:tabLst>
             </a:pPr>
             <a:r>
-              <a:rPr sz="1800" dirty="0" err="1" smtClean="0">
+              <a:rPr sz="1800" dirty="0" err="1">
                 <a:solidFill>
                   <a:srgbClr val="7D7D7D"/>
                 </a:solidFill>
@@ -15446,7 +15356,7 @@
               <a:t>Senha</a:t>
             </a:r>
             <a:r>
-              <a:rPr sz="1800" dirty="0" smtClean="0">
+              <a:rPr sz="1800" dirty="0">
                 <a:solidFill>
                   <a:srgbClr val="7D7D7D"/>
                 </a:solidFill>
@@ -15456,17 +15366,17 @@
               <a:t>:</a:t>
             </a:r>
             <a:r>
-              <a:rPr lang="pt-BR" spc="-75" dirty="0" smtClean="0">
-                <a:solidFill>
-                  <a:srgbClr val="7D7D7D"/>
-                </a:solidFill>
-                <a:latin typeface="Calibri"/>
-                <a:cs typeface="Calibri"/>
-              </a:rPr>
-              <a:t> </a:t>
-            </a:r>
-            <a:r>
-              <a:rPr lang="pt-BR" dirty="0" smtClean="0">
+              <a:rPr lang="pt-BR" spc="-75" dirty="0">
+                <a:solidFill>
+                  <a:srgbClr val="7D7D7D"/>
+                </a:solidFill>
+                <a:latin typeface="Calibri"/>
+                <a:cs typeface="Calibri"/>
+              </a:rPr>
+              <a:t> </a:t>
+            </a:r>
+            <a:r>
+              <a:rPr lang="pt-BR" dirty="0">
                 <a:solidFill>
                   <a:srgbClr val="7D7D7D"/>
                 </a:solidFill>
@@ -15475,7 +15385,7 @@
               </a:rPr>
               <a:t>{{SENHA}}</a:t>
             </a:r>
-            <a:endParaRPr sz="1800" dirty="0" smtClean="0">
+            <a:endParaRPr sz="1800" dirty="0">
               <a:latin typeface="Calibri"/>
               <a:cs typeface="Calibri"/>
             </a:endParaRPr>
@@ -15492,7 +15402,7 @@
               </a:tabLst>
             </a:pPr>
             <a:r>
-              <a:rPr sz="1800" dirty="0" smtClean="0">
+              <a:rPr sz="1800" dirty="0">
                 <a:solidFill>
                   <a:srgbClr val="7D7D7D"/>
                 </a:solidFill>
@@ -15502,17 +15412,17 @@
               <a:t>OBS.</a:t>
             </a:r>
             <a:r>
-              <a:rPr sz="1800" spc="-95" dirty="0" smtClean="0">
-                <a:solidFill>
-                  <a:srgbClr val="7D7D7D"/>
-                </a:solidFill>
-                <a:latin typeface="Calibri"/>
-                <a:cs typeface="Calibri"/>
-              </a:rPr>
-              <a:t> </a:t>
-            </a:r>
-            <a:r>
-              <a:rPr sz="1800" dirty="0" smtClean="0">
+              <a:rPr sz="1800" spc="-95" dirty="0">
+                <a:solidFill>
+                  <a:srgbClr val="7D7D7D"/>
+                </a:solidFill>
+                <a:latin typeface="Calibri"/>
+                <a:cs typeface="Calibri"/>
+              </a:rPr>
+              <a:t> </a:t>
+            </a:r>
+            <a:r>
+              <a:rPr sz="1800" dirty="0">
                 <a:solidFill>
                   <a:srgbClr val="7D7D7D"/>
                 </a:solidFill>
@@ -15522,7 +15432,7 @@
               <a:t>(</a:t>
             </a:r>
             <a:r>
-              <a:rPr sz="1800" dirty="0" err="1" smtClean="0">
+              <a:rPr sz="1800" dirty="0" err="1">
                 <a:solidFill>
                   <a:srgbClr val="7D7D7D"/>
                 </a:solidFill>
@@ -15532,17 +15442,17 @@
               <a:t>Por</a:t>
             </a:r>
             <a:r>
-              <a:rPr sz="1800" spc="-60" dirty="0" smtClean="0">
-                <a:solidFill>
-                  <a:srgbClr val="7D7D7D"/>
-                </a:solidFill>
-                <a:latin typeface="Calibri"/>
-                <a:cs typeface="Calibri"/>
-              </a:rPr>
-              <a:t> </a:t>
-            </a:r>
-            <a:r>
-              <a:rPr sz="1800" dirty="0" err="1" smtClean="0">
+              <a:rPr sz="1800" spc="-60" dirty="0">
+                <a:solidFill>
+                  <a:srgbClr val="7D7D7D"/>
+                </a:solidFill>
+                <a:latin typeface="Calibri"/>
+                <a:cs typeface="Calibri"/>
+              </a:rPr>
+              <a:t> </a:t>
+            </a:r>
+            <a:r>
+              <a:rPr sz="1800" dirty="0" err="1">
                 <a:solidFill>
                   <a:srgbClr val="7D7D7D"/>
                 </a:solidFill>
@@ -15552,17 +15462,17 @@
               <a:t>questões</a:t>
             </a:r>
             <a:r>
-              <a:rPr sz="1800" spc="-55" dirty="0" smtClean="0">
-                <a:solidFill>
-                  <a:srgbClr val="7D7D7D"/>
-                </a:solidFill>
-                <a:latin typeface="Calibri"/>
-                <a:cs typeface="Calibri"/>
-              </a:rPr>
-              <a:t> </a:t>
-            </a:r>
-            <a:r>
-              <a:rPr sz="1800" dirty="0" smtClean="0">
+              <a:rPr sz="1800" spc="-55" dirty="0">
+                <a:solidFill>
+                  <a:srgbClr val="7D7D7D"/>
+                </a:solidFill>
+                <a:latin typeface="Calibri"/>
+                <a:cs typeface="Calibri"/>
+              </a:rPr>
+              <a:t> </a:t>
+            </a:r>
+            <a:r>
+              <a:rPr sz="1800" dirty="0">
                 <a:solidFill>
                   <a:srgbClr val="7D7D7D"/>
                 </a:solidFill>
@@ -15572,17 +15482,17 @@
               <a:t>de</a:t>
             </a:r>
             <a:r>
-              <a:rPr sz="1800" spc="-60" dirty="0" smtClean="0">
-                <a:solidFill>
-                  <a:srgbClr val="7D7D7D"/>
-                </a:solidFill>
-                <a:latin typeface="Calibri"/>
-                <a:cs typeface="Calibri"/>
-              </a:rPr>
-              <a:t> </a:t>
-            </a:r>
-            <a:r>
-              <a:rPr sz="1800" dirty="0" err="1" smtClean="0">
+              <a:rPr sz="1800" spc="-60" dirty="0">
+                <a:solidFill>
+                  <a:srgbClr val="7D7D7D"/>
+                </a:solidFill>
+                <a:latin typeface="Calibri"/>
+                <a:cs typeface="Calibri"/>
+              </a:rPr>
+              <a:t> </a:t>
+            </a:r>
+            <a:r>
+              <a:rPr sz="1800" dirty="0" err="1">
                 <a:solidFill>
                   <a:srgbClr val="7D7D7D"/>
                 </a:solidFill>
@@ -15592,7 +15502,7 @@
               <a:t>segurança</a:t>
             </a:r>
             <a:r>
-              <a:rPr sz="1800" dirty="0" smtClean="0">
+              <a:rPr sz="1800" dirty="0">
                 <a:solidFill>
                   <a:srgbClr val="7D7D7D"/>
                 </a:solidFill>
@@ -15602,17 +15512,17 @@
               <a:t>,</a:t>
             </a:r>
             <a:r>
-              <a:rPr sz="1800" spc="-60" dirty="0" smtClean="0">
-                <a:solidFill>
-                  <a:srgbClr val="7D7D7D"/>
-                </a:solidFill>
-                <a:latin typeface="Calibri"/>
-                <a:cs typeface="Calibri"/>
-              </a:rPr>
-              <a:t> </a:t>
-            </a:r>
-            <a:r>
-              <a:rPr sz="1800" dirty="0" smtClean="0">
+              <a:rPr sz="1800" spc="-60" dirty="0">
+                <a:solidFill>
+                  <a:srgbClr val="7D7D7D"/>
+                </a:solidFill>
+                <a:latin typeface="Calibri"/>
+                <a:cs typeface="Calibri"/>
+              </a:rPr>
+              <a:t> </a:t>
+            </a:r>
+            <a:r>
+              <a:rPr sz="1800" dirty="0">
                 <a:solidFill>
                   <a:srgbClr val="7D7D7D"/>
                 </a:solidFill>
@@ -15622,17 +15532,17 @@
               <a:t>favor</a:t>
             </a:r>
             <a:r>
-              <a:rPr sz="1800" spc="-90" dirty="0" smtClean="0">
-                <a:solidFill>
-                  <a:srgbClr val="7D7D7D"/>
-                </a:solidFill>
-                <a:latin typeface="Calibri"/>
-                <a:cs typeface="Calibri"/>
-              </a:rPr>
-              <a:t> </a:t>
-            </a:r>
-            <a:r>
-              <a:rPr sz="1800" dirty="0" smtClean="0">
+              <a:rPr sz="1800" spc="-90" dirty="0">
+                <a:solidFill>
+                  <a:srgbClr val="7D7D7D"/>
+                </a:solidFill>
+                <a:latin typeface="Calibri"/>
+                <a:cs typeface="Calibri"/>
+              </a:rPr>
+              <a:t> </a:t>
+            </a:r>
+            <a:r>
+              <a:rPr sz="1800" dirty="0">
                 <a:solidFill>
                   <a:srgbClr val="7D7D7D"/>
                 </a:solidFill>
@@ -15642,17 +15552,17 @@
               <a:t>trocar</a:t>
             </a:r>
             <a:r>
-              <a:rPr sz="1800" spc="-55" dirty="0" smtClean="0">
-                <a:solidFill>
-                  <a:srgbClr val="7D7D7D"/>
-                </a:solidFill>
-                <a:latin typeface="Calibri"/>
-                <a:cs typeface="Calibri"/>
-              </a:rPr>
-              <a:t> </a:t>
-            </a:r>
-            <a:r>
-              <a:rPr sz="1800" dirty="0" smtClean="0">
+              <a:rPr sz="1800" spc="-55" dirty="0">
+                <a:solidFill>
+                  <a:srgbClr val="7D7D7D"/>
+                </a:solidFill>
+                <a:latin typeface="Calibri"/>
+                <a:cs typeface="Calibri"/>
+              </a:rPr>
+              <a:t> </a:t>
+            </a:r>
+            <a:r>
+              <a:rPr sz="1800" dirty="0">
                 <a:solidFill>
                   <a:srgbClr val="7D7D7D"/>
                 </a:solidFill>
@@ -15662,17 +15572,17 @@
               <a:t>a</a:t>
             </a:r>
             <a:r>
-              <a:rPr sz="1800" spc="-60" dirty="0" smtClean="0">
-                <a:solidFill>
-                  <a:srgbClr val="7D7D7D"/>
-                </a:solidFill>
-                <a:latin typeface="Calibri"/>
-                <a:cs typeface="Calibri"/>
-              </a:rPr>
-              <a:t> </a:t>
-            </a:r>
-            <a:r>
-              <a:rPr sz="1800" dirty="0" err="1" smtClean="0">
+              <a:rPr sz="1800" spc="-60" dirty="0">
+                <a:solidFill>
+                  <a:srgbClr val="7D7D7D"/>
+                </a:solidFill>
+                <a:latin typeface="Calibri"/>
+                <a:cs typeface="Calibri"/>
+              </a:rPr>
+              <a:t> </a:t>
+            </a:r>
+            <a:r>
+              <a:rPr sz="1800" dirty="0" err="1">
                 <a:solidFill>
                   <a:srgbClr val="7D7D7D"/>
                 </a:solidFill>
@@ -15682,17 +15592,17 @@
               <a:t>senha</a:t>
             </a:r>
             <a:r>
-              <a:rPr sz="1800" spc="-60" dirty="0" smtClean="0">
-                <a:solidFill>
-                  <a:srgbClr val="7D7D7D"/>
-                </a:solidFill>
-                <a:latin typeface="Calibri"/>
-                <a:cs typeface="Calibri"/>
-              </a:rPr>
-              <a:t> </a:t>
-            </a:r>
-            <a:r>
-              <a:rPr sz="1800" dirty="0" smtClean="0">
+              <a:rPr sz="1800" spc="-60" dirty="0">
+                <a:solidFill>
+                  <a:srgbClr val="7D7D7D"/>
+                </a:solidFill>
+                <a:latin typeface="Calibri"/>
+                <a:cs typeface="Calibri"/>
+              </a:rPr>
+              <a:t> </a:t>
+            </a:r>
+            <a:r>
+              <a:rPr sz="1800" dirty="0">
                 <a:solidFill>
                   <a:srgbClr val="7D7D7D"/>
                 </a:solidFill>
@@ -15702,17 +15612,17 @@
               <a:t>logo</a:t>
             </a:r>
             <a:r>
-              <a:rPr sz="1800" spc="-50" dirty="0" smtClean="0">
-                <a:solidFill>
-                  <a:srgbClr val="7D7D7D"/>
-                </a:solidFill>
-                <a:latin typeface="Calibri"/>
-                <a:cs typeface="Calibri"/>
-              </a:rPr>
-              <a:t> </a:t>
-            </a:r>
-            <a:r>
-              <a:rPr sz="1800" dirty="0" err="1" smtClean="0">
+              <a:rPr sz="1800" spc="-50" dirty="0">
+                <a:solidFill>
+                  <a:srgbClr val="7D7D7D"/>
+                </a:solidFill>
+                <a:latin typeface="Calibri"/>
+                <a:cs typeface="Calibri"/>
+              </a:rPr>
+              <a:t> </a:t>
+            </a:r>
+            <a:r>
+              <a:rPr sz="1800" dirty="0" err="1">
                 <a:solidFill>
                   <a:srgbClr val="7D7D7D"/>
                 </a:solidFill>
@@ -15722,17 +15632,17 @@
               <a:t>após</a:t>
             </a:r>
             <a:r>
-              <a:rPr sz="1800" spc="-70" dirty="0" smtClean="0">
-                <a:solidFill>
-                  <a:srgbClr val="7D7D7D"/>
-                </a:solidFill>
-                <a:latin typeface="Calibri"/>
-                <a:cs typeface="Calibri"/>
-              </a:rPr>
-              <a:t> </a:t>
-            </a:r>
-            <a:r>
-              <a:rPr sz="1800" dirty="0" smtClean="0">
+              <a:rPr sz="1800" spc="-70" dirty="0">
+                <a:solidFill>
+                  <a:srgbClr val="7D7D7D"/>
+                </a:solidFill>
+                <a:latin typeface="Calibri"/>
+                <a:cs typeface="Calibri"/>
+              </a:rPr>
+              <a:t> </a:t>
+            </a:r>
+            <a:r>
+              <a:rPr sz="1800" dirty="0">
                 <a:solidFill>
                   <a:srgbClr val="7D7D7D"/>
                 </a:solidFill>
@@ -15742,17 +15652,17 @@
               <a:t>o</a:t>
             </a:r>
             <a:r>
-              <a:rPr sz="1800" spc="-55" dirty="0" smtClean="0">
-                <a:solidFill>
-                  <a:srgbClr val="7D7D7D"/>
-                </a:solidFill>
-                <a:latin typeface="Calibri"/>
-                <a:cs typeface="Calibri"/>
-              </a:rPr>
-              <a:t> </a:t>
-            </a:r>
-            <a:r>
-              <a:rPr sz="1800" dirty="0" err="1" smtClean="0">
+              <a:rPr sz="1800" spc="-55" dirty="0">
+                <a:solidFill>
+                  <a:srgbClr val="7D7D7D"/>
+                </a:solidFill>
+                <a:latin typeface="Calibri"/>
+                <a:cs typeface="Calibri"/>
+              </a:rPr>
+              <a:t> </a:t>
+            </a:r>
+            <a:r>
+              <a:rPr sz="1800" dirty="0" err="1">
                 <a:solidFill>
                   <a:srgbClr val="7D7D7D"/>
                 </a:solidFill>
@@ -15762,17 +15672,17 @@
               <a:t>primeiro</a:t>
             </a:r>
             <a:r>
-              <a:rPr sz="1800" spc="-55" dirty="0" smtClean="0">
-                <a:solidFill>
-                  <a:srgbClr val="7D7D7D"/>
-                </a:solidFill>
-                <a:latin typeface="Calibri"/>
-                <a:cs typeface="Calibri"/>
-              </a:rPr>
-              <a:t> </a:t>
-            </a:r>
-            <a:r>
-              <a:rPr sz="1800" spc="-10" dirty="0" smtClean="0">
+              <a:rPr sz="1800" spc="-55" dirty="0">
+                <a:solidFill>
+                  <a:srgbClr val="7D7D7D"/>
+                </a:solidFill>
+                <a:latin typeface="Calibri"/>
+                <a:cs typeface="Calibri"/>
+              </a:rPr>
+              <a:t> </a:t>
+            </a:r>
+            <a:r>
+              <a:rPr sz="1800" spc="-10" dirty="0">
                 <a:solidFill>
                   <a:srgbClr val="7D7D7D"/>
                 </a:solidFill>
@@ -15790,12 +15700,12 @@
       </p:sp>
       <p:pic>
         <p:nvPicPr>
-          <p:cNvPr id="6" name="object 6"/>
+          <p:cNvPr id="6" name="img_office"/>
           <p:cNvPicPr/>
           <p:nvPr/>
         </p:nvPicPr>
         <p:blipFill>
-          <a:blip r:embed="rId5" cstate="print"/>
+          <a:blip r:embed="rId4" cstate="print"/>
           <a:stretch>
             <a:fillRect/>
           </a:stretch>
@@ -15810,12 +15720,979 @@
           </a:prstGeom>
         </p:spPr>
       </p:pic>
+      <p:sp>
+        <p:nvSpPr>
+          <p:cNvPr id="10" name="ct_office"/>
+          <p:cNvSpPr txBox="1"/>
+          <p:nvPr/>
+        </p:nvSpPr>
+        <p:spPr>
+          <a:xfrm>
+            <a:off x="655421" y="2891734"/>
+            <a:ext cx="8408019" cy="1754326"/>
+          </a:xfrm>
+          <a:prstGeom prst="rect">
+            <a:avLst/>
+          </a:prstGeom>
+          <a:noFill/>
+        </p:spPr>
+        <p:txBody>
+          <a:bodyPr wrap="square" rtlCol="0">
+            <a:spAutoFit/>
+          </a:bodyPr>
+          <a:lstStyle/>
+          <a:p>
+            <a:pPr marL="299085" indent="-286385">
+              <a:lnSpc>
+                <a:spcPct val="100000"/>
+              </a:lnSpc>
+              <a:buFont typeface="Wingdings"/>
+              <a:buChar char=""/>
+              <a:tabLst>
+                <a:tab pos="299085" algn="l"/>
+              </a:tabLst>
+            </a:pPr>
+            <a:r>
+              <a:rPr lang="pt-BR" sz="1800" dirty="0" err="1">
+                <a:solidFill>
+                  <a:srgbClr val="7D7D7D"/>
+                </a:solidFill>
+                <a:latin typeface="Calibri"/>
+                <a:cs typeface="Calibri"/>
+              </a:rPr>
+              <a:t>Login</a:t>
+            </a:r>
+            <a:r>
+              <a:rPr lang="pt-BR" sz="1800" spc="-35" dirty="0">
+                <a:solidFill>
+                  <a:srgbClr val="7D7D7D"/>
+                </a:solidFill>
+                <a:latin typeface="Calibri"/>
+                <a:cs typeface="Calibri"/>
+              </a:rPr>
+              <a:t> </a:t>
+            </a:r>
+            <a:r>
+              <a:rPr lang="pt-BR" spc="-35" dirty="0">
+                <a:solidFill>
+                  <a:srgbClr val="7D7D7D"/>
+                </a:solidFill>
+                <a:latin typeface="Calibri"/>
+                <a:cs typeface="Calibri"/>
+              </a:rPr>
+              <a:t>do Office365</a:t>
+            </a:r>
+            <a:endParaRPr lang="pt-BR" sz="1800" dirty="0">
+              <a:latin typeface="Calibri"/>
+              <a:cs typeface="Calibri"/>
+            </a:endParaRPr>
+          </a:p>
+          <a:p>
+            <a:pPr marL="12700" marR="5080">
+              <a:lnSpc>
+                <a:spcPct val="100000"/>
+              </a:lnSpc>
+            </a:pPr>
+            <a:r>
+              <a:rPr lang="pt-BR" sz="1800" dirty="0">
+                <a:solidFill>
+                  <a:srgbClr val="7D7D7D"/>
+                </a:solidFill>
+                <a:latin typeface="Calibri"/>
+                <a:cs typeface="Calibri"/>
+              </a:rPr>
+              <a:t>Seu</a:t>
+            </a:r>
+            <a:r>
+              <a:rPr lang="pt-BR" sz="1800" spc="-60" dirty="0">
+                <a:solidFill>
+                  <a:srgbClr val="7D7D7D"/>
+                </a:solidFill>
+                <a:latin typeface="Calibri"/>
+                <a:cs typeface="Calibri"/>
+              </a:rPr>
+              <a:t> </a:t>
+            </a:r>
+            <a:r>
+              <a:rPr lang="pt-BR" sz="1800" spc="-25" dirty="0">
+                <a:solidFill>
+                  <a:srgbClr val="7D7D7D"/>
+                </a:solidFill>
+                <a:latin typeface="Calibri"/>
+                <a:cs typeface="Calibri"/>
+              </a:rPr>
+              <a:t>e-</a:t>
+            </a:r>
+            <a:r>
+              <a:rPr lang="pt-BR" sz="1800" dirty="0">
+                <a:solidFill>
+                  <a:srgbClr val="7D7D7D"/>
+                </a:solidFill>
+                <a:latin typeface="Calibri"/>
+                <a:cs typeface="Calibri"/>
+              </a:rPr>
+              <a:t>mail</a:t>
+            </a:r>
+            <a:r>
+              <a:rPr lang="pt-BR" sz="1800" spc="-60" dirty="0">
+                <a:solidFill>
+                  <a:srgbClr val="7D7D7D"/>
+                </a:solidFill>
+                <a:latin typeface="Calibri"/>
+                <a:cs typeface="Calibri"/>
+              </a:rPr>
+              <a:t> </a:t>
+            </a:r>
+            <a:r>
+              <a:rPr lang="pt-BR" sz="1800" dirty="0">
+                <a:solidFill>
+                  <a:srgbClr val="7D7D7D"/>
+                </a:solidFill>
+                <a:latin typeface="Calibri"/>
+                <a:cs typeface="Calibri"/>
+              </a:rPr>
+              <a:t>está</a:t>
+            </a:r>
+            <a:r>
+              <a:rPr lang="pt-BR" sz="1800" spc="-70" dirty="0">
+                <a:solidFill>
+                  <a:srgbClr val="7D7D7D"/>
+                </a:solidFill>
+                <a:latin typeface="Calibri"/>
+                <a:cs typeface="Calibri"/>
+              </a:rPr>
+              <a:t> </a:t>
+            </a:r>
+            <a:r>
+              <a:rPr lang="pt-BR" sz="1800" spc="-10" dirty="0">
+                <a:solidFill>
+                  <a:srgbClr val="7D7D7D"/>
+                </a:solidFill>
+                <a:latin typeface="Calibri"/>
+                <a:cs typeface="Calibri"/>
+              </a:rPr>
+              <a:t>hospedado</a:t>
+            </a:r>
+            <a:r>
+              <a:rPr lang="pt-BR" sz="1800" spc="-50" dirty="0">
+                <a:solidFill>
+                  <a:srgbClr val="7D7D7D"/>
+                </a:solidFill>
+                <a:latin typeface="Calibri"/>
+                <a:cs typeface="Calibri"/>
+              </a:rPr>
+              <a:t> </a:t>
+            </a:r>
+            <a:r>
+              <a:rPr lang="pt-BR" sz="1800" dirty="0">
+                <a:solidFill>
+                  <a:srgbClr val="7D7D7D"/>
+                </a:solidFill>
+                <a:latin typeface="Calibri"/>
+                <a:cs typeface="Calibri"/>
+              </a:rPr>
+              <a:t>da</a:t>
+            </a:r>
+            <a:r>
+              <a:rPr lang="pt-BR" sz="1800" spc="-60" dirty="0">
+                <a:solidFill>
+                  <a:srgbClr val="7D7D7D"/>
+                </a:solidFill>
+                <a:latin typeface="Calibri"/>
+                <a:cs typeface="Calibri"/>
+              </a:rPr>
+              <a:t> </a:t>
+            </a:r>
+            <a:r>
+              <a:rPr lang="pt-BR" sz="1800" dirty="0">
+                <a:solidFill>
+                  <a:srgbClr val="7D7D7D"/>
+                </a:solidFill>
+                <a:latin typeface="Calibri"/>
+                <a:cs typeface="Calibri"/>
+              </a:rPr>
+              <a:t>Microsoft</a:t>
+            </a:r>
+            <a:r>
+              <a:rPr lang="pt-BR" sz="1800" spc="-55" dirty="0">
+                <a:solidFill>
+                  <a:srgbClr val="7D7D7D"/>
+                </a:solidFill>
+                <a:latin typeface="Calibri"/>
+                <a:cs typeface="Calibri"/>
+              </a:rPr>
+              <a:t> </a:t>
+            </a:r>
+            <a:r>
+              <a:rPr lang="pt-BR" sz="1800" dirty="0">
+                <a:solidFill>
+                  <a:srgbClr val="7D7D7D"/>
+                </a:solidFill>
+                <a:latin typeface="Calibri"/>
+                <a:cs typeface="Calibri"/>
+              </a:rPr>
+              <a:t>(parceiro</a:t>
+            </a:r>
+            <a:r>
+              <a:rPr lang="pt-BR" sz="1800" spc="-30" dirty="0">
+                <a:solidFill>
+                  <a:srgbClr val="7D7D7D"/>
+                </a:solidFill>
+                <a:latin typeface="Calibri"/>
+                <a:cs typeface="Calibri"/>
+              </a:rPr>
+              <a:t> </a:t>
+            </a:r>
+            <a:r>
+              <a:rPr lang="pt-BR" sz="1800" dirty="0">
+                <a:solidFill>
+                  <a:srgbClr val="7D7D7D"/>
+                </a:solidFill>
+                <a:latin typeface="Calibri"/>
+                <a:cs typeface="Calibri"/>
+              </a:rPr>
+              <a:t>de</a:t>
+            </a:r>
+            <a:r>
+              <a:rPr lang="pt-BR" sz="1800" spc="-45" dirty="0">
+                <a:solidFill>
+                  <a:srgbClr val="7D7D7D"/>
+                </a:solidFill>
+                <a:latin typeface="Calibri"/>
+                <a:cs typeface="Calibri"/>
+              </a:rPr>
+              <a:t> </a:t>
+            </a:r>
+            <a:r>
+              <a:rPr lang="pt-BR" sz="1800" dirty="0">
+                <a:solidFill>
+                  <a:srgbClr val="7D7D7D"/>
+                </a:solidFill>
+                <a:latin typeface="Calibri"/>
+                <a:cs typeface="Calibri"/>
+              </a:rPr>
+              <a:t>serviços</a:t>
+            </a:r>
+            <a:r>
+              <a:rPr lang="pt-BR" sz="1800" spc="-65" dirty="0">
+                <a:solidFill>
+                  <a:srgbClr val="7D7D7D"/>
+                </a:solidFill>
+                <a:latin typeface="Calibri"/>
+                <a:cs typeface="Calibri"/>
+              </a:rPr>
+              <a:t> </a:t>
+            </a:r>
+            <a:r>
+              <a:rPr lang="pt-BR" sz="1800" dirty="0">
+                <a:solidFill>
+                  <a:srgbClr val="7D7D7D"/>
+                </a:solidFill>
+                <a:latin typeface="Calibri"/>
+                <a:cs typeface="Calibri"/>
+              </a:rPr>
+              <a:t>em</a:t>
+            </a:r>
+            <a:r>
+              <a:rPr lang="pt-BR" sz="1800" spc="-60" dirty="0">
+                <a:solidFill>
+                  <a:srgbClr val="7D7D7D"/>
+                </a:solidFill>
+                <a:latin typeface="Calibri"/>
+                <a:cs typeface="Calibri"/>
+              </a:rPr>
+              <a:t> </a:t>
+            </a:r>
+            <a:r>
+              <a:rPr lang="pt-BR" sz="1800" dirty="0">
+                <a:solidFill>
+                  <a:srgbClr val="7D7D7D"/>
+                </a:solidFill>
+                <a:latin typeface="Calibri"/>
+                <a:cs typeface="Calibri"/>
+              </a:rPr>
+              <a:t>nuvem)</a:t>
+            </a:r>
+            <a:r>
+              <a:rPr lang="pt-BR" sz="1800" spc="-45" dirty="0">
+                <a:solidFill>
+                  <a:srgbClr val="7D7D7D"/>
+                </a:solidFill>
+                <a:latin typeface="Calibri"/>
+                <a:cs typeface="Calibri"/>
+              </a:rPr>
+              <a:t> </a:t>
+            </a:r>
+            <a:r>
+              <a:rPr lang="pt-BR" sz="1800" dirty="0">
+                <a:solidFill>
+                  <a:srgbClr val="7D7D7D"/>
+                </a:solidFill>
+                <a:latin typeface="Calibri"/>
+                <a:cs typeface="Calibri"/>
+              </a:rPr>
+              <a:t>e</a:t>
+            </a:r>
+            <a:r>
+              <a:rPr lang="pt-BR" sz="1800" spc="-65" dirty="0">
+                <a:solidFill>
+                  <a:srgbClr val="7D7D7D"/>
+                </a:solidFill>
+                <a:latin typeface="Calibri"/>
+                <a:cs typeface="Calibri"/>
+              </a:rPr>
+              <a:t> </a:t>
+            </a:r>
+            <a:r>
+              <a:rPr lang="pt-BR" sz="1800" dirty="0">
+                <a:solidFill>
+                  <a:srgbClr val="7D7D7D"/>
+                </a:solidFill>
+                <a:latin typeface="Calibri"/>
+                <a:cs typeface="Calibri"/>
+              </a:rPr>
+              <a:t>pode</a:t>
+            </a:r>
+            <a:r>
+              <a:rPr lang="pt-BR" sz="1800" spc="-35" dirty="0">
+                <a:solidFill>
+                  <a:srgbClr val="7D7D7D"/>
+                </a:solidFill>
+                <a:latin typeface="Calibri"/>
+                <a:cs typeface="Calibri"/>
+              </a:rPr>
+              <a:t> </a:t>
+            </a:r>
+            <a:r>
+              <a:rPr lang="pt-BR" sz="1800" dirty="0">
+                <a:solidFill>
+                  <a:srgbClr val="7D7D7D"/>
+                </a:solidFill>
+                <a:latin typeface="Calibri"/>
+                <a:cs typeface="Calibri"/>
+              </a:rPr>
+              <a:t>ser</a:t>
+            </a:r>
+            <a:r>
+              <a:rPr lang="pt-BR" sz="1800" spc="-80" dirty="0">
+                <a:solidFill>
+                  <a:srgbClr val="7D7D7D"/>
+                </a:solidFill>
+                <a:latin typeface="Calibri"/>
+                <a:cs typeface="Calibri"/>
+              </a:rPr>
+              <a:t> </a:t>
+            </a:r>
+            <a:r>
+              <a:rPr lang="pt-BR" sz="1800" spc="-10" dirty="0">
+                <a:solidFill>
+                  <a:srgbClr val="7D7D7D"/>
+                </a:solidFill>
+                <a:latin typeface="Calibri"/>
+                <a:cs typeface="Calibri"/>
+              </a:rPr>
+              <a:t>acessado </a:t>
+            </a:r>
+            <a:r>
+              <a:rPr lang="pt-BR" sz="1800" dirty="0">
+                <a:solidFill>
+                  <a:srgbClr val="7D7D7D"/>
+                </a:solidFill>
+                <a:latin typeface="Calibri"/>
+                <a:cs typeface="Calibri"/>
+              </a:rPr>
+              <a:t>pela</a:t>
+            </a:r>
+            <a:r>
+              <a:rPr lang="pt-BR" sz="1800" spc="-95" dirty="0">
+                <a:solidFill>
+                  <a:srgbClr val="7D7D7D"/>
+                </a:solidFill>
+                <a:latin typeface="Calibri"/>
+                <a:cs typeface="Calibri"/>
+              </a:rPr>
+              <a:t> </a:t>
+            </a:r>
+            <a:r>
+              <a:rPr lang="pt-BR" sz="1800" dirty="0">
+                <a:solidFill>
+                  <a:srgbClr val="7D7D7D"/>
+                </a:solidFill>
+                <a:latin typeface="Calibri"/>
+                <a:cs typeface="Calibri"/>
+              </a:rPr>
+              <a:t>web,</a:t>
+            </a:r>
+            <a:r>
+              <a:rPr lang="pt-BR" sz="1800" spc="-70" dirty="0">
+                <a:solidFill>
+                  <a:srgbClr val="7D7D7D"/>
+                </a:solidFill>
+                <a:latin typeface="Calibri"/>
+                <a:cs typeface="Calibri"/>
+              </a:rPr>
+              <a:t> </a:t>
+            </a:r>
+            <a:r>
+              <a:rPr lang="pt-BR" sz="1800" dirty="0">
+                <a:solidFill>
+                  <a:srgbClr val="7D7D7D"/>
+                </a:solidFill>
+                <a:latin typeface="Calibri"/>
+                <a:cs typeface="Calibri"/>
+              </a:rPr>
+              <a:t>de</a:t>
+            </a:r>
+            <a:r>
+              <a:rPr lang="pt-BR" sz="1800" spc="-70" dirty="0">
+                <a:solidFill>
+                  <a:srgbClr val="7D7D7D"/>
+                </a:solidFill>
+                <a:latin typeface="Calibri"/>
+                <a:cs typeface="Calibri"/>
+              </a:rPr>
+              <a:t> </a:t>
+            </a:r>
+            <a:r>
+              <a:rPr lang="pt-BR" sz="1800" dirty="0">
+                <a:solidFill>
+                  <a:srgbClr val="7D7D7D"/>
+                </a:solidFill>
+                <a:latin typeface="Calibri"/>
+                <a:cs typeface="Calibri"/>
+              </a:rPr>
+              <a:t>qualquer</a:t>
+            </a:r>
+            <a:r>
+              <a:rPr lang="pt-BR" sz="1800" spc="-55" dirty="0">
+                <a:solidFill>
+                  <a:srgbClr val="7D7D7D"/>
+                </a:solidFill>
+                <a:latin typeface="Calibri"/>
+                <a:cs typeface="Calibri"/>
+              </a:rPr>
+              <a:t> </a:t>
+            </a:r>
+            <a:r>
+              <a:rPr lang="pt-BR" sz="1800" spc="-30" dirty="0">
+                <a:solidFill>
+                  <a:srgbClr val="7D7D7D"/>
+                </a:solidFill>
+                <a:latin typeface="Calibri"/>
+                <a:cs typeface="Calibri"/>
+              </a:rPr>
+              <a:t>lugar,</a:t>
+            </a:r>
+            <a:r>
+              <a:rPr lang="pt-BR" sz="1800" spc="-70" dirty="0">
+                <a:solidFill>
+                  <a:srgbClr val="7D7D7D"/>
+                </a:solidFill>
+                <a:latin typeface="Calibri"/>
+                <a:cs typeface="Calibri"/>
+              </a:rPr>
+              <a:t> </a:t>
+            </a:r>
+            <a:r>
+              <a:rPr lang="pt-BR" sz="1800" dirty="0">
+                <a:solidFill>
+                  <a:srgbClr val="7D7D7D"/>
+                </a:solidFill>
+                <a:latin typeface="Calibri"/>
+                <a:cs typeface="Calibri"/>
+              </a:rPr>
+              <a:t>pelo</a:t>
+            </a:r>
+            <a:r>
+              <a:rPr lang="pt-BR" sz="1800" spc="-75" dirty="0">
+                <a:solidFill>
+                  <a:srgbClr val="7D7D7D"/>
+                </a:solidFill>
+                <a:latin typeface="Calibri"/>
+                <a:cs typeface="Calibri"/>
+              </a:rPr>
+              <a:t> </a:t>
+            </a:r>
+            <a:r>
+              <a:rPr lang="pt-BR" sz="1800" dirty="0">
+                <a:solidFill>
+                  <a:srgbClr val="7D7D7D"/>
+                </a:solidFill>
+                <a:latin typeface="Calibri"/>
+                <a:cs typeface="Calibri"/>
+              </a:rPr>
+              <a:t>endereço</a:t>
+            </a:r>
+            <a:r>
+              <a:rPr lang="pt-BR" sz="1800" spc="-35" dirty="0">
+                <a:solidFill>
+                  <a:srgbClr val="7D7D7D"/>
+                </a:solidFill>
+                <a:latin typeface="Calibri"/>
+                <a:cs typeface="Calibri"/>
+              </a:rPr>
+              <a:t> </a:t>
+            </a:r>
+            <a:r>
+              <a:rPr lang="pt-BR" sz="1800" u="sng" dirty="0">
+                <a:solidFill>
+                  <a:srgbClr val="0000FF"/>
+                </a:solidFill>
+                <a:uFill>
+                  <a:solidFill>
+                    <a:srgbClr val="0000FF"/>
+                  </a:solidFill>
+                </a:uFill>
+                <a:latin typeface="Calibri"/>
+                <a:cs typeface="Calibri"/>
+                <a:hlinkClick r:id="rId5"/>
+              </a:rPr>
+              <a:t>outlook.com</a:t>
+            </a:r>
+            <a:r>
+              <a:rPr lang="pt-BR" sz="1800" spc="-85" dirty="0">
+                <a:solidFill>
+                  <a:srgbClr val="0000FF"/>
+                </a:solidFill>
+                <a:latin typeface="Calibri"/>
+                <a:cs typeface="Calibri"/>
+              </a:rPr>
+              <a:t> </a:t>
+            </a:r>
+            <a:r>
+              <a:rPr lang="pt-BR" sz="1800" dirty="0">
+                <a:solidFill>
+                  <a:srgbClr val="7D7D7D"/>
+                </a:solidFill>
+                <a:latin typeface="Calibri"/>
+                <a:cs typeface="Calibri"/>
+              </a:rPr>
+              <a:t>ou</a:t>
+            </a:r>
+            <a:r>
+              <a:rPr lang="pt-BR" sz="1800" spc="-65" dirty="0">
+                <a:solidFill>
+                  <a:srgbClr val="7D7D7D"/>
+                </a:solidFill>
+                <a:latin typeface="Calibri"/>
+                <a:cs typeface="Calibri"/>
+              </a:rPr>
+              <a:t> </a:t>
+            </a:r>
+            <a:r>
+              <a:rPr lang="pt-BR" sz="1800" u="sng" spc="-10" dirty="0">
+                <a:solidFill>
+                  <a:srgbClr val="0000FF"/>
+                </a:solidFill>
+                <a:uFill>
+                  <a:solidFill>
+                    <a:srgbClr val="0000FF"/>
+                  </a:solidFill>
+                </a:uFill>
+                <a:latin typeface="Calibri"/>
+                <a:cs typeface="Calibri"/>
+                <a:hlinkClick r:id="rId6"/>
+              </a:rPr>
+              <a:t>office.com</a:t>
+            </a:r>
+            <a:endParaRPr lang="pt-BR" sz="1800" dirty="0">
+              <a:latin typeface="Calibri"/>
+              <a:cs typeface="Calibri"/>
+            </a:endParaRPr>
+          </a:p>
+          <a:p>
+            <a:pPr marL="755650" lvl="1" indent="-285750">
+              <a:buFont typeface="Wingdings"/>
+              <a:buChar char=""/>
+              <a:tabLst>
+                <a:tab pos="755650" algn="l"/>
+              </a:tabLst>
+            </a:pPr>
+            <a:r>
+              <a:rPr lang="pt-BR" sz="1800" dirty="0">
+                <a:solidFill>
+                  <a:srgbClr val="7D7D7D"/>
+                </a:solidFill>
+                <a:latin typeface="Calibri"/>
+                <a:cs typeface="Calibri"/>
+              </a:rPr>
+              <a:t>Usuário:</a:t>
+            </a:r>
+            <a:r>
+              <a:rPr lang="pt-BR" sz="1800" spc="-20" dirty="0">
+                <a:solidFill>
+                  <a:srgbClr val="7D7D7D"/>
+                </a:solidFill>
+                <a:latin typeface="Calibri"/>
+                <a:cs typeface="Calibri"/>
+              </a:rPr>
+              <a:t> </a:t>
+            </a:r>
+            <a:r>
+              <a:rPr lang="pt-BR" dirty="0">
+                <a:solidFill>
+                  <a:srgbClr val="7D7D7D"/>
+                </a:solidFill>
+                <a:latin typeface="Calibri"/>
+                <a:cs typeface="Calibri"/>
+              </a:rPr>
+              <a:t>{{USUARIO}}@itabom.com.br</a:t>
+            </a:r>
+            <a:endParaRPr lang="pt-BR" sz="1800" dirty="0">
+              <a:latin typeface="Calibri"/>
+              <a:cs typeface="Calibri"/>
+            </a:endParaRPr>
+          </a:p>
+          <a:p>
+            <a:pPr marL="755650" lvl="1" indent="-285750">
+              <a:lnSpc>
+                <a:spcPct val="100000"/>
+              </a:lnSpc>
+              <a:buFont typeface="Wingdings"/>
+              <a:buChar char=""/>
+              <a:tabLst>
+                <a:tab pos="755650" algn="l"/>
+              </a:tabLst>
+            </a:pPr>
+            <a:r>
+              <a:rPr lang="pt-BR" sz="1800" dirty="0">
+                <a:solidFill>
+                  <a:srgbClr val="7D7D7D"/>
+                </a:solidFill>
+                <a:latin typeface="Calibri"/>
+                <a:cs typeface="Calibri"/>
+              </a:rPr>
+              <a:t>Senha:</a:t>
+            </a:r>
+            <a:r>
+              <a:rPr lang="pt-BR" sz="1800" spc="-90" dirty="0">
+                <a:solidFill>
+                  <a:srgbClr val="7D7D7D"/>
+                </a:solidFill>
+                <a:latin typeface="Calibri"/>
+                <a:cs typeface="Calibri"/>
+              </a:rPr>
+              <a:t> </a:t>
+            </a:r>
+            <a:r>
+              <a:rPr lang="pt-BR" dirty="0">
+                <a:solidFill>
+                  <a:srgbClr val="7D7D7D"/>
+                </a:solidFill>
+                <a:latin typeface="Calibri"/>
+                <a:cs typeface="Calibri"/>
+              </a:rPr>
+              <a:t>{{SENHA}}</a:t>
+            </a:r>
+            <a:endParaRPr lang="pt-BR" sz="1800" dirty="0">
+              <a:latin typeface="Calibri"/>
+              <a:cs typeface="Calibri"/>
+            </a:endParaRPr>
+          </a:p>
+          <a:p>
+            <a:pPr marL="755650" lvl="1" indent="-285750">
+              <a:lnSpc>
+                <a:spcPct val="100000"/>
+              </a:lnSpc>
+              <a:buFont typeface="Wingdings"/>
+              <a:buChar char=""/>
+              <a:tabLst>
+                <a:tab pos="755650" algn="l"/>
+              </a:tabLst>
+            </a:pPr>
+            <a:r>
+              <a:rPr lang="pt-BR" sz="1800" dirty="0">
+                <a:solidFill>
+                  <a:srgbClr val="7D7D7D"/>
+                </a:solidFill>
+                <a:latin typeface="Calibri"/>
+                <a:cs typeface="Calibri"/>
+              </a:rPr>
+              <a:t>OBS.</a:t>
+            </a:r>
+            <a:r>
+              <a:rPr lang="pt-BR" sz="1800" spc="-80" dirty="0">
+                <a:solidFill>
+                  <a:srgbClr val="7D7D7D"/>
+                </a:solidFill>
+                <a:latin typeface="Calibri"/>
+                <a:cs typeface="Calibri"/>
+              </a:rPr>
+              <a:t> </a:t>
+            </a:r>
+            <a:r>
+              <a:rPr lang="pt-BR" sz="1800" dirty="0">
+                <a:solidFill>
+                  <a:srgbClr val="7D7D7D"/>
+                </a:solidFill>
+                <a:latin typeface="Calibri"/>
+                <a:cs typeface="Calibri"/>
+              </a:rPr>
+              <a:t>(Por</a:t>
+            </a:r>
+            <a:r>
+              <a:rPr lang="pt-BR" sz="1800" spc="-50" dirty="0">
+                <a:solidFill>
+                  <a:srgbClr val="7D7D7D"/>
+                </a:solidFill>
+                <a:latin typeface="Calibri"/>
+                <a:cs typeface="Calibri"/>
+              </a:rPr>
+              <a:t> </a:t>
+            </a:r>
+            <a:r>
+              <a:rPr lang="pt-BR" sz="1800" spc="-10" dirty="0">
+                <a:solidFill>
+                  <a:srgbClr val="7D7D7D"/>
+                </a:solidFill>
+                <a:latin typeface="Calibri"/>
+                <a:cs typeface="Calibri"/>
+              </a:rPr>
+              <a:t>questões</a:t>
+            </a:r>
+            <a:r>
+              <a:rPr lang="pt-BR" sz="1800" spc="-50" dirty="0">
+                <a:solidFill>
+                  <a:srgbClr val="7D7D7D"/>
+                </a:solidFill>
+                <a:latin typeface="Calibri"/>
+                <a:cs typeface="Calibri"/>
+              </a:rPr>
+              <a:t> </a:t>
+            </a:r>
+            <a:r>
+              <a:rPr lang="pt-BR" sz="1800" dirty="0">
+                <a:solidFill>
+                  <a:srgbClr val="7D7D7D"/>
+                </a:solidFill>
+                <a:latin typeface="Calibri"/>
+                <a:cs typeface="Calibri"/>
+              </a:rPr>
+              <a:t>de</a:t>
+            </a:r>
+            <a:r>
+              <a:rPr lang="pt-BR" sz="1800" spc="-45" dirty="0">
+                <a:solidFill>
+                  <a:srgbClr val="7D7D7D"/>
+                </a:solidFill>
+                <a:latin typeface="Calibri"/>
+                <a:cs typeface="Calibri"/>
+              </a:rPr>
+              <a:t> </a:t>
+            </a:r>
+            <a:r>
+              <a:rPr lang="pt-BR" sz="1800" spc="-20" dirty="0">
+                <a:solidFill>
+                  <a:srgbClr val="7D7D7D"/>
+                </a:solidFill>
+                <a:latin typeface="Calibri"/>
+                <a:cs typeface="Calibri"/>
+              </a:rPr>
+              <a:t>segurança,</a:t>
+            </a:r>
+            <a:r>
+              <a:rPr lang="pt-BR" sz="1800" spc="-35" dirty="0">
+                <a:solidFill>
+                  <a:srgbClr val="7D7D7D"/>
+                </a:solidFill>
+                <a:latin typeface="Calibri"/>
+                <a:cs typeface="Calibri"/>
+              </a:rPr>
+              <a:t> </a:t>
+            </a:r>
+            <a:r>
+              <a:rPr lang="pt-BR" sz="1800" spc="-10" dirty="0">
+                <a:solidFill>
+                  <a:srgbClr val="7D7D7D"/>
+                </a:solidFill>
+                <a:latin typeface="Calibri"/>
+                <a:cs typeface="Calibri"/>
+              </a:rPr>
+              <a:t>favor</a:t>
+            </a:r>
+            <a:r>
+              <a:rPr lang="pt-BR" sz="1800" spc="-85" dirty="0">
+                <a:solidFill>
+                  <a:srgbClr val="7D7D7D"/>
+                </a:solidFill>
+                <a:latin typeface="Calibri"/>
+                <a:cs typeface="Calibri"/>
+              </a:rPr>
+              <a:t> </a:t>
+            </a:r>
+            <a:r>
+              <a:rPr lang="pt-BR" sz="1800" dirty="0">
+                <a:solidFill>
+                  <a:srgbClr val="7D7D7D"/>
+                </a:solidFill>
+                <a:latin typeface="Calibri"/>
+                <a:cs typeface="Calibri"/>
+              </a:rPr>
+              <a:t>trocar</a:t>
+            </a:r>
+            <a:r>
+              <a:rPr lang="pt-BR" sz="1800" spc="-55" dirty="0">
+                <a:solidFill>
+                  <a:srgbClr val="7D7D7D"/>
+                </a:solidFill>
+                <a:latin typeface="Calibri"/>
+                <a:cs typeface="Calibri"/>
+              </a:rPr>
+              <a:t> </a:t>
+            </a:r>
+            <a:r>
+              <a:rPr lang="pt-BR" sz="1800" dirty="0">
+                <a:solidFill>
+                  <a:srgbClr val="7D7D7D"/>
+                </a:solidFill>
+                <a:latin typeface="Calibri"/>
+                <a:cs typeface="Calibri"/>
+              </a:rPr>
+              <a:t>a</a:t>
+            </a:r>
+            <a:r>
+              <a:rPr lang="pt-BR" sz="1800" spc="-45" dirty="0">
+                <a:solidFill>
+                  <a:srgbClr val="7D7D7D"/>
+                </a:solidFill>
+                <a:latin typeface="Calibri"/>
+                <a:cs typeface="Calibri"/>
+              </a:rPr>
+              <a:t> </a:t>
+            </a:r>
+            <a:r>
+              <a:rPr lang="pt-BR" sz="1800" dirty="0">
+                <a:solidFill>
+                  <a:srgbClr val="7D7D7D"/>
+                </a:solidFill>
+                <a:latin typeface="Calibri"/>
+                <a:cs typeface="Calibri"/>
+              </a:rPr>
+              <a:t>senha</a:t>
+            </a:r>
+            <a:r>
+              <a:rPr lang="pt-BR" sz="1800" spc="-65" dirty="0">
+                <a:solidFill>
+                  <a:srgbClr val="7D7D7D"/>
+                </a:solidFill>
+                <a:latin typeface="Calibri"/>
+                <a:cs typeface="Calibri"/>
+              </a:rPr>
+              <a:t> </a:t>
+            </a:r>
+            <a:r>
+              <a:rPr lang="pt-BR" sz="1800" dirty="0">
+                <a:solidFill>
+                  <a:srgbClr val="7D7D7D"/>
+                </a:solidFill>
+                <a:latin typeface="Calibri"/>
+                <a:cs typeface="Calibri"/>
+              </a:rPr>
+              <a:t>logo</a:t>
+            </a:r>
+            <a:r>
+              <a:rPr lang="pt-BR" sz="1800" spc="-45" dirty="0">
+                <a:solidFill>
+                  <a:srgbClr val="7D7D7D"/>
+                </a:solidFill>
+                <a:latin typeface="Calibri"/>
+                <a:cs typeface="Calibri"/>
+              </a:rPr>
+              <a:t> </a:t>
+            </a:r>
+            <a:r>
+              <a:rPr lang="pt-BR" sz="1800" dirty="0">
+                <a:solidFill>
+                  <a:srgbClr val="7D7D7D"/>
+                </a:solidFill>
+                <a:latin typeface="Calibri"/>
+                <a:cs typeface="Calibri"/>
+              </a:rPr>
+              <a:t>após</a:t>
+            </a:r>
+            <a:r>
+              <a:rPr lang="pt-BR" sz="1800" spc="-55" dirty="0">
+                <a:solidFill>
+                  <a:srgbClr val="7D7D7D"/>
+                </a:solidFill>
+                <a:latin typeface="Calibri"/>
+                <a:cs typeface="Calibri"/>
+              </a:rPr>
+              <a:t> </a:t>
+            </a:r>
+            <a:r>
+              <a:rPr lang="pt-BR" sz="1800" dirty="0">
+                <a:solidFill>
+                  <a:srgbClr val="7D7D7D"/>
+                </a:solidFill>
+                <a:latin typeface="Calibri"/>
+                <a:cs typeface="Calibri"/>
+              </a:rPr>
+              <a:t>o</a:t>
+            </a:r>
+            <a:r>
+              <a:rPr lang="pt-BR" sz="1800" spc="-45" dirty="0">
+                <a:solidFill>
+                  <a:srgbClr val="7D7D7D"/>
+                </a:solidFill>
+                <a:latin typeface="Calibri"/>
+                <a:cs typeface="Calibri"/>
+              </a:rPr>
+              <a:t> </a:t>
+            </a:r>
+            <a:r>
+              <a:rPr lang="pt-BR" sz="1800" spc="-10" dirty="0">
+                <a:solidFill>
+                  <a:srgbClr val="7D7D7D"/>
+                </a:solidFill>
+                <a:latin typeface="Calibri"/>
+                <a:cs typeface="Calibri"/>
+              </a:rPr>
+              <a:t>primeiro</a:t>
+            </a:r>
+            <a:r>
+              <a:rPr lang="pt-BR" sz="1800" spc="-40" dirty="0">
+                <a:solidFill>
+                  <a:srgbClr val="7D7D7D"/>
+                </a:solidFill>
+                <a:latin typeface="Calibri"/>
+                <a:cs typeface="Calibri"/>
+              </a:rPr>
+              <a:t> </a:t>
+            </a:r>
+            <a:r>
+              <a:rPr lang="pt-BR" sz="1800" spc="-10" dirty="0" err="1">
+                <a:solidFill>
+                  <a:srgbClr val="7D7D7D"/>
+                </a:solidFill>
+                <a:latin typeface="Calibri"/>
+                <a:cs typeface="Calibri"/>
+              </a:rPr>
+              <a:t>login</a:t>
+            </a:r>
+            <a:r>
+              <a:rPr lang="pt-BR" sz="1800" spc="-10" dirty="0">
+                <a:solidFill>
+                  <a:srgbClr val="7D7D7D"/>
+                </a:solidFill>
+                <a:latin typeface="Calibri"/>
+                <a:cs typeface="Calibri"/>
+              </a:rPr>
+              <a:t>)</a:t>
+            </a:r>
+            <a:endParaRPr lang="pt-BR" sz="1800" dirty="0">
+              <a:latin typeface="Calibri"/>
+              <a:cs typeface="Calibri"/>
+            </a:endParaRPr>
+          </a:p>
+        </p:txBody>
+      </p:sp>
       <p:pic>
         <p:nvPicPr>
-          <p:cNvPr id="8" name="Imagem 7">
+          <p:cNvPr id="8" name="img_rede">
             <a:extLst>
               <a:ext uri="{FF2B5EF4-FFF2-40B4-BE49-F238E27FC236}">
-                <a16:creationId xmlns:a16="http://schemas.microsoft.com/office/drawing/2014/main" xmlns="" id="{F29B3925-15E3-9589-4653-D4C180393887}"/>
+                <a16:creationId xmlns:a16="http://schemas.microsoft.com/office/drawing/2014/main" id="{F29B3925-15E3-9589-4653-D4C180393887}"/>
               </a:ext>
             </a:extLst>
           </p:cNvPr>
@@ -15825,7 +16702,7 @@
           <p:nvPr/>
         </p:nvPicPr>
         <p:blipFill>
-          <a:blip r:embed="rId6"/>
+          <a:blip r:embed="rId7"/>
           <a:stretch>
             <a:fillRect/>
           </a:stretch>
@@ -15842,7 +16719,7 @@
       </p:pic>
       <p:sp>
         <p:nvSpPr>
-          <p:cNvPr id="7" name="CaixaDeTexto 6"/>
+          <p:cNvPr id="7" name="ct_rede"/>
           <p:cNvSpPr txBox="1"/>
           <p:nvPr/>
         </p:nvSpPr>
@@ -15876,7 +16753,7 @@
               </a:tabLst>
             </a:pPr>
             <a:r>
-              <a:rPr lang="pt-BR" sz="1800" dirty="0" err="1" smtClean="0">
+              <a:rPr lang="pt-BR" sz="1800" dirty="0" err="1">
                 <a:solidFill>
                   <a:srgbClr val="7D7D7D"/>
                 </a:solidFill>
@@ -15886,17 +16763,17 @@
               <a:t>Login</a:t>
             </a:r>
             <a:r>
-              <a:rPr lang="pt-BR" sz="1800" spc="-40" dirty="0" smtClean="0">
-                <a:solidFill>
-                  <a:srgbClr val="7D7D7D"/>
-                </a:solidFill>
-                <a:latin typeface="Calibri"/>
-                <a:cs typeface="Calibri"/>
-              </a:rPr>
-              <a:t> </a:t>
-            </a:r>
-            <a:r>
-              <a:rPr lang="pt-BR" sz="1800" dirty="0" smtClean="0">
+              <a:rPr lang="pt-BR" sz="1800" spc="-40" dirty="0">
+                <a:solidFill>
+                  <a:srgbClr val="7D7D7D"/>
+                </a:solidFill>
+                <a:latin typeface="Calibri"/>
+                <a:cs typeface="Calibri"/>
+              </a:rPr>
+              <a:t> </a:t>
+            </a:r>
+            <a:r>
+              <a:rPr lang="pt-BR" sz="1800" dirty="0">
                 <a:solidFill>
                   <a:srgbClr val="7D7D7D"/>
                 </a:solidFill>
@@ -15906,17 +16783,17 @@
               <a:t>de</a:t>
             </a:r>
             <a:r>
-              <a:rPr lang="pt-BR" sz="1800" spc="-45" dirty="0" smtClean="0">
-                <a:solidFill>
-                  <a:srgbClr val="7D7D7D"/>
-                </a:solidFill>
-                <a:latin typeface="Calibri"/>
-                <a:cs typeface="Calibri"/>
-              </a:rPr>
-              <a:t> </a:t>
-            </a:r>
-            <a:r>
-              <a:rPr lang="pt-BR" sz="1800" spc="-20" dirty="0" smtClean="0">
+              <a:rPr lang="pt-BR" sz="1800" spc="-45" dirty="0">
+                <a:solidFill>
+                  <a:srgbClr val="7D7D7D"/>
+                </a:solidFill>
+                <a:latin typeface="Calibri"/>
+                <a:cs typeface="Calibri"/>
+              </a:rPr>
+              <a:t> </a:t>
+            </a:r>
+            <a:r>
+              <a:rPr lang="pt-BR" sz="1800" spc="-20" dirty="0">
                 <a:solidFill>
                   <a:srgbClr val="7D7D7D"/>
                 </a:solidFill>
@@ -15925,7 +16802,7 @@
               </a:rPr>
               <a:t>rede</a:t>
             </a:r>
-            <a:endParaRPr lang="pt-BR" sz="1800" dirty="0" smtClean="0">
+            <a:endParaRPr lang="pt-BR" sz="1800" dirty="0">
               <a:latin typeface="Calibri"/>
               <a:cs typeface="Calibri"/>
             </a:endParaRPr>
@@ -15942,7 +16819,7 @@
               </a:tabLst>
             </a:pPr>
             <a:r>
-              <a:rPr lang="pt-BR" dirty="0" smtClean="0">
+              <a:rPr lang="pt-BR" dirty="0">
                 <a:solidFill>
                   <a:srgbClr val="7D7D7D"/>
                 </a:solidFill>
@@ -15964,7 +16841,7 @@
               </a:tabLst>
             </a:pPr>
             <a:r>
-              <a:rPr lang="pt-BR" sz="1800" dirty="0" smtClean="0">
+              <a:rPr lang="pt-BR" sz="1800" dirty="0">
                 <a:solidFill>
                   <a:srgbClr val="7D7D7D"/>
                 </a:solidFill>
@@ -15974,7 +16851,7 @@
               <a:t>Senha:</a:t>
             </a:r>
             <a:r>
-              <a:rPr lang="pt-BR" dirty="0" smtClean="0">
+              <a:rPr lang="pt-BR" dirty="0">
                 <a:solidFill>
                   <a:srgbClr val="7D7D7D"/>
                 </a:solidFill>
@@ -15983,7 +16860,7 @@
               </a:rPr>
               <a:t> {{SENHA}}</a:t>
             </a:r>
-            <a:endParaRPr lang="pt-BR" sz="1800" dirty="0" smtClean="0">
+            <a:endParaRPr lang="pt-BR" sz="1800" dirty="0">
               <a:latin typeface="Calibri"/>
               <a:cs typeface="Calibri"/>
             </a:endParaRPr>
@@ -16000,7 +16877,7 @@
               </a:tabLst>
             </a:pPr>
             <a:r>
-              <a:rPr lang="pt-BR" sz="1800" dirty="0" smtClean="0">
+              <a:rPr lang="pt-BR" sz="1800" dirty="0">
                 <a:solidFill>
                   <a:srgbClr val="7D7D7D"/>
                 </a:solidFill>
@@ -16010,17 +16887,17 @@
               <a:t>OBS.</a:t>
             </a:r>
             <a:r>
-              <a:rPr lang="pt-BR" sz="1800" spc="-80" dirty="0" smtClean="0">
-                <a:solidFill>
-                  <a:srgbClr val="7D7D7D"/>
-                </a:solidFill>
-                <a:latin typeface="Calibri"/>
-                <a:cs typeface="Calibri"/>
-              </a:rPr>
-              <a:t> </a:t>
-            </a:r>
-            <a:r>
-              <a:rPr lang="pt-BR" sz="1800" dirty="0" smtClean="0">
+              <a:rPr lang="pt-BR" sz="1800" spc="-80" dirty="0">
+                <a:solidFill>
+                  <a:srgbClr val="7D7D7D"/>
+                </a:solidFill>
+                <a:latin typeface="Calibri"/>
+                <a:cs typeface="Calibri"/>
+              </a:rPr>
+              <a:t> </a:t>
+            </a:r>
+            <a:r>
+              <a:rPr lang="pt-BR" sz="1800" dirty="0">
                 <a:solidFill>
                   <a:srgbClr val="7D7D7D"/>
                 </a:solidFill>
@@ -16030,17 +16907,17 @@
               <a:t>(Por</a:t>
             </a:r>
             <a:r>
-              <a:rPr lang="pt-BR" sz="1800" spc="-50" dirty="0" smtClean="0">
-                <a:solidFill>
-                  <a:srgbClr val="7D7D7D"/>
-                </a:solidFill>
-                <a:latin typeface="Calibri"/>
-                <a:cs typeface="Calibri"/>
-              </a:rPr>
-              <a:t> </a:t>
-            </a:r>
-            <a:r>
-              <a:rPr lang="pt-BR" sz="1800" spc="-10" dirty="0" smtClean="0">
+              <a:rPr lang="pt-BR" sz="1800" spc="-50" dirty="0">
+                <a:solidFill>
+                  <a:srgbClr val="7D7D7D"/>
+                </a:solidFill>
+                <a:latin typeface="Calibri"/>
+                <a:cs typeface="Calibri"/>
+              </a:rPr>
+              <a:t> </a:t>
+            </a:r>
+            <a:r>
+              <a:rPr lang="pt-BR" sz="1800" spc="-10" dirty="0">
                 <a:solidFill>
                   <a:srgbClr val="7D7D7D"/>
                 </a:solidFill>
@@ -16050,17 +16927,17 @@
               <a:t>questões</a:t>
             </a:r>
             <a:r>
-              <a:rPr lang="pt-BR" sz="1800" spc="-50" dirty="0" smtClean="0">
-                <a:solidFill>
-                  <a:srgbClr val="7D7D7D"/>
-                </a:solidFill>
-                <a:latin typeface="Calibri"/>
-                <a:cs typeface="Calibri"/>
-              </a:rPr>
-              <a:t> </a:t>
-            </a:r>
-            <a:r>
-              <a:rPr lang="pt-BR" sz="1800" dirty="0" smtClean="0">
+              <a:rPr lang="pt-BR" sz="1800" spc="-50" dirty="0">
+                <a:solidFill>
+                  <a:srgbClr val="7D7D7D"/>
+                </a:solidFill>
+                <a:latin typeface="Calibri"/>
+                <a:cs typeface="Calibri"/>
+              </a:rPr>
+              <a:t> </a:t>
+            </a:r>
+            <a:r>
+              <a:rPr lang="pt-BR" sz="1800" dirty="0">
                 <a:solidFill>
                   <a:srgbClr val="7D7D7D"/>
                 </a:solidFill>
@@ -16070,17 +16947,17 @@
               <a:t>de</a:t>
             </a:r>
             <a:r>
-              <a:rPr lang="pt-BR" sz="1800" spc="-45" dirty="0" smtClean="0">
-                <a:solidFill>
-                  <a:srgbClr val="7D7D7D"/>
-                </a:solidFill>
-                <a:latin typeface="Calibri"/>
-                <a:cs typeface="Calibri"/>
-              </a:rPr>
-              <a:t> </a:t>
-            </a:r>
-            <a:r>
-              <a:rPr lang="pt-BR" sz="1800" spc="-20" dirty="0" smtClean="0">
+              <a:rPr lang="pt-BR" sz="1800" spc="-45" dirty="0">
+                <a:solidFill>
+                  <a:srgbClr val="7D7D7D"/>
+                </a:solidFill>
+                <a:latin typeface="Calibri"/>
+                <a:cs typeface="Calibri"/>
+              </a:rPr>
+              <a:t> </a:t>
+            </a:r>
+            <a:r>
+              <a:rPr lang="pt-BR" sz="1800" spc="-20" dirty="0">
                 <a:solidFill>
                   <a:srgbClr val="7D7D7D"/>
                 </a:solidFill>
@@ -16090,17 +16967,17 @@
               <a:t>segurança,</a:t>
             </a:r>
             <a:r>
-              <a:rPr lang="pt-BR" sz="1800" spc="-35" dirty="0" smtClean="0">
-                <a:solidFill>
-                  <a:srgbClr val="7D7D7D"/>
-                </a:solidFill>
-                <a:latin typeface="Calibri"/>
-                <a:cs typeface="Calibri"/>
-              </a:rPr>
-              <a:t> </a:t>
-            </a:r>
-            <a:r>
-              <a:rPr lang="pt-BR" sz="1800" spc="-10" dirty="0" smtClean="0">
+              <a:rPr lang="pt-BR" sz="1800" spc="-35" dirty="0">
+                <a:solidFill>
+                  <a:srgbClr val="7D7D7D"/>
+                </a:solidFill>
+                <a:latin typeface="Calibri"/>
+                <a:cs typeface="Calibri"/>
+              </a:rPr>
+              <a:t> </a:t>
+            </a:r>
+            <a:r>
+              <a:rPr lang="pt-BR" sz="1800" spc="-10" dirty="0">
                 <a:solidFill>
                   <a:srgbClr val="7D7D7D"/>
                 </a:solidFill>
@@ -16110,17 +16987,17 @@
               <a:t>favor</a:t>
             </a:r>
             <a:r>
-              <a:rPr lang="pt-BR" sz="1800" spc="-85" dirty="0" smtClean="0">
-                <a:solidFill>
-                  <a:srgbClr val="7D7D7D"/>
-                </a:solidFill>
-                <a:latin typeface="Calibri"/>
-                <a:cs typeface="Calibri"/>
-              </a:rPr>
-              <a:t> </a:t>
-            </a:r>
-            <a:r>
-              <a:rPr lang="pt-BR" sz="1800" dirty="0" smtClean="0">
+              <a:rPr lang="pt-BR" sz="1800" spc="-85" dirty="0">
+                <a:solidFill>
+                  <a:srgbClr val="7D7D7D"/>
+                </a:solidFill>
+                <a:latin typeface="Calibri"/>
+                <a:cs typeface="Calibri"/>
+              </a:rPr>
+              <a:t> </a:t>
+            </a:r>
+            <a:r>
+              <a:rPr lang="pt-BR" sz="1800" dirty="0">
                 <a:solidFill>
                   <a:srgbClr val="7D7D7D"/>
                 </a:solidFill>
@@ -16130,17 +17007,17 @@
               <a:t>trocar</a:t>
             </a:r>
             <a:r>
-              <a:rPr lang="pt-BR" sz="1800" spc="-55" dirty="0" smtClean="0">
-                <a:solidFill>
-                  <a:srgbClr val="7D7D7D"/>
-                </a:solidFill>
-                <a:latin typeface="Calibri"/>
-                <a:cs typeface="Calibri"/>
-              </a:rPr>
-              <a:t> </a:t>
-            </a:r>
-            <a:r>
-              <a:rPr lang="pt-BR" sz="1800" dirty="0" smtClean="0">
+              <a:rPr lang="pt-BR" sz="1800" spc="-55" dirty="0">
+                <a:solidFill>
+                  <a:srgbClr val="7D7D7D"/>
+                </a:solidFill>
+                <a:latin typeface="Calibri"/>
+                <a:cs typeface="Calibri"/>
+              </a:rPr>
+              <a:t> </a:t>
+            </a:r>
+            <a:r>
+              <a:rPr lang="pt-BR" sz="1800" dirty="0">
                 <a:solidFill>
                   <a:srgbClr val="7D7D7D"/>
                 </a:solidFill>
@@ -16150,17 +17027,17 @@
               <a:t>a</a:t>
             </a:r>
             <a:r>
-              <a:rPr lang="pt-BR" sz="1800" spc="-45" dirty="0" smtClean="0">
-                <a:solidFill>
-                  <a:srgbClr val="7D7D7D"/>
-                </a:solidFill>
-                <a:latin typeface="Calibri"/>
-                <a:cs typeface="Calibri"/>
-              </a:rPr>
-              <a:t> </a:t>
-            </a:r>
-            <a:r>
-              <a:rPr lang="pt-BR" sz="1800" dirty="0" smtClean="0">
+              <a:rPr lang="pt-BR" sz="1800" spc="-45" dirty="0">
+                <a:solidFill>
+                  <a:srgbClr val="7D7D7D"/>
+                </a:solidFill>
+                <a:latin typeface="Calibri"/>
+                <a:cs typeface="Calibri"/>
+              </a:rPr>
+              <a:t> </a:t>
+            </a:r>
+            <a:r>
+              <a:rPr lang="pt-BR" sz="1800" dirty="0">
                 <a:solidFill>
                   <a:srgbClr val="7D7D7D"/>
                 </a:solidFill>
@@ -16170,17 +17047,17 @@
               <a:t>senha</a:t>
             </a:r>
             <a:r>
-              <a:rPr lang="pt-BR" sz="1800" spc="-65" dirty="0" smtClean="0">
-                <a:solidFill>
-                  <a:srgbClr val="7D7D7D"/>
-                </a:solidFill>
-                <a:latin typeface="Calibri"/>
-                <a:cs typeface="Calibri"/>
-              </a:rPr>
-              <a:t> </a:t>
-            </a:r>
-            <a:r>
-              <a:rPr lang="pt-BR" sz="1800" dirty="0" smtClean="0">
+              <a:rPr lang="pt-BR" sz="1800" spc="-65" dirty="0">
+                <a:solidFill>
+                  <a:srgbClr val="7D7D7D"/>
+                </a:solidFill>
+                <a:latin typeface="Calibri"/>
+                <a:cs typeface="Calibri"/>
+              </a:rPr>
+              <a:t> </a:t>
+            </a:r>
+            <a:r>
+              <a:rPr lang="pt-BR" sz="1800" dirty="0">
                 <a:solidFill>
                   <a:srgbClr val="7D7D7D"/>
                 </a:solidFill>
@@ -16190,17 +17067,17 @@
               <a:t>logo</a:t>
             </a:r>
             <a:r>
-              <a:rPr lang="pt-BR" sz="1800" spc="-45" dirty="0" smtClean="0">
-                <a:solidFill>
-                  <a:srgbClr val="7D7D7D"/>
-                </a:solidFill>
-                <a:latin typeface="Calibri"/>
-                <a:cs typeface="Calibri"/>
-              </a:rPr>
-              <a:t> </a:t>
-            </a:r>
-            <a:r>
-              <a:rPr lang="pt-BR" sz="1800" dirty="0" smtClean="0">
+              <a:rPr lang="pt-BR" sz="1800" spc="-45" dirty="0">
+                <a:solidFill>
+                  <a:srgbClr val="7D7D7D"/>
+                </a:solidFill>
+                <a:latin typeface="Calibri"/>
+                <a:cs typeface="Calibri"/>
+              </a:rPr>
+              <a:t> </a:t>
+            </a:r>
+            <a:r>
+              <a:rPr lang="pt-BR" sz="1800" dirty="0">
                 <a:solidFill>
                   <a:srgbClr val="7D7D7D"/>
                 </a:solidFill>
@@ -16210,17 +17087,17 @@
               <a:t>após</a:t>
             </a:r>
             <a:r>
-              <a:rPr lang="pt-BR" sz="1800" spc="-55" dirty="0" smtClean="0">
-                <a:solidFill>
-                  <a:srgbClr val="7D7D7D"/>
-                </a:solidFill>
-                <a:latin typeface="Calibri"/>
-                <a:cs typeface="Calibri"/>
-              </a:rPr>
-              <a:t> </a:t>
-            </a:r>
-            <a:r>
-              <a:rPr lang="pt-BR" sz="1800" dirty="0" smtClean="0">
+              <a:rPr lang="pt-BR" sz="1800" spc="-55" dirty="0">
+                <a:solidFill>
+                  <a:srgbClr val="7D7D7D"/>
+                </a:solidFill>
+                <a:latin typeface="Calibri"/>
+                <a:cs typeface="Calibri"/>
+              </a:rPr>
+              <a:t> </a:t>
+            </a:r>
+            <a:r>
+              <a:rPr lang="pt-BR" sz="1800" dirty="0">
                 <a:solidFill>
                   <a:srgbClr val="7D7D7D"/>
                 </a:solidFill>
@@ -16230,17 +17107,17 @@
               <a:t>o</a:t>
             </a:r>
             <a:r>
-              <a:rPr lang="pt-BR" sz="1800" spc="-45" dirty="0" smtClean="0">
-                <a:solidFill>
-                  <a:srgbClr val="7D7D7D"/>
-                </a:solidFill>
-                <a:latin typeface="Calibri"/>
-                <a:cs typeface="Calibri"/>
-              </a:rPr>
-              <a:t> </a:t>
-            </a:r>
-            <a:r>
-              <a:rPr lang="pt-BR" sz="1800" spc="-10" dirty="0" smtClean="0">
+              <a:rPr lang="pt-BR" sz="1800" spc="-45" dirty="0">
+                <a:solidFill>
+                  <a:srgbClr val="7D7D7D"/>
+                </a:solidFill>
+                <a:latin typeface="Calibri"/>
+                <a:cs typeface="Calibri"/>
+              </a:rPr>
+              <a:t> </a:t>
+            </a:r>
+            <a:r>
+              <a:rPr lang="pt-BR" sz="1800" spc="-10" dirty="0">
                 <a:solidFill>
                   <a:srgbClr val="7D7D7D"/>
                 </a:solidFill>
@@ -16250,17 +17127,17 @@
               <a:t>primeiro</a:t>
             </a:r>
             <a:r>
-              <a:rPr lang="pt-BR" sz="1800" spc="-40" dirty="0" smtClean="0">
-                <a:solidFill>
-                  <a:srgbClr val="7D7D7D"/>
-                </a:solidFill>
-                <a:latin typeface="Calibri"/>
-                <a:cs typeface="Calibri"/>
-              </a:rPr>
-              <a:t> </a:t>
-            </a:r>
-            <a:r>
-              <a:rPr lang="pt-BR" sz="1800" spc="-10" dirty="0" err="1" smtClean="0">
+              <a:rPr lang="pt-BR" sz="1800" spc="-40" dirty="0">
+                <a:solidFill>
+                  <a:srgbClr val="7D7D7D"/>
+                </a:solidFill>
+                <a:latin typeface="Calibri"/>
+                <a:cs typeface="Calibri"/>
+              </a:rPr>
+              <a:t> </a:t>
+            </a:r>
+            <a:r>
+              <a:rPr lang="pt-BR" sz="1800" spc="-10" dirty="0" err="1">
                 <a:solidFill>
                   <a:srgbClr val="7D7D7D"/>
                 </a:solidFill>
@@ -16270,7 +17147,7 @@
               <a:t>login</a:t>
             </a:r>
             <a:r>
-              <a:rPr lang="pt-BR" sz="1800" spc="-10" dirty="0" smtClean="0">
+              <a:rPr lang="pt-BR" sz="1800" spc="-10" dirty="0">
                 <a:solidFill>
                   <a:srgbClr val="7D7D7D"/>
                 </a:solidFill>
@@ -16279,998 +17156,90 @@
               </a:rPr>
               <a:t>)</a:t>
             </a:r>
-            <a:endParaRPr lang="pt-BR" sz="1800" dirty="0" smtClean="0">
+            <a:endParaRPr lang="pt-BR" sz="1800" dirty="0">
               <a:latin typeface="Calibri"/>
               <a:cs typeface="Calibri"/>
             </a:endParaRPr>
           </a:p>
         </p:txBody>
       </p:sp>
-      <p:sp>
-        <p:nvSpPr>
-          <p:cNvPr id="10" name="CaixaDeTexto 9"/>
-          <p:cNvSpPr txBox="1"/>
+      <p:pic>
+        <p:nvPicPr>
+          <p:cNvPr id="3" name="object 3"/>
+          <p:cNvPicPr/>
           <p:nvPr/>
-        </p:nvSpPr>
+        </p:nvPicPr>
+        <p:blipFill>
+          <a:blip r:embed="rId8" cstate="print"/>
+          <a:stretch>
+            <a:fillRect/>
+          </a:stretch>
+        </p:blipFill>
         <p:spPr>
           <a:xfrm>
-            <a:off x="655421" y="2891734"/>
-            <a:ext cx="8408019" cy="1754326"/>
+            <a:off x="118871" y="908303"/>
+            <a:ext cx="4024924" cy="45720"/>
           </a:xfrm>
           <a:prstGeom prst="rect">
             <a:avLst/>
           </a:prstGeom>
-          <a:noFill/>
+        </p:spPr>
+      </p:pic>
+      <p:sp>
+        <p:nvSpPr>
+          <p:cNvPr id="2" name="object 2"/>
+          <p:cNvSpPr txBox="1">
+            <a:spLocks noGrp="1"/>
+          </p:cNvSpPr>
+          <p:nvPr>
+            <p:ph type="title"/>
+          </p:nvPr>
+        </p:nvSpPr>
+        <p:spPr>
+          <a:prstGeom prst="rect">
+            <a:avLst/>
+          </a:prstGeom>
         </p:spPr>
         <p:txBody>
-          <a:bodyPr wrap="square" rtlCol="0">
+          <a:bodyPr vert="horz" wrap="square" lIns="0" tIns="12700" rIns="0" bIns="0" rtlCol="0">
             <a:spAutoFit/>
           </a:bodyPr>
           <a:lstStyle/>
           <a:p>
-            <a:pPr marL="299085" indent="-286385">
+            <a:pPr marL="12700">
               <a:lnSpc>
                 <a:spcPct val="100000"/>
               </a:lnSpc>
-              <a:buFont typeface="Wingdings"/>
-              <a:buChar char=""/>
-              <a:tabLst>
-                <a:tab pos="299085" algn="l"/>
-              </a:tabLst>
+              <a:spcBef>
+                <a:spcPts val="100"/>
+              </a:spcBef>
             </a:pPr>
             <a:r>
-              <a:rPr lang="pt-BR" sz="1800" dirty="0" err="1" smtClean="0">
-                <a:solidFill>
-                  <a:srgbClr val="7D7D7D"/>
-                </a:solidFill>
-                <a:latin typeface="Calibri"/>
-                <a:cs typeface="Calibri"/>
-              </a:rPr>
-              <a:t>Login</a:t>
-            </a:r>
-            <a:r>
-              <a:rPr lang="pt-BR" sz="1800" spc="-35" dirty="0" smtClean="0">
-                <a:solidFill>
-                  <a:srgbClr val="7D7D7D"/>
-                </a:solidFill>
-                <a:latin typeface="Calibri"/>
-                <a:cs typeface="Calibri"/>
-              </a:rPr>
-              <a:t> </a:t>
-            </a:r>
-            <a:r>
-              <a:rPr lang="pt-BR" spc="-35" dirty="0" smtClean="0">
-                <a:solidFill>
-                  <a:srgbClr val="7D7D7D"/>
-                </a:solidFill>
-                <a:latin typeface="Calibri"/>
-                <a:cs typeface="Calibri"/>
-              </a:rPr>
-              <a:t>do Office365</a:t>
-            </a:r>
-            <a:endParaRPr lang="pt-BR" sz="1800" dirty="0" smtClean="0">
-              <a:latin typeface="Calibri"/>
-              <a:cs typeface="Calibri"/>
-            </a:endParaRPr>
-          </a:p>
-          <a:p>
-            <a:pPr marL="12700" marR="5080">
-              <a:lnSpc>
-                <a:spcPct val="100000"/>
-              </a:lnSpc>
-            </a:pPr>
-            <a:r>
-              <a:rPr lang="pt-BR" sz="1800" dirty="0" smtClean="0">
-                <a:solidFill>
-                  <a:srgbClr val="7D7D7D"/>
-                </a:solidFill>
-                <a:latin typeface="Calibri"/>
-                <a:cs typeface="Calibri"/>
-              </a:rPr>
-              <a:t>Seu</a:t>
-            </a:r>
-            <a:r>
-              <a:rPr lang="pt-BR" sz="1800" spc="-60" dirty="0" smtClean="0">
-                <a:solidFill>
-                  <a:srgbClr val="7D7D7D"/>
-                </a:solidFill>
-                <a:latin typeface="Calibri"/>
-                <a:cs typeface="Calibri"/>
-              </a:rPr>
-              <a:t> </a:t>
-            </a:r>
-            <a:r>
-              <a:rPr lang="pt-BR" sz="1800" spc="-25" dirty="0" smtClean="0">
-                <a:solidFill>
-                  <a:srgbClr val="7D7D7D"/>
-                </a:solidFill>
-                <a:latin typeface="Calibri"/>
-                <a:cs typeface="Calibri"/>
-              </a:rPr>
-              <a:t>e-</a:t>
-            </a:r>
-            <a:r>
-              <a:rPr lang="pt-BR" sz="1800" dirty="0" smtClean="0">
-                <a:solidFill>
-                  <a:srgbClr val="7D7D7D"/>
-                </a:solidFill>
-                <a:latin typeface="Calibri"/>
-                <a:cs typeface="Calibri"/>
-              </a:rPr>
-              <a:t>mail</a:t>
-            </a:r>
-            <a:r>
-              <a:rPr lang="pt-BR" sz="1800" spc="-60" dirty="0" smtClean="0">
-                <a:solidFill>
-                  <a:srgbClr val="7D7D7D"/>
-                </a:solidFill>
-                <a:latin typeface="Calibri"/>
-                <a:cs typeface="Calibri"/>
-              </a:rPr>
-              <a:t> </a:t>
-            </a:r>
-            <a:r>
-              <a:rPr lang="pt-BR" sz="1800" dirty="0" smtClean="0">
-                <a:solidFill>
-                  <a:srgbClr val="7D7D7D"/>
-                </a:solidFill>
-                <a:latin typeface="Calibri"/>
-                <a:cs typeface="Calibri"/>
-              </a:rPr>
-              <a:t>está</a:t>
-            </a:r>
-            <a:r>
-              <a:rPr lang="pt-BR" sz="1800" spc="-70" dirty="0" smtClean="0">
-                <a:solidFill>
-                  <a:srgbClr val="7D7D7D"/>
-                </a:solidFill>
-                <a:latin typeface="Calibri"/>
-                <a:cs typeface="Calibri"/>
-              </a:rPr>
-              <a:t> </a:t>
-            </a:r>
-            <a:r>
-              <a:rPr lang="pt-BR" sz="1800" spc="-10" dirty="0" smtClean="0">
-                <a:solidFill>
-                  <a:srgbClr val="7D7D7D"/>
-                </a:solidFill>
-                <a:latin typeface="Calibri"/>
-                <a:cs typeface="Calibri"/>
-              </a:rPr>
-              <a:t>hospedado</a:t>
-            </a:r>
-            <a:r>
-              <a:rPr lang="pt-BR" sz="1800" spc="-50" dirty="0" smtClean="0">
-                <a:solidFill>
-                  <a:srgbClr val="7D7D7D"/>
-                </a:solidFill>
-                <a:latin typeface="Calibri"/>
-                <a:cs typeface="Calibri"/>
-              </a:rPr>
-              <a:t> </a:t>
-            </a:r>
-            <a:r>
-              <a:rPr lang="pt-BR" sz="1800" dirty="0" smtClean="0">
-                <a:solidFill>
-                  <a:srgbClr val="7D7D7D"/>
-                </a:solidFill>
-                <a:latin typeface="Calibri"/>
-                <a:cs typeface="Calibri"/>
-              </a:rPr>
-              <a:t>da</a:t>
-            </a:r>
-            <a:r>
-              <a:rPr lang="pt-BR" sz="1800" spc="-60" dirty="0" smtClean="0">
-                <a:solidFill>
-                  <a:srgbClr val="7D7D7D"/>
-                </a:solidFill>
-                <a:latin typeface="Calibri"/>
-                <a:cs typeface="Calibri"/>
-              </a:rPr>
-              <a:t> </a:t>
-            </a:r>
-            <a:r>
-              <a:rPr lang="pt-BR" sz="1800" dirty="0" smtClean="0">
-                <a:solidFill>
-                  <a:srgbClr val="7D7D7D"/>
-                </a:solidFill>
-                <a:latin typeface="Calibri"/>
-                <a:cs typeface="Calibri"/>
-              </a:rPr>
-              <a:t>Microsoft</a:t>
-            </a:r>
-            <a:r>
-              <a:rPr lang="pt-BR" sz="1800" spc="-55" dirty="0" smtClean="0">
-                <a:solidFill>
-                  <a:srgbClr val="7D7D7D"/>
-                </a:solidFill>
-                <a:latin typeface="Calibri"/>
-                <a:cs typeface="Calibri"/>
-              </a:rPr>
-              <a:t> </a:t>
-            </a:r>
-            <a:r>
-              <a:rPr lang="pt-BR" sz="1800" dirty="0" smtClean="0">
-                <a:solidFill>
-                  <a:srgbClr val="7D7D7D"/>
-                </a:solidFill>
-                <a:latin typeface="Calibri"/>
-                <a:cs typeface="Calibri"/>
-              </a:rPr>
-              <a:t>(parceiro</a:t>
-            </a:r>
-            <a:r>
-              <a:rPr lang="pt-BR" sz="1800" spc="-30" dirty="0" smtClean="0">
-                <a:solidFill>
-                  <a:srgbClr val="7D7D7D"/>
-                </a:solidFill>
-                <a:latin typeface="Calibri"/>
-                <a:cs typeface="Calibri"/>
-              </a:rPr>
-              <a:t> </a:t>
-            </a:r>
-            <a:r>
-              <a:rPr lang="pt-BR" sz="1800" dirty="0" smtClean="0">
-                <a:solidFill>
-                  <a:srgbClr val="7D7D7D"/>
-                </a:solidFill>
-                <a:latin typeface="Calibri"/>
-                <a:cs typeface="Calibri"/>
-              </a:rPr>
-              <a:t>de</a:t>
-            </a:r>
-            <a:r>
-              <a:rPr lang="pt-BR" sz="1800" spc="-45" dirty="0" smtClean="0">
-                <a:solidFill>
-                  <a:srgbClr val="7D7D7D"/>
-                </a:solidFill>
-                <a:latin typeface="Calibri"/>
-                <a:cs typeface="Calibri"/>
-              </a:rPr>
-              <a:t> </a:t>
-            </a:r>
-            <a:r>
-              <a:rPr lang="pt-BR" sz="1800" dirty="0" smtClean="0">
-                <a:solidFill>
-                  <a:srgbClr val="7D7D7D"/>
-                </a:solidFill>
-                <a:latin typeface="Calibri"/>
-                <a:cs typeface="Calibri"/>
-              </a:rPr>
-              <a:t>serviços</a:t>
-            </a:r>
-            <a:r>
-              <a:rPr lang="pt-BR" sz="1800" spc="-65" dirty="0" smtClean="0">
-                <a:solidFill>
-                  <a:srgbClr val="7D7D7D"/>
-                </a:solidFill>
-                <a:latin typeface="Calibri"/>
-                <a:cs typeface="Calibri"/>
-              </a:rPr>
-              <a:t> </a:t>
-            </a:r>
-            <a:r>
-              <a:rPr lang="pt-BR" sz="1800" dirty="0" smtClean="0">
-                <a:solidFill>
-                  <a:srgbClr val="7D7D7D"/>
-                </a:solidFill>
-                <a:latin typeface="Calibri"/>
-                <a:cs typeface="Calibri"/>
-              </a:rPr>
-              <a:t>em</a:t>
-            </a:r>
-            <a:r>
-              <a:rPr lang="pt-BR" sz="1800" spc="-60" dirty="0" smtClean="0">
-                <a:solidFill>
-                  <a:srgbClr val="7D7D7D"/>
-                </a:solidFill>
-                <a:latin typeface="Calibri"/>
-                <a:cs typeface="Calibri"/>
-              </a:rPr>
-              <a:t> </a:t>
-            </a:r>
-            <a:r>
-              <a:rPr lang="pt-BR" sz="1800" dirty="0" smtClean="0">
-                <a:solidFill>
-                  <a:srgbClr val="7D7D7D"/>
-                </a:solidFill>
-                <a:latin typeface="Calibri"/>
-                <a:cs typeface="Calibri"/>
-              </a:rPr>
-              <a:t>nuvem)</a:t>
-            </a:r>
-            <a:r>
-              <a:rPr lang="pt-BR" sz="1800" spc="-45" dirty="0" smtClean="0">
-                <a:solidFill>
-                  <a:srgbClr val="7D7D7D"/>
-                </a:solidFill>
-                <a:latin typeface="Calibri"/>
-                <a:cs typeface="Calibri"/>
-              </a:rPr>
-              <a:t> </a:t>
-            </a:r>
-            <a:r>
-              <a:rPr lang="pt-BR" sz="1800" dirty="0" smtClean="0">
-                <a:solidFill>
-                  <a:srgbClr val="7D7D7D"/>
-                </a:solidFill>
-                <a:latin typeface="Calibri"/>
-                <a:cs typeface="Calibri"/>
-              </a:rPr>
-              <a:t>e</a:t>
-            </a:r>
-            <a:r>
-              <a:rPr lang="pt-BR" sz="1800" spc="-65" dirty="0" smtClean="0">
-                <a:solidFill>
-                  <a:srgbClr val="7D7D7D"/>
-                </a:solidFill>
-                <a:latin typeface="Calibri"/>
-                <a:cs typeface="Calibri"/>
-              </a:rPr>
-              <a:t> </a:t>
-            </a:r>
-            <a:r>
-              <a:rPr lang="pt-BR" sz="1800" dirty="0" smtClean="0">
-                <a:solidFill>
-                  <a:srgbClr val="7D7D7D"/>
-                </a:solidFill>
-                <a:latin typeface="Calibri"/>
-                <a:cs typeface="Calibri"/>
-              </a:rPr>
-              <a:t>pode</a:t>
-            </a:r>
-            <a:r>
-              <a:rPr lang="pt-BR" sz="1800" spc="-35" dirty="0" smtClean="0">
-                <a:solidFill>
-                  <a:srgbClr val="7D7D7D"/>
-                </a:solidFill>
-                <a:latin typeface="Calibri"/>
-                <a:cs typeface="Calibri"/>
-              </a:rPr>
-              <a:t> </a:t>
-            </a:r>
-            <a:r>
-              <a:rPr lang="pt-BR" sz="1800" dirty="0" smtClean="0">
-                <a:solidFill>
-                  <a:srgbClr val="7D7D7D"/>
-                </a:solidFill>
-                <a:latin typeface="Calibri"/>
-                <a:cs typeface="Calibri"/>
-              </a:rPr>
-              <a:t>ser</a:t>
-            </a:r>
-            <a:r>
-              <a:rPr lang="pt-BR" sz="1800" spc="-80" dirty="0" smtClean="0">
-                <a:solidFill>
-                  <a:srgbClr val="7D7D7D"/>
-                </a:solidFill>
-                <a:latin typeface="Calibri"/>
-                <a:cs typeface="Calibri"/>
-              </a:rPr>
-              <a:t> </a:t>
-            </a:r>
-            <a:r>
-              <a:rPr lang="pt-BR" sz="1800" spc="-10" dirty="0" smtClean="0">
-                <a:solidFill>
-                  <a:srgbClr val="7D7D7D"/>
-                </a:solidFill>
-                <a:latin typeface="Calibri"/>
-                <a:cs typeface="Calibri"/>
-              </a:rPr>
-              <a:t>acessado </a:t>
-            </a:r>
-            <a:r>
-              <a:rPr lang="pt-BR" sz="1800" dirty="0" smtClean="0">
-                <a:solidFill>
-                  <a:srgbClr val="7D7D7D"/>
-                </a:solidFill>
-                <a:latin typeface="Calibri"/>
-                <a:cs typeface="Calibri"/>
-              </a:rPr>
-              <a:t>pela</a:t>
-            </a:r>
-            <a:r>
-              <a:rPr lang="pt-BR" sz="1800" spc="-95" dirty="0" smtClean="0">
-                <a:solidFill>
-                  <a:srgbClr val="7D7D7D"/>
-                </a:solidFill>
-                <a:latin typeface="Calibri"/>
-                <a:cs typeface="Calibri"/>
-              </a:rPr>
-              <a:t> </a:t>
-            </a:r>
-            <a:r>
-              <a:rPr lang="pt-BR" sz="1800" dirty="0" smtClean="0">
-                <a:solidFill>
-                  <a:srgbClr val="7D7D7D"/>
-                </a:solidFill>
-                <a:latin typeface="Calibri"/>
-                <a:cs typeface="Calibri"/>
-              </a:rPr>
-              <a:t>web,</a:t>
-            </a:r>
-            <a:r>
-              <a:rPr lang="pt-BR" sz="1800" spc="-70" dirty="0" smtClean="0">
-                <a:solidFill>
-                  <a:srgbClr val="7D7D7D"/>
-                </a:solidFill>
-                <a:latin typeface="Calibri"/>
-                <a:cs typeface="Calibri"/>
-              </a:rPr>
-              <a:t> </a:t>
-            </a:r>
-            <a:r>
-              <a:rPr lang="pt-BR" sz="1800" dirty="0" smtClean="0">
-                <a:solidFill>
-                  <a:srgbClr val="7D7D7D"/>
-                </a:solidFill>
-                <a:latin typeface="Calibri"/>
-                <a:cs typeface="Calibri"/>
-              </a:rPr>
-              <a:t>de</a:t>
-            </a:r>
-            <a:r>
-              <a:rPr lang="pt-BR" sz="1800" spc="-70" dirty="0" smtClean="0">
-                <a:solidFill>
-                  <a:srgbClr val="7D7D7D"/>
-                </a:solidFill>
-                <a:latin typeface="Calibri"/>
-                <a:cs typeface="Calibri"/>
-              </a:rPr>
-              <a:t> </a:t>
-            </a:r>
-            <a:r>
-              <a:rPr lang="pt-BR" sz="1800" dirty="0" smtClean="0">
-                <a:solidFill>
-                  <a:srgbClr val="7D7D7D"/>
-                </a:solidFill>
-                <a:latin typeface="Calibri"/>
-                <a:cs typeface="Calibri"/>
-              </a:rPr>
-              <a:t>qualquer</a:t>
-            </a:r>
-            <a:r>
-              <a:rPr lang="pt-BR" sz="1800" spc="-55" dirty="0" smtClean="0">
-                <a:solidFill>
-                  <a:srgbClr val="7D7D7D"/>
-                </a:solidFill>
-                <a:latin typeface="Calibri"/>
-                <a:cs typeface="Calibri"/>
-              </a:rPr>
-              <a:t> </a:t>
-            </a:r>
-            <a:r>
-              <a:rPr lang="pt-BR" sz="1800" spc="-30" dirty="0" smtClean="0">
-                <a:solidFill>
-                  <a:srgbClr val="7D7D7D"/>
-                </a:solidFill>
-                <a:latin typeface="Calibri"/>
-                <a:cs typeface="Calibri"/>
-              </a:rPr>
-              <a:t>lugar,</a:t>
-            </a:r>
-            <a:r>
-              <a:rPr lang="pt-BR" sz="1800" spc="-70" dirty="0" smtClean="0">
-                <a:solidFill>
-                  <a:srgbClr val="7D7D7D"/>
-                </a:solidFill>
-                <a:latin typeface="Calibri"/>
-                <a:cs typeface="Calibri"/>
-              </a:rPr>
-              <a:t> </a:t>
-            </a:r>
-            <a:r>
-              <a:rPr lang="pt-BR" sz="1800" dirty="0" smtClean="0">
-                <a:solidFill>
-                  <a:srgbClr val="7D7D7D"/>
-                </a:solidFill>
-                <a:latin typeface="Calibri"/>
-                <a:cs typeface="Calibri"/>
-              </a:rPr>
-              <a:t>pelo</a:t>
-            </a:r>
-            <a:r>
-              <a:rPr lang="pt-BR" sz="1800" spc="-75" dirty="0" smtClean="0">
-                <a:solidFill>
-                  <a:srgbClr val="7D7D7D"/>
-                </a:solidFill>
-                <a:latin typeface="Calibri"/>
-                <a:cs typeface="Calibri"/>
-              </a:rPr>
-              <a:t> </a:t>
-            </a:r>
-            <a:r>
-              <a:rPr lang="pt-BR" sz="1800" dirty="0" smtClean="0">
-                <a:solidFill>
-                  <a:srgbClr val="7D7D7D"/>
-                </a:solidFill>
-                <a:latin typeface="Calibri"/>
-                <a:cs typeface="Calibri"/>
-              </a:rPr>
-              <a:t>endereço</a:t>
-            </a:r>
-            <a:r>
-              <a:rPr lang="pt-BR" sz="1800" spc="-35" dirty="0" smtClean="0">
-                <a:solidFill>
-                  <a:srgbClr val="7D7D7D"/>
-                </a:solidFill>
-                <a:latin typeface="Calibri"/>
-                <a:cs typeface="Calibri"/>
-              </a:rPr>
-              <a:t> </a:t>
-            </a:r>
-            <a:r>
-              <a:rPr lang="pt-BR" sz="1800" u="sng" dirty="0" smtClean="0">
-                <a:solidFill>
-                  <a:srgbClr val="0000FF"/>
-                </a:solidFill>
-                <a:uFill>
-                  <a:solidFill>
-                    <a:srgbClr val="0000FF"/>
-                  </a:solidFill>
-                </a:uFill>
-                <a:latin typeface="Calibri"/>
-                <a:cs typeface="Calibri"/>
-                <a:hlinkClick r:id="rId7"/>
-              </a:rPr>
-              <a:t>outlook.com</a:t>
-            </a:r>
-            <a:r>
-              <a:rPr lang="pt-BR" sz="1800" spc="-85" dirty="0" smtClean="0">
-                <a:solidFill>
-                  <a:srgbClr val="0000FF"/>
-                </a:solidFill>
-                <a:latin typeface="Calibri"/>
-                <a:cs typeface="Calibri"/>
-              </a:rPr>
-              <a:t> </a:t>
-            </a:r>
-            <a:r>
-              <a:rPr lang="pt-BR" sz="1800" dirty="0" smtClean="0">
-                <a:solidFill>
-                  <a:srgbClr val="7D7D7D"/>
-                </a:solidFill>
-                <a:latin typeface="Calibri"/>
-                <a:cs typeface="Calibri"/>
-              </a:rPr>
-              <a:t>ou</a:t>
-            </a:r>
-            <a:r>
-              <a:rPr lang="pt-BR" sz="1800" spc="-65" dirty="0" smtClean="0">
-                <a:solidFill>
-                  <a:srgbClr val="7D7D7D"/>
-                </a:solidFill>
-                <a:latin typeface="Calibri"/>
-                <a:cs typeface="Calibri"/>
-              </a:rPr>
-              <a:t> </a:t>
-            </a:r>
-            <a:r>
-              <a:rPr lang="pt-BR" sz="1800" u="sng" spc="-10" dirty="0" smtClean="0">
-                <a:solidFill>
-                  <a:srgbClr val="0000FF"/>
-                </a:solidFill>
-                <a:uFill>
-                  <a:solidFill>
-                    <a:srgbClr val="0000FF"/>
-                  </a:solidFill>
-                </a:uFill>
-                <a:latin typeface="Calibri"/>
-                <a:cs typeface="Calibri"/>
-                <a:hlinkClick r:id="rId8"/>
-              </a:rPr>
-              <a:t>office.com</a:t>
-            </a:r>
-            <a:endParaRPr lang="pt-BR" sz="1800" dirty="0" smtClean="0">
-              <a:latin typeface="Calibri"/>
-              <a:cs typeface="Calibri"/>
-            </a:endParaRPr>
-          </a:p>
-          <a:p>
-            <a:pPr marL="755650" lvl="1" indent="-285750">
-              <a:buFont typeface="Wingdings"/>
-              <a:buChar char=""/>
-              <a:tabLst>
-                <a:tab pos="755650" algn="l"/>
-              </a:tabLst>
-            </a:pPr>
-            <a:r>
-              <a:rPr lang="pt-BR" sz="1800" dirty="0" smtClean="0">
-                <a:solidFill>
-                  <a:srgbClr val="7D7D7D"/>
-                </a:solidFill>
-                <a:latin typeface="Calibri"/>
-                <a:cs typeface="Calibri"/>
-              </a:rPr>
-              <a:t>Usuário:</a:t>
-            </a:r>
-            <a:r>
-              <a:rPr lang="pt-BR" sz="1800" spc="-20" dirty="0" smtClean="0">
-                <a:solidFill>
-                  <a:srgbClr val="7D7D7D"/>
-                </a:solidFill>
-                <a:latin typeface="Calibri"/>
-                <a:cs typeface="Calibri"/>
-              </a:rPr>
-              <a:t> </a:t>
-            </a:r>
-            <a:r>
-              <a:rPr lang="pt-BR" dirty="0" smtClean="0">
-                <a:solidFill>
-                  <a:srgbClr val="7D7D7D"/>
-                </a:solidFill>
-                <a:latin typeface="Calibri"/>
-                <a:cs typeface="Calibri"/>
-              </a:rPr>
-              <a:t>{{USUARIO}}</a:t>
-            </a:r>
-            <a:r>
-              <a:rPr lang="pt-BR" dirty="0" smtClean="0">
-                <a:solidFill>
-                  <a:srgbClr val="7D7D7D"/>
-                </a:solidFill>
-                <a:latin typeface="Calibri"/>
-                <a:cs typeface="Calibri"/>
-                <a:hlinkClick r:id="rId9"/>
-              </a:rPr>
-              <a:t>@itabom.com.br</a:t>
-            </a:r>
-            <a:r>
-              <a:rPr lang="pt-BR" dirty="0" smtClean="0">
-                <a:solidFill>
-                  <a:srgbClr val="7D7D7D"/>
-                </a:solidFill>
-                <a:latin typeface="Calibri"/>
-                <a:cs typeface="Calibri"/>
-              </a:rPr>
-              <a:t>	</a:t>
-            </a:r>
-            <a:endParaRPr lang="pt-BR" sz="1800" dirty="0" smtClean="0">
-              <a:latin typeface="Calibri"/>
-              <a:cs typeface="Calibri"/>
-            </a:endParaRPr>
-          </a:p>
-          <a:p>
-            <a:pPr marL="755650" lvl="1" indent="-285750">
-              <a:lnSpc>
-                <a:spcPct val="100000"/>
-              </a:lnSpc>
-              <a:buFont typeface="Wingdings"/>
-              <a:buChar char=""/>
-              <a:tabLst>
-                <a:tab pos="755650" algn="l"/>
-              </a:tabLst>
-            </a:pPr>
-            <a:r>
-              <a:rPr lang="pt-BR" sz="1800" dirty="0" smtClean="0">
-                <a:solidFill>
-                  <a:srgbClr val="7D7D7D"/>
-                </a:solidFill>
-                <a:latin typeface="Calibri"/>
-                <a:cs typeface="Calibri"/>
-              </a:rPr>
-              <a:t>Senha:</a:t>
-            </a:r>
-            <a:r>
-              <a:rPr lang="pt-BR" sz="1800" spc="-90" dirty="0" smtClean="0">
-                <a:solidFill>
-                  <a:srgbClr val="7D7D7D"/>
-                </a:solidFill>
-                <a:latin typeface="Calibri"/>
-                <a:cs typeface="Calibri"/>
-              </a:rPr>
-              <a:t> </a:t>
-            </a:r>
-            <a:r>
-              <a:rPr lang="pt-BR" dirty="0" smtClean="0">
-                <a:solidFill>
-                  <a:srgbClr val="7D7D7D"/>
-                </a:solidFill>
-                <a:latin typeface="Calibri"/>
-                <a:cs typeface="Calibri"/>
-              </a:rPr>
-              <a:t>{{SENHA}}</a:t>
-            </a:r>
-            <a:endParaRPr lang="pt-BR" sz="1800" dirty="0" smtClean="0">
-              <a:latin typeface="Calibri"/>
-              <a:cs typeface="Calibri"/>
-            </a:endParaRPr>
-          </a:p>
-          <a:p>
-            <a:pPr marL="755650" lvl="1" indent="-285750">
-              <a:lnSpc>
-                <a:spcPct val="100000"/>
-              </a:lnSpc>
-              <a:buFont typeface="Wingdings"/>
-              <a:buChar char=""/>
-              <a:tabLst>
-                <a:tab pos="755650" algn="l"/>
-              </a:tabLst>
-            </a:pPr>
-            <a:r>
-              <a:rPr lang="pt-BR" sz="1800" dirty="0" smtClean="0">
-                <a:solidFill>
-                  <a:srgbClr val="7D7D7D"/>
-                </a:solidFill>
-                <a:latin typeface="Calibri"/>
-                <a:cs typeface="Calibri"/>
-              </a:rPr>
-              <a:t>OBS.</a:t>
-            </a:r>
-            <a:r>
-              <a:rPr lang="pt-BR" sz="1800" spc="-80" dirty="0" smtClean="0">
-                <a:solidFill>
-                  <a:srgbClr val="7D7D7D"/>
-                </a:solidFill>
-                <a:latin typeface="Calibri"/>
-                <a:cs typeface="Calibri"/>
-              </a:rPr>
-              <a:t> </a:t>
-            </a:r>
-            <a:r>
-              <a:rPr lang="pt-BR" sz="1800" dirty="0" smtClean="0">
-                <a:solidFill>
-                  <a:srgbClr val="7D7D7D"/>
-                </a:solidFill>
-                <a:latin typeface="Calibri"/>
-                <a:cs typeface="Calibri"/>
-              </a:rPr>
-              <a:t>(Por</a:t>
-            </a:r>
-            <a:r>
-              <a:rPr lang="pt-BR" sz="1800" spc="-50" dirty="0" smtClean="0">
-                <a:solidFill>
-                  <a:srgbClr val="7D7D7D"/>
-                </a:solidFill>
-                <a:latin typeface="Calibri"/>
-                <a:cs typeface="Calibri"/>
-              </a:rPr>
-              <a:t> </a:t>
-            </a:r>
-            <a:r>
-              <a:rPr lang="pt-BR" sz="1800" spc="-10" dirty="0" smtClean="0">
-                <a:solidFill>
-                  <a:srgbClr val="7D7D7D"/>
-                </a:solidFill>
-                <a:latin typeface="Calibri"/>
-                <a:cs typeface="Calibri"/>
-              </a:rPr>
-              <a:t>questões</a:t>
-            </a:r>
-            <a:r>
-              <a:rPr lang="pt-BR" sz="1800" spc="-50" dirty="0" smtClean="0">
-                <a:solidFill>
-                  <a:srgbClr val="7D7D7D"/>
-                </a:solidFill>
-                <a:latin typeface="Calibri"/>
-                <a:cs typeface="Calibri"/>
-              </a:rPr>
-              <a:t> </a:t>
-            </a:r>
-            <a:r>
-              <a:rPr lang="pt-BR" sz="1800" dirty="0" smtClean="0">
-                <a:solidFill>
-                  <a:srgbClr val="7D7D7D"/>
-                </a:solidFill>
-                <a:latin typeface="Calibri"/>
-                <a:cs typeface="Calibri"/>
-              </a:rPr>
-              <a:t>de</a:t>
-            </a:r>
-            <a:r>
-              <a:rPr lang="pt-BR" sz="1800" spc="-45" dirty="0" smtClean="0">
-                <a:solidFill>
-                  <a:srgbClr val="7D7D7D"/>
-                </a:solidFill>
-                <a:latin typeface="Calibri"/>
-                <a:cs typeface="Calibri"/>
-              </a:rPr>
-              <a:t> </a:t>
-            </a:r>
-            <a:r>
-              <a:rPr lang="pt-BR" sz="1800" spc="-20" dirty="0" smtClean="0">
-                <a:solidFill>
-                  <a:srgbClr val="7D7D7D"/>
-                </a:solidFill>
-                <a:latin typeface="Calibri"/>
-                <a:cs typeface="Calibri"/>
-              </a:rPr>
-              <a:t>segurança,</a:t>
-            </a:r>
-            <a:r>
-              <a:rPr lang="pt-BR" sz="1800" spc="-35" dirty="0" smtClean="0">
-                <a:solidFill>
-                  <a:srgbClr val="7D7D7D"/>
-                </a:solidFill>
-                <a:latin typeface="Calibri"/>
-                <a:cs typeface="Calibri"/>
-              </a:rPr>
-              <a:t> </a:t>
-            </a:r>
-            <a:r>
-              <a:rPr lang="pt-BR" sz="1800" spc="-10" dirty="0" smtClean="0">
-                <a:solidFill>
-                  <a:srgbClr val="7D7D7D"/>
-                </a:solidFill>
-                <a:latin typeface="Calibri"/>
-                <a:cs typeface="Calibri"/>
-              </a:rPr>
-              <a:t>favor</a:t>
-            </a:r>
-            <a:r>
-              <a:rPr lang="pt-BR" sz="1800" spc="-85" dirty="0" smtClean="0">
-                <a:solidFill>
-                  <a:srgbClr val="7D7D7D"/>
-                </a:solidFill>
-                <a:latin typeface="Calibri"/>
-                <a:cs typeface="Calibri"/>
-              </a:rPr>
-              <a:t> </a:t>
-            </a:r>
-            <a:r>
-              <a:rPr lang="pt-BR" sz="1800" dirty="0" smtClean="0">
-                <a:solidFill>
-                  <a:srgbClr val="7D7D7D"/>
-                </a:solidFill>
-                <a:latin typeface="Calibri"/>
-                <a:cs typeface="Calibri"/>
-              </a:rPr>
-              <a:t>trocar</a:t>
-            </a:r>
-            <a:r>
-              <a:rPr lang="pt-BR" sz="1800" spc="-55" dirty="0" smtClean="0">
-                <a:solidFill>
-                  <a:srgbClr val="7D7D7D"/>
-                </a:solidFill>
-                <a:latin typeface="Calibri"/>
-                <a:cs typeface="Calibri"/>
-              </a:rPr>
-              <a:t> </a:t>
-            </a:r>
-            <a:r>
-              <a:rPr lang="pt-BR" sz="1800" dirty="0" smtClean="0">
-                <a:solidFill>
-                  <a:srgbClr val="7D7D7D"/>
-                </a:solidFill>
-                <a:latin typeface="Calibri"/>
-                <a:cs typeface="Calibri"/>
-              </a:rPr>
-              <a:t>a</a:t>
-            </a:r>
-            <a:r>
-              <a:rPr lang="pt-BR" sz="1800" spc="-45" dirty="0" smtClean="0">
-                <a:solidFill>
-                  <a:srgbClr val="7D7D7D"/>
-                </a:solidFill>
-                <a:latin typeface="Calibri"/>
-                <a:cs typeface="Calibri"/>
-              </a:rPr>
-              <a:t> </a:t>
-            </a:r>
-            <a:r>
-              <a:rPr lang="pt-BR" sz="1800" dirty="0" smtClean="0">
-                <a:solidFill>
-                  <a:srgbClr val="7D7D7D"/>
-                </a:solidFill>
-                <a:latin typeface="Calibri"/>
-                <a:cs typeface="Calibri"/>
-              </a:rPr>
-              <a:t>senha</a:t>
-            </a:r>
-            <a:r>
-              <a:rPr lang="pt-BR" sz="1800" spc="-65" dirty="0" smtClean="0">
-                <a:solidFill>
-                  <a:srgbClr val="7D7D7D"/>
-                </a:solidFill>
-                <a:latin typeface="Calibri"/>
-                <a:cs typeface="Calibri"/>
-              </a:rPr>
-              <a:t> </a:t>
-            </a:r>
-            <a:r>
-              <a:rPr lang="pt-BR" sz="1800" dirty="0" smtClean="0">
-                <a:solidFill>
-                  <a:srgbClr val="7D7D7D"/>
-                </a:solidFill>
-                <a:latin typeface="Calibri"/>
-                <a:cs typeface="Calibri"/>
-              </a:rPr>
-              <a:t>logo</a:t>
-            </a:r>
-            <a:r>
-              <a:rPr lang="pt-BR" sz="1800" spc="-45" dirty="0" smtClean="0">
-                <a:solidFill>
-                  <a:srgbClr val="7D7D7D"/>
-                </a:solidFill>
-                <a:latin typeface="Calibri"/>
-                <a:cs typeface="Calibri"/>
-              </a:rPr>
-              <a:t> </a:t>
-            </a:r>
-            <a:r>
-              <a:rPr lang="pt-BR" sz="1800" dirty="0" smtClean="0">
-                <a:solidFill>
-                  <a:srgbClr val="7D7D7D"/>
-                </a:solidFill>
-                <a:latin typeface="Calibri"/>
-                <a:cs typeface="Calibri"/>
-              </a:rPr>
-              <a:t>após</a:t>
-            </a:r>
-            <a:r>
-              <a:rPr lang="pt-BR" sz="1800" spc="-55" dirty="0" smtClean="0">
-                <a:solidFill>
-                  <a:srgbClr val="7D7D7D"/>
-                </a:solidFill>
-                <a:latin typeface="Calibri"/>
-                <a:cs typeface="Calibri"/>
-              </a:rPr>
-              <a:t> </a:t>
-            </a:r>
-            <a:r>
-              <a:rPr lang="pt-BR" sz="1800" dirty="0" smtClean="0">
-                <a:solidFill>
-                  <a:srgbClr val="7D7D7D"/>
-                </a:solidFill>
-                <a:latin typeface="Calibri"/>
-                <a:cs typeface="Calibri"/>
-              </a:rPr>
-              <a:t>o</a:t>
-            </a:r>
-            <a:r>
-              <a:rPr lang="pt-BR" sz="1800" spc="-45" dirty="0" smtClean="0">
-                <a:solidFill>
-                  <a:srgbClr val="7D7D7D"/>
-                </a:solidFill>
-                <a:latin typeface="Calibri"/>
-                <a:cs typeface="Calibri"/>
-              </a:rPr>
-              <a:t> </a:t>
-            </a:r>
-            <a:r>
-              <a:rPr lang="pt-BR" sz="1800" spc="-10" dirty="0" smtClean="0">
-                <a:solidFill>
-                  <a:srgbClr val="7D7D7D"/>
-                </a:solidFill>
-                <a:latin typeface="Calibri"/>
-                <a:cs typeface="Calibri"/>
-              </a:rPr>
-              <a:t>primeiro</a:t>
-            </a:r>
-            <a:r>
-              <a:rPr lang="pt-BR" sz="1800" spc="-40" dirty="0" smtClean="0">
-                <a:solidFill>
-                  <a:srgbClr val="7D7D7D"/>
-                </a:solidFill>
-                <a:latin typeface="Calibri"/>
-                <a:cs typeface="Calibri"/>
-              </a:rPr>
-              <a:t> </a:t>
-            </a:r>
-            <a:r>
-              <a:rPr lang="pt-BR" sz="1800" spc="-10" dirty="0" err="1" smtClean="0">
-                <a:solidFill>
-                  <a:srgbClr val="7D7D7D"/>
-                </a:solidFill>
-                <a:latin typeface="Calibri"/>
-                <a:cs typeface="Calibri"/>
-              </a:rPr>
-              <a:t>login</a:t>
-            </a:r>
-            <a:r>
-              <a:rPr lang="pt-BR" sz="1800" spc="-10" dirty="0" smtClean="0">
-                <a:solidFill>
-                  <a:srgbClr val="7D7D7D"/>
-                </a:solidFill>
-                <a:latin typeface="Calibri"/>
-                <a:cs typeface="Calibri"/>
-              </a:rPr>
-              <a:t>)</a:t>
-            </a:r>
-            <a:endParaRPr lang="pt-BR" sz="1800" dirty="0">
-              <a:latin typeface="Calibri"/>
-              <a:cs typeface="Calibri"/>
-            </a:endParaRPr>
+              <a:rPr spc="-20"/>
+              <a:t>Informações</a:t>
+            </a:r>
+            <a:r>
+              <a:rPr spc="-105"/>
+              <a:t> </a:t>
+            </a:r>
+            <a:r>
+              <a:t>sobre</a:t>
+            </a:r>
+            <a:r>
+              <a:rPr spc="-80"/>
+              <a:t> </a:t>
+            </a:r>
+            <a:r>
+              <a:t>seus</a:t>
+            </a:r>
+            <a:r>
+              <a:rPr spc="-60"/>
+              <a:t> </a:t>
+            </a:r>
+            <a:r>
+              <a:rPr spc="-10"/>
+              <a:t>acessos</a:t>
+            </a:r>
           </a:p>
         </p:txBody>
       </p:sp>
@@ -17290,7 +17259,7 @@
         <p:cNvPr id="1" name="">
           <a:extLst>
             <a:ext uri="{FF2B5EF4-FFF2-40B4-BE49-F238E27FC236}">
-              <a16:creationId xmlns:a16="http://schemas.microsoft.com/office/drawing/2014/main" xmlns="" id="{09A899BB-8BBE-A98C-DAB8-F97D2A4A5341}"/>
+              <a16:creationId xmlns:a16="http://schemas.microsoft.com/office/drawing/2014/main" id="{09A899BB-8BBE-A98C-DAB8-F97D2A4A5341}"/>
             </a:ext>
           </a:extLst>
         </p:cNvPr>
@@ -17310,7 +17279,7 @@
           <p:cNvPr id="2" name="object 2">
             <a:extLst>
               <a:ext uri="{FF2B5EF4-FFF2-40B4-BE49-F238E27FC236}">
-                <a16:creationId xmlns:a16="http://schemas.microsoft.com/office/drawing/2014/main" xmlns="" id="{311FD2AC-8D63-29A6-7E58-99D8CBDB47AC}"/>
+                <a16:creationId xmlns:a16="http://schemas.microsoft.com/office/drawing/2014/main" id="{311FD2AC-8D63-29A6-7E58-99D8CBDB47AC}"/>
               </a:ext>
             </a:extLst>
           </p:cNvPr>
@@ -17374,7 +17343,7 @@
           <p:cNvPr id="3" name="object 3">
             <a:extLst>
               <a:ext uri="{FF2B5EF4-FFF2-40B4-BE49-F238E27FC236}">
-                <a16:creationId xmlns:a16="http://schemas.microsoft.com/office/drawing/2014/main" xmlns="" id="{EC7811BE-1386-C843-04B0-AF70E3296332}"/>
+                <a16:creationId xmlns:a16="http://schemas.microsoft.com/office/drawing/2014/main" id="{EC7811BE-1386-C843-04B0-AF70E3296332}"/>
               </a:ext>
             </a:extLst>
           </p:cNvPr>
@@ -17397,12 +17366,42 @@
           </a:prstGeom>
         </p:spPr>
       </p:pic>
+      <p:pic>
+        <p:nvPicPr>
+          <p:cNvPr id="15" name="img_sag">
+            <a:extLst>
+              <a:ext uri="{FF2B5EF4-FFF2-40B4-BE49-F238E27FC236}">
+                <a16:creationId xmlns:a16="http://schemas.microsoft.com/office/drawing/2014/main" id="{D872C0D9-2195-9457-8EFC-97E41061FD13}"/>
+              </a:ext>
+            </a:extLst>
+          </p:cNvPr>
+          <p:cNvPicPr>
+            <a:picLocks noChangeAspect="1"/>
+          </p:cNvPicPr>
+          <p:nvPr/>
+        </p:nvPicPr>
+        <p:blipFill>
+          <a:blip r:embed="rId3"/>
+          <a:stretch>
+            <a:fillRect/>
+          </a:stretch>
+        </p:blipFill>
+        <p:spPr>
+          <a:xfrm>
+            <a:off x="9940482" y="5013429"/>
+            <a:ext cx="679896" cy="945942"/>
+          </a:xfrm>
+          <a:prstGeom prst="rect">
+            <a:avLst/>
+          </a:prstGeom>
+        </p:spPr>
+      </p:pic>
       <p:sp>
         <p:nvSpPr>
-          <p:cNvPr id="5" name="object 5">
+          <p:cNvPr id="5" name="ct_sag">
             <a:extLst>
               <a:ext uri="{FF2B5EF4-FFF2-40B4-BE49-F238E27FC236}">
-                <a16:creationId xmlns:a16="http://schemas.microsoft.com/office/drawing/2014/main" xmlns="" id="{F55478FB-EFF5-A6D1-4124-AAA00F367DF5}"/>
+                <a16:creationId xmlns:a16="http://schemas.microsoft.com/office/drawing/2014/main" id="{F55478FB-EFF5-A6D1-4124-AAA00F367DF5}"/>
               </a:ext>
             </a:extLst>
           </p:cNvPr>
@@ -17438,7 +17437,7 @@
               </a:tabLst>
             </a:pPr>
             <a:r>
-              <a:rPr lang="pt-BR" sz="1800" dirty="0" err="1" smtClean="0">
+              <a:rPr lang="pt-BR" sz="1800" dirty="0" err="1">
                 <a:solidFill>
                   <a:srgbClr val="7D7D7D"/>
                 </a:solidFill>
@@ -17448,7 +17447,7 @@
               <a:t>Login</a:t>
             </a:r>
             <a:r>
-              <a:rPr lang="pt-BR" sz="1800" spc="-40" dirty="0" smtClean="0">
+              <a:rPr lang="pt-BR" sz="1800" spc="-40" dirty="0">
                 <a:solidFill>
                   <a:srgbClr val="7D7D7D"/>
                 </a:solidFill>
@@ -17491,25 +17490,8 @@
                 <a:latin typeface="Calibri"/>
                 <a:cs typeface="Calibri"/>
               </a:rPr>
-              <a:t>Usuário: </a:t>
-            </a:r>
-            <a:r>
-              <a:rPr lang="pt-BR" dirty="0" smtClean="0">
-                <a:solidFill>
-                  <a:srgbClr val="7D7D7D"/>
-                </a:solidFill>
-                <a:latin typeface="Calibri"/>
-                <a:cs typeface="Calibri"/>
-              </a:rPr>
-              <a:t>{{USUARIO}}</a:t>
-            </a:r>
-            <a:endParaRPr lang="pt-BR" dirty="0">
-              <a:solidFill>
-                <a:srgbClr val="7D7D7D"/>
-              </a:solidFill>
-              <a:latin typeface="Calibri"/>
-              <a:cs typeface="Calibri"/>
-            </a:endParaRPr>
+              <a:t>Usuário: {{USUARIO_SAG}}</a:t>
+            </a:r>
           </a:p>
           <a:p>
             <a:pPr marL="755650" lvl="1" indent="-285750">
@@ -17533,7 +17515,7 @@
               <a:t>Senha: </a:t>
             </a:r>
             <a:r>
-              <a:rPr lang="pt-BR" dirty="0" smtClean="0">
+              <a:rPr lang="pt-BR" dirty="0">
                 <a:solidFill>
                   <a:srgbClr val="7D7D7D"/>
                 </a:solidFill>
@@ -17819,16 +17801,6 @@
               <a:t> </a:t>
             </a:r>
             <a:r>
-              <a:rPr lang="pt-BR" sz="1800" spc="-10" dirty="0" err="1">
-                <a:solidFill>
-                  <a:srgbClr val="7D7D7D"/>
-                </a:solidFill>
-                <a:latin typeface="Calibri"/>
-                <a:cs typeface="Calibri"/>
-              </a:rPr>
-              <a:t>login</a:t>
-            </a:r>
-            <a:r>
               <a:rPr lang="pt-BR" sz="1800" spc="-10" dirty="0">
                 <a:solidFill>
                   <a:srgbClr val="7D7D7D"/>
@@ -17836,7 +17808,7 @@
                 <a:latin typeface="Calibri"/>
                 <a:cs typeface="Calibri"/>
               </a:rPr>
-              <a:t>)</a:t>
+              <a:t>login)</a:t>
             </a:r>
             <a:endParaRPr lang="pt-BR" sz="1800" dirty="0">
               <a:latin typeface="Calibri"/>
@@ -17866,10 +17838,10 @@
       </p:sp>
       <p:pic>
         <p:nvPicPr>
-          <p:cNvPr id="9" name="Imagem 8">
+          <p:cNvPr id="9" name="img_edata3">
             <a:extLst>
               <a:ext uri="{FF2B5EF4-FFF2-40B4-BE49-F238E27FC236}">
-                <a16:creationId xmlns:a16="http://schemas.microsoft.com/office/drawing/2014/main" xmlns="" id="{CA85C695-0F15-60E7-8CDA-B9FB860FB629}"/>
+                <a16:creationId xmlns:a16="http://schemas.microsoft.com/office/drawing/2014/main" id="{CA85C695-0F15-60E7-8CDA-B9FB860FB629}"/>
               </a:ext>
             </a:extLst>
           </p:cNvPr>
@@ -17879,7 +17851,7 @@
           <p:nvPr/>
         </p:nvPicPr>
         <p:blipFill>
-          <a:blip r:embed="rId3"/>
+          <a:blip r:embed="rId4"/>
           <a:stretch>
             <a:fillRect/>
           </a:stretch>
@@ -17896,10 +17868,10 @@
       </p:pic>
       <p:pic>
         <p:nvPicPr>
-          <p:cNvPr id="11" name="Imagem 10">
+          <p:cNvPr id="11" name="img_edata2">
             <a:extLst>
               <a:ext uri="{FF2B5EF4-FFF2-40B4-BE49-F238E27FC236}">
-                <a16:creationId xmlns:a16="http://schemas.microsoft.com/office/drawing/2014/main" xmlns="" id="{108A01B1-3407-DEA4-4DB3-24039A979DE9}"/>
+                <a16:creationId xmlns:a16="http://schemas.microsoft.com/office/drawing/2014/main" id="{108A01B1-3407-DEA4-4DB3-24039A979DE9}"/>
               </a:ext>
             </a:extLst>
           </p:cNvPr>
@@ -17909,7 +17881,7 @@
           <p:nvPr/>
         </p:nvPicPr>
         <p:blipFill>
-          <a:blip r:embed="rId4"/>
+          <a:blip r:embed="rId5"/>
           <a:stretch>
             <a:fillRect/>
           </a:stretch>
@@ -17926,40 +17898,10 @@
       </p:pic>
       <p:pic>
         <p:nvPicPr>
-          <p:cNvPr id="13" name="Imagem 12">
+          <p:cNvPr id="13" name="img_edata1">
             <a:extLst>
               <a:ext uri="{FF2B5EF4-FFF2-40B4-BE49-F238E27FC236}">
-                <a16:creationId xmlns:a16="http://schemas.microsoft.com/office/drawing/2014/main" xmlns="" id="{F70734AE-A964-9398-BFD3-56703C113760}"/>
-              </a:ext>
-            </a:extLst>
-          </p:cNvPr>
-          <p:cNvPicPr>
-            <a:picLocks noChangeAspect="1"/>
-          </p:cNvPicPr>
-          <p:nvPr/>
-        </p:nvPicPr>
-        <p:blipFill>
-          <a:blip r:embed="rId5"/>
-          <a:stretch>
-            <a:fillRect/>
-          </a:stretch>
-        </p:blipFill>
-        <p:spPr>
-          <a:xfrm>
-            <a:off x="10045653" y="3912910"/>
-            <a:ext cx="821837" cy="769657"/>
-          </a:xfrm>
-          <a:prstGeom prst="rect">
-            <a:avLst/>
-          </a:prstGeom>
-        </p:spPr>
-      </p:pic>
-      <p:pic>
-        <p:nvPicPr>
-          <p:cNvPr id="15" name="Imagem 14">
-            <a:extLst>
-              <a:ext uri="{FF2B5EF4-FFF2-40B4-BE49-F238E27FC236}">
-                <a16:creationId xmlns:a16="http://schemas.microsoft.com/office/drawing/2014/main" xmlns="" id="{D872C0D9-2195-9457-8EFC-97E41061FD13}"/>
+                <a16:creationId xmlns:a16="http://schemas.microsoft.com/office/drawing/2014/main" id="{F70734AE-A964-9398-BFD3-56703C113760}"/>
               </a:ext>
             </a:extLst>
           </p:cNvPr>
@@ -17976,98 +17918,8 @@
         </p:blipFill>
         <p:spPr>
           <a:xfrm>
-            <a:off x="9940482" y="5013429"/>
-            <a:ext cx="679896" cy="945942"/>
-          </a:xfrm>
-          <a:prstGeom prst="rect">
-            <a:avLst/>
-          </a:prstGeom>
-        </p:spPr>
-      </p:pic>
-      <p:pic>
-        <p:nvPicPr>
-          <p:cNvPr id="10" name="Imagem 9">
-            <a:extLst>
-              <a:ext uri="{FF2B5EF4-FFF2-40B4-BE49-F238E27FC236}">
-                <a16:creationId xmlns:a16="http://schemas.microsoft.com/office/drawing/2014/main" xmlns="" id="{F05613AC-5FCE-4ECE-1D9C-BAD72D9B66AB}"/>
-              </a:ext>
-            </a:extLst>
-          </p:cNvPr>
-          <p:cNvPicPr>
-            <a:picLocks noChangeAspect="1"/>
-          </p:cNvPicPr>
-          <p:nvPr/>
-        </p:nvPicPr>
-        <p:blipFill>
-          <a:blip r:embed="rId7"/>
-          <a:stretch>
-            <a:fillRect/>
-          </a:stretch>
-        </p:blipFill>
-        <p:spPr>
-          <a:xfrm>
-            <a:off x="10550541" y="1240449"/>
-            <a:ext cx="752475" cy="714375"/>
-          </a:xfrm>
-          <a:prstGeom prst="rect">
-            <a:avLst/>
-          </a:prstGeom>
-        </p:spPr>
-      </p:pic>
-      <p:pic>
-        <p:nvPicPr>
-          <p:cNvPr id="14" name="Imagem 13">
-            <a:extLst>
-              <a:ext uri="{FF2B5EF4-FFF2-40B4-BE49-F238E27FC236}">
-                <a16:creationId xmlns:a16="http://schemas.microsoft.com/office/drawing/2014/main" xmlns="" id="{3FF66795-E667-C6B7-993F-01E55135EFBD}"/>
-              </a:ext>
-            </a:extLst>
-          </p:cNvPr>
-          <p:cNvPicPr>
-            <a:picLocks noChangeAspect="1"/>
-          </p:cNvPicPr>
-          <p:nvPr/>
-        </p:nvPicPr>
-        <p:blipFill>
-          <a:blip r:embed="rId8"/>
-          <a:stretch>
-            <a:fillRect/>
-          </a:stretch>
-        </p:blipFill>
-        <p:spPr>
-          <a:xfrm>
-            <a:off x="9972893" y="2025888"/>
-            <a:ext cx="771525" cy="742950"/>
-          </a:xfrm>
-          <a:prstGeom prst="rect">
-            <a:avLst/>
-          </a:prstGeom>
-        </p:spPr>
-      </p:pic>
-      <p:pic>
-        <p:nvPicPr>
-          <p:cNvPr id="17" name="Imagem 16">
-            <a:extLst>
-              <a:ext uri="{FF2B5EF4-FFF2-40B4-BE49-F238E27FC236}">
-                <a16:creationId xmlns:a16="http://schemas.microsoft.com/office/drawing/2014/main" xmlns="" id="{E01B398B-14D1-FDF2-3357-06B46C3FF2F6}"/>
-              </a:ext>
-            </a:extLst>
-          </p:cNvPr>
-          <p:cNvPicPr>
-            <a:picLocks noChangeAspect="1"/>
-          </p:cNvPicPr>
-          <p:nvPr/>
-        </p:nvPicPr>
-        <p:blipFill>
-          <a:blip r:embed="rId9"/>
-          <a:stretch>
-            <a:fillRect/>
-          </a:stretch>
-        </p:blipFill>
-        <p:spPr>
-          <a:xfrm>
-            <a:off x="9412930" y="1202349"/>
-            <a:ext cx="714375" cy="752475"/>
+            <a:off x="10045653" y="3912910"/>
+            <a:ext cx="821837" cy="769657"/>
           </a:xfrm>
           <a:prstGeom prst="rect">
             <a:avLst/>
@@ -18076,450 +17928,7 @@
       </p:pic>
       <p:sp>
         <p:nvSpPr>
-          <p:cNvPr id="18" name="CaixaDeTexto 17"/>
-          <p:cNvSpPr txBox="1"/>
-          <p:nvPr/>
-        </p:nvSpPr>
-        <p:spPr>
-          <a:xfrm>
-            <a:off x="704671" y="1597636"/>
-            <a:ext cx="8408019" cy="1200329"/>
-          </a:xfrm>
-          <a:prstGeom prst="rect">
-            <a:avLst/>
-          </a:prstGeom>
-          <a:noFill/>
-        </p:spPr>
-        <p:txBody>
-          <a:bodyPr wrap="square" rtlCol="0">
-            <a:spAutoFit/>
-          </a:bodyPr>
-          <a:lstStyle/>
-          <a:p>
-            <a:pPr marL="299085" indent="-286385">
-              <a:spcBef>
-                <a:spcPts val="100"/>
-              </a:spcBef>
-              <a:buFont typeface="Wingdings"/>
-              <a:buChar char=""/>
-              <a:tabLst>
-                <a:tab pos="299085" algn="l"/>
-              </a:tabLst>
-            </a:pPr>
-            <a:r>
-              <a:rPr lang="pt-BR" sz="1800" dirty="0" err="1" smtClean="0">
-                <a:solidFill>
-                  <a:srgbClr val="7D7D7D"/>
-                </a:solidFill>
-                <a:latin typeface="Calibri"/>
-                <a:cs typeface="Calibri"/>
-              </a:rPr>
-              <a:t>Login</a:t>
-            </a:r>
-            <a:r>
-              <a:rPr lang="pt-BR" sz="1800" spc="-40" dirty="0" smtClean="0">
-                <a:solidFill>
-                  <a:srgbClr val="7D7D7D"/>
-                </a:solidFill>
-                <a:latin typeface="Calibri"/>
-                <a:cs typeface="Calibri"/>
-              </a:rPr>
-              <a:t> </a:t>
-            </a:r>
-            <a:r>
-              <a:rPr lang="pt-BR" sz="1800" dirty="0" smtClean="0">
-                <a:solidFill>
-                  <a:srgbClr val="7D7D7D"/>
-                </a:solidFill>
-                <a:latin typeface="Calibri"/>
-                <a:cs typeface="Calibri"/>
-              </a:rPr>
-              <a:t>de</a:t>
-            </a:r>
-            <a:r>
-              <a:rPr lang="pt-BR" sz="1800" spc="-45" dirty="0" smtClean="0">
-                <a:solidFill>
-                  <a:srgbClr val="7D7D7D"/>
-                </a:solidFill>
-                <a:latin typeface="Calibri"/>
-                <a:cs typeface="Calibri"/>
-              </a:rPr>
-              <a:t> </a:t>
-            </a:r>
-            <a:r>
-              <a:rPr lang="pt-BR" sz="1800" dirty="0" smtClean="0">
-                <a:solidFill>
-                  <a:srgbClr val="7D7D7D"/>
-                </a:solidFill>
-                <a:latin typeface="Calibri"/>
-                <a:cs typeface="Calibri"/>
-              </a:rPr>
-              <a:t>Protheus</a:t>
-            </a:r>
-            <a:endParaRPr lang="pt-BR" sz="1800" dirty="0" smtClean="0">
-              <a:latin typeface="Calibri"/>
-              <a:cs typeface="Calibri"/>
-            </a:endParaRPr>
-          </a:p>
-          <a:p>
-            <a:pPr marL="755650" lvl="1" indent="-285750">
-              <a:spcBef>
-                <a:spcPts val="5"/>
-              </a:spcBef>
-              <a:buFont typeface="Wingdings"/>
-              <a:buChar char=""/>
-              <a:tabLst>
-                <a:tab pos="755650" algn="l"/>
-              </a:tabLst>
-            </a:pPr>
-            <a:r>
-              <a:rPr lang="pt-BR" dirty="0" smtClean="0">
-                <a:solidFill>
-                  <a:srgbClr val="7D7D7D"/>
-                </a:solidFill>
-                <a:latin typeface="Calibri"/>
-                <a:cs typeface="Calibri"/>
-              </a:rPr>
-              <a:t>Usuário: {{USUARIO}}</a:t>
-            </a:r>
-          </a:p>
-          <a:p>
-            <a:pPr marL="755650" lvl="1" indent="-285750">
-              <a:lnSpc>
-                <a:spcPct val="100000"/>
-              </a:lnSpc>
-              <a:buFont typeface="Wingdings"/>
-              <a:buChar char=""/>
-              <a:tabLst>
-                <a:tab pos="755650" algn="l"/>
-              </a:tabLst>
-            </a:pPr>
-            <a:r>
-              <a:rPr lang="pt-BR" sz="1800" dirty="0" smtClean="0">
-                <a:solidFill>
-                  <a:srgbClr val="7D7D7D"/>
-                </a:solidFill>
-                <a:latin typeface="Calibri"/>
-                <a:cs typeface="Calibri"/>
-              </a:rPr>
-              <a:t>Senha:</a:t>
-            </a:r>
-            <a:r>
-              <a:rPr lang="pt-BR" dirty="0" smtClean="0">
-                <a:solidFill>
-                  <a:srgbClr val="7D7D7D"/>
-                </a:solidFill>
-                <a:latin typeface="Calibri"/>
-                <a:cs typeface="Calibri"/>
-              </a:rPr>
-              <a:t> {{SENHA}}</a:t>
-            </a:r>
-            <a:endParaRPr lang="pt-BR" sz="1800" dirty="0" smtClean="0">
-              <a:latin typeface="Calibri"/>
-              <a:cs typeface="Calibri"/>
-            </a:endParaRPr>
-          </a:p>
-          <a:p>
-            <a:pPr marL="755650" lvl="1" indent="-285750">
-              <a:lnSpc>
-                <a:spcPct val="100000"/>
-              </a:lnSpc>
-              <a:buFont typeface="Wingdings"/>
-              <a:buChar char=""/>
-              <a:tabLst>
-                <a:tab pos="755650" algn="l"/>
-              </a:tabLst>
-            </a:pPr>
-            <a:r>
-              <a:rPr lang="pt-BR" sz="1800" dirty="0" smtClean="0">
-                <a:solidFill>
-                  <a:srgbClr val="7D7D7D"/>
-                </a:solidFill>
-                <a:latin typeface="Calibri"/>
-                <a:cs typeface="Calibri"/>
-              </a:rPr>
-              <a:t>OBS.</a:t>
-            </a:r>
-            <a:r>
-              <a:rPr lang="pt-BR" sz="1800" spc="-80" dirty="0" smtClean="0">
-                <a:solidFill>
-                  <a:srgbClr val="7D7D7D"/>
-                </a:solidFill>
-                <a:latin typeface="Calibri"/>
-                <a:cs typeface="Calibri"/>
-              </a:rPr>
-              <a:t> </a:t>
-            </a:r>
-            <a:r>
-              <a:rPr lang="pt-BR" sz="1800" dirty="0" smtClean="0">
-                <a:solidFill>
-                  <a:srgbClr val="7D7D7D"/>
-                </a:solidFill>
-                <a:latin typeface="Calibri"/>
-                <a:cs typeface="Calibri"/>
-              </a:rPr>
-              <a:t>(Por</a:t>
-            </a:r>
-            <a:r>
-              <a:rPr lang="pt-BR" sz="1800" spc="-50" dirty="0" smtClean="0">
-                <a:solidFill>
-                  <a:srgbClr val="7D7D7D"/>
-                </a:solidFill>
-                <a:latin typeface="Calibri"/>
-                <a:cs typeface="Calibri"/>
-              </a:rPr>
-              <a:t> </a:t>
-            </a:r>
-            <a:r>
-              <a:rPr lang="pt-BR" sz="1800" spc="-10" dirty="0" smtClean="0">
-                <a:solidFill>
-                  <a:srgbClr val="7D7D7D"/>
-                </a:solidFill>
-                <a:latin typeface="Calibri"/>
-                <a:cs typeface="Calibri"/>
-              </a:rPr>
-              <a:t>questões</a:t>
-            </a:r>
-            <a:r>
-              <a:rPr lang="pt-BR" sz="1800" spc="-50" dirty="0" smtClean="0">
-                <a:solidFill>
-                  <a:srgbClr val="7D7D7D"/>
-                </a:solidFill>
-                <a:latin typeface="Calibri"/>
-                <a:cs typeface="Calibri"/>
-              </a:rPr>
-              <a:t> </a:t>
-            </a:r>
-            <a:r>
-              <a:rPr lang="pt-BR" sz="1800" dirty="0" smtClean="0">
-                <a:solidFill>
-                  <a:srgbClr val="7D7D7D"/>
-                </a:solidFill>
-                <a:latin typeface="Calibri"/>
-                <a:cs typeface="Calibri"/>
-              </a:rPr>
-              <a:t>de</a:t>
-            </a:r>
-            <a:r>
-              <a:rPr lang="pt-BR" sz="1800" spc="-45" dirty="0" smtClean="0">
-                <a:solidFill>
-                  <a:srgbClr val="7D7D7D"/>
-                </a:solidFill>
-                <a:latin typeface="Calibri"/>
-                <a:cs typeface="Calibri"/>
-              </a:rPr>
-              <a:t> </a:t>
-            </a:r>
-            <a:r>
-              <a:rPr lang="pt-BR" sz="1800" spc="-20" dirty="0" smtClean="0">
-                <a:solidFill>
-                  <a:srgbClr val="7D7D7D"/>
-                </a:solidFill>
-                <a:latin typeface="Calibri"/>
-                <a:cs typeface="Calibri"/>
-              </a:rPr>
-              <a:t>segurança,</a:t>
-            </a:r>
-            <a:r>
-              <a:rPr lang="pt-BR" sz="1800" spc="-35" dirty="0" smtClean="0">
-                <a:solidFill>
-                  <a:srgbClr val="7D7D7D"/>
-                </a:solidFill>
-                <a:latin typeface="Calibri"/>
-                <a:cs typeface="Calibri"/>
-              </a:rPr>
-              <a:t> </a:t>
-            </a:r>
-            <a:r>
-              <a:rPr lang="pt-BR" sz="1800" spc="-10" dirty="0" smtClean="0">
-                <a:solidFill>
-                  <a:srgbClr val="7D7D7D"/>
-                </a:solidFill>
-                <a:latin typeface="Calibri"/>
-                <a:cs typeface="Calibri"/>
-              </a:rPr>
-              <a:t>favor</a:t>
-            </a:r>
-            <a:r>
-              <a:rPr lang="pt-BR" sz="1800" spc="-85" dirty="0" smtClean="0">
-                <a:solidFill>
-                  <a:srgbClr val="7D7D7D"/>
-                </a:solidFill>
-                <a:latin typeface="Calibri"/>
-                <a:cs typeface="Calibri"/>
-              </a:rPr>
-              <a:t> </a:t>
-            </a:r>
-            <a:r>
-              <a:rPr lang="pt-BR" sz="1800" dirty="0" smtClean="0">
-                <a:solidFill>
-                  <a:srgbClr val="7D7D7D"/>
-                </a:solidFill>
-                <a:latin typeface="Calibri"/>
-                <a:cs typeface="Calibri"/>
-              </a:rPr>
-              <a:t>trocar</a:t>
-            </a:r>
-            <a:r>
-              <a:rPr lang="pt-BR" sz="1800" spc="-55" dirty="0" smtClean="0">
-                <a:solidFill>
-                  <a:srgbClr val="7D7D7D"/>
-                </a:solidFill>
-                <a:latin typeface="Calibri"/>
-                <a:cs typeface="Calibri"/>
-              </a:rPr>
-              <a:t> </a:t>
-            </a:r>
-            <a:r>
-              <a:rPr lang="pt-BR" sz="1800" dirty="0" smtClean="0">
-                <a:solidFill>
-                  <a:srgbClr val="7D7D7D"/>
-                </a:solidFill>
-                <a:latin typeface="Calibri"/>
-                <a:cs typeface="Calibri"/>
-              </a:rPr>
-              <a:t>a</a:t>
-            </a:r>
-            <a:r>
-              <a:rPr lang="pt-BR" sz="1800" spc="-45" dirty="0" smtClean="0">
-                <a:solidFill>
-                  <a:srgbClr val="7D7D7D"/>
-                </a:solidFill>
-                <a:latin typeface="Calibri"/>
-                <a:cs typeface="Calibri"/>
-              </a:rPr>
-              <a:t> </a:t>
-            </a:r>
-            <a:r>
-              <a:rPr lang="pt-BR" sz="1800" dirty="0" smtClean="0">
-                <a:solidFill>
-                  <a:srgbClr val="7D7D7D"/>
-                </a:solidFill>
-                <a:latin typeface="Calibri"/>
-                <a:cs typeface="Calibri"/>
-              </a:rPr>
-              <a:t>senha</a:t>
-            </a:r>
-            <a:r>
-              <a:rPr lang="pt-BR" sz="1800" spc="-65" dirty="0" smtClean="0">
-                <a:solidFill>
-                  <a:srgbClr val="7D7D7D"/>
-                </a:solidFill>
-                <a:latin typeface="Calibri"/>
-                <a:cs typeface="Calibri"/>
-              </a:rPr>
-              <a:t> </a:t>
-            </a:r>
-            <a:r>
-              <a:rPr lang="pt-BR" sz="1800" dirty="0" smtClean="0">
-                <a:solidFill>
-                  <a:srgbClr val="7D7D7D"/>
-                </a:solidFill>
-                <a:latin typeface="Calibri"/>
-                <a:cs typeface="Calibri"/>
-              </a:rPr>
-              <a:t>logo</a:t>
-            </a:r>
-            <a:r>
-              <a:rPr lang="pt-BR" sz="1800" spc="-45" dirty="0" smtClean="0">
-                <a:solidFill>
-                  <a:srgbClr val="7D7D7D"/>
-                </a:solidFill>
-                <a:latin typeface="Calibri"/>
-                <a:cs typeface="Calibri"/>
-              </a:rPr>
-              <a:t> </a:t>
-            </a:r>
-            <a:r>
-              <a:rPr lang="pt-BR" sz="1800" dirty="0" smtClean="0">
-                <a:solidFill>
-                  <a:srgbClr val="7D7D7D"/>
-                </a:solidFill>
-                <a:latin typeface="Calibri"/>
-                <a:cs typeface="Calibri"/>
-              </a:rPr>
-              <a:t>após</a:t>
-            </a:r>
-            <a:r>
-              <a:rPr lang="pt-BR" sz="1800" spc="-55" dirty="0" smtClean="0">
-                <a:solidFill>
-                  <a:srgbClr val="7D7D7D"/>
-                </a:solidFill>
-                <a:latin typeface="Calibri"/>
-                <a:cs typeface="Calibri"/>
-              </a:rPr>
-              <a:t> </a:t>
-            </a:r>
-            <a:r>
-              <a:rPr lang="pt-BR" sz="1800" dirty="0" smtClean="0">
-                <a:solidFill>
-                  <a:srgbClr val="7D7D7D"/>
-                </a:solidFill>
-                <a:latin typeface="Calibri"/>
-                <a:cs typeface="Calibri"/>
-              </a:rPr>
-              <a:t>o</a:t>
-            </a:r>
-            <a:r>
-              <a:rPr lang="pt-BR" sz="1800" spc="-45" dirty="0" smtClean="0">
-                <a:solidFill>
-                  <a:srgbClr val="7D7D7D"/>
-                </a:solidFill>
-                <a:latin typeface="Calibri"/>
-                <a:cs typeface="Calibri"/>
-              </a:rPr>
-              <a:t> </a:t>
-            </a:r>
-            <a:r>
-              <a:rPr lang="pt-BR" sz="1800" spc="-10" dirty="0" smtClean="0">
-                <a:solidFill>
-                  <a:srgbClr val="7D7D7D"/>
-                </a:solidFill>
-                <a:latin typeface="Calibri"/>
-                <a:cs typeface="Calibri"/>
-              </a:rPr>
-              <a:t>primeiro</a:t>
-            </a:r>
-            <a:r>
-              <a:rPr lang="pt-BR" sz="1800" spc="-40" dirty="0" smtClean="0">
-                <a:solidFill>
-                  <a:srgbClr val="7D7D7D"/>
-                </a:solidFill>
-                <a:latin typeface="Calibri"/>
-                <a:cs typeface="Calibri"/>
-              </a:rPr>
-              <a:t> </a:t>
-            </a:r>
-            <a:r>
-              <a:rPr lang="pt-BR" sz="1800" spc="-10" dirty="0" err="1" smtClean="0">
-                <a:solidFill>
-                  <a:srgbClr val="7D7D7D"/>
-                </a:solidFill>
-                <a:latin typeface="Calibri"/>
-                <a:cs typeface="Calibri"/>
-              </a:rPr>
-              <a:t>login</a:t>
-            </a:r>
-            <a:r>
-              <a:rPr lang="pt-BR" sz="1800" spc="-10" dirty="0" smtClean="0">
-                <a:solidFill>
-                  <a:srgbClr val="7D7D7D"/>
-                </a:solidFill>
-                <a:latin typeface="Calibri"/>
-                <a:cs typeface="Calibri"/>
-              </a:rPr>
-              <a:t>)</a:t>
-            </a:r>
-            <a:endParaRPr lang="pt-BR" sz="1800" dirty="0" smtClean="0">
-              <a:latin typeface="Calibri"/>
-              <a:cs typeface="Calibri"/>
-            </a:endParaRPr>
-          </a:p>
-        </p:txBody>
-      </p:sp>
-      <p:sp>
-        <p:nvSpPr>
-          <p:cNvPr id="19" name="CaixaDeTexto 18"/>
+          <p:cNvPr id="19" name="ct_edata"/>
           <p:cNvSpPr txBox="1"/>
           <p:nvPr/>
         </p:nvSpPr>
@@ -18553,7 +17962,7 @@
               </a:tabLst>
             </a:pPr>
             <a:r>
-              <a:rPr lang="pt-BR" sz="1800" dirty="0" err="1" smtClean="0">
+              <a:rPr lang="pt-BR" sz="1800" dirty="0" err="1">
                 <a:solidFill>
                   <a:srgbClr val="7D7D7D"/>
                 </a:solidFill>
@@ -18563,17 +17972,17 @@
               <a:t>Login</a:t>
             </a:r>
             <a:r>
-              <a:rPr lang="pt-BR" sz="1800" spc="-40" dirty="0" smtClean="0">
-                <a:solidFill>
-                  <a:srgbClr val="7D7D7D"/>
-                </a:solidFill>
-                <a:latin typeface="Calibri"/>
-                <a:cs typeface="Calibri"/>
-              </a:rPr>
-              <a:t> </a:t>
-            </a:r>
-            <a:r>
-              <a:rPr lang="pt-BR" sz="1800" dirty="0" smtClean="0">
+              <a:rPr lang="pt-BR" sz="1800" spc="-40" dirty="0">
+                <a:solidFill>
+                  <a:srgbClr val="7D7D7D"/>
+                </a:solidFill>
+                <a:latin typeface="Calibri"/>
+                <a:cs typeface="Calibri"/>
+              </a:rPr>
+              <a:t> </a:t>
+            </a:r>
+            <a:r>
+              <a:rPr lang="pt-BR" sz="1800" dirty="0">
                 <a:solidFill>
                   <a:srgbClr val="7D7D7D"/>
                 </a:solidFill>
@@ -18583,7 +17992,7 @@
               <a:t>do </a:t>
             </a:r>
             <a:r>
-              <a:rPr lang="pt-BR" sz="1800" dirty="0" err="1" smtClean="0">
+              <a:rPr lang="pt-BR" sz="1800" dirty="0" err="1">
                 <a:solidFill>
                   <a:srgbClr val="7D7D7D"/>
                 </a:solidFill>
@@ -18592,7 +18001,7 @@
               </a:rPr>
               <a:t>Edata</a:t>
             </a:r>
-            <a:endParaRPr lang="pt-BR" sz="1800" dirty="0" smtClean="0">
+            <a:endParaRPr lang="pt-BR" sz="1800" dirty="0">
               <a:latin typeface="Calibri"/>
               <a:cs typeface="Calibri"/>
             </a:endParaRPr>
@@ -18609,14 +18018,14 @@
               </a:tabLst>
             </a:pPr>
             <a:r>
-              <a:rPr lang="pt-BR" dirty="0" smtClean="0">
-                <a:solidFill>
-                  <a:srgbClr val="7D7D7D"/>
-                </a:solidFill>
-                <a:latin typeface="Calibri"/>
-                <a:cs typeface="Calibri"/>
-              </a:rPr>
-              <a:t>Usuário: {{USUARIO}}</a:t>
+              <a:rPr lang="pt-BR" dirty="0">
+                <a:solidFill>
+                  <a:srgbClr val="7D7D7D"/>
+                </a:solidFill>
+                <a:latin typeface="Calibri"/>
+                <a:cs typeface="Calibri"/>
+              </a:rPr>
+              <a:t>Usuário: {{USUARIO_EDATA}}</a:t>
             </a:r>
           </a:p>
           <a:p>
@@ -18631,7 +18040,7 @@
               </a:tabLst>
             </a:pPr>
             <a:r>
-              <a:rPr lang="pt-BR" sz="1800" dirty="0" smtClean="0">
+              <a:rPr lang="pt-BR" sz="1800" dirty="0">
                 <a:solidFill>
                   <a:srgbClr val="7D7D7D"/>
                 </a:solidFill>
@@ -18641,7 +18050,7 @@
               <a:t>Senha: </a:t>
             </a:r>
             <a:r>
-              <a:rPr lang="pt-BR" dirty="0" smtClean="0">
+              <a:rPr lang="pt-BR" dirty="0">
                 <a:solidFill>
                   <a:srgbClr val="7D7D7D"/>
                 </a:solidFill>
@@ -18650,7 +18059,7 @@
               </a:rPr>
               <a:t>{{SENHA}}</a:t>
             </a:r>
-            <a:endParaRPr lang="pt-BR" sz="1800" dirty="0" smtClean="0">
+            <a:endParaRPr lang="pt-BR" sz="1800" dirty="0">
               <a:latin typeface="Calibri"/>
               <a:cs typeface="Calibri"/>
             </a:endParaRPr>
@@ -18667,7 +18076,7 @@
               </a:tabLst>
             </a:pPr>
             <a:r>
-              <a:rPr lang="pt-BR" sz="1800" dirty="0" smtClean="0">
+              <a:rPr lang="pt-BR" sz="1800" dirty="0">
                 <a:solidFill>
                   <a:srgbClr val="7D7D7D"/>
                 </a:solidFill>
@@ -18677,17 +18086,17 @@
               <a:t>OBS.</a:t>
             </a:r>
             <a:r>
-              <a:rPr lang="pt-BR" sz="1800" spc="-80" dirty="0" smtClean="0">
-                <a:solidFill>
-                  <a:srgbClr val="7D7D7D"/>
-                </a:solidFill>
-                <a:latin typeface="Calibri"/>
-                <a:cs typeface="Calibri"/>
-              </a:rPr>
-              <a:t> </a:t>
-            </a:r>
-            <a:r>
-              <a:rPr lang="pt-BR" sz="1800" dirty="0" smtClean="0">
+              <a:rPr lang="pt-BR" sz="1800" spc="-80" dirty="0">
+                <a:solidFill>
+                  <a:srgbClr val="7D7D7D"/>
+                </a:solidFill>
+                <a:latin typeface="Calibri"/>
+                <a:cs typeface="Calibri"/>
+              </a:rPr>
+              <a:t> </a:t>
+            </a:r>
+            <a:r>
+              <a:rPr lang="pt-BR" sz="1800" dirty="0">
                 <a:solidFill>
                   <a:srgbClr val="7D7D7D"/>
                 </a:solidFill>
@@ -18697,17 +18106,17 @@
               <a:t>(Por</a:t>
             </a:r>
             <a:r>
-              <a:rPr lang="pt-BR" sz="1800" spc="-50" dirty="0" smtClean="0">
-                <a:solidFill>
-                  <a:srgbClr val="7D7D7D"/>
-                </a:solidFill>
-                <a:latin typeface="Calibri"/>
-                <a:cs typeface="Calibri"/>
-              </a:rPr>
-              <a:t> </a:t>
-            </a:r>
-            <a:r>
-              <a:rPr lang="pt-BR" sz="1800" spc="-10" dirty="0" smtClean="0">
+              <a:rPr lang="pt-BR" sz="1800" spc="-50" dirty="0">
+                <a:solidFill>
+                  <a:srgbClr val="7D7D7D"/>
+                </a:solidFill>
+                <a:latin typeface="Calibri"/>
+                <a:cs typeface="Calibri"/>
+              </a:rPr>
+              <a:t> </a:t>
+            </a:r>
+            <a:r>
+              <a:rPr lang="pt-BR" sz="1800" spc="-10" dirty="0">
                 <a:solidFill>
                   <a:srgbClr val="7D7D7D"/>
                 </a:solidFill>
@@ -18717,17 +18126,17 @@
               <a:t>questões</a:t>
             </a:r>
             <a:r>
-              <a:rPr lang="pt-BR" sz="1800" spc="-50" dirty="0" smtClean="0">
-                <a:solidFill>
-                  <a:srgbClr val="7D7D7D"/>
-                </a:solidFill>
-                <a:latin typeface="Calibri"/>
-                <a:cs typeface="Calibri"/>
-              </a:rPr>
-              <a:t> </a:t>
-            </a:r>
-            <a:r>
-              <a:rPr lang="pt-BR" sz="1800" dirty="0" smtClean="0">
+              <a:rPr lang="pt-BR" sz="1800" spc="-50" dirty="0">
+                <a:solidFill>
+                  <a:srgbClr val="7D7D7D"/>
+                </a:solidFill>
+                <a:latin typeface="Calibri"/>
+                <a:cs typeface="Calibri"/>
+              </a:rPr>
+              <a:t> </a:t>
+            </a:r>
+            <a:r>
+              <a:rPr lang="pt-BR" sz="1800" dirty="0">
                 <a:solidFill>
                   <a:srgbClr val="7D7D7D"/>
                 </a:solidFill>
@@ -18737,17 +18146,17 @@
               <a:t>de</a:t>
             </a:r>
             <a:r>
-              <a:rPr lang="pt-BR" sz="1800" spc="-45" dirty="0" smtClean="0">
-                <a:solidFill>
-                  <a:srgbClr val="7D7D7D"/>
-                </a:solidFill>
-                <a:latin typeface="Calibri"/>
-                <a:cs typeface="Calibri"/>
-              </a:rPr>
-              <a:t> </a:t>
-            </a:r>
-            <a:r>
-              <a:rPr lang="pt-BR" sz="1800" spc="-20" dirty="0" smtClean="0">
+              <a:rPr lang="pt-BR" sz="1800" spc="-45" dirty="0">
+                <a:solidFill>
+                  <a:srgbClr val="7D7D7D"/>
+                </a:solidFill>
+                <a:latin typeface="Calibri"/>
+                <a:cs typeface="Calibri"/>
+              </a:rPr>
+              <a:t> </a:t>
+            </a:r>
+            <a:r>
+              <a:rPr lang="pt-BR" sz="1800" spc="-20" dirty="0">
                 <a:solidFill>
                   <a:srgbClr val="7D7D7D"/>
                 </a:solidFill>
@@ -18757,17 +18166,17 @@
               <a:t>segurança,</a:t>
             </a:r>
             <a:r>
-              <a:rPr lang="pt-BR" sz="1800" spc="-35" dirty="0" smtClean="0">
-                <a:solidFill>
-                  <a:srgbClr val="7D7D7D"/>
-                </a:solidFill>
-                <a:latin typeface="Calibri"/>
-                <a:cs typeface="Calibri"/>
-              </a:rPr>
-              <a:t> </a:t>
-            </a:r>
-            <a:r>
-              <a:rPr lang="pt-BR" sz="1800" spc="-10" dirty="0" smtClean="0">
+              <a:rPr lang="pt-BR" sz="1800" spc="-35" dirty="0">
+                <a:solidFill>
+                  <a:srgbClr val="7D7D7D"/>
+                </a:solidFill>
+                <a:latin typeface="Calibri"/>
+                <a:cs typeface="Calibri"/>
+              </a:rPr>
+              <a:t> </a:t>
+            </a:r>
+            <a:r>
+              <a:rPr lang="pt-BR" sz="1800" spc="-10" dirty="0">
                 <a:solidFill>
                   <a:srgbClr val="7D7D7D"/>
                 </a:solidFill>
@@ -18777,17 +18186,17 @@
               <a:t>favor</a:t>
             </a:r>
             <a:r>
-              <a:rPr lang="pt-BR" sz="1800" spc="-85" dirty="0" smtClean="0">
-                <a:solidFill>
-                  <a:srgbClr val="7D7D7D"/>
-                </a:solidFill>
-                <a:latin typeface="Calibri"/>
-                <a:cs typeface="Calibri"/>
-              </a:rPr>
-              <a:t> </a:t>
-            </a:r>
-            <a:r>
-              <a:rPr lang="pt-BR" sz="1800" dirty="0" smtClean="0">
+              <a:rPr lang="pt-BR" sz="1800" spc="-85" dirty="0">
+                <a:solidFill>
+                  <a:srgbClr val="7D7D7D"/>
+                </a:solidFill>
+                <a:latin typeface="Calibri"/>
+                <a:cs typeface="Calibri"/>
+              </a:rPr>
+              <a:t> </a:t>
+            </a:r>
+            <a:r>
+              <a:rPr lang="pt-BR" sz="1800" dirty="0">
                 <a:solidFill>
                   <a:srgbClr val="7D7D7D"/>
                 </a:solidFill>
@@ -18797,17 +18206,17 @@
               <a:t>trocar</a:t>
             </a:r>
             <a:r>
-              <a:rPr lang="pt-BR" sz="1800" spc="-55" dirty="0" smtClean="0">
-                <a:solidFill>
-                  <a:srgbClr val="7D7D7D"/>
-                </a:solidFill>
-                <a:latin typeface="Calibri"/>
-                <a:cs typeface="Calibri"/>
-              </a:rPr>
-              <a:t> </a:t>
-            </a:r>
-            <a:r>
-              <a:rPr lang="pt-BR" sz="1800" dirty="0" smtClean="0">
+              <a:rPr lang="pt-BR" sz="1800" spc="-55" dirty="0">
+                <a:solidFill>
+                  <a:srgbClr val="7D7D7D"/>
+                </a:solidFill>
+                <a:latin typeface="Calibri"/>
+                <a:cs typeface="Calibri"/>
+              </a:rPr>
+              <a:t> </a:t>
+            </a:r>
+            <a:r>
+              <a:rPr lang="pt-BR" sz="1800" dirty="0">
                 <a:solidFill>
                   <a:srgbClr val="7D7D7D"/>
                 </a:solidFill>
@@ -18817,17 +18226,17 @@
               <a:t>a</a:t>
             </a:r>
             <a:r>
-              <a:rPr lang="pt-BR" sz="1800" spc="-45" dirty="0" smtClean="0">
-                <a:solidFill>
-                  <a:srgbClr val="7D7D7D"/>
-                </a:solidFill>
-                <a:latin typeface="Calibri"/>
-                <a:cs typeface="Calibri"/>
-              </a:rPr>
-              <a:t> </a:t>
-            </a:r>
-            <a:r>
-              <a:rPr lang="pt-BR" sz="1800" dirty="0" smtClean="0">
+              <a:rPr lang="pt-BR" sz="1800" spc="-45" dirty="0">
+                <a:solidFill>
+                  <a:srgbClr val="7D7D7D"/>
+                </a:solidFill>
+                <a:latin typeface="Calibri"/>
+                <a:cs typeface="Calibri"/>
+              </a:rPr>
+              <a:t> </a:t>
+            </a:r>
+            <a:r>
+              <a:rPr lang="pt-BR" sz="1800" dirty="0">
                 <a:solidFill>
                   <a:srgbClr val="7D7D7D"/>
                 </a:solidFill>
@@ -18837,17 +18246,17 @@
               <a:t>senha</a:t>
             </a:r>
             <a:r>
-              <a:rPr lang="pt-BR" sz="1800" spc="-65" dirty="0" smtClean="0">
-                <a:solidFill>
-                  <a:srgbClr val="7D7D7D"/>
-                </a:solidFill>
-                <a:latin typeface="Calibri"/>
-                <a:cs typeface="Calibri"/>
-              </a:rPr>
-              <a:t> </a:t>
-            </a:r>
-            <a:r>
-              <a:rPr lang="pt-BR" sz="1800" dirty="0" smtClean="0">
+              <a:rPr lang="pt-BR" sz="1800" spc="-65" dirty="0">
+                <a:solidFill>
+                  <a:srgbClr val="7D7D7D"/>
+                </a:solidFill>
+                <a:latin typeface="Calibri"/>
+                <a:cs typeface="Calibri"/>
+              </a:rPr>
+              <a:t> </a:t>
+            </a:r>
+            <a:r>
+              <a:rPr lang="pt-BR" sz="1800" dirty="0">
                 <a:solidFill>
                   <a:srgbClr val="7D7D7D"/>
                 </a:solidFill>
@@ -18857,17 +18266,17 @@
               <a:t>logo</a:t>
             </a:r>
             <a:r>
-              <a:rPr lang="pt-BR" sz="1800" spc="-45" dirty="0" smtClean="0">
-                <a:solidFill>
-                  <a:srgbClr val="7D7D7D"/>
-                </a:solidFill>
-                <a:latin typeface="Calibri"/>
-                <a:cs typeface="Calibri"/>
-              </a:rPr>
-              <a:t> </a:t>
-            </a:r>
-            <a:r>
-              <a:rPr lang="pt-BR" sz="1800" dirty="0" smtClean="0">
+              <a:rPr lang="pt-BR" sz="1800" spc="-45" dirty="0">
+                <a:solidFill>
+                  <a:srgbClr val="7D7D7D"/>
+                </a:solidFill>
+                <a:latin typeface="Calibri"/>
+                <a:cs typeface="Calibri"/>
+              </a:rPr>
+              <a:t> </a:t>
+            </a:r>
+            <a:r>
+              <a:rPr lang="pt-BR" sz="1800" dirty="0">
                 <a:solidFill>
                   <a:srgbClr val="7D7D7D"/>
                 </a:solidFill>
@@ -18877,17 +18286,17 @@
               <a:t>após</a:t>
             </a:r>
             <a:r>
-              <a:rPr lang="pt-BR" sz="1800" spc="-55" dirty="0" smtClean="0">
-                <a:solidFill>
-                  <a:srgbClr val="7D7D7D"/>
-                </a:solidFill>
-                <a:latin typeface="Calibri"/>
-                <a:cs typeface="Calibri"/>
-              </a:rPr>
-              <a:t> </a:t>
-            </a:r>
-            <a:r>
-              <a:rPr lang="pt-BR" sz="1800" dirty="0" smtClean="0">
+              <a:rPr lang="pt-BR" sz="1800" spc="-55" dirty="0">
+                <a:solidFill>
+                  <a:srgbClr val="7D7D7D"/>
+                </a:solidFill>
+                <a:latin typeface="Calibri"/>
+                <a:cs typeface="Calibri"/>
+              </a:rPr>
+              <a:t> </a:t>
+            </a:r>
+            <a:r>
+              <a:rPr lang="pt-BR" sz="1800" dirty="0">
                 <a:solidFill>
                   <a:srgbClr val="7D7D7D"/>
                 </a:solidFill>
@@ -18897,17 +18306,17 @@
               <a:t>o</a:t>
             </a:r>
             <a:r>
-              <a:rPr lang="pt-BR" sz="1800" spc="-45" dirty="0" smtClean="0">
-                <a:solidFill>
-                  <a:srgbClr val="7D7D7D"/>
-                </a:solidFill>
-                <a:latin typeface="Calibri"/>
-                <a:cs typeface="Calibri"/>
-              </a:rPr>
-              <a:t> </a:t>
-            </a:r>
-            <a:r>
-              <a:rPr lang="pt-BR" sz="1800" spc="-10" dirty="0" smtClean="0">
+              <a:rPr lang="pt-BR" sz="1800" spc="-45" dirty="0">
+                <a:solidFill>
+                  <a:srgbClr val="7D7D7D"/>
+                </a:solidFill>
+                <a:latin typeface="Calibri"/>
+                <a:cs typeface="Calibri"/>
+              </a:rPr>
+              <a:t> </a:t>
+            </a:r>
+            <a:r>
+              <a:rPr lang="pt-BR" sz="1800" spc="-10" dirty="0">
                 <a:solidFill>
                   <a:srgbClr val="7D7D7D"/>
                 </a:solidFill>
@@ -18917,17 +18326,17 @@
               <a:t>primeiro</a:t>
             </a:r>
             <a:r>
-              <a:rPr lang="pt-BR" sz="1800" spc="-40" dirty="0" smtClean="0">
-                <a:solidFill>
-                  <a:srgbClr val="7D7D7D"/>
-                </a:solidFill>
-                <a:latin typeface="Calibri"/>
-                <a:cs typeface="Calibri"/>
-              </a:rPr>
-              <a:t> </a:t>
-            </a:r>
-            <a:r>
-              <a:rPr lang="pt-BR" sz="1800" spc="-10" dirty="0" err="1" smtClean="0">
+              <a:rPr lang="pt-BR" sz="1800" spc="-40" dirty="0">
+                <a:solidFill>
+                  <a:srgbClr val="7D7D7D"/>
+                </a:solidFill>
+                <a:latin typeface="Calibri"/>
+                <a:cs typeface="Calibri"/>
+              </a:rPr>
+              <a:t> </a:t>
+            </a:r>
+            <a:r>
+              <a:rPr lang="pt-BR" sz="1800" spc="-10" dirty="0" err="1">
                 <a:solidFill>
                   <a:srgbClr val="7D7D7D"/>
                 </a:solidFill>
@@ -18937,7 +18346,7 @@
               <a:t>login</a:t>
             </a:r>
             <a:r>
-              <a:rPr lang="pt-BR" sz="1800" spc="-10" dirty="0" smtClean="0">
+              <a:rPr lang="pt-BR" sz="1800" spc="-10" dirty="0">
                 <a:solidFill>
                   <a:srgbClr val="7D7D7D"/>
                 </a:solidFill>
@@ -18946,10 +18355,526 @@
               </a:rPr>
               <a:t>)</a:t>
             </a:r>
-            <a:endParaRPr lang="pt-BR" sz="1800" spc="-10" dirty="0">
-              <a:solidFill>
-                <a:srgbClr val="7D7D7D"/>
-              </a:solidFill>
+          </a:p>
+        </p:txBody>
+      </p:sp>
+      <p:pic>
+        <p:nvPicPr>
+          <p:cNvPr id="10" name="img_protheus3">
+            <a:extLst>
+              <a:ext uri="{FF2B5EF4-FFF2-40B4-BE49-F238E27FC236}">
+                <a16:creationId xmlns:a16="http://schemas.microsoft.com/office/drawing/2014/main" id="{F05613AC-5FCE-4ECE-1D9C-BAD72D9B66AB}"/>
+              </a:ext>
+            </a:extLst>
+          </p:cNvPr>
+          <p:cNvPicPr>
+            <a:picLocks noChangeAspect="1"/>
+          </p:cNvPicPr>
+          <p:nvPr/>
+        </p:nvPicPr>
+        <p:blipFill>
+          <a:blip r:embed="rId7"/>
+          <a:stretch>
+            <a:fillRect/>
+          </a:stretch>
+        </p:blipFill>
+        <p:spPr>
+          <a:xfrm>
+            <a:off x="10550541" y="1240449"/>
+            <a:ext cx="752475" cy="714375"/>
+          </a:xfrm>
+          <a:prstGeom prst="rect">
+            <a:avLst/>
+          </a:prstGeom>
+        </p:spPr>
+      </p:pic>
+      <p:pic>
+        <p:nvPicPr>
+          <p:cNvPr id="14" name="img_protheus2">
+            <a:extLst>
+              <a:ext uri="{FF2B5EF4-FFF2-40B4-BE49-F238E27FC236}">
+                <a16:creationId xmlns:a16="http://schemas.microsoft.com/office/drawing/2014/main" id="{3FF66795-E667-C6B7-993F-01E55135EFBD}"/>
+              </a:ext>
+            </a:extLst>
+          </p:cNvPr>
+          <p:cNvPicPr>
+            <a:picLocks noChangeAspect="1"/>
+          </p:cNvPicPr>
+          <p:nvPr/>
+        </p:nvPicPr>
+        <p:blipFill>
+          <a:blip r:embed="rId8"/>
+          <a:stretch>
+            <a:fillRect/>
+          </a:stretch>
+        </p:blipFill>
+        <p:spPr>
+          <a:xfrm>
+            <a:off x="9972893" y="2025888"/>
+            <a:ext cx="771525" cy="742950"/>
+          </a:xfrm>
+          <a:prstGeom prst="rect">
+            <a:avLst/>
+          </a:prstGeom>
+        </p:spPr>
+      </p:pic>
+      <p:pic>
+        <p:nvPicPr>
+          <p:cNvPr id="17" name="img_protheus1">
+            <a:extLst>
+              <a:ext uri="{FF2B5EF4-FFF2-40B4-BE49-F238E27FC236}">
+                <a16:creationId xmlns:a16="http://schemas.microsoft.com/office/drawing/2014/main" id="{E01B398B-14D1-FDF2-3357-06B46C3FF2F6}"/>
+              </a:ext>
+            </a:extLst>
+          </p:cNvPr>
+          <p:cNvPicPr>
+            <a:picLocks noChangeAspect="1"/>
+          </p:cNvPicPr>
+          <p:nvPr/>
+        </p:nvPicPr>
+        <p:blipFill>
+          <a:blip r:embed="rId9"/>
+          <a:stretch>
+            <a:fillRect/>
+          </a:stretch>
+        </p:blipFill>
+        <p:spPr>
+          <a:xfrm>
+            <a:off x="9412930" y="1202349"/>
+            <a:ext cx="714375" cy="752475"/>
+          </a:xfrm>
+          <a:prstGeom prst="rect">
+            <a:avLst/>
+          </a:prstGeom>
+        </p:spPr>
+      </p:pic>
+      <p:sp>
+        <p:nvSpPr>
+          <p:cNvPr id="18" name="ct_protheus"/>
+          <p:cNvSpPr txBox="1"/>
+          <p:nvPr/>
+        </p:nvSpPr>
+        <p:spPr>
+          <a:xfrm>
+            <a:off x="704671" y="1597636"/>
+            <a:ext cx="8408019" cy="1200329"/>
+          </a:xfrm>
+          <a:prstGeom prst="rect">
+            <a:avLst/>
+          </a:prstGeom>
+          <a:noFill/>
+        </p:spPr>
+        <p:txBody>
+          <a:bodyPr wrap="square" rtlCol="0">
+            <a:spAutoFit/>
+          </a:bodyPr>
+          <a:lstStyle/>
+          <a:p>
+            <a:pPr marL="299085" indent="-286385">
+              <a:spcBef>
+                <a:spcPts val="100"/>
+              </a:spcBef>
+              <a:buFont typeface="Wingdings"/>
+              <a:buChar char=""/>
+              <a:tabLst>
+                <a:tab pos="299085" algn="l"/>
+              </a:tabLst>
+            </a:pPr>
+            <a:r>
+              <a:rPr lang="pt-BR" sz="1800" dirty="0">
+                <a:solidFill>
+                  <a:srgbClr val="7D7D7D"/>
+                </a:solidFill>
+                <a:latin typeface="Calibri"/>
+                <a:cs typeface="Calibri"/>
+              </a:rPr>
+              <a:t>Login</a:t>
+            </a:r>
+            <a:r>
+              <a:rPr lang="pt-BR" sz="1800" spc="-40" dirty="0">
+                <a:solidFill>
+                  <a:srgbClr val="7D7D7D"/>
+                </a:solidFill>
+                <a:latin typeface="Calibri"/>
+                <a:cs typeface="Calibri"/>
+              </a:rPr>
+              <a:t> </a:t>
+            </a:r>
+            <a:r>
+              <a:rPr lang="pt-BR" sz="1800" dirty="0">
+                <a:solidFill>
+                  <a:srgbClr val="7D7D7D"/>
+                </a:solidFill>
+                <a:latin typeface="Calibri"/>
+                <a:cs typeface="Calibri"/>
+              </a:rPr>
+              <a:t>de</a:t>
+            </a:r>
+            <a:r>
+              <a:rPr lang="pt-BR" sz="1800" spc="-45" dirty="0">
+                <a:solidFill>
+                  <a:srgbClr val="7D7D7D"/>
+                </a:solidFill>
+                <a:latin typeface="Calibri"/>
+                <a:cs typeface="Calibri"/>
+              </a:rPr>
+              <a:t> </a:t>
+            </a:r>
+            <a:r>
+              <a:rPr lang="pt-BR" sz="1800" dirty="0">
+                <a:solidFill>
+                  <a:srgbClr val="7D7D7D"/>
+                </a:solidFill>
+                <a:latin typeface="Calibri"/>
+                <a:cs typeface="Calibri"/>
+              </a:rPr>
+              <a:t>Protheus</a:t>
+            </a:r>
+            <a:endParaRPr lang="pt-BR" sz="1800" dirty="0">
+              <a:latin typeface="Calibri"/>
+              <a:cs typeface="Calibri"/>
+            </a:endParaRPr>
+          </a:p>
+          <a:p>
+            <a:pPr marL="755650" lvl="1" indent="-285750">
+              <a:spcBef>
+                <a:spcPts val="5"/>
+              </a:spcBef>
+              <a:buFont typeface="Wingdings"/>
+              <a:buChar char=""/>
+              <a:tabLst>
+                <a:tab pos="755650" algn="l"/>
+              </a:tabLst>
+            </a:pPr>
+            <a:r>
+              <a:rPr lang="pt-BR" dirty="0">
+                <a:solidFill>
+                  <a:srgbClr val="7D7D7D"/>
+                </a:solidFill>
+                <a:latin typeface="Calibri"/>
+                <a:cs typeface="Calibri"/>
+              </a:rPr>
+              <a:t>Usuário: {{USUARIO}}</a:t>
+            </a:r>
+          </a:p>
+          <a:p>
+            <a:pPr marL="755650" lvl="1" indent="-285750">
+              <a:lnSpc>
+                <a:spcPct val="100000"/>
+              </a:lnSpc>
+              <a:buFont typeface="Wingdings"/>
+              <a:buChar char=""/>
+              <a:tabLst>
+                <a:tab pos="755650" algn="l"/>
+              </a:tabLst>
+            </a:pPr>
+            <a:r>
+              <a:rPr lang="pt-BR" sz="1800" dirty="0">
+                <a:solidFill>
+                  <a:srgbClr val="7D7D7D"/>
+                </a:solidFill>
+                <a:latin typeface="Calibri"/>
+                <a:cs typeface="Calibri"/>
+              </a:rPr>
+              <a:t>Senha:</a:t>
+            </a:r>
+            <a:r>
+              <a:rPr lang="pt-BR" dirty="0">
+                <a:solidFill>
+                  <a:srgbClr val="7D7D7D"/>
+                </a:solidFill>
+                <a:latin typeface="Calibri"/>
+                <a:cs typeface="Calibri"/>
+              </a:rPr>
+              <a:t> {{SENHA}}</a:t>
+            </a:r>
+            <a:endParaRPr lang="pt-BR" sz="1800" dirty="0">
+              <a:latin typeface="Calibri"/>
+              <a:cs typeface="Calibri"/>
+            </a:endParaRPr>
+          </a:p>
+          <a:p>
+            <a:pPr marL="755650" lvl="1" indent="-285750">
+              <a:lnSpc>
+                <a:spcPct val="100000"/>
+              </a:lnSpc>
+              <a:buFont typeface="Wingdings"/>
+              <a:buChar char=""/>
+              <a:tabLst>
+                <a:tab pos="755650" algn="l"/>
+              </a:tabLst>
+            </a:pPr>
+            <a:r>
+              <a:rPr lang="pt-BR" sz="1800" dirty="0">
+                <a:solidFill>
+                  <a:srgbClr val="7D7D7D"/>
+                </a:solidFill>
+                <a:latin typeface="Calibri"/>
+                <a:cs typeface="Calibri"/>
+              </a:rPr>
+              <a:t>OBS.</a:t>
+            </a:r>
+            <a:r>
+              <a:rPr lang="pt-BR" sz="1800" spc="-80" dirty="0">
+                <a:solidFill>
+                  <a:srgbClr val="7D7D7D"/>
+                </a:solidFill>
+                <a:latin typeface="Calibri"/>
+                <a:cs typeface="Calibri"/>
+              </a:rPr>
+              <a:t> </a:t>
+            </a:r>
+            <a:r>
+              <a:rPr lang="pt-BR" sz="1800" dirty="0">
+                <a:solidFill>
+                  <a:srgbClr val="7D7D7D"/>
+                </a:solidFill>
+                <a:latin typeface="Calibri"/>
+                <a:cs typeface="Calibri"/>
+              </a:rPr>
+              <a:t>(Por</a:t>
+            </a:r>
+            <a:r>
+              <a:rPr lang="pt-BR" sz="1800" spc="-50" dirty="0">
+                <a:solidFill>
+                  <a:srgbClr val="7D7D7D"/>
+                </a:solidFill>
+                <a:latin typeface="Calibri"/>
+                <a:cs typeface="Calibri"/>
+              </a:rPr>
+              <a:t> </a:t>
+            </a:r>
+            <a:r>
+              <a:rPr lang="pt-BR" sz="1800" spc="-10" dirty="0">
+                <a:solidFill>
+                  <a:srgbClr val="7D7D7D"/>
+                </a:solidFill>
+                <a:latin typeface="Calibri"/>
+                <a:cs typeface="Calibri"/>
+              </a:rPr>
+              <a:t>questões</a:t>
+            </a:r>
+            <a:r>
+              <a:rPr lang="pt-BR" sz="1800" spc="-50" dirty="0">
+                <a:solidFill>
+                  <a:srgbClr val="7D7D7D"/>
+                </a:solidFill>
+                <a:latin typeface="Calibri"/>
+                <a:cs typeface="Calibri"/>
+              </a:rPr>
+              <a:t> </a:t>
+            </a:r>
+            <a:r>
+              <a:rPr lang="pt-BR" sz="1800" dirty="0">
+                <a:solidFill>
+                  <a:srgbClr val="7D7D7D"/>
+                </a:solidFill>
+                <a:latin typeface="Calibri"/>
+                <a:cs typeface="Calibri"/>
+              </a:rPr>
+              <a:t>de</a:t>
+            </a:r>
+            <a:r>
+              <a:rPr lang="pt-BR" sz="1800" spc="-45" dirty="0">
+                <a:solidFill>
+                  <a:srgbClr val="7D7D7D"/>
+                </a:solidFill>
+                <a:latin typeface="Calibri"/>
+                <a:cs typeface="Calibri"/>
+              </a:rPr>
+              <a:t> </a:t>
+            </a:r>
+            <a:r>
+              <a:rPr lang="pt-BR" sz="1800" spc="-20" dirty="0">
+                <a:solidFill>
+                  <a:srgbClr val="7D7D7D"/>
+                </a:solidFill>
+                <a:latin typeface="Calibri"/>
+                <a:cs typeface="Calibri"/>
+              </a:rPr>
+              <a:t>segurança,</a:t>
+            </a:r>
+            <a:r>
+              <a:rPr lang="pt-BR" sz="1800" spc="-35" dirty="0">
+                <a:solidFill>
+                  <a:srgbClr val="7D7D7D"/>
+                </a:solidFill>
+                <a:latin typeface="Calibri"/>
+                <a:cs typeface="Calibri"/>
+              </a:rPr>
+              <a:t> </a:t>
+            </a:r>
+            <a:r>
+              <a:rPr lang="pt-BR" sz="1800" spc="-10" dirty="0">
+                <a:solidFill>
+                  <a:srgbClr val="7D7D7D"/>
+                </a:solidFill>
+                <a:latin typeface="Calibri"/>
+                <a:cs typeface="Calibri"/>
+              </a:rPr>
+              <a:t>favor</a:t>
+            </a:r>
+            <a:r>
+              <a:rPr lang="pt-BR" sz="1800" spc="-85" dirty="0">
+                <a:solidFill>
+                  <a:srgbClr val="7D7D7D"/>
+                </a:solidFill>
+                <a:latin typeface="Calibri"/>
+                <a:cs typeface="Calibri"/>
+              </a:rPr>
+              <a:t> </a:t>
+            </a:r>
+            <a:r>
+              <a:rPr lang="pt-BR" sz="1800" dirty="0">
+                <a:solidFill>
+                  <a:srgbClr val="7D7D7D"/>
+                </a:solidFill>
+                <a:latin typeface="Calibri"/>
+                <a:cs typeface="Calibri"/>
+              </a:rPr>
+              <a:t>trocar</a:t>
+            </a:r>
+            <a:r>
+              <a:rPr lang="pt-BR" sz="1800" spc="-55" dirty="0">
+                <a:solidFill>
+                  <a:srgbClr val="7D7D7D"/>
+                </a:solidFill>
+                <a:latin typeface="Calibri"/>
+                <a:cs typeface="Calibri"/>
+              </a:rPr>
+              <a:t> </a:t>
+            </a:r>
+            <a:r>
+              <a:rPr lang="pt-BR" sz="1800" dirty="0">
+                <a:solidFill>
+                  <a:srgbClr val="7D7D7D"/>
+                </a:solidFill>
+                <a:latin typeface="Calibri"/>
+                <a:cs typeface="Calibri"/>
+              </a:rPr>
+              <a:t>a</a:t>
+            </a:r>
+            <a:r>
+              <a:rPr lang="pt-BR" sz="1800" spc="-45" dirty="0">
+                <a:solidFill>
+                  <a:srgbClr val="7D7D7D"/>
+                </a:solidFill>
+                <a:latin typeface="Calibri"/>
+                <a:cs typeface="Calibri"/>
+              </a:rPr>
+              <a:t> </a:t>
+            </a:r>
+            <a:r>
+              <a:rPr lang="pt-BR" sz="1800" dirty="0">
+                <a:solidFill>
+                  <a:srgbClr val="7D7D7D"/>
+                </a:solidFill>
+                <a:latin typeface="Calibri"/>
+                <a:cs typeface="Calibri"/>
+              </a:rPr>
+              <a:t>senha</a:t>
+            </a:r>
+            <a:r>
+              <a:rPr lang="pt-BR" sz="1800" spc="-65" dirty="0">
+                <a:solidFill>
+                  <a:srgbClr val="7D7D7D"/>
+                </a:solidFill>
+                <a:latin typeface="Calibri"/>
+                <a:cs typeface="Calibri"/>
+              </a:rPr>
+              <a:t> </a:t>
+            </a:r>
+            <a:r>
+              <a:rPr lang="pt-BR" sz="1800" dirty="0">
+                <a:solidFill>
+                  <a:srgbClr val="7D7D7D"/>
+                </a:solidFill>
+                <a:latin typeface="Calibri"/>
+                <a:cs typeface="Calibri"/>
+              </a:rPr>
+              <a:t>logo</a:t>
+            </a:r>
+            <a:r>
+              <a:rPr lang="pt-BR" sz="1800" spc="-45" dirty="0">
+                <a:solidFill>
+                  <a:srgbClr val="7D7D7D"/>
+                </a:solidFill>
+                <a:latin typeface="Calibri"/>
+                <a:cs typeface="Calibri"/>
+              </a:rPr>
+              <a:t> </a:t>
+            </a:r>
+            <a:r>
+              <a:rPr lang="pt-BR" sz="1800" dirty="0">
+                <a:solidFill>
+                  <a:srgbClr val="7D7D7D"/>
+                </a:solidFill>
+                <a:latin typeface="Calibri"/>
+                <a:cs typeface="Calibri"/>
+              </a:rPr>
+              <a:t>após</a:t>
+            </a:r>
+            <a:r>
+              <a:rPr lang="pt-BR" sz="1800" spc="-55" dirty="0">
+                <a:solidFill>
+                  <a:srgbClr val="7D7D7D"/>
+                </a:solidFill>
+                <a:latin typeface="Calibri"/>
+                <a:cs typeface="Calibri"/>
+              </a:rPr>
+              <a:t> </a:t>
+            </a:r>
+            <a:r>
+              <a:rPr lang="pt-BR" sz="1800" dirty="0">
+                <a:solidFill>
+                  <a:srgbClr val="7D7D7D"/>
+                </a:solidFill>
+                <a:latin typeface="Calibri"/>
+                <a:cs typeface="Calibri"/>
+              </a:rPr>
+              <a:t>o</a:t>
+            </a:r>
+            <a:r>
+              <a:rPr lang="pt-BR" sz="1800" spc="-45" dirty="0">
+                <a:solidFill>
+                  <a:srgbClr val="7D7D7D"/>
+                </a:solidFill>
+                <a:latin typeface="Calibri"/>
+                <a:cs typeface="Calibri"/>
+              </a:rPr>
+              <a:t> </a:t>
+            </a:r>
+            <a:r>
+              <a:rPr lang="pt-BR" sz="1800" spc="-10" dirty="0">
+                <a:solidFill>
+                  <a:srgbClr val="7D7D7D"/>
+                </a:solidFill>
+                <a:latin typeface="Calibri"/>
+                <a:cs typeface="Calibri"/>
+              </a:rPr>
+              <a:t>primeiro</a:t>
+            </a:r>
+            <a:r>
+              <a:rPr lang="pt-BR" sz="1800" spc="-40" dirty="0">
+                <a:solidFill>
+                  <a:srgbClr val="7D7D7D"/>
+                </a:solidFill>
+                <a:latin typeface="Calibri"/>
+                <a:cs typeface="Calibri"/>
+              </a:rPr>
+              <a:t> </a:t>
+            </a:r>
+            <a:r>
+              <a:rPr lang="pt-BR" sz="1800" spc="-10" dirty="0">
+                <a:solidFill>
+                  <a:srgbClr val="7D7D7D"/>
+                </a:solidFill>
+                <a:latin typeface="Calibri"/>
+                <a:cs typeface="Calibri"/>
+              </a:rPr>
+              <a:t>login)</a:t>
+            </a:r>
+            <a:endParaRPr lang="pt-BR" sz="1800" dirty="0">
               <a:latin typeface="Calibri"/>
               <a:cs typeface="Calibri"/>
             </a:endParaRPr>
@@ -18977,7 +18902,7 @@
         <p:cNvPr id="1" name="">
           <a:extLst>
             <a:ext uri="{FF2B5EF4-FFF2-40B4-BE49-F238E27FC236}">
-              <a16:creationId xmlns:a16="http://schemas.microsoft.com/office/drawing/2014/main" xmlns="" id="{A8638C76-D353-6778-CBC1-4FA348B994CE}"/>
+              <a16:creationId xmlns:a16="http://schemas.microsoft.com/office/drawing/2014/main" id="{E9BA4D0B-7F86-456A-0D03-F395A0FB1F54}"/>
             </a:ext>
           </a:extLst>
         </p:cNvPr>
@@ -18997,7 +18922,7 @@
           <p:cNvPr id="2" name="object 2">
             <a:extLst>
               <a:ext uri="{FF2B5EF4-FFF2-40B4-BE49-F238E27FC236}">
-                <a16:creationId xmlns:a16="http://schemas.microsoft.com/office/drawing/2014/main" xmlns="" id="{85581F38-DADB-C350-F427-1181B0F3B8B7}"/>
+                <a16:creationId xmlns:a16="http://schemas.microsoft.com/office/drawing/2014/main" id="{4E1256B8-953B-7127-12F3-5A802C317716}"/>
               </a:ext>
             </a:extLst>
           </p:cNvPr>
@@ -19061,7 +18986,7 @@
           <p:cNvPr id="3" name="object 3">
             <a:extLst>
               <a:ext uri="{FF2B5EF4-FFF2-40B4-BE49-F238E27FC236}">
-                <a16:creationId xmlns:a16="http://schemas.microsoft.com/office/drawing/2014/main" xmlns="" id="{DCACE88A-5BBA-C0F9-CC21-257C93584EDD}"/>
+                <a16:creationId xmlns:a16="http://schemas.microsoft.com/office/drawing/2014/main" id="{8BB2E0BE-3AAE-7853-DAA6-BA9048CBDC4A}"/>
               </a:ext>
             </a:extLst>
           </p:cNvPr>
@@ -19086,10 +19011,10 @@
       </p:pic>
       <p:sp>
         <p:nvSpPr>
-          <p:cNvPr id="5" name="object 5">
+          <p:cNvPr id="19" name="ct_wmw">
             <a:extLst>
               <a:ext uri="{FF2B5EF4-FFF2-40B4-BE49-F238E27FC236}">
-                <a16:creationId xmlns:a16="http://schemas.microsoft.com/office/drawing/2014/main" xmlns="" id="{4693F199-06EC-95DD-0751-550461ED25B2}"/>
+                <a16:creationId xmlns:a16="http://schemas.microsoft.com/office/drawing/2014/main" id="{7E2B7AE5-04C2-8FA3-A06E-596B507B9402}"/>
               </a:ext>
             </a:extLst>
           </p:cNvPr>
@@ -19098,15 +19023,16 @@
         </p:nvSpPr>
         <p:spPr>
           <a:xfrm>
-            <a:off x="990600" y="1371600"/>
-            <a:ext cx="8713470" cy="1410643"/>
+            <a:off x="704671" y="3224505"/>
+            <a:ext cx="8408019" cy="1490152"/>
           </a:xfrm>
           <a:prstGeom prst="rect">
             <a:avLst/>
           </a:prstGeom>
+          <a:noFill/>
         </p:spPr>
         <p:txBody>
-          <a:bodyPr vert="horz" wrap="square" lIns="0" tIns="12700" rIns="0" bIns="0" rtlCol="0">
+          <a:bodyPr wrap="square" rtlCol="0">
             <a:spAutoFit/>
           </a:bodyPr>
           <a:lstStyle/>
@@ -19125,7 +19051,7 @@
               </a:tabLst>
             </a:pPr>
             <a:r>
-              <a:rPr sz="1800" dirty="0">
+              <a:rPr lang="pt-BR" sz="1800" dirty="0">
                 <a:solidFill>
                   <a:srgbClr val="7D7D7D"/>
                 </a:solidFill>
@@ -19135,24 +19061,14 @@
               <a:t>Login</a:t>
             </a:r>
             <a:r>
-              <a:rPr sz="1800" spc="-40" dirty="0">
-                <a:solidFill>
-                  <a:srgbClr val="7D7D7D"/>
-                </a:solidFill>
-                <a:latin typeface="Calibri"/>
-                <a:cs typeface="Calibri"/>
-              </a:rPr>
-              <a:t> </a:t>
-            </a:r>
-            <a:r>
-              <a:rPr sz="1800" dirty="0">
-                <a:solidFill>
-                  <a:srgbClr val="7D7D7D"/>
-                </a:solidFill>
-                <a:latin typeface="Calibri"/>
-                <a:cs typeface="Calibri"/>
-              </a:rPr>
-              <a:t>d</a:t>
+              <a:rPr lang="pt-BR" sz="1800" spc="-40" dirty="0">
+                <a:solidFill>
+                  <a:srgbClr val="7D7D7D"/>
+                </a:solidFill>
+                <a:latin typeface="Calibri"/>
+                <a:cs typeface="Calibri"/>
+              </a:rPr>
+              <a:t> </a:t>
             </a:r>
             <a:r>
               <a:rPr lang="pt-BR" sz="1800" dirty="0">
@@ -19162,7 +19078,7 @@
                 <a:latin typeface="Calibri"/>
                 <a:cs typeface="Calibri"/>
               </a:rPr>
-              <a:t>o Power BI</a:t>
+              <a:t>do WMW</a:t>
             </a:r>
           </a:p>
           <a:p>
@@ -19195,6 +19111,16 @@
               <a:t> </a:t>
             </a:r>
             <a:r>
+              <a:rPr lang="pt-BR" spc="-60" dirty="0">
+                <a:solidFill>
+                  <a:srgbClr val="7D7D7D"/>
+                </a:solidFill>
+                <a:latin typeface="Calibri"/>
+                <a:cs typeface="Calibri"/>
+              </a:rPr>
+              <a:t>download do sistema </a:t>
+            </a:r>
+            <a:r>
               <a:rPr lang="pt-BR" sz="1800" dirty="0">
                 <a:solidFill>
                   <a:srgbClr val="7D7D7D"/>
@@ -19202,7 +19128,27 @@
                 <a:latin typeface="Calibri"/>
                 <a:cs typeface="Calibri"/>
               </a:rPr>
-              <a:t>sistema</a:t>
+              <a:t>pode</a:t>
+            </a:r>
+            <a:r>
+              <a:rPr lang="pt-BR" sz="1800" spc="-25" dirty="0">
+                <a:solidFill>
+                  <a:srgbClr val="7D7D7D"/>
+                </a:solidFill>
+                <a:latin typeface="Calibri"/>
+                <a:cs typeface="Calibri"/>
+              </a:rPr>
+              <a:t> </a:t>
+            </a:r>
+            <a:r>
+              <a:rPr lang="pt-BR" sz="1800" dirty="0">
+                <a:solidFill>
+                  <a:srgbClr val="7D7D7D"/>
+                </a:solidFill>
+                <a:latin typeface="Calibri"/>
+                <a:cs typeface="Calibri"/>
+              </a:rPr>
+              <a:t>ser</a:t>
             </a:r>
             <a:r>
               <a:rPr lang="pt-BR" sz="1800" spc="-55" dirty="0">
@@ -19215,6 +19161,16 @@
               <a:t> </a:t>
             </a:r>
             <a:r>
+              <a:rPr lang="pt-BR" spc="-55" dirty="0">
+                <a:solidFill>
+                  <a:srgbClr val="7D7D7D"/>
+                </a:solidFill>
+                <a:latin typeface="Calibri"/>
+                <a:cs typeface="Calibri"/>
+              </a:rPr>
+              <a:t>feito </a:t>
+            </a:r>
+            <a:r>
               <a:rPr lang="pt-BR" sz="1800" dirty="0">
                 <a:solidFill>
                   <a:srgbClr val="7D7D7D"/>
@@ -19222,10 +19178,10 @@
                 <a:latin typeface="Calibri"/>
                 <a:cs typeface="Calibri"/>
               </a:rPr>
-              <a:t>pode</a:t>
-            </a:r>
-            <a:r>
-              <a:rPr lang="pt-BR" sz="1800" spc="-25" dirty="0">
+              <a:t>pelo</a:t>
+            </a:r>
+            <a:r>
+              <a:rPr lang="pt-BR" sz="1800" spc="-35" dirty="0">
                 <a:solidFill>
                   <a:srgbClr val="7D7D7D"/>
                 </a:solidFill>
@@ -19242,70 +19198,10 @@
                 <a:latin typeface="Calibri"/>
                 <a:cs typeface="Calibri"/>
               </a:rPr>
-              <a:t>ser</a:t>
-            </a:r>
-            <a:r>
-              <a:rPr lang="pt-BR" sz="1800" spc="-55" dirty="0">
-                <a:solidFill>
-                  <a:srgbClr val="7D7D7D"/>
-                </a:solidFill>
-                <a:latin typeface="Calibri"/>
-                <a:cs typeface="Calibri"/>
-              </a:rPr>
-              <a:t> </a:t>
-            </a:r>
-            <a:r>
-              <a:rPr lang="pt-BR" sz="1800" dirty="0">
-                <a:solidFill>
-                  <a:srgbClr val="7D7D7D"/>
-                </a:solidFill>
-                <a:latin typeface="Calibri"/>
-                <a:cs typeface="Calibri"/>
-              </a:rPr>
-              <a:t>acessado</a:t>
-            </a:r>
-            <a:r>
-              <a:rPr lang="pt-BR" sz="1800" spc="-75" dirty="0">
-                <a:solidFill>
-                  <a:srgbClr val="7D7D7D"/>
-                </a:solidFill>
-                <a:latin typeface="Calibri"/>
-                <a:cs typeface="Calibri"/>
-              </a:rPr>
-              <a:t> </a:t>
-            </a:r>
-            <a:r>
-              <a:rPr lang="pt-BR" sz="1800" dirty="0">
-                <a:solidFill>
-                  <a:srgbClr val="7D7D7D"/>
-                </a:solidFill>
-                <a:latin typeface="Calibri"/>
-                <a:cs typeface="Calibri"/>
-              </a:rPr>
-              <a:t>pelo</a:t>
-            </a:r>
-            <a:r>
-              <a:rPr lang="pt-BR" sz="1800" spc="-35" dirty="0">
-                <a:solidFill>
-                  <a:srgbClr val="7D7D7D"/>
-                </a:solidFill>
-                <a:latin typeface="Calibri"/>
-                <a:cs typeface="Calibri"/>
-              </a:rPr>
-              <a:t> </a:t>
-            </a:r>
-            <a:r>
-              <a:rPr lang="pt-BR" sz="1800" dirty="0">
-                <a:solidFill>
-                  <a:srgbClr val="7D7D7D"/>
-                </a:solidFill>
-                <a:latin typeface="Calibri"/>
-                <a:cs typeface="Calibri"/>
-              </a:rPr>
               <a:t>link</a:t>
             </a:r>
             <a:r>
-              <a:rPr lang="pt-BR" spc="-5" dirty="0">
+              <a:rPr lang="pt-BR" sz="1800" spc="-5" dirty="0">
                 <a:solidFill>
                   <a:srgbClr val="7D7D7D"/>
                 </a:solidFill>
@@ -19315,7 +19211,7 @@
               <a:t>: </a:t>
             </a:r>
             <a:r>
-              <a:rPr lang="pt-BR" spc="-5" dirty="0">
+              <a:rPr lang="pt-BR" sz="1800" spc="-5" dirty="0">
                 <a:solidFill>
                   <a:srgbClr val="7D7D7D"/>
                 </a:solidFill>
@@ -19323,9 +19219,9 @@
                 <a:cs typeface="Calibri"/>
                 <a:hlinkClick r:id="rId3"/>
               </a:rPr>
-              <a:t>Power BI</a:t>
-            </a:r>
-            <a:endParaRPr sz="1800" dirty="0">
+              <a:t>WMW</a:t>
+            </a:r>
+            <a:endParaRPr lang="pt-BR" sz="1800" dirty="0">
               <a:latin typeface="Calibri"/>
               <a:cs typeface="Calibri"/>
             </a:endParaRPr>
@@ -19349,27 +19245,7 @@
                 <a:latin typeface="Calibri"/>
                 <a:cs typeface="Calibri"/>
               </a:rPr>
-              <a:t>Usuário: </a:t>
-            </a:r>
-            <a:r>
-              <a:rPr lang="pt-BR" dirty="0" smtClean="0">
-                <a:solidFill>
-                  <a:srgbClr val="7D7D7D"/>
-                </a:solidFill>
-                <a:latin typeface="Calibri"/>
-                <a:cs typeface="Calibri"/>
-              </a:rPr>
-              <a:t>{{USUARIO}}@</a:t>
-            </a:r>
-            <a:r>
-              <a:rPr lang="pt-BR" dirty="0">
-                <a:solidFill>
-                  <a:srgbClr val="7D7D7D"/>
-                </a:solidFill>
-                <a:latin typeface="Calibri"/>
-                <a:cs typeface="Calibri"/>
-              </a:rPr>
-              <a:t>itabom.com.br</a:t>
+              <a:t>Usuário: {{USUARIO_WMW}}</a:t>
             </a:r>
           </a:p>
           <a:p>
@@ -19394,7 +19270,7 @@
               <a:t>Senha: </a:t>
             </a:r>
             <a:r>
-              <a:rPr lang="pt-BR" dirty="0" smtClean="0">
+              <a:rPr lang="pt-BR" dirty="0">
                 <a:solidFill>
                   <a:srgbClr val="7D7D7D"/>
                 </a:solidFill>
@@ -19420,7 +19296,7 @@
               </a:tabLst>
             </a:pPr>
             <a:r>
-              <a:rPr sz="1800" dirty="0">
+              <a:rPr lang="pt-BR" sz="1800" dirty="0">
                 <a:solidFill>
                   <a:srgbClr val="7D7D7D"/>
                 </a:solidFill>
@@ -19430,17 +19306,17 @@
               <a:t>OBS.</a:t>
             </a:r>
             <a:r>
-              <a:rPr sz="1800" spc="-80" dirty="0">
-                <a:solidFill>
-                  <a:srgbClr val="7D7D7D"/>
-                </a:solidFill>
-                <a:latin typeface="Calibri"/>
-                <a:cs typeface="Calibri"/>
-              </a:rPr>
-              <a:t> </a:t>
-            </a:r>
-            <a:r>
-              <a:rPr sz="1800" dirty="0">
+              <a:rPr lang="pt-BR" sz="1800" spc="-80" dirty="0">
+                <a:solidFill>
+                  <a:srgbClr val="7D7D7D"/>
+                </a:solidFill>
+                <a:latin typeface="Calibri"/>
+                <a:cs typeface="Calibri"/>
+              </a:rPr>
+              <a:t> </a:t>
+            </a:r>
+            <a:r>
+              <a:rPr lang="pt-BR" sz="1800" dirty="0">
                 <a:solidFill>
                   <a:srgbClr val="7D7D7D"/>
                 </a:solidFill>
@@ -19450,17 +19326,17 @@
               <a:t>(Por</a:t>
             </a:r>
             <a:r>
-              <a:rPr sz="1800" spc="-50" dirty="0">
-                <a:solidFill>
-                  <a:srgbClr val="7D7D7D"/>
-                </a:solidFill>
-                <a:latin typeface="Calibri"/>
-                <a:cs typeface="Calibri"/>
-              </a:rPr>
-              <a:t> </a:t>
-            </a:r>
-            <a:r>
-              <a:rPr sz="1800" spc="-10" dirty="0" err="1">
+              <a:rPr lang="pt-BR" sz="1800" spc="-50" dirty="0">
+                <a:solidFill>
+                  <a:srgbClr val="7D7D7D"/>
+                </a:solidFill>
+                <a:latin typeface="Calibri"/>
+                <a:cs typeface="Calibri"/>
+              </a:rPr>
+              <a:t> </a:t>
+            </a:r>
+            <a:r>
+              <a:rPr lang="pt-BR" sz="1800" spc="-10" dirty="0">
                 <a:solidFill>
                   <a:srgbClr val="7D7D7D"/>
                 </a:solidFill>
@@ -19470,17 +19346,17 @@
               <a:t>questões</a:t>
             </a:r>
             <a:r>
-              <a:rPr sz="1800" spc="-50" dirty="0">
-                <a:solidFill>
-                  <a:srgbClr val="7D7D7D"/>
-                </a:solidFill>
-                <a:latin typeface="Calibri"/>
-                <a:cs typeface="Calibri"/>
-              </a:rPr>
-              <a:t> </a:t>
-            </a:r>
-            <a:r>
-              <a:rPr sz="1800" dirty="0">
+              <a:rPr lang="pt-BR" sz="1800" spc="-50" dirty="0">
+                <a:solidFill>
+                  <a:srgbClr val="7D7D7D"/>
+                </a:solidFill>
+                <a:latin typeface="Calibri"/>
+                <a:cs typeface="Calibri"/>
+              </a:rPr>
+              <a:t> </a:t>
+            </a:r>
+            <a:r>
+              <a:rPr lang="pt-BR" sz="1800" dirty="0">
                 <a:solidFill>
                   <a:srgbClr val="7D7D7D"/>
                 </a:solidFill>
@@ -19490,47 +19366,37 @@
               <a:t>de</a:t>
             </a:r>
             <a:r>
-              <a:rPr sz="1800" spc="-45" dirty="0">
-                <a:solidFill>
-                  <a:srgbClr val="7D7D7D"/>
-                </a:solidFill>
-                <a:latin typeface="Calibri"/>
-                <a:cs typeface="Calibri"/>
-              </a:rPr>
-              <a:t> </a:t>
-            </a:r>
-            <a:r>
-              <a:rPr sz="1800" spc="-20" dirty="0" err="1">
-                <a:solidFill>
-                  <a:srgbClr val="7D7D7D"/>
-                </a:solidFill>
-                <a:latin typeface="Calibri"/>
-                <a:cs typeface="Calibri"/>
-              </a:rPr>
-              <a:t>segurança</a:t>
-            </a:r>
-            <a:r>
-              <a:rPr sz="1800" spc="-20" dirty="0">
-                <a:solidFill>
-                  <a:srgbClr val="7D7D7D"/>
-                </a:solidFill>
-                <a:latin typeface="Calibri"/>
-                <a:cs typeface="Calibri"/>
-              </a:rPr>
-              <a:t>,</a:t>
-            </a:r>
-            <a:r>
-              <a:rPr sz="1800" spc="-35" dirty="0">
-                <a:solidFill>
-                  <a:srgbClr val="7D7D7D"/>
-                </a:solidFill>
-                <a:latin typeface="Calibri"/>
-                <a:cs typeface="Calibri"/>
-              </a:rPr>
-              <a:t> </a:t>
-            </a:r>
-            <a:r>
-              <a:rPr sz="1800" spc="-10" dirty="0">
+              <a:rPr lang="pt-BR" sz="1800" spc="-45" dirty="0">
+                <a:solidFill>
+                  <a:srgbClr val="7D7D7D"/>
+                </a:solidFill>
+                <a:latin typeface="Calibri"/>
+                <a:cs typeface="Calibri"/>
+              </a:rPr>
+              <a:t> </a:t>
+            </a:r>
+            <a:r>
+              <a:rPr lang="pt-BR" sz="1800" spc="-20" dirty="0">
+                <a:solidFill>
+                  <a:srgbClr val="7D7D7D"/>
+                </a:solidFill>
+                <a:latin typeface="Calibri"/>
+                <a:cs typeface="Calibri"/>
+              </a:rPr>
+              <a:t>segurança,</a:t>
+            </a:r>
+            <a:r>
+              <a:rPr lang="pt-BR" sz="1800" spc="-35" dirty="0">
+                <a:solidFill>
+                  <a:srgbClr val="7D7D7D"/>
+                </a:solidFill>
+                <a:latin typeface="Calibri"/>
+                <a:cs typeface="Calibri"/>
+              </a:rPr>
+              <a:t> </a:t>
+            </a:r>
+            <a:r>
+              <a:rPr lang="pt-BR" sz="1800" spc="-10" dirty="0">
                 <a:solidFill>
                   <a:srgbClr val="7D7D7D"/>
                 </a:solidFill>
@@ -19540,17 +19406,17 @@
               <a:t>favor</a:t>
             </a:r>
             <a:r>
-              <a:rPr sz="1800" spc="-85" dirty="0">
-                <a:solidFill>
-                  <a:srgbClr val="7D7D7D"/>
-                </a:solidFill>
-                <a:latin typeface="Calibri"/>
-                <a:cs typeface="Calibri"/>
-              </a:rPr>
-              <a:t> </a:t>
-            </a:r>
-            <a:r>
-              <a:rPr sz="1800" dirty="0">
+              <a:rPr lang="pt-BR" sz="1800" spc="-85" dirty="0">
+                <a:solidFill>
+                  <a:srgbClr val="7D7D7D"/>
+                </a:solidFill>
+                <a:latin typeface="Calibri"/>
+                <a:cs typeface="Calibri"/>
+              </a:rPr>
+              <a:t> </a:t>
+            </a:r>
+            <a:r>
+              <a:rPr lang="pt-BR" sz="1800" dirty="0">
                 <a:solidFill>
                   <a:srgbClr val="7D7D7D"/>
                 </a:solidFill>
@@ -19560,17 +19426,17 @@
               <a:t>trocar</a:t>
             </a:r>
             <a:r>
-              <a:rPr sz="1800" spc="-55" dirty="0">
-                <a:solidFill>
-                  <a:srgbClr val="7D7D7D"/>
-                </a:solidFill>
-                <a:latin typeface="Calibri"/>
-                <a:cs typeface="Calibri"/>
-              </a:rPr>
-              <a:t> </a:t>
-            </a:r>
-            <a:r>
-              <a:rPr sz="1800" dirty="0">
+              <a:rPr lang="pt-BR" sz="1800" spc="-55" dirty="0">
+                <a:solidFill>
+                  <a:srgbClr val="7D7D7D"/>
+                </a:solidFill>
+                <a:latin typeface="Calibri"/>
+                <a:cs typeface="Calibri"/>
+              </a:rPr>
+              <a:t> </a:t>
+            </a:r>
+            <a:r>
+              <a:rPr lang="pt-BR" sz="1800" dirty="0">
                 <a:solidFill>
                   <a:srgbClr val="7D7D7D"/>
                 </a:solidFill>
@@ -19580,17 +19446,17 @@
               <a:t>a</a:t>
             </a:r>
             <a:r>
-              <a:rPr sz="1800" spc="-45" dirty="0">
-                <a:solidFill>
-                  <a:srgbClr val="7D7D7D"/>
-                </a:solidFill>
-                <a:latin typeface="Calibri"/>
-                <a:cs typeface="Calibri"/>
-              </a:rPr>
-              <a:t> </a:t>
-            </a:r>
-            <a:r>
-              <a:rPr sz="1800" dirty="0" err="1">
+              <a:rPr lang="pt-BR" sz="1800" spc="-45" dirty="0">
+                <a:solidFill>
+                  <a:srgbClr val="7D7D7D"/>
+                </a:solidFill>
+                <a:latin typeface="Calibri"/>
+                <a:cs typeface="Calibri"/>
+              </a:rPr>
+              <a:t> </a:t>
+            </a:r>
+            <a:r>
+              <a:rPr lang="pt-BR" sz="1800" dirty="0">
                 <a:solidFill>
                   <a:srgbClr val="7D7D7D"/>
                 </a:solidFill>
@@ -19600,17 +19466,17 @@
               <a:t>senha</a:t>
             </a:r>
             <a:r>
-              <a:rPr sz="1800" spc="-65" dirty="0">
-                <a:solidFill>
-                  <a:srgbClr val="7D7D7D"/>
-                </a:solidFill>
-                <a:latin typeface="Calibri"/>
-                <a:cs typeface="Calibri"/>
-              </a:rPr>
-              <a:t> </a:t>
-            </a:r>
-            <a:r>
-              <a:rPr sz="1800" dirty="0">
+              <a:rPr lang="pt-BR" sz="1800" spc="-65" dirty="0">
+                <a:solidFill>
+                  <a:srgbClr val="7D7D7D"/>
+                </a:solidFill>
+                <a:latin typeface="Calibri"/>
+                <a:cs typeface="Calibri"/>
+              </a:rPr>
+              <a:t> </a:t>
+            </a:r>
+            <a:r>
+              <a:rPr lang="pt-BR" sz="1800" dirty="0">
                 <a:solidFill>
                   <a:srgbClr val="7D7D7D"/>
                 </a:solidFill>
@@ -19620,17 +19486,17 @@
               <a:t>logo</a:t>
             </a:r>
             <a:r>
-              <a:rPr sz="1800" spc="-45" dirty="0">
-                <a:solidFill>
-                  <a:srgbClr val="7D7D7D"/>
-                </a:solidFill>
-                <a:latin typeface="Calibri"/>
-                <a:cs typeface="Calibri"/>
-              </a:rPr>
-              <a:t> </a:t>
-            </a:r>
-            <a:r>
-              <a:rPr sz="1800" dirty="0" err="1">
+              <a:rPr lang="pt-BR" sz="1800" spc="-45" dirty="0">
+                <a:solidFill>
+                  <a:srgbClr val="7D7D7D"/>
+                </a:solidFill>
+                <a:latin typeface="Calibri"/>
+                <a:cs typeface="Calibri"/>
+              </a:rPr>
+              <a:t> </a:t>
+            </a:r>
+            <a:r>
+              <a:rPr lang="pt-BR" sz="1800" dirty="0">
                 <a:solidFill>
                   <a:srgbClr val="7D7D7D"/>
                 </a:solidFill>
@@ -19640,17 +19506,17 @@
               <a:t>após</a:t>
             </a:r>
             <a:r>
-              <a:rPr sz="1800" spc="-55" dirty="0">
-                <a:solidFill>
-                  <a:srgbClr val="7D7D7D"/>
-                </a:solidFill>
-                <a:latin typeface="Calibri"/>
-                <a:cs typeface="Calibri"/>
-              </a:rPr>
-              <a:t> </a:t>
-            </a:r>
-            <a:r>
-              <a:rPr sz="1800" dirty="0">
+              <a:rPr lang="pt-BR" sz="1800" spc="-55" dirty="0">
+                <a:solidFill>
+                  <a:srgbClr val="7D7D7D"/>
+                </a:solidFill>
+                <a:latin typeface="Calibri"/>
+                <a:cs typeface="Calibri"/>
+              </a:rPr>
+              <a:t> </a:t>
+            </a:r>
+            <a:r>
+              <a:rPr lang="pt-BR" sz="1800" dirty="0">
                 <a:solidFill>
                   <a:srgbClr val="7D7D7D"/>
                 </a:solidFill>
@@ -19660,17 +19526,17 @@
               <a:t>o</a:t>
             </a:r>
             <a:r>
-              <a:rPr sz="1800" spc="-45" dirty="0">
-                <a:solidFill>
-                  <a:srgbClr val="7D7D7D"/>
-                </a:solidFill>
-                <a:latin typeface="Calibri"/>
-                <a:cs typeface="Calibri"/>
-              </a:rPr>
-              <a:t> </a:t>
-            </a:r>
-            <a:r>
-              <a:rPr sz="1800" spc="-10" dirty="0" err="1">
+              <a:rPr lang="pt-BR" sz="1800" spc="-45" dirty="0">
+                <a:solidFill>
+                  <a:srgbClr val="7D7D7D"/>
+                </a:solidFill>
+                <a:latin typeface="Calibri"/>
+                <a:cs typeface="Calibri"/>
+              </a:rPr>
+              <a:t> </a:t>
+            </a:r>
+            <a:r>
+              <a:rPr lang="pt-BR" sz="1800" spc="-10" dirty="0">
                 <a:solidFill>
                   <a:srgbClr val="7D7D7D"/>
                 </a:solidFill>
@@ -19680,17 +19546,17 @@
               <a:t>primeiro</a:t>
             </a:r>
             <a:r>
-              <a:rPr sz="1800" spc="-40" dirty="0">
-                <a:solidFill>
-                  <a:srgbClr val="7D7D7D"/>
-                </a:solidFill>
-                <a:latin typeface="Calibri"/>
-                <a:cs typeface="Calibri"/>
-              </a:rPr>
-              <a:t> </a:t>
-            </a:r>
-            <a:r>
-              <a:rPr sz="1800" spc="-10" dirty="0">
+              <a:rPr lang="pt-BR" sz="1800" spc="-40" dirty="0">
+                <a:solidFill>
+                  <a:srgbClr val="7D7D7D"/>
+                </a:solidFill>
+                <a:latin typeface="Calibri"/>
+                <a:cs typeface="Calibri"/>
+              </a:rPr>
+              <a:t> </a:t>
+            </a:r>
+            <a:r>
+              <a:rPr lang="pt-BR" sz="1800" spc="-10" dirty="0">
                 <a:solidFill>
                   <a:srgbClr val="7D7D7D"/>
                 </a:solidFill>
@@ -19699,22 +19565,15 @@
               </a:rPr>
               <a:t>login)</a:t>
             </a:r>
-            <a:endParaRPr lang="pt-BR" sz="1800" spc="-10" dirty="0">
-              <a:solidFill>
-                <a:srgbClr val="7D7D7D"/>
-              </a:solidFill>
-              <a:latin typeface="Calibri"/>
-              <a:cs typeface="Calibri"/>
-            </a:endParaRPr>
           </a:p>
         </p:txBody>
       </p:sp>
       <p:pic>
         <p:nvPicPr>
-          <p:cNvPr id="6" name="Imagem 5">
+          <p:cNvPr id="4" name="img_bi">
             <a:extLst>
               <a:ext uri="{FF2B5EF4-FFF2-40B4-BE49-F238E27FC236}">
-                <a16:creationId xmlns:a16="http://schemas.microsoft.com/office/drawing/2014/main" xmlns="" id="{0862A068-BAB2-9093-F40D-26CA66681951}"/>
+                <a16:creationId xmlns:a16="http://schemas.microsoft.com/office/drawing/2014/main" id="{5A8820C8-4033-EC73-5DD9-08448B48F7A7}"/>
               </a:ext>
             </a:extLst>
           </p:cNvPr>
@@ -19739,10 +19598,589 @@
           </a:prstGeom>
         </p:spPr>
       </p:pic>
+      <p:sp>
+        <p:nvSpPr>
+          <p:cNvPr id="18" name="ct_bi">
+            <a:extLst>
+              <a:ext uri="{FF2B5EF4-FFF2-40B4-BE49-F238E27FC236}">
+                <a16:creationId xmlns:a16="http://schemas.microsoft.com/office/drawing/2014/main" id="{7758CEA6-2A9B-3E70-127E-D248C08C5FCA}"/>
+              </a:ext>
+            </a:extLst>
+          </p:cNvPr>
+          <p:cNvSpPr txBox="1"/>
+          <p:nvPr/>
+        </p:nvSpPr>
+        <p:spPr>
+          <a:xfrm>
+            <a:off x="704671" y="1597636"/>
+            <a:ext cx="8408019" cy="1490152"/>
+          </a:xfrm>
+          <a:prstGeom prst="rect">
+            <a:avLst/>
+          </a:prstGeom>
+          <a:noFill/>
+        </p:spPr>
+        <p:txBody>
+          <a:bodyPr wrap="square" rtlCol="0">
+            <a:spAutoFit/>
+          </a:bodyPr>
+          <a:lstStyle/>
+          <a:p>
+            <a:pPr marL="299085" indent="-286385">
+              <a:lnSpc>
+                <a:spcPct val="100000"/>
+              </a:lnSpc>
+              <a:spcBef>
+                <a:spcPts val="100"/>
+              </a:spcBef>
+              <a:buFont typeface="Wingdings"/>
+              <a:buChar char=""/>
+              <a:tabLst>
+                <a:tab pos="299085" algn="l"/>
+              </a:tabLst>
+            </a:pPr>
+            <a:r>
+              <a:rPr lang="pt-BR" sz="1800" dirty="0">
+                <a:solidFill>
+                  <a:srgbClr val="7D7D7D"/>
+                </a:solidFill>
+                <a:latin typeface="Calibri"/>
+                <a:cs typeface="Calibri"/>
+              </a:rPr>
+              <a:t>Login</a:t>
+            </a:r>
+            <a:r>
+              <a:rPr lang="pt-BR" sz="1800" spc="-40" dirty="0">
+                <a:solidFill>
+                  <a:srgbClr val="7D7D7D"/>
+                </a:solidFill>
+                <a:latin typeface="Calibri"/>
+                <a:cs typeface="Calibri"/>
+              </a:rPr>
+              <a:t> </a:t>
+            </a:r>
+            <a:r>
+              <a:rPr lang="pt-BR" sz="1800" dirty="0">
+                <a:solidFill>
+                  <a:srgbClr val="7D7D7D"/>
+                </a:solidFill>
+                <a:latin typeface="Calibri"/>
+                <a:cs typeface="Calibri"/>
+              </a:rPr>
+              <a:t>do Power BI</a:t>
+            </a:r>
+          </a:p>
+          <a:p>
+            <a:pPr marL="12700">
+              <a:spcBef>
+                <a:spcPts val="100"/>
+              </a:spcBef>
+              <a:tabLst>
+                <a:tab pos="299085" algn="l"/>
+              </a:tabLst>
+            </a:pPr>
+            <a:r>
+              <a:rPr lang="pt-BR" sz="1800" dirty="0">
+                <a:solidFill>
+                  <a:srgbClr val="7D7D7D"/>
+                </a:solidFill>
+                <a:latin typeface="Calibri"/>
+                <a:cs typeface="Calibri"/>
+              </a:rPr>
+              <a:t>O</a:t>
+            </a:r>
+            <a:r>
+              <a:rPr lang="pt-BR" sz="1800" spc="-60" dirty="0">
+                <a:solidFill>
+                  <a:srgbClr val="7D7D7D"/>
+                </a:solidFill>
+                <a:latin typeface="Calibri"/>
+                <a:cs typeface="Calibri"/>
+              </a:rPr>
+              <a:t> </a:t>
+            </a:r>
+            <a:r>
+              <a:rPr lang="pt-BR" sz="1800" dirty="0">
+                <a:solidFill>
+                  <a:srgbClr val="7D7D7D"/>
+                </a:solidFill>
+                <a:latin typeface="Calibri"/>
+                <a:cs typeface="Calibri"/>
+              </a:rPr>
+              <a:t>sistema</a:t>
+            </a:r>
+            <a:r>
+              <a:rPr lang="pt-BR" sz="1800" spc="-55" dirty="0">
+                <a:solidFill>
+                  <a:srgbClr val="7D7D7D"/>
+                </a:solidFill>
+                <a:latin typeface="Calibri"/>
+                <a:cs typeface="Calibri"/>
+              </a:rPr>
+              <a:t> </a:t>
+            </a:r>
+            <a:r>
+              <a:rPr lang="pt-BR" sz="1800" dirty="0">
+                <a:solidFill>
+                  <a:srgbClr val="7D7D7D"/>
+                </a:solidFill>
+                <a:latin typeface="Calibri"/>
+                <a:cs typeface="Calibri"/>
+              </a:rPr>
+              <a:t>pode</a:t>
+            </a:r>
+            <a:r>
+              <a:rPr lang="pt-BR" sz="1800" spc="-25" dirty="0">
+                <a:solidFill>
+                  <a:srgbClr val="7D7D7D"/>
+                </a:solidFill>
+                <a:latin typeface="Calibri"/>
+                <a:cs typeface="Calibri"/>
+              </a:rPr>
+              <a:t> </a:t>
+            </a:r>
+            <a:r>
+              <a:rPr lang="pt-BR" sz="1800" dirty="0">
+                <a:solidFill>
+                  <a:srgbClr val="7D7D7D"/>
+                </a:solidFill>
+                <a:latin typeface="Calibri"/>
+                <a:cs typeface="Calibri"/>
+              </a:rPr>
+              <a:t>ser</a:t>
+            </a:r>
+            <a:r>
+              <a:rPr lang="pt-BR" sz="1800" spc="-55" dirty="0">
+                <a:solidFill>
+                  <a:srgbClr val="7D7D7D"/>
+                </a:solidFill>
+                <a:latin typeface="Calibri"/>
+                <a:cs typeface="Calibri"/>
+              </a:rPr>
+              <a:t> </a:t>
+            </a:r>
+            <a:r>
+              <a:rPr lang="pt-BR" sz="1800" dirty="0">
+                <a:solidFill>
+                  <a:srgbClr val="7D7D7D"/>
+                </a:solidFill>
+                <a:latin typeface="Calibri"/>
+                <a:cs typeface="Calibri"/>
+              </a:rPr>
+              <a:t>acessado</a:t>
+            </a:r>
+            <a:r>
+              <a:rPr lang="pt-BR" sz="1800" spc="-75" dirty="0">
+                <a:solidFill>
+                  <a:srgbClr val="7D7D7D"/>
+                </a:solidFill>
+                <a:latin typeface="Calibri"/>
+                <a:cs typeface="Calibri"/>
+              </a:rPr>
+              <a:t> </a:t>
+            </a:r>
+            <a:r>
+              <a:rPr lang="pt-BR" sz="1800" dirty="0">
+                <a:solidFill>
+                  <a:srgbClr val="7D7D7D"/>
+                </a:solidFill>
+                <a:latin typeface="Calibri"/>
+                <a:cs typeface="Calibri"/>
+              </a:rPr>
+              <a:t>pelo</a:t>
+            </a:r>
+            <a:r>
+              <a:rPr lang="pt-BR" sz="1800" spc="-35" dirty="0">
+                <a:solidFill>
+                  <a:srgbClr val="7D7D7D"/>
+                </a:solidFill>
+                <a:latin typeface="Calibri"/>
+                <a:cs typeface="Calibri"/>
+              </a:rPr>
+              <a:t> </a:t>
+            </a:r>
+            <a:r>
+              <a:rPr lang="pt-BR" sz="1800" dirty="0">
+                <a:solidFill>
+                  <a:srgbClr val="7D7D7D"/>
+                </a:solidFill>
+                <a:latin typeface="Calibri"/>
+                <a:cs typeface="Calibri"/>
+              </a:rPr>
+              <a:t>link</a:t>
+            </a:r>
+            <a:r>
+              <a:rPr lang="pt-BR" spc="-5" dirty="0">
+                <a:solidFill>
+                  <a:srgbClr val="7D7D7D"/>
+                </a:solidFill>
+                <a:latin typeface="Calibri"/>
+                <a:cs typeface="Calibri"/>
+              </a:rPr>
+              <a:t>: </a:t>
+            </a:r>
+            <a:r>
+              <a:rPr lang="pt-BR" spc="-5" dirty="0">
+                <a:solidFill>
+                  <a:srgbClr val="7D7D7D"/>
+                </a:solidFill>
+                <a:latin typeface="Calibri"/>
+                <a:cs typeface="Calibri"/>
+                <a:hlinkClick r:id="rId5"/>
+              </a:rPr>
+              <a:t>Power BI</a:t>
+            </a:r>
+            <a:endParaRPr lang="pt-BR" sz="1800" dirty="0">
+              <a:latin typeface="Calibri"/>
+              <a:cs typeface="Calibri"/>
+            </a:endParaRPr>
+          </a:p>
+          <a:p>
+            <a:pPr marL="755650" lvl="1" indent="-285750">
+              <a:spcBef>
+                <a:spcPts val="5"/>
+              </a:spcBef>
+              <a:buFont typeface="Wingdings"/>
+              <a:buChar char=""/>
+              <a:tabLst>
+                <a:tab pos="755650" algn="l"/>
+              </a:tabLst>
+            </a:pPr>
+            <a:r>
+              <a:rPr lang="pt-BR" dirty="0">
+                <a:solidFill>
+                  <a:srgbClr val="7D7D7D"/>
+                </a:solidFill>
+                <a:latin typeface="Calibri"/>
+                <a:cs typeface="Calibri"/>
+              </a:rPr>
+              <a:t>Usuário: {{USUARIO}}@itabom.com.br</a:t>
+            </a:r>
+          </a:p>
+          <a:p>
+            <a:pPr marL="755650" lvl="1" indent="-285750">
+              <a:lnSpc>
+                <a:spcPct val="100000"/>
+              </a:lnSpc>
+              <a:buFont typeface="Wingdings"/>
+              <a:buChar char=""/>
+              <a:tabLst>
+                <a:tab pos="755650" algn="l"/>
+              </a:tabLst>
+            </a:pPr>
+            <a:r>
+              <a:rPr lang="pt-BR" sz="1800" dirty="0">
+                <a:solidFill>
+                  <a:srgbClr val="7D7D7D"/>
+                </a:solidFill>
+                <a:latin typeface="Calibri"/>
+                <a:cs typeface="Calibri"/>
+              </a:rPr>
+              <a:t>Senha: </a:t>
+            </a:r>
+            <a:r>
+              <a:rPr lang="pt-BR" dirty="0">
+                <a:solidFill>
+                  <a:srgbClr val="7D7D7D"/>
+                </a:solidFill>
+                <a:latin typeface="Calibri"/>
+                <a:cs typeface="Calibri"/>
+              </a:rPr>
+              <a:t>{{SENHA}}</a:t>
+            </a:r>
+            <a:endParaRPr lang="pt-BR" sz="1800" dirty="0">
+              <a:latin typeface="Calibri"/>
+              <a:cs typeface="Calibri"/>
+            </a:endParaRPr>
+          </a:p>
+          <a:p>
+            <a:pPr marL="755650" lvl="1" indent="-285750">
+              <a:lnSpc>
+                <a:spcPct val="100000"/>
+              </a:lnSpc>
+              <a:buFont typeface="Wingdings"/>
+              <a:buChar char=""/>
+              <a:tabLst>
+                <a:tab pos="755650" algn="l"/>
+              </a:tabLst>
+            </a:pPr>
+            <a:r>
+              <a:rPr lang="pt-BR" sz="1800" dirty="0">
+                <a:solidFill>
+                  <a:srgbClr val="7D7D7D"/>
+                </a:solidFill>
+                <a:latin typeface="Calibri"/>
+                <a:cs typeface="Calibri"/>
+              </a:rPr>
+              <a:t>OBS.</a:t>
+            </a:r>
+            <a:r>
+              <a:rPr lang="pt-BR" sz="1800" spc="-80" dirty="0">
+                <a:solidFill>
+                  <a:srgbClr val="7D7D7D"/>
+                </a:solidFill>
+                <a:latin typeface="Calibri"/>
+                <a:cs typeface="Calibri"/>
+              </a:rPr>
+              <a:t> </a:t>
+            </a:r>
+            <a:r>
+              <a:rPr lang="pt-BR" sz="1800" dirty="0">
+                <a:solidFill>
+                  <a:srgbClr val="7D7D7D"/>
+                </a:solidFill>
+                <a:latin typeface="Calibri"/>
+                <a:cs typeface="Calibri"/>
+              </a:rPr>
+              <a:t>(Por</a:t>
+            </a:r>
+            <a:r>
+              <a:rPr lang="pt-BR" sz="1800" spc="-50" dirty="0">
+                <a:solidFill>
+                  <a:srgbClr val="7D7D7D"/>
+                </a:solidFill>
+                <a:latin typeface="Calibri"/>
+                <a:cs typeface="Calibri"/>
+              </a:rPr>
+              <a:t> </a:t>
+            </a:r>
+            <a:r>
+              <a:rPr lang="pt-BR" sz="1800" spc="-10" dirty="0">
+                <a:solidFill>
+                  <a:srgbClr val="7D7D7D"/>
+                </a:solidFill>
+                <a:latin typeface="Calibri"/>
+                <a:cs typeface="Calibri"/>
+              </a:rPr>
+              <a:t>questões</a:t>
+            </a:r>
+            <a:r>
+              <a:rPr lang="pt-BR" sz="1800" spc="-50" dirty="0">
+                <a:solidFill>
+                  <a:srgbClr val="7D7D7D"/>
+                </a:solidFill>
+                <a:latin typeface="Calibri"/>
+                <a:cs typeface="Calibri"/>
+              </a:rPr>
+              <a:t> </a:t>
+            </a:r>
+            <a:r>
+              <a:rPr lang="pt-BR" sz="1800" dirty="0">
+                <a:solidFill>
+                  <a:srgbClr val="7D7D7D"/>
+                </a:solidFill>
+                <a:latin typeface="Calibri"/>
+                <a:cs typeface="Calibri"/>
+              </a:rPr>
+              <a:t>de</a:t>
+            </a:r>
+            <a:r>
+              <a:rPr lang="pt-BR" sz="1800" spc="-45" dirty="0">
+                <a:solidFill>
+                  <a:srgbClr val="7D7D7D"/>
+                </a:solidFill>
+                <a:latin typeface="Calibri"/>
+                <a:cs typeface="Calibri"/>
+              </a:rPr>
+              <a:t> </a:t>
+            </a:r>
+            <a:r>
+              <a:rPr lang="pt-BR" sz="1800" spc="-20" dirty="0">
+                <a:solidFill>
+                  <a:srgbClr val="7D7D7D"/>
+                </a:solidFill>
+                <a:latin typeface="Calibri"/>
+                <a:cs typeface="Calibri"/>
+              </a:rPr>
+              <a:t>segurança,</a:t>
+            </a:r>
+            <a:r>
+              <a:rPr lang="pt-BR" sz="1800" spc="-35" dirty="0">
+                <a:solidFill>
+                  <a:srgbClr val="7D7D7D"/>
+                </a:solidFill>
+                <a:latin typeface="Calibri"/>
+                <a:cs typeface="Calibri"/>
+              </a:rPr>
+              <a:t> </a:t>
+            </a:r>
+            <a:r>
+              <a:rPr lang="pt-BR" sz="1800" spc="-10" dirty="0">
+                <a:solidFill>
+                  <a:srgbClr val="7D7D7D"/>
+                </a:solidFill>
+                <a:latin typeface="Calibri"/>
+                <a:cs typeface="Calibri"/>
+              </a:rPr>
+              <a:t>favor</a:t>
+            </a:r>
+            <a:r>
+              <a:rPr lang="pt-BR" sz="1800" spc="-85" dirty="0">
+                <a:solidFill>
+                  <a:srgbClr val="7D7D7D"/>
+                </a:solidFill>
+                <a:latin typeface="Calibri"/>
+                <a:cs typeface="Calibri"/>
+              </a:rPr>
+              <a:t> </a:t>
+            </a:r>
+            <a:r>
+              <a:rPr lang="pt-BR" sz="1800" dirty="0">
+                <a:solidFill>
+                  <a:srgbClr val="7D7D7D"/>
+                </a:solidFill>
+                <a:latin typeface="Calibri"/>
+                <a:cs typeface="Calibri"/>
+              </a:rPr>
+              <a:t>trocar</a:t>
+            </a:r>
+            <a:r>
+              <a:rPr lang="pt-BR" sz="1800" spc="-55" dirty="0">
+                <a:solidFill>
+                  <a:srgbClr val="7D7D7D"/>
+                </a:solidFill>
+                <a:latin typeface="Calibri"/>
+                <a:cs typeface="Calibri"/>
+              </a:rPr>
+              <a:t> </a:t>
+            </a:r>
+            <a:r>
+              <a:rPr lang="pt-BR" sz="1800" dirty="0">
+                <a:solidFill>
+                  <a:srgbClr val="7D7D7D"/>
+                </a:solidFill>
+                <a:latin typeface="Calibri"/>
+                <a:cs typeface="Calibri"/>
+              </a:rPr>
+              <a:t>a</a:t>
+            </a:r>
+            <a:r>
+              <a:rPr lang="pt-BR" sz="1800" spc="-45" dirty="0">
+                <a:solidFill>
+                  <a:srgbClr val="7D7D7D"/>
+                </a:solidFill>
+                <a:latin typeface="Calibri"/>
+                <a:cs typeface="Calibri"/>
+              </a:rPr>
+              <a:t> </a:t>
+            </a:r>
+            <a:r>
+              <a:rPr lang="pt-BR" sz="1800" dirty="0">
+                <a:solidFill>
+                  <a:srgbClr val="7D7D7D"/>
+                </a:solidFill>
+                <a:latin typeface="Calibri"/>
+                <a:cs typeface="Calibri"/>
+              </a:rPr>
+              <a:t>senha</a:t>
+            </a:r>
+            <a:r>
+              <a:rPr lang="pt-BR" sz="1800" spc="-65" dirty="0">
+                <a:solidFill>
+                  <a:srgbClr val="7D7D7D"/>
+                </a:solidFill>
+                <a:latin typeface="Calibri"/>
+                <a:cs typeface="Calibri"/>
+              </a:rPr>
+              <a:t> </a:t>
+            </a:r>
+            <a:r>
+              <a:rPr lang="pt-BR" sz="1800" dirty="0">
+                <a:solidFill>
+                  <a:srgbClr val="7D7D7D"/>
+                </a:solidFill>
+                <a:latin typeface="Calibri"/>
+                <a:cs typeface="Calibri"/>
+              </a:rPr>
+              <a:t>logo</a:t>
+            </a:r>
+            <a:r>
+              <a:rPr lang="pt-BR" sz="1800" spc="-45" dirty="0">
+                <a:solidFill>
+                  <a:srgbClr val="7D7D7D"/>
+                </a:solidFill>
+                <a:latin typeface="Calibri"/>
+                <a:cs typeface="Calibri"/>
+              </a:rPr>
+              <a:t> </a:t>
+            </a:r>
+            <a:r>
+              <a:rPr lang="pt-BR" sz="1800" dirty="0">
+                <a:solidFill>
+                  <a:srgbClr val="7D7D7D"/>
+                </a:solidFill>
+                <a:latin typeface="Calibri"/>
+                <a:cs typeface="Calibri"/>
+              </a:rPr>
+              <a:t>após</a:t>
+            </a:r>
+            <a:r>
+              <a:rPr lang="pt-BR" sz="1800" spc="-55" dirty="0">
+                <a:solidFill>
+                  <a:srgbClr val="7D7D7D"/>
+                </a:solidFill>
+                <a:latin typeface="Calibri"/>
+                <a:cs typeface="Calibri"/>
+              </a:rPr>
+              <a:t> </a:t>
+            </a:r>
+            <a:r>
+              <a:rPr lang="pt-BR" sz="1800" dirty="0">
+                <a:solidFill>
+                  <a:srgbClr val="7D7D7D"/>
+                </a:solidFill>
+                <a:latin typeface="Calibri"/>
+                <a:cs typeface="Calibri"/>
+              </a:rPr>
+              <a:t>o</a:t>
+            </a:r>
+            <a:r>
+              <a:rPr lang="pt-BR" sz="1800" spc="-45" dirty="0">
+                <a:solidFill>
+                  <a:srgbClr val="7D7D7D"/>
+                </a:solidFill>
+                <a:latin typeface="Calibri"/>
+                <a:cs typeface="Calibri"/>
+              </a:rPr>
+              <a:t> </a:t>
+            </a:r>
+            <a:r>
+              <a:rPr lang="pt-BR" sz="1800" spc="-10" dirty="0">
+                <a:solidFill>
+                  <a:srgbClr val="7D7D7D"/>
+                </a:solidFill>
+                <a:latin typeface="Calibri"/>
+                <a:cs typeface="Calibri"/>
+              </a:rPr>
+              <a:t>primeiro</a:t>
+            </a:r>
+            <a:r>
+              <a:rPr lang="pt-BR" sz="1800" spc="-40" dirty="0">
+                <a:solidFill>
+                  <a:srgbClr val="7D7D7D"/>
+                </a:solidFill>
+                <a:latin typeface="Calibri"/>
+                <a:cs typeface="Calibri"/>
+              </a:rPr>
+              <a:t> </a:t>
+            </a:r>
+            <a:r>
+              <a:rPr lang="pt-BR" sz="1800" spc="-10" dirty="0">
+                <a:solidFill>
+                  <a:srgbClr val="7D7D7D"/>
+                </a:solidFill>
+                <a:latin typeface="Calibri"/>
+                <a:cs typeface="Calibri"/>
+              </a:rPr>
+              <a:t>login)</a:t>
+            </a:r>
+          </a:p>
+        </p:txBody>
+      </p:sp>
     </p:spTree>
     <p:extLst>
       <p:ext uri="{BB962C8B-B14F-4D97-AF65-F5344CB8AC3E}">
-        <p14:creationId xmlns:p14="http://schemas.microsoft.com/office/powerpoint/2010/main" val="3369121352"/>
+        <p14:creationId xmlns:p14="http://schemas.microsoft.com/office/powerpoint/2010/main" val="1599395792"/>
       </p:ext>
     </p:extLst>
   </p:cSld>
@@ -20843,7 +21281,7 @@
           <p:cNvPr id="19" name="Agrupar 18">
             <a:extLst>
               <a:ext uri="{FF2B5EF4-FFF2-40B4-BE49-F238E27FC236}">
-                <a16:creationId xmlns:a16="http://schemas.microsoft.com/office/drawing/2014/main" xmlns="" id="{4A9F5C77-9FDA-F636-C032-A5EE4637808A}"/>
+                <a16:creationId xmlns:a16="http://schemas.microsoft.com/office/drawing/2014/main" id="{4A9F5C77-9FDA-F636-C032-A5EE4637808A}"/>
               </a:ext>
             </a:extLst>
           </p:cNvPr>
@@ -20983,7 +21421,7 @@
           <p:cNvPr id="26" name="Agrupar 25">
             <a:extLst>
               <a:ext uri="{FF2B5EF4-FFF2-40B4-BE49-F238E27FC236}">
-                <a16:creationId xmlns:a16="http://schemas.microsoft.com/office/drawing/2014/main" xmlns="" id="{E4493763-4EC4-7DF1-2F14-D6FA5E01D513}"/>
+                <a16:creationId xmlns:a16="http://schemas.microsoft.com/office/drawing/2014/main" id="{E4493763-4EC4-7DF1-2F14-D6FA5E01D513}"/>
               </a:ext>
             </a:extLst>
           </p:cNvPr>
@@ -21262,7 +21700,7 @@
           <p:cNvPr id="25" name="Agrupar 24">
             <a:extLst>
               <a:ext uri="{FF2B5EF4-FFF2-40B4-BE49-F238E27FC236}">
-                <a16:creationId xmlns:a16="http://schemas.microsoft.com/office/drawing/2014/main" xmlns="" id="{BEE6D2A7-0D3B-F267-16E2-5429818387D1}"/>
+                <a16:creationId xmlns:a16="http://schemas.microsoft.com/office/drawing/2014/main" id="{BEE6D2A7-0D3B-F267-16E2-5429818387D1}"/>
               </a:ext>
             </a:extLst>
           </p:cNvPr>
@@ -21282,7 +21720,7 @@
             <p:cNvPr id="23" name="object 12">
               <a:extLst>
                 <a:ext uri="{FF2B5EF4-FFF2-40B4-BE49-F238E27FC236}">
-                  <a16:creationId xmlns:a16="http://schemas.microsoft.com/office/drawing/2014/main" xmlns="" id="{E31B8CD8-FE73-AC0F-C168-C9A91F89FCD4}"/>
+                  <a16:creationId xmlns:a16="http://schemas.microsoft.com/office/drawing/2014/main" id="{E31B8CD8-FE73-AC0F-C168-C9A91F89FCD4}"/>
                 </a:ext>
               </a:extLst>
             </p:cNvPr>
@@ -21395,7 +21833,7 @@
             <p:cNvPr id="18" name="Imagem 17" descr="Homem de barba e camisa preta&#10;&#10;Descrição gerada automaticamente">
               <a:extLst>
                 <a:ext uri="{FF2B5EF4-FFF2-40B4-BE49-F238E27FC236}">
-                  <a16:creationId xmlns:a16="http://schemas.microsoft.com/office/drawing/2014/main" xmlns="" id="{39913945-FD17-6284-5969-B4CC128E0EB0}"/>
+                  <a16:creationId xmlns:a16="http://schemas.microsoft.com/office/drawing/2014/main" id="{39913945-FD17-6284-5969-B4CC128E0EB0}"/>
                 </a:ext>
               </a:extLst>
             </p:cNvPr>
@@ -21432,7 +21870,7 @@
           <p:cNvPr id="20" name="Agrupar 19">
             <a:extLst>
               <a:ext uri="{FF2B5EF4-FFF2-40B4-BE49-F238E27FC236}">
-                <a16:creationId xmlns:a16="http://schemas.microsoft.com/office/drawing/2014/main" xmlns="" id="{56C03B9F-1964-CED7-CE65-4573A624E82F}"/>
+                <a16:creationId xmlns:a16="http://schemas.microsoft.com/office/drawing/2014/main" id="{56C03B9F-1964-CED7-CE65-4573A624E82F}"/>
               </a:ext>
             </a:extLst>
           </p:cNvPr>
@@ -21474,7 +21912,7 @@
             <p:cNvPr id="17" name="object 14">
               <a:extLst>
                 <a:ext uri="{FF2B5EF4-FFF2-40B4-BE49-F238E27FC236}">
-                  <a16:creationId xmlns:a16="http://schemas.microsoft.com/office/drawing/2014/main" xmlns="" id="{F59718F6-2A26-6100-33C7-C7794BF2CD90}"/>
+                  <a16:creationId xmlns:a16="http://schemas.microsoft.com/office/drawing/2014/main" id="{F59718F6-2A26-6100-33C7-C7794BF2CD90}"/>
                 </a:ext>
               </a:extLst>
             </p:cNvPr>
@@ -21588,7 +22026,7 @@
           <p:cNvPr id="30" name="object 2">
             <a:extLst>
               <a:ext uri="{FF2B5EF4-FFF2-40B4-BE49-F238E27FC236}">
-                <a16:creationId xmlns:a16="http://schemas.microsoft.com/office/drawing/2014/main" xmlns="" id="{299FE8B9-DB81-0928-8F5F-D2EAF751A962}"/>
+                <a16:creationId xmlns:a16="http://schemas.microsoft.com/office/drawing/2014/main" id="{299FE8B9-DB81-0928-8F5F-D2EAF751A962}"/>
               </a:ext>
             </a:extLst>
           </p:cNvPr>
@@ -21640,7 +22078,7 @@
           <p:cNvPr id="6" name="object 12">
             <a:extLst>
               <a:ext uri="{FF2B5EF4-FFF2-40B4-BE49-F238E27FC236}">
-                <a16:creationId xmlns:a16="http://schemas.microsoft.com/office/drawing/2014/main" xmlns="" id="{D4C729DB-BCEC-317A-871D-EDABD7780E54}"/>
+                <a16:creationId xmlns:a16="http://schemas.microsoft.com/office/drawing/2014/main" id="{D4C729DB-BCEC-317A-871D-EDABD7780E54}"/>
               </a:ext>
             </a:extLst>
           </p:cNvPr>
@@ -21769,7 +22207,7 @@
           <p:cNvPr id="8" name="Imagem 7" descr="Cabeça de gato&#10;&#10;O conteúdo gerado por IA pode estar incorreto.">
             <a:extLst>
               <a:ext uri="{FF2B5EF4-FFF2-40B4-BE49-F238E27FC236}">
-                <a16:creationId xmlns:a16="http://schemas.microsoft.com/office/drawing/2014/main" xmlns="" id="{EB983B60-9DC8-B667-1100-6CC9A624A0E7}"/>
+                <a16:creationId xmlns:a16="http://schemas.microsoft.com/office/drawing/2014/main" id="{EB983B60-9DC8-B667-1100-6CC9A624A0E7}"/>
               </a:ext>
             </a:extLst>
           </p:cNvPr>
@@ -21812,7 +22250,7 @@
           <p:cNvPr id="5" name="Imagem 4" descr="Homem com camisa azul&#10;&#10;O conteúdo gerado por IA pode estar incorreto.">
             <a:extLst>
               <a:ext uri="{FF2B5EF4-FFF2-40B4-BE49-F238E27FC236}">
-                <a16:creationId xmlns:a16="http://schemas.microsoft.com/office/drawing/2014/main" xmlns="" id="{43921BD6-5D6B-B91E-28FA-E3B5D5F3636B}"/>
+                <a16:creationId xmlns:a16="http://schemas.microsoft.com/office/drawing/2014/main" id="{43921BD6-5D6B-B91E-28FA-E3B5D5F3636B}"/>
               </a:ext>
             </a:extLst>
           </p:cNvPr>

--- a/onboarding/template_onboarding.pptx
+++ b/onboarding/template_onboarding.pptx
@@ -273,7 +273,7 @@
           <a:p>
             <a:fld id="{1D8BD707-D9CF-40AE-B4C6-C98DA3205C09}" type="datetimeFigureOut">
               <a:rPr lang="en-US"/>
-              <a:t>6/10/2026</a:t>
+              <a:t>6/11/2026</a:t>
             </a:fld>
             <a:endParaRPr lang="en-US"/>
           </a:p>
@@ -450,7 +450,7 @@
           <a:p>
             <a:fld id="{1D8BD707-D9CF-40AE-B4C6-C98DA3205C09}" type="datetimeFigureOut">
               <a:rPr lang="en-US"/>
-              <a:t>6/10/2026</a:t>
+              <a:t>6/11/2026</a:t>
             </a:fld>
             <a:endParaRPr lang="en-US"/>
           </a:p>
@@ -664,7 +664,7 @@
           <a:p>
             <a:fld id="{1D8BD707-D9CF-40AE-B4C6-C98DA3205C09}" type="datetimeFigureOut">
               <a:rPr lang="en-US"/>
-              <a:t>6/10/2026</a:t>
+              <a:t>6/11/2026</a:t>
             </a:fld>
             <a:endParaRPr lang="en-US"/>
           </a:p>
@@ -812,7 +812,7 @@
           <a:p>
             <a:fld id="{1D8BD707-D9CF-40AE-B4C6-C98DA3205C09}" type="datetimeFigureOut">
               <a:rPr lang="en-US"/>
-              <a:t>6/10/2026</a:t>
+              <a:t>6/11/2026</a:t>
             </a:fld>
             <a:endParaRPr lang="en-US"/>
           </a:p>
@@ -2829,7 +2829,7 @@
           <a:p>
             <a:fld id="{1D8BD707-D9CF-40AE-B4C6-C98DA3205C09}" type="datetimeFigureOut">
               <a:rPr lang="en-US"/>
-              <a:t>6/10/2026</a:t>
+              <a:t>6/11/2026</a:t>
             </a:fld>
             <a:endParaRPr lang="en-US"/>
           </a:p>
@@ -3076,7 +3076,7 @@
           <a:p>
             <a:fld id="{1D8BD707-D9CF-40AE-B4C6-C98DA3205C09}" type="datetimeFigureOut">
               <a:rPr lang="en-US"/>
-              <a:t>6/10/2026</a:t>
+              <a:t>6/11/2026</a:t>
             </a:fld>
             <a:endParaRPr lang="en-US"/>
           </a:p>
@@ -3464,545 +3464,6 @@
           <a:chExt cx="0" cy="0"/>
         </a:xfrm>
       </p:grpSpPr>
-      <p:grpSp>
-        <p:nvGrpSpPr>
-          <p:cNvPr id="2" name="object 2"/>
-          <p:cNvGrpSpPr/>
-          <p:nvPr/>
-        </p:nvGrpSpPr>
-        <p:grpSpPr>
-          <a:xfrm>
-            <a:off x="5036819" y="4447041"/>
-            <a:ext cx="1701164" cy="527685"/>
-            <a:chOff x="5055108" y="3532666"/>
-            <a:chExt cx="1701164" cy="527685"/>
-          </a:xfrm>
-        </p:grpSpPr>
-        <p:pic>
-          <p:nvPicPr>
-            <p:cNvPr id="3" name="object 3"/>
-            <p:cNvPicPr/>
-            <p:nvPr/>
-          </p:nvPicPr>
-          <p:blipFill>
-            <a:blip r:embed="rId2" cstate="print"/>
-            <a:stretch>
-              <a:fillRect/>
-            </a:stretch>
-          </p:blipFill>
-          <p:spPr>
-            <a:xfrm>
-              <a:off x="5055108" y="3532666"/>
-              <a:ext cx="1700784" cy="527268"/>
-            </a:xfrm>
-            <a:prstGeom prst="rect">
-              <a:avLst/>
-            </a:prstGeom>
-          </p:spPr>
-        </p:pic>
-        <p:pic>
-          <p:nvPicPr>
-            <p:cNvPr id="4" name="object 4"/>
-            <p:cNvPicPr/>
-            <p:nvPr/>
-          </p:nvPicPr>
-          <p:blipFill>
-            <a:blip r:embed="rId3" cstate="print"/>
-            <a:stretch>
-              <a:fillRect/>
-            </a:stretch>
-          </p:blipFill>
-          <p:spPr>
-            <a:xfrm>
-              <a:off x="5093208" y="3544823"/>
-              <a:ext cx="1629156" cy="461771"/>
-            </a:xfrm>
-            <a:prstGeom prst="rect">
-              <a:avLst/>
-            </a:prstGeom>
-          </p:spPr>
-        </p:pic>
-        <p:sp>
-          <p:nvSpPr>
-            <p:cNvPr id="5" name="object 5"/>
-            <p:cNvSpPr/>
-            <p:nvPr/>
-          </p:nvSpPr>
-          <p:spPr>
-            <a:xfrm>
-              <a:off x="5093208" y="3544823"/>
-              <a:ext cx="1629410" cy="461645"/>
-            </a:xfrm>
-            <a:custGeom>
-              <a:avLst/>
-              <a:gdLst/>
-              <a:ahLst/>
-              <a:cxnLst/>
-              <a:rect l="l" t="t" r="r" b="b"/>
-              <a:pathLst>
-                <a:path w="1629409" h="461645">
-                  <a:moveTo>
-                    <a:pt x="0" y="76834"/>
-                  </a:moveTo>
-                  <a:lnTo>
-                    <a:pt x="6095" y="46989"/>
-                  </a:lnTo>
-                  <a:lnTo>
-                    <a:pt x="22478" y="22478"/>
-                  </a:lnTo>
-                  <a:lnTo>
-                    <a:pt x="46989" y="6096"/>
-                  </a:lnTo>
-                  <a:lnTo>
-                    <a:pt x="76962" y="0"/>
-                  </a:lnTo>
-                  <a:lnTo>
-                    <a:pt x="1551939" y="0"/>
-                  </a:lnTo>
-                  <a:lnTo>
-                    <a:pt x="1581912" y="6096"/>
-                  </a:lnTo>
-                  <a:lnTo>
-                    <a:pt x="1606422" y="22478"/>
-                  </a:lnTo>
-                  <a:lnTo>
-                    <a:pt x="1622806" y="46989"/>
-                  </a:lnTo>
-                  <a:lnTo>
-                    <a:pt x="1628901" y="76834"/>
-                  </a:lnTo>
-                  <a:lnTo>
-                    <a:pt x="1628901" y="384428"/>
-                  </a:lnTo>
-                  <a:lnTo>
-                    <a:pt x="1622806" y="414274"/>
-                  </a:lnTo>
-                  <a:lnTo>
-                    <a:pt x="1606422" y="438784"/>
-                  </a:lnTo>
-                  <a:lnTo>
-                    <a:pt x="1581912" y="455168"/>
-                  </a:lnTo>
-                  <a:lnTo>
-                    <a:pt x="1551939" y="461263"/>
-                  </a:lnTo>
-                  <a:lnTo>
-                    <a:pt x="76962" y="461263"/>
-                  </a:lnTo>
-                  <a:lnTo>
-                    <a:pt x="46989" y="455168"/>
-                  </a:lnTo>
-                  <a:lnTo>
-                    <a:pt x="22478" y="438784"/>
-                  </a:lnTo>
-                  <a:lnTo>
-                    <a:pt x="6095" y="414274"/>
-                  </a:lnTo>
-                  <a:lnTo>
-                    <a:pt x="0" y="384428"/>
-                  </a:lnTo>
-                  <a:lnTo>
-                    <a:pt x="0" y="76834"/>
-                  </a:lnTo>
-                  <a:close/>
-                </a:path>
-              </a:pathLst>
-            </a:custGeom>
-            <a:ln w="9524">
-              <a:solidFill>
-                <a:srgbClr val="96B852"/>
-              </a:solidFill>
-            </a:ln>
-          </p:spPr>
-          <p:txBody>
-            <a:bodyPr wrap="square" lIns="0" tIns="0" rIns="0" bIns="0" rtlCol="0"/>
-            <a:lstStyle/>
-            <a:p>
-              <a:endParaRPr/>
-            </a:p>
-          </p:txBody>
-        </p:sp>
-      </p:grpSp>
-      <p:grpSp>
-        <p:nvGrpSpPr>
-          <p:cNvPr id="6" name="object 6"/>
-          <p:cNvGrpSpPr/>
-          <p:nvPr/>
-        </p:nvGrpSpPr>
-        <p:grpSpPr>
-          <a:xfrm>
-            <a:off x="5950840" y="5369062"/>
-            <a:ext cx="1701164" cy="527685"/>
-            <a:chOff x="5105400" y="4454687"/>
-            <a:chExt cx="1701164" cy="527685"/>
-          </a:xfrm>
-        </p:grpSpPr>
-        <p:pic>
-          <p:nvPicPr>
-            <p:cNvPr id="7" name="object 7"/>
-            <p:cNvPicPr/>
-            <p:nvPr/>
-          </p:nvPicPr>
-          <p:blipFill>
-            <a:blip r:embed="rId2" cstate="print"/>
-            <a:stretch>
-              <a:fillRect/>
-            </a:stretch>
-          </p:blipFill>
-          <p:spPr>
-            <a:xfrm>
-              <a:off x="5105400" y="4454687"/>
-              <a:ext cx="1700783" cy="527268"/>
-            </a:xfrm>
-            <a:prstGeom prst="rect">
-              <a:avLst/>
-            </a:prstGeom>
-          </p:spPr>
-        </p:pic>
-        <p:pic>
-          <p:nvPicPr>
-            <p:cNvPr id="8" name="object 8"/>
-            <p:cNvPicPr/>
-            <p:nvPr/>
-          </p:nvPicPr>
-          <p:blipFill>
-            <a:blip r:embed="rId4" cstate="print"/>
-            <a:stretch>
-              <a:fillRect/>
-            </a:stretch>
-          </p:blipFill>
-          <p:spPr>
-            <a:xfrm>
-              <a:off x="5143500" y="4466843"/>
-              <a:ext cx="1629155" cy="461771"/>
-            </a:xfrm>
-            <a:prstGeom prst="rect">
-              <a:avLst/>
-            </a:prstGeom>
-          </p:spPr>
-        </p:pic>
-        <p:sp>
-          <p:nvSpPr>
-            <p:cNvPr id="9" name="object 9"/>
-            <p:cNvSpPr/>
-            <p:nvPr/>
-          </p:nvSpPr>
-          <p:spPr>
-            <a:xfrm>
-              <a:off x="5143500" y="4466843"/>
-              <a:ext cx="1629410" cy="461645"/>
-            </a:xfrm>
-            <a:custGeom>
-              <a:avLst/>
-              <a:gdLst/>
-              <a:ahLst/>
-              <a:cxnLst/>
-              <a:rect l="l" t="t" r="r" b="b"/>
-              <a:pathLst>
-                <a:path w="1629409" h="461645">
-                  <a:moveTo>
-                    <a:pt x="0" y="76834"/>
-                  </a:moveTo>
-                  <a:lnTo>
-                    <a:pt x="6096" y="46989"/>
-                  </a:lnTo>
-                  <a:lnTo>
-                    <a:pt x="22478" y="22478"/>
-                  </a:lnTo>
-                  <a:lnTo>
-                    <a:pt x="46989" y="6095"/>
-                  </a:lnTo>
-                  <a:lnTo>
-                    <a:pt x="76962" y="0"/>
-                  </a:lnTo>
-                  <a:lnTo>
-                    <a:pt x="1551940" y="0"/>
-                  </a:lnTo>
-                  <a:lnTo>
-                    <a:pt x="1581911" y="6095"/>
-                  </a:lnTo>
-                  <a:lnTo>
-                    <a:pt x="1606423" y="22478"/>
-                  </a:lnTo>
-                  <a:lnTo>
-                    <a:pt x="1622805" y="46989"/>
-                  </a:lnTo>
-                  <a:lnTo>
-                    <a:pt x="1628902" y="76834"/>
-                  </a:lnTo>
-                  <a:lnTo>
-                    <a:pt x="1628902" y="384428"/>
-                  </a:lnTo>
-                  <a:lnTo>
-                    <a:pt x="1622805" y="414273"/>
-                  </a:lnTo>
-                  <a:lnTo>
-                    <a:pt x="1606423" y="438784"/>
-                  </a:lnTo>
-                  <a:lnTo>
-                    <a:pt x="1581911" y="455167"/>
-                  </a:lnTo>
-                  <a:lnTo>
-                    <a:pt x="1551940" y="461263"/>
-                  </a:lnTo>
-                  <a:lnTo>
-                    <a:pt x="76962" y="461263"/>
-                  </a:lnTo>
-                  <a:lnTo>
-                    <a:pt x="46989" y="455167"/>
-                  </a:lnTo>
-                  <a:lnTo>
-                    <a:pt x="22478" y="438784"/>
-                  </a:lnTo>
-                  <a:lnTo>
-                    <a:pt x="6096" y="414273"/>
-                  </a:lnTo>
-                  <a:lnTo>
-                    <a:pt x="0" y="384428"/>
-                  </a:lnTo>
-                  <a:lnTo>
-                    <a:pt x="0" y="76834"/>
-                  </a:lnTo>
-                  <a:close/>
-                </a:path>
-              </a:pathLst>
-            </a:custGeom>
-            <a:ln w="9523">
-              <a:solidFill>
-                <a:srgbClr val="96B852"/>
-              </a:solidFill>
-            </a:ln>
-          </p:spPr>
-          <p:txBody>
-            <a:bodyPr wrap="square" lIns="0" tIns="0" rIns="0" bIns="0" rtlCol="0"/>
-            <a:lstStyle/>
-            <a:p>
-              <a:endParaRPr/>
-            </a:p>
-          </p:txBody>
-        </p:sp>
-      </p:grpSp>
-      <p:grpSp>
-        <p:nvGrpSpPr>
-          <p:cNvPr id="10" name="object 10"/>
-          <p:cNvGrpSpPr/>
-          <p:nvPr/>
-        </p:nvGrpSpPr>
-        <p:grpSpPr>
-          <a:xfrm>
-            <a:off x="4094607" y="5369062"/>
-            <a:ext cx="1701164" cy="527685"/>
-            <a:chOff x="3249167" y="4454687"/>
-            <a:chExt cx="1701164" cy="527685"/>
-          </a:xfrm>
-        </p:grpSpPr>
-        <p:pic>
-          <p:nvPicPr>
-            <p:cNvPr id="11" name="object 11"/>
-            <p:cNvPicPr/>
-            <p:nvPr/>
-          </p:nvPicPr>
-          <p:blipFill>
-            <a:blip r:embed="rId2" cstate="print"/>
-            <a:stretch>
-              <a:fillRect/>
-            </a:stretch>
-          </p:blipFill>
-          <p:spPr>
-            <a:xfrm>
-              <a:off x="3249167" y="4454687"/>
-              <a:ext cx="1700783" cy="527268"/>
-            </a:xfrm>
-            <a:prstGeom prst="rect">
-              <a:avLst/>
-            </a:prstGeom>
-          </p:spPr>
-        </p:pic>
-        <p:pic>
-          <p:nvPicPr>
-            <p:cNvPr id="12" name="object 12"/>
-            <p:cNvPicPr/>
-            <p:nvPr/>
-          </p:nvPicPr>
-          <p:blipFill>
-            <a:blip r:embed="rId4" cstate="print"/>
-            <a:stretch>
-              <a:fillRect/>
-            </a:stretch>
-          </p:blipFill>
-          <p:spPr>
-            <a:xfrm>
-              <a:off x="3287267" y="4466843"/>
-              <a:ext cx="1629156" cy="461771"/>
-            </a:xfrm>
-            <a:prstGeom prst="rect">
-              <a:avLst/>
-            </a:prstGeom>
-          </p:spPr>
-        </p:pic>
-        <p:sp>
-          <p:nvSpPr>
-            <p:cNvPr id="13" name="object 13"/>
-            <p:cNvSpPr/>
-            <p:nvPr/>
-          </p:nvSpPr>
-          <p:spPr>
-            <a:xfrm>
-              <a:off x="3287267" y="4466843"/>
-              <a:ext cx="1629410" cy="461645"/>
-            </a:xfrm>
-            <a:custGeom>
-              <a:avLst/>
-              <a:gdLst/>
-              <a:ahLst/>
-              <a:cxnLst/>
-              <a:rect l="l" t="t" r="r" b="b"/>
-              <a:pathLst>
-                <a:path w="1629410" h="461645">
-                  <a:moveTo>
-                    <a:pt x="0" y="76834"/>
-                  </a:moveTo>
-                  <a:lnTo>
-                    <a:pt x="6096" y="46989"/>
-                  </a:lnTo>
-                  <a:lnTo>
-                    <a:pt x="22479" y="22478"/>
-                  </a:lnTo>
-                  <a:lnTo>
-                    <a:pt x="46990" y="6095"/>
-                  </a:lnTo>
-                  <a:lnTo>
-                    <a:pt x="76962" y="0"/>
-                  </a:lnTo>
-                  <a:lnTo>
-                    <a:pt x="1551940" y="0"/>
-                  </a:lnTo>
-                  <a:lnTo>
-                    <a:pt x="1581912" y="6095"/>
-                  </a:lnTo>
-                  <a:lnTo>
-                    <a:pt x="1606423" y="22478"/>
-                  </a:lnTo>
-                  <a:lnTo>
-                    <a:pt x="1622806" y="46989"/>
-                  </a:lnTo>
-                  <a:lnTo>
-                    <a:pt x="1628902" y="76834"/>
-                  </a:lnTo>
-                  <a:lnTo>
-                    <a:pt x="1628902" y="384428"/>
-                  </a:lnTo>
-                  <a:lnTo>
-                    <a:pt x="1622806" y="414273"/>
-                  </a:lnTo>
-                  <a:lnTo>
-                    <a:pt x="1606423" y="438784"/>
-                  </a:lnTo>
-                  <a:lnTo>
-                    <a:pt x="1581912" y="455167"/>
-                  </a:lnTo>
-                  <a:lnTo>
-                    <a:pt x="1551940" y="461263"/>
-                  </a:lnTo>
-                  <a:lnTo>
-                    <a:pt x="76962" y="461263"/>
-                  </a:lnTo>
-                  <a:lnTo>
-                    <a:pt x="46990" y="455167"/>
-                  </a:lnTo>
-                  <a:lnTo>
-                    <a:pt x="22479" y="438784"/>
-                  </a:lnTo>
-                  <a:lnTo>
-                    <a:pt x="6096" y="414273"/>
-                  </a:lnTo>
-                  <a:lnTo>
-                    <a:pt x="0" y="384428"/>
-                  </a:lnTo>
-                  <a:lnTo>
-                    <a:pt x="0" y="76834"/>
-                  </a:lnTo>
-                  <a:close/>
-                </a:path>
-              </a:pathLst>
-            </a:custGeom>
-            <a:ln w="9524">
-              <a:solidFill>
-                <a:srgbClr val="96B852"/>
-              </a:solidFill>
-            </a:ln>
-          </p:spPr>
-          <p:txBody>
-            <a:bodyPr wrap="square" lIns="0" tIns="0" rIns="0" bIns="0" rtlCol="0"/>
-            <a:lstStyle/>
-            <a:p>
-              <a:endParaRPr/>
-            </a:p>
-          </p:txBody>
-        </p:sp>
-      </p:grpSp>
-      <p:sp>
-        <p:nvSpPr>
-          <p:cNvPr id="14" name="object 14"/>
-          <p:cNvSpPr/>
-          <p:nvPr/>
-        </p:nvSpPr>
-        <p:spPr>
-          <a:xfrm>
-            <a:off x="5847587" y="4919472"/>
-            <a:ext cx="76200" cy="693390"/>
-          </a:xfrm>
-          <a:custGeom>
-            <a:avLst/>
-            <a:gdLst/>
-            <a:ahLst/>
-            <a:cxnLst/>
-            <a:rect l="l" t="t" r="r" b="b"/>
-            <a:pathLst>
-              <a:path w="76200" h="461645">
-                <a:moveTo>
-                  <a:pt x="76200" y="385038"/>
-                </a:moveTo>
-                <a:lnTo>
-                  <a:pt x="44450" y="385038"/>
-                </a:lnTo>
-                <a:lnTo>
-                  <a:pt x="44450" y="0"/>
-                </a:lnTo>
-                <a:lnTo>
-                  <a:pt x="31750" y="0"/>
-                </a:lnTo>
-                <a:lnTo>
-                  <a:pt x="31750" y="385038"/>
-                </a:lnTo>
-                <a:lnTo>
-                  <a:pt x="0" y="385038"/>
-                </a:lnTo>
-                <a:lnTo>
-                  <a:pt x="38100" y="461238"/>
-                </a:lnTo>
-                <a:lnTo>
-                  <a:pt x="69850" y="397738"/>
-                </a:lnTo>
-                <a:lnTo>
-                  <a:pt x="76200" y="385038"/>
-                </a:lnTo>
-                <a:close/>
-              </a:path>
-            </a:pathLst>
-          </a:custGeom>
-          <a:solidFill>
-            <a:srgbClr val="000000"/>
-          </a:solidFill>
-        </p:spPr>
-        <p:txBody>
-          <a:bodyPr wrap="square" lIns="0" tIns="0" rIns="0" bIns="0" rtlCol="0"/>
-          <a:lstStyle/>
-          <a:p>
-            <a:endParaRPr/>
-          </a:p>
-        </p:txBody>
-      </p:sp>
       <p:sp>
         <p:nvSpPr>
           <p:cNvPr id="16" name="object 16"/>
@@ -4061,7 +3522,7 @@
           <p:nvPr/>
         </p:nvPicPr>
         <p:blipFill>
-          <a:blip r:embed="rId5" cstate="print"/>
+          <a:blip r:embed="rId2" cstate="print"/>
           <a:stretch>
             <a:fillRect/>
           </a:stretch>
@@ -4078,33 +3539,45 @@
       </p:pic>
       <p:grpSp>
         <p:nvGrpSpPr>
-          <p:cNvPr id="18" name="object 18"/>
+          <p:cNvPr id="24" name="object 2">
+            <a:extLst>
+              <a:ext uri="{FF2B5EF4-FFF2-40B4-BE49-F238E27FC236}">
+                <a16:creationId xmlns:a16="http://schemas.microsoft.com/office/drawing/2014/main" id="{FFCCFBBB-8392-2CCA-CDF9-1E442092B9FA}"/>
+              </a:ext>
+            </a:extLst>
+          </p:cNvPr>
           <p:cNvGrpSpPr/>
           <p:nvPr/>
         </p:nvGrpSpPr>
         <p:grpSpPr>
           <a:xfrm>
-            <a:off x="4863701" y="3497047"/>
-            <a:ext cx="2018062" cy="527268"/>
-            <a:chOff x="5049011" y="2583214"/>
-            <a:chExt cx="1700784" cy="527268"/>
+            <a:off x="3256382" y="3220341"/>
+            <a:ext cx="1701164" cy="527685"/>
+            <a:chOff x="5055108" y="3532666"/>
+            <a:chExt cx="1701164" cy="527685"/>
           </a:xfrm>
         </p:grpSpPr>
         <p:pic>
           <p:nvPicPr>
-            <p:cNvPr id="19" name="object 19"/>
+            <p:cNvPr id="25" name="object 3">
+              <a:extLst>
+                <a:ext uri="{FF2B5EF4-FFF2-40B4-BE49-F238E27FC236}">
+                  <a16:creationId xmlns:a16="http://schemas.microsoft.com/office/drawing/2014/main" id="{535D2AF3-C534-964F-5731-F0126CEC63AA}"/>
+                </a:ext>
+              </a:extLst>
+            </p:cNvPr>
             <p:cNvPicPr/>
             <p:nvPr/>
           </p:nvPicPr>
           <p:blipFill>
-            <a:blip r:embed="rId2" cstate="print"/>
+            <a:blip r:embed="rId3" cstate="print"/>
             <a:stretch>
               <a:fillRect/>
             </a:stretch>
           </p:blipFill>
           <p:spPr>
             <a:xfrm>
-              <a:off x="5049011" y="2583214"/>
+              <a:off x="5055108" y="3532666"/>
               <a:ext cx="1700784" cy="527268"/>
             </a:xfrm>
             <a:prstGeom prst="rect">
@@ -4114,20 +3587,26 @@
         </p:pic>
         <p:pic>
           <p:nvPicPr>
-            <p:cNvPr id="20" name="object 20"/>
+            <p:cNvPr id="26" name="object 4">
+              <a:extLst>
+                <a:ext uri="{FF2B5EF4-FFF2-40B4-BE49-F238E27FC236}">
+                  <a16:creationId xmlns:a16="http://schemas.microsoft.com/office/drawing/2014/main" id="{99E68F6B-82D2-B1C5-5619-2FC5B797BB29}"/>
+                </a:ext>
+              </a:extLst>
+            </p:cNvPr>
             <p:cNvPicPr/>
             <p:nvPr/>
           </p:nvPicPr>
           <p:blipFill>
-            <a:blip r:embed="rId6" cstate="print"/>
+            <a:blip r:embed="rId4" cstate="print"/>
             <a:stretch>
               <a:fillRect/>
             </a:stretch>
           </p:blipFill>
           <p:spPr>
             <a:xfrm>
-              <a:off x="5087111" y="2595371"/>
-              <a:ext cx="1629156" cy="461772"/>
+              <a:off x="5093208" y="3544823"/>
+              <a:ext cx="1629156" cy="461771"/>
             </a:xfrm>
             <a:prstGeom prst="rect">
               <a:avLst/>
@@ -4136,13 +3615,19 @@
         </p:pic>
         <p:sp>
           <p:nvSpPr>
-            <p:cNvPr id="21" name="object 21"/>
+            <p:cNvPr id="27" name="object 5">
+              <a:extLst>
+                <a:ext uri="{FF2B5EF4-FFF2-40B4-BE49-F238E27FC236}">
+                  <a16:creationId xmlns:a16="http://schemas.microsoft.com/office/drawing/2014/main" id="{42E47403-D771-D545-C7CA-416BBD6C55A1}"/>
+                </a:ext>
+              </a:extLst>
+            </p:cNvPr>
             <p:cNvSpPr/>
             <p:nvPr/>
           </p:nvSpPr>
           <p:spPr>
             <a:xfrm>
-              <a:off x="5087111" y="2595371"/>
+              <a:off x="5093208" y="3544823"/>
               <a:ext cx="1629410" cy="461645"/>
             </a:xfrm>
             <a:custGeom>
@@ -4152,18 +3637,18 @@
               <a:cxnLst/>
               <a:rect l="l" t="t" r="r" b="b"/>
               <a:pathLst>
-                <a:path w="1629409" h="461644">
+                <a:path w="1629409" h="461645">
                   <a:moveTo>
-                    <a:pt x="0" y="76835"/>
+                    <a:pt x="0" y="76834"/>
                   </a:moveTo>
                   <a:lnTo>
-                    <a:pt x="6096" y="46989"/>
+                    <a:pt x="6095" y="46989"/>
                   </a:lnTo>
                   <a:lnTo>
                     <a:pt x="22478" y="22478"/>
                   </a:lnTo>
                   <a:lnTo>
-                    <a:pt x="46989" y="6095"/>
+                    <a:pt x="46989" y="6096"/>
                   </a:lnTo>
                   <a:lnTo>
                     <a:pt x="76962" y="0"/>
@@ -4172,7 +3657,7 @@
                     <a:pt x="1551939" y="0"/>
                   </a:lnTo>
                   <a:lnTo>
-                    <a:pt x="1581912" y="6095"/>
+                    <a:pt x="1581912" y="6096"/>
                   </a:lnTo>
                   <a:lnTo>
                     <a:pt x="1606422" y="22478"/>
@@ -4181,19 +3666,19 @@
                     <a:pt x="1622806" y="46989"/>
                   </a:lnTo>
                   <a:lnTo>
-                    <a:pt x="1628902" y="76835"/>
-                  </a:lnTo>
-                  <a:lnTo>
-                    <a:pt x="1628902" y="384428"/>
+                    <a:pt x="1628901" y="76834"/>
+                  </a:lnTo>
+                  <a:lnTo>
+                    <a:pt x="1628901" y="384428"/>
                   </a:lnTo>
                   <a:lnTo>
                     <a:pt x="1622806" y="414274"/>
                   </a:lnTo>
                   <a:lnTo>
-                    <a:pt x="1606422" y="438785"/>
-                  </a:lnTo>
-                  <a:lnTo>
-                    <a:pt x="1581912" y="455167"/>
+                    <a:pt x="1606422" y="438784"/>
+                  </a:lnTo>
+                  <a:lnTo>
+                    <a:pt x="1581912" y="455168"/>
                   </a:lnTo>
                   <a:lnTo>
                     <a:pt x="1551939" y="461263"/>
@@ -4202,19 +3687,19 @@
                     <a:pt x="76962" y="461263"/>
                   </a:lnTo>
                   <a:lnTo>
-                    <a:pt x="46989" y="455167"/>
-                  </a:lnTo>
-                  <a:lnTo>
-                    <a:pt x="22478" y="438785"/>
-                  </a:lnTo>
-                  <a:lnTo>
-                    <a:pt x="6096" y="414274"/>
+                    <a:pt x="46989" y="455168"/>
+                  </a:lnTo>
+                  <a:lnTo>
+                    <a:pt x="22478" y="438784"/>
+                  </a:lnTo>
+                  <a:lnTo>
+                    <a:pt x="6095" y="414274"/>
                   </a:lnTo>
                   <a:lnTo>
                     <a:pt x="0" y="384428"/>
                   </a:lnTo>
                   <a:lnTo>
-                    <a:pt x="0" y="76835"/>
+                    <a:pt x="0" y="76834"/>
                   </a:lnTo>
                   <a:close/>
                 </a:path>
@@ -4235,1339 +3720,12 @@
           </p:txBody>
         </p:sp>
       </p:grpSp>
-      <p:sp>
-        <p:nvSpPr>
-          <p:cNvPr id="23" name="object 23"/>
-          <p:cNvSpPr txBox="1"/>
-          <p:nvPr/>
-        </p:nvSpPr>
-        <p:spPr>
-          <a:xfrm>
-            <a:off x="4918135" y="3542449"/>
-            <a:ext cx="1917767" cy="382156"/>
-          </a:xfrm>
-          <a:prstGeom prst="rect">
-            <a:avLst/>
-          </a:prstGeom>
-        </p:spPr>
-        <p:txBody>
-          <a:bodyPr vert="horz" wrap="square" lIns="0" tIns="12700" rIns="0" bIns="0" rtlCol="0">
-            <a:spAutoFit/>
-          </a:bodyPr>
-          <a:lstStyle/>
-          <a:p>
-            <a:pPr algn="ctr">
-              <a:lnSpc>
-                <a:spcPct val="100000"/>
-              </a:lnSpc>
-              <a:spcBef>
-                <a:spcPts val="100"/>
-              </a:spcBef>
-            </a:pPr>
-            <a:r>
-              <a:rPr sz="1200" b="1" u="sng" dirty="0">
-                <a:uFill>
-                  <a:solidFill>
-                    <a:srgbClr val="000000"/>
-                  </a:solidFill>
-                </a:uFill>
-                <a:latin typeface="Arial"/>
-                <a:cs typeface="Arial"/>
-              </a:rPr>
-              <a:t>Renato</a:t>
-            </a:r>
-            <a:r>
-              <a:rPr sz="1200" b="1" u="sng" spc="-70" dirty="0">
-                <a:uFill>
-                  <a:solidFill>
-                    <a:srgbClr val="000000"/>
-                  </a:solidFill>
-                </a:uFill>
-                <a:latin typeface="Arial"/>
-                <a:cs typeface="Arial"/>
-              </a:rPr>
-              <a:t> </a:t>
-            </a:r>
-            <a:r>
-              <a:rPr sz="1200" b="1" u="sng" spc="-10" dirty="0">
-                <a:uFill>
-                  <a:solidFill>
-                    <a:srgbClr val="000000"/>
-                  </a:solidFill>
-                </a:uFill>
-                <a:latin typeface="Arial"/>
-                <a:cs typeface="Arial"/>
-              </a:rPr>
-              <a:t>Constancio</a:t>
-            </a:r>
-            <a:endParaRPr sz="1200" dirty="0">
-              <a:latin typeface="Arial"/>
-              <a:cs typeface="Arial"/>
-            </a:endParaRPr>
-          </a:p>
-          <a:p>
-            <a:pPr algn="ctr">
-              <a:lnSpc>
-                <a:spcPct val="100000"/>
-              </a:lnSpc>
-            </a:pPr>
-            <a:r>
-              <a:rPr sz="1200" i="1" dirty="0" err="1">
-                <a:solidFill>
-                  <a:srgbClr val="001F5F"/>
-                </a:solidFill>
-                <a:latin typeface="Arial"/>
-                <a:cs typeface="Arial"/>
-              </a:rPr>
-              <a:t>Gerente</a:t>
-            </a:r>
-            <a:r>
-              <a:rPr lang="pt-BR" sz="1200" i="1" dirty="0">
-                <a:solidFill>
-                  <a:srgbClr val="001F5F"/>
-                </a:solidFill>
-                <a:latin typeface="Arial"/>
-                <a:cs typeface="Arial"/>
-              </a:rPr>
-              <a:t> Operacional</a:t>
-            </a:r>
-            <a:r>
-              <a:rPr sz="1200" i="1" spc="-55" dirty="0">
-                <a:solidFill>
-                  <a:srgbClr val="001F5F"/>
-                </a:solidFill>
-                <a:latin typeface="Arial"/>
-                <a:cs typeface="Arial"/>
-              </a:rPr>
-              <a:t> </a:t>
-            </a:r>
-            <a:r>
-              <a:rPr sz="1200" i="1" dirty="0">
-                <a:solidFill>
-                  <a:srgbClr val="001F5F"/>
-                </a:solidFill>
-                <a:latin typeface="Arial"/>
-                <a:cs typeface="Arial"/>
-              </a:rPr>
-              <a:t>de</a:t>
-            </a:r>
-            <a:r>
-              <a:rPr sz="1200" i="1" spc="-50" dirty="0">
-                <a:solidFill>
-                  <a:srgbClr val="001F5F"/>
-                </a:solidFill>
-                <a:latin typeface="Arial"/>
-                <a:cs typeface="Arial"/>
-              </a:rPr>
-              <a:t> </a:t>
-            </a:r>
-            <a:r>
-              <a:rPr sz="1200" i="1" spc="-35" dirty="0">
-                <a:solidFill>
-                  <a:srgbClr val="001F5F"/>
-                </a:solidFill>
-                <a:latin typeface="Arial"/>
-                <a:cs typeface="Arial"/>
-              </a:rPr>
-              <a:t>TI</a:t>
-            </a:r>
-            <a:endParaRPr sz="1200" dirty="0">
-              <a:latin typeface="Arial"/>
-              <a:cs typeface="Arial"/>
-            </a:endParaRPr>
-          </a:p>
-        </p:txBody>
-      </p:sp>
       <p:grpSp>
         <p:nvGrpSpPr>
-          <p:cNvPr id="24" name="object 24"/>
-          <p:cNvGrpSpPr/>
-          <p:nvPr/>
-        </p:nvGrpSpPr>
-        <p:grpSpPr>
-          <a:xfrm>
-            <a:off x="5013959" y="1609344"/>
-            <a:ext cx="1717547" cy="972197"/>
-            <a:chOff x="5013959" y="1609344"/>
-            <a:chExt cx="1717547" cy="972197"/>
-          </a:xfrm>
-        </p:grpSpPr>
-        <p:sp>
-          <p:nvSpPr>
-            <p:cNvPr id="25" name="object 25"/>
-            <p:cNvSpPr/>
-            <p:nvPr/>
-          </p:nvSpPr>
-          <p:spPr>
-            <a:xfrm>
-              <a:off x="5865876" y="2119896"/>
-              <a:ext cx="76200" cy="461645"/>
-            </a:xfrm>
-            <a:custGeom>
-              <a:avLst/>
-              <a:gdLst/>
-              <a:ahLst/>
-              <a:cxnLst/>
-              <a:rect l="l" t="t" r="r" b="b"/>
-              <a:pathLst>
-                <a:path w="76200" h="461644">
-                  <a:moveTo>
-                    <a:pt x="76200" y="385051"/>
-                  </a:moveTo>
-                  <a:lnTo>
-                    <a:pt x="44450" y="385051"/>
-                  </a:lnTo>
-                  <a:lnTo>
-                    <a:pt x="44450" y="0"/>
-                  </a:lnTo>
-                  <a:lnTo>
-                    <a:pt x="31750" y="0"/>
-                  </a:lnTo>
-                  <a:lnTo>
-                    <a:pt x="31750" y="385051"/>
-                  </a:lnTo>
-                  <a:lnTo>
-                    <a:pt x="0" y="385051"/>
-                  </a:lnTo>
-                  <a:lnTo>
-                    <a:pt x="38100" y="461251"/>
-                  </a:lnTo>
-                  <a:lnTo>
-                    <a:pt x="69850" y="397751"/>
-                  </a:lnTo>
-                  <a:lnTo>
-                    <a:pt x="76200" y="385051"/>
-                  </a:lnTo>
-                  <a:close/>
-                </a:path>
-              </a:pathLst>
-            </a:custGeom>
-            <a:solidFill>
-              <a:srgbClr val="000000"/>
-            </a:solidFill>
-          </p:spPr>
-          <p:txBody>
-            <a:bodyPr wrap="square" lIns="0" tIns="0" rIns="0" bIns="0" rtlCol="0"/>
-            <a:lstStyle/>
-            <a:p>
-              <a:endParaRPr/>
-            </a:p>
-          </p:txBody>
-        </p:sp>
-        <p:pic>
-          <p:nvPicPr>
-            <p:cNvPr id="26" name="object 26"/>
-            <p:cNvPicPr/>
-            <p:nvPr/>
-          </p:nvPicPr>
-          <p:blipFill>
-            <a:blip r:embed="rId7" cstate="print"/>
-            <a:stretch>
-              <a:fillRect/>
-            </a:stretch>
-          </p:blipFill>
-          <p:spPr>
-            <a:xfrm>
-              <a:off x="5013959" y="1609344"/>
-              <a:ext cx="1717547" cy="550163"/>
-            </a:xfrm>
-            <a:prstGeom prst="rect">
-              <a:avLst/>
-            </a:prstGeom>
-          </p:spPr>
-        </p:pic>
-        <p:pic>
-          <p:nvPicPr>
-            <p:cNvPr id="27" name="object 27"/>
-            <p:cNvPicPr/>
-            <p:nvPr/>
-          </p:nvPicPr>
-          <p:blipFill>
-            <a:blip r:embed="rId8" cstate="print"/>
-            <a:stretch>
-              <a:fillRect/>
-            </a:stretch>
-          </p:blipFill>
-          <p:spPr>
-            <a:xfrm>
-              <a:off x="5061203" y="1636776"/>
-              <a:ext cx="1627631" cy="460248"/>
-            </a:xfrm>
-            <a:prstGeom prst="rect">
-              <a:avLst/>
-            </a:prstGeom>
-          </p:spPr>
-        </p:pic>
-        <p:sp>
-          <p:nvSpPr>
-            <p:cNvPr id="28" name="object 28"/>
-            <p:cNvSpPr/>
-            <p:nvPr/>
-          </p:nvSpPr>
-          <p:spPr>
-            <a:xfrm>
-              <a:off x="5061203" y="1636776"/>
-              <a:ext cx="1627505" cy="460375"/>
-            </a:xfrm>
-            <a:custGeom>
-              <a:avLst/>
-              <a:gdLst/>
-              <a:ahLst/>
-              <a:cxnLst/>
-              <a:rect l="l" t="t" r="r" b="b"/>
-              <a:pathLst>
-                <a:path w="1627504" h="460375">
-                  <a:moveTo>
-                    <a:pt x="0" y="76708"/>
-                  </a:moveTo>
-                  <a:lnTo>
-                    <a:pt x="5969" y="46862"/>
-                  </a:lnTo>
-                  <a:lnTo>
-                    <a:pt x="22479" y="22478"/>
-                  </a:lnTo>
-                  <a:lnTo>
-                    <a:pt x="46862" y="5969"/>
-                  </a:lnTo>
-                  <a:lnTo>
-                    <a:pt x="76708" y="0"/>
-                  </a:lnTo>
-                  <a:lnTo>
-                    <a:pt x="1550416" y="0"/>
-                  </a:lnTo>
-                  <a:lnTo>
-                    <a:pt x="1580261" y="5969"/>
-                  </a:lnTo>
-                  <a:lnTo>
-                    <a:pt x="1604645" y="22478"/>
-                  </a:lnTo>
-                  <a:lnTo>
-                    <a:pt x="1621154" y="46862"/>
-                  </a:lnTo>
-                  <a:lnTo>
-                    <a:pt x="1627124" y="76708"/>
-                  </a:lnTo>
-                  <a:lnTo>
-                    <a:pt x="1627124" y="383413"/>
-                  </a:lnTo>
-                  <a:lnTo>
-                    <a:pt x="1621154" y="413258"/>
-                  </a:lnTo>
-                  <a:lnTo>
-                    <a:pt x="1604645" y="437641"/>
-                  </a:lnTo>
-                  <a:lnTo>
-                    <a:pt x="1580261" y="454151"/>
-                  </a:lnTo>
-                  <a:lnTo>
-                    <a:pt x="1550416" y="460121"/>
-                  </a:lnTo>
-                  <a:lnTo>
-                    <a:pt x="76708" y="460121"/>
-                  </a:lnTo>
-                  <a:lnTo>
-                    <a:pt x="46862" y="454151"/>
-                  </a:lnTo>
-                  <a:lnTo>
-                    <a:pt x="22479" y="437641"/>
-                  </a:lnTo>
-                  <a:lnTo>
-                    <a:pt x="5969" y="413258"/>
-                  </a:lnTo>
-                  <a:lnTo>
-                    <a:pt x="0" y="383413"/>
-                  </a:lnTo>
-                  <a:lnTo>
-                    <a:pt x="0" y="76708"/>
-                  </a:lnTo>
-                  <a:close/>
-                </a:path>
-              </a:pathLst>
-            </a:custGeom>
-            <a:ln w="9525">
-              <a:solidFill>
-                <a:srgbClr val="96B852"/>
-              </a:solidFill>
-            </a:ln>
-          </p:spPr>
-          <p:txBody>
-            <a:bodyPr wrap="square" lIns="0" tIns="0" rIns="0" bIns="0" rtlCol="0"/>
-            <a:lstStyle/>
-            <a:p>
-              <a:endParaRPr/>
-            </a:p>
-          </p:txBody>
-        </p:sp>
-      </p:grpSp>
-      <p:sp>
-        <p:nvSpPr>
-          <p:cNvPr id="30" name="object 30"/>
-          <p:cNvSpPr txBox="1"/>
-          <p:nvPr/>
-        </p:nvSpPr>
-        <p:spPr>
-          <a:xfrm>
-            <a:off x="5183885" y="1660347"/>
-            <a:ext cx="1428115" cy="391795"/>
-          </a:xfrm>
-          <a:prstGeom prst="rect">
-            <a:avLst/>
-          </a:prstGeom>
-        </p:spPr>
-        <p:txBody>
-          <a:bodyPr vert="horz" wrap="square" lIns="0" tIns="12700" rIns="0" bIns="0" rtlCol="0">
-            <a:spAutoFit/>
-          </a:bodyPr>
-          <a:lstStyle/>
-          <a:p>
-            <a:pPr algn="ctr">
-              <a:lnSpc>
-                <a:spcPct val="100000"/>
-              </a:lnSpc>
-              <a:spcBef>
-                <a:spcPts val="100"/>
-              </a:spcBef>
-            </a:pPr>
-            <a:r>
-              <a:rPr sz="1200" b="1" u="sng">
-                <a:uFill>
-                  <a:solidFill>
-                    <a:srgbClr val="000000"/>
-                  </a:solidFill>
-                </a:uFill>
-                <a:latin typeface="Arial"/>
-                <a:cs typeface="Arial"/>
-              </a:rPr>
-              <a:t>Anderson</a:t>
-            </a:r>
-            <a:r>
-              <a:rPr sz="1200" b="1" u="sng" spc="-65">
-                <a:uFill>
-                  <a:solidFill>
-                    <a:srgbClr val="000000"/>
-                  </a:solidFill>
-                </a:uFill>
-                <a:latin typeface="Arial"/>
-                <a:cs typeface="Arial"/>
-              </a:rPr>
-              <a:t> </a:t>
-            </a:r>
-            <a:r>
-              <a:rPr sz="1200" b="1" u="sng" spc="-10">
-                <a:uFill>
-                  <a:solidFill>
-                    <a:srgbClr val="000000"/>
-                  </a:solidFill>
-                </a:uFill>
-                <a:latin typeface="Arial"/>
-                <a:cs typeface="Arial"/>
-              </a:rPr>
-              <a:t>Gasparin</a:t>
-            </a:r>
-            <a:endParaRPr sz="1200">
-              <a:latin typeface="Arial"/>
-              <a:cs typeface="Arial"/>
-            </a:endParaRPr>
-          </a:p>
-          <a:p>
-            <a:pPr algn="ctr">
-              <a:lnSpc>
-                <a:spcPct val="100000"/>
-              </a:lnSpc>
-              <a:spcBef>
-                <a:spcPts val="5"/>
-              </a:spcBef>
-            </a:pPr>
-            <a:r>
-              <a:rPr sz="1200" i="1">
-                <a:solidFill>
-                  <a:srgbClr val="001F5F"/>
-                </a:solidFill>
-                <a:latin typeface="Arial"/>
-                <a:cs typeface="Arial"/>
-              </a:rPr>
-              <a:t>Diretor</a:t>
-            </a:r>
-            <a:r>
-              <a:rPr sz="1200" i="1" spc="-50">
-                <a:solidFill>
-                  <a:srgbClr val="001F5F"/>
-                </a:solidFill>
-                <a:latin typeface="Arial"/>
-                <a:cs typeface="Arial"/>
-              </a:rPr>
-              <a:t> </a:t>
-            </a:r>
-            <a:r>
-              <a:rPr sz="1200" i="1">
-                <a:solidFill>
-                  <a:srgbClr val="001F5F"/>
-                </a:solidFill>
-                <a:latin typeface="Arial"/>
-                <a:cs typeface="Arial"/>
-              </a:rPr>
-              <a:t>de</a:t>
-            </a:r>
-            <a:r>
-              <a:rPr sz="1200" i="1" spc="-55">
-                <a:solidFill>
-                  <a:srgbClr val="001F5F"/>
-                </a:solidFill>
-                <a:latin typeface="Arial"/>
-                <a:cs typeface="Arial"/>
-              </a:rPr>
-              <a:t> </a:t>
-            </a:r>
-            <a:r>
-              <a:rPr sz="1200" i="1" spc="-35">
-                <a:solidFill>
-                  <a:srgbClr val="001F5F"/>
-                </a:solidFill>
-                <a:latin typeface="Arial"/>
-                <a:cs typeface="Arial"/>
-              </a:rPr>
-              <a:t>TI</a:t>
-            </a:r>
-            <a:endParaRPr sz="1200">
-              <a:latin typeface="Arial"/>
-              <a:cs typeface="Arial"/>
-            </a:endParaRPr>
-          </a:p>
-        </p:txBody>
-      </p:sp>
-      <p:sp>
-        <p:nvSpPr>
-          <p:cNvPr id="32" name="object 32"/>
-          <p:cNvSpPr txBox="1"/>
-          <p:nvPr/>
-        </p:nvSpPr>
-        <p:spPr>
-          <a:xfrm>
-            <a:off x="5239511" y="4493742"/>
-            <a:ext cx="1354200" cy="382156"/>
-          </a:xfrm>
-          <a:prstGeom prst="rect">
-            <a:avLst/>
-          </a:prstGeom>
-        </p:spPr>
-        <p:txBody>
-          <a:bodyPr vert="horz" wrap="square" lIns="0" tIns="12700" rIns="0" bIns="0" rtlCol="0">
-            <a:spAutoFit/>
-          </a:bodyPr>
-          <a:lstStyle/>
-          <a:p>
-            <a:pPr marL="33655" algn="ctr">
-              <a:lnSpc>
-                <a:spcPct val="100000"/>
-              </a:lnSpc>
-              <a:spcBef>
-                <a:spcPts val="100"/>
-              </a:spcBef>
-            </a:pPr>
-            <a:r>
-              <a:rPr sz="1200" b="1" u="sng" spc="-10">
-                <a:uFill>
-                  <a:solidFill>
-                    <a:srgbClr val="000000"/>
-                  </a:solidFill>
-                </a:uFill>
-                <a:latin typeface="Arial"/>
-                <a:cs typeface="Arial"/>
-              </a:rPr>
-              <a:t>Marco</a:t>
-            </a:r>
-            <a:r>
-              <a:rPr sz="1200" b="1" u="sng" spc="-40">
-                <a:uFill>
-                  <a:solidFill>
-                    <a:srgbClr val="000000"/>
-                  </a:solidFill>
-                </a:uFill>
-                <a:latin typeface="Arial"/>
-                <a:cs typeface="Arial"/>
-              </a:rPr>
-              <a:t> </a:t>
-            </a:r>
-            <a:r>
-              <a:rPr sz="1200" b="1" u="sng" spc="-10">
-                <a:uFill>
-                  <a:solidFill>
-                    <a:srgbClr val="000000"/>
-                  </a:solidFill>
-                </a:uFill>
-                <a:latin typeface="Arial"/>
-                <a:cs typeface="Arial"/>
-              </a:rPr>
-              <a:t>Borges</a:t>
-            </a:r>
-            <a:endParaRPr lang="pt-BR" sz="1200" b="1" u="sng" spc="-10">
-              <a:uFill>
-                <a:solidFill>
-                  <a:srgbClr val="000000"/>
-                </a:solidFill>
-              </a:uFill>
-              <a:latin typeface="Arial"/>
-              <a:cs typeface="Arial"/>
-            </a:endParaRPr>
-          </a:p>
-          <a:p>
-            <a:pPr marL="12700" algn="ctr">
-              <a:lnSpc>
-                <a:spcPct val="100000"/>
-              </a:lnSpc>
-              <a:spcBef>
-                <a:spcPts val="5"/>
-              </a:spcBef>
-            </a:pPr>
-            <a:r>
-              <a:rPr sz="1200" i="1" spc="-10">
-                <a:solidFill>
-                  <a:srgbClr val="001F5F"/>
-                </a:solidFill>
-                <a:latin typeface="Arial"/>
-                <a:cs typeface="Arial"/>
-              </a:rPr>
-              <a:t>Coordenador</a:t>
-            </a:r>
-            <a:r>
-              <a:rPr sz="1200" i="1" spc="-20">
-                <a:solidFill>
-                  <a:srgbClr val="001F5F"/>
-                </a:solidFill>
-                <a:latin typeface="Arial"/>
-                <a:cs typeface="Arial"/>
-              </a:rPr>
-              <a:t> </a:t>
-            </a:r>
-            <a:r>
-              <a:rPr sz="1200" i="1">
-                <a:solidFill>
-                  <a:srgbClr val="001F5F"/>
-                </a:solidFill>
-                <a:latin typeface="Arial"/>
-                <a:cs typeface="Arial"/>
-              </a:rPr>
-              <a:t>de</a:t>
-            </a:r>
-            <a:r>
-              <a:rPr sz="1200" i="1" spc="-25">
-                <a:solidFill>
-                  <a:srgbClr val="001F5F"/>
-                </a:solidFill>
-                <a:latin typeface="Arial"/>
-                <a:cs typeface="Arial"/>
-              </a:rPr>
-              <a:t> TI</a:t>
-            </a:r>
-            <a:endParaRPr sz="1200">
-              <a:latin typeface="Arial"/>
-              <a:cs typeface="Arial"/>
-            </a:endParaRPr>
-          </a:p>
-        </p:txBody>
-      </p:sp>
-      <p:sp>
-        <p:nvSpPr>
-          <p:cNvPr id="33" name="object 33"/>
-          <p:cNvSpPr/>
-          <p:nvPr/>
-        </p:nvSpPr>
-        <p:spPr>
-          <a:xfrm>
-            <a:off x="5847587" y="3977627"/>
-            <a:ext cx="76200" cy="461645"/>
-          </a:xfrm>
-          <a:custGeom>
-            <a:avLst/>
-            <a:gdLst/>
-            <a:ahLst/>
-            <a:cxnLst/>
-            <a:rect l="l" t="t" r="r" b="b"/>
-            <a:pathLst>
-              <a:path w="76200" h="461645">
-                <a:moveTo>
-                  <a:pt x="76200" y="385051"/>
-                </a:moveTo>
-                <a:lnTo>
-                  <a:pt x="44450" y="385051"/>
-                </a:lnTo>
-                <a:lnTo>
-                  <a:pt x="44450" y="0"/>
-                </a:lnTo>
-                <a:lnTo>
-                  <a:pt x="31750" y="0"/>
-                </a:lnTo>
-                <a:lnTo>
-                  <a:pt x="31750" y="385051"/>
-                </a:lnTo>
-                <a:lnTo>
-                  <a:pt x="0" y="385051"/>
-                </a:lnTo>
-                <a:lnTo>
-                  <a:pt x="38100" y="461251"/>
-                </a:lnTo>
-                <a:lnTo>
-                  <a:pt x="69850" y="397751"/>
-                </a:lnTo>
-                <a:lnTo>
-                  <a:pt x="76200" y="385051"/>
-                </a:lnTo>
-                <a:close/>
-              </a:path>
-            </a:pathLst>
-          </a:custGeom>
-          <a:solidFill>
-            <a:srgbClr val="000000"/>
-          </a:solidFill>
-        </p:spPr>
-        <p:txBody>
-          <a:bodyPr wrap="square" lIns="0" tIns="0" rIns="0" bIns="0" rtlCol="0"/>
-          <a:lstStyle/>
-          <a:p>
-            <a:endParaRPr/>
-          </a:p>
-        </p:txBody>
-      </p:sp>
-      <p:sp>
-        <p:nvSpPr>
-          <p:cNvPr id="34" name="object 34"/>
-          <p:cNvSpPr txBox="1"/>
-          <p:nvPr/>
-        </p:nvSpPr>
-        <p:spPr>
-          <a:xfrm>
-            <a:off x="4497138" y="5420962"/>
-            <a:ext cx="943227" cy="382156"/>
-          </a:xfrm>
-          <a:prstGeom prst="rect">
-            <a:avLst/>
-          </a:prstGeom>
-        </p:spPr>
-        <p:txBody>
-          <a:bodyPr vert="horz" wrap="square" lIns="0" tIns="12700" rIns="0" bIns="0" rtlCol="0">
-            <a:spAutoFit/>
-          </a:bodyPr>
-          <a:lstStyle/>
-          <a:p>
-            <a:pPr marL="12700" algn="ctr">
-              <a:lnSpc>
-                <a:spcPct val="100000"/>
-              </a:lnSpc>
-              <a:spcBef>
-                <a:spcPts val="100"/>
-              </a:spcBef>
-            </a:pPr>
-            <a:r>
-              <a:rPr sz="1200" b="1" u="sng">
-                <a:uFill>
-                  <a:solidFill>
-                    <a:srgbClr val="000000"/>
-                  </a:solidFill>
-                </a:uFill>
-                <a:latin typeface="Arial"/>
-                <a:cs typeface="Arial"/>
-              </a:rPr>
-              <a:t>Kayky</a:t>
-            </a:r>
-            <a:r>
-              <a:rPr sz="1200" b="1" u="sng" spc="-90">
-                <a:uFill>
-                  <a:solidFill>
-                    <a:srgbClr val="000000"/>
-                  </a:solidFill>
-                </a:uFill>
-                <a:latin typeface="Arial"/>
-                <a:cs typeface="Arial"/>
-              </a:rPr>
-              <a:t> </a:t>
-            </a:r>
-            <a:r>
-              <a:rPr sz="1200" b="1" u="sng" spc="-10">
-                <a:uFill>
-                  <a:solidFill>
-                    <a:srgbClr val="000000"/>
-                  </a:solidFill>
-                </a:uFill>
-                <a:latin typeface="Arial"/>
-                <a:cs typeface="Arial"/>
-              </a:rPr>
-              <a:t>Silva</a:t>
-            </a:r>
-            <a:endParaRPr lang="pt-BR" sz="1200" b="1" u="sng" spc="-10">
-              <a:uFill>
-                <a:solidFill>
-                  <a:srgbClr val="000000"/>
-                </a:solidFill>
-              </a:uFill>
-              <a:latin typeface="Arial"/>
-              <a:cs typeface="Arial"/>
-            </a:endParaRPr>
-          </a:p>
-          <a:p>
-            <a:pPr marL="65405" algn="ctr">
-              <a:lnSpc>
-                <a:spcPct val="100000"/>
-              </a:lnSpc>
-              <a:spcBef>
-                <a:spcPts val="5"/>
-              </a:spcBef>
-            </a:pPr>
-            <a:r>
-              <a:rPr sz="1200" i="1">
-                <a:solidFill>
-                  <a:srgbClr val="001F5F"/>
-                </a:solidFill>
-                <a:latin typeface="Arial"/>
-                <a:cs typeface="Arial"/>
-              </a:rPr>
-              <a:t>Auxiliar</a:t>
-            </a:r>
-            <a:r>
-              <a:rPr sz="1200" i="1" spc="-35">
-                <a:solidFill>
-                  <a:srgbClr val="001F5F"/>
-                </a:solidFill>
-                <a:latin typeface="Arial"/>
-                <a:cs typeface="Arial"/>
-              </a:rPr>
-              <a:t> </a:t>
-            </a:r>
-            <a:r>
-              <a:rPr sz="1200" i="1" spc="-10">
-                <a:solidFill>
-                  <a:srgbClr val="001F5F"/>
-                </a:solidFill>
-                <a:latin typeface="Arial"/>
-                <a:cs typeface="Arial"/>
-              </a:rPr>
-              <a:t>de</a:t>
-            </a:r>
-            <a:r>
-              <a:rPr sz="1200" i="1" spc="-65">
-                <a:solidFill>
-                  <a:srgbClr val="001F5F"/>
-                </a:solidFill>
-                <a:latin typeface="Arial"/>
-                <a:cs typeface="Arial"/>
-              </a:rPr>
-              <a:t> </a:t>
-            </a:r>
-            <a:r>
-              <a:rPr sz="1200" i="1" spc="-25">
-                <a:solidFill>
-                  <a:srgbClr val="001F5F"/>
-                </a:solidFill>
-                <a:latin typeface="Arial"/>
-                <a:cs typeface="Arial"/>
-              </a:rPr>
-              <a:t>TI</a:t>
-            </a:r>
-            <a:endParaRPr sz="1200">
-              <a:latin typeface="Arial"/>
-              <a:cs typeface="Arial"/>
-            </a:endParaRPr>
-          </a:p>
-        </p:txBody>
-      </p:sp>
-      <p:sp>
-        <p:nvSpPr>
-          <p:cNvPr id="36" name="object 36"/>
-          <p:cNvSpPr txBox="1"/>
-          <p:nvPr/>
-        </p:nvSpPr>
-        <p:spPr>
-          <a:xfrm>
-            <a:off x="6028563" y="5377408"/>
-            <a:ext cx="1539495" cy="366767"/>
-          </a:xfrm>
-          <a:prstGeom prst="rect">
-            <a:avLst/>
-          </a:prstGeom>
-        </p:spPr>
-        <p:txBody>
-          <a:bodyPr vert="horz" wrap="square" lIns="0" tIns="12700" rIns="0" bIns="0" rtlCol="0">
-            <a:spAutoFit/>
-          </a:bodyPr>
-          <a:lstStyle/>
-          <a:p>
-            <a:pPr algn="ctr">
-              <a:lnSpc>
-                <a:spcPct val="100000"/>
-              </a:lnSpc>
-              <a:spcBef>
-                <a:spcPts val="100"/>
-              </a:spcBef>
-            </a:pPr>
-            <a:r>
-              <a:rPr sz="1200" b="1" u="sng">
-                <a:uFill>
-                  <a:solidFill>
-                    <a:srgbClr val="000000"/>
-                  </a:solidFill>
-                </a:uFill>
-                <a:latin typeface="Arial"/>
-                <a:cs typeface="Arial"/>
-              </a:rPr>
-              <a:t>Vitor</a:t>
-            </a:r>
-            <a:r>
-              <a:rPr sz="1200" b="1" u="sng" spc="-75">
-                <a:uFill>
-                  <a:solidFill>
-                    <a:srgbClr val="000000"/>
-                  </a:solidFill>
-                </a:uFill>
-                <a:latin typeface="Arial"/>
-                <a:cs typeface="Arial"/>
-              </a:rPr>
-              <a:t> </a:t>
-            </a:r>
-            <a:r>
-              <a:rPr sz="1200" b="1" u="sng" spc="-10">
-                <a:uFill>
-                  <a:solidFill>
-                    <a:srgbClr val="000000"/>
-                  </a:solidFill>
-                </a:uFill>
-                <a:latin typeface="Arial"/>
-                <a:cs typeface="Arial"/>
-              </a:rPr>
-              <a:t>Silva</a:t>
-            </a:r>
-            <a:endParaRPr sz="1200">
-              <a:latin typeface="Arial"/>
-              <a:cs typeface="Arial"/>
-            </a:endParaRPr>
-          </a:p>
-          <a:p>
-            <a:pPr algn="ctr">
-              <a:lnSpc>
-                <a:spcPct val="100000"/>
-              </a:lnSpc>
-              <a:spcBef>
-                <a:spcPts val="5"/>
-              </a:spcBef>
-            </a:pPr>
-            <a:r>
-              <a:rPr sz="1100" i="1" spc="-10">
-                <a:solidFill>
-                  <a:srgbClr val="001F5F"/>
-                </a:solidFill>
-                <a:latin typeface="Arial"/>
-                <a:cs typeface="Arial"/>
-              </a:rPr>
-              <a:t>Analista</a:t>
-            </a:r>
-            <a:r>
-              <a:rPr sz="1100" i="1" spc="-5">
-                <a:solidFill>
-                  <a:srgbClr val="001F5F"/>
-                </a:solidFill>
-                <a:latin typeface="Arial"/>
-                <a:cs typeface="Arial"/>
-              </a:rPr>
-              <a:t> </a:t>
-            </a:r>
-            <a:r>
-              <a:rPr sz="1100" i="1">
-                <a:solidFill>
-                  <a:srgbClr val="001F5F"/>
-                </a:solidFill>
-                <a:latin typeface="Arial"/>
-                <a:cs typeface="Arial"/>
-              </a:rPr>
-              <a:t>de</a:t>
-            </a:r>
-            <a:r>
-              <a:rPr sz="1100" i="1" spc="-50">
-                <a:solidFill>
-                  <a:srgbClr val="001F5F"/>
-                </a:solidFill>
-                <a:latin typeface="Arial"/>
-                <a:cs typeface="Arial"/>
-              </a:rPr>
-              <a:t> </a:t>
-            </a:r>
-            <a:r>
-              <a:rPr lang="pt-BR" sz="1100" i="1" spc="-10">
-                <a:solidFill>
-                  <a:srgbClr val="001F5F"/>
-                </a:solidFill>
-                <a:latin typeface="Arial"/>
-                <a:cs typeface="Arial"/>
-              </a:rPr>
-              <a:t>Infraestrutura</a:t>
-            </a:r>
-            <a:endParaRPr sz="1100">
-              <a:latin typeface="Arial"/>
-              <a:cs typeface="Arial"/>
-            </a:endParaRPr>
-          </a:p>
-        </p:txBody>
-      </p:sp>
-      <p:sp>
-        <p:nvSpPr>
-          <p:cNvPr id="37" name="object 37"/>
-          <p:cNvSpPr/>
-          <p:nvPr/>
-        </p:nvSpPr>
-        <p:spPr>
-          <a:xfrm>
-            <a:off x="5761863" y="5612866"/>
-            <a:ext cx="228600" cy="0"/>
-          </a:xfrm>
-          <a:custGeom>
-            <a:avLst/>
-            <a:gdLst/>
-            <a:ahLst/>
-            <a:cxnLst/>
-            <a:rect l="l" t="t" r="r" b="b"/>
-            <a:pathLst>
-              <a:path w="228600">
-                <a:moveTo>
-                  <a:pt x="0" y="0"/>
-                </a:moveTo>
-                <a:lnTo>
-                  <a:pt x="228218" y="0"/>
-                </a:lnTo>
-              </a:path>
-            </a:pathLst>
-          </a:custGeom>
-          <a:ln w="9525">
-            <a:solidFill>
-              <a:srgbClr val="000000"/>
-            </a:solidFill>
-          </a:ln>
-        </p:spPr>
-        <p:txBody>
-          <a:bodyPr wrap="square" lIns="0" tIns="0" rIns="0" bIns="0" rtlCol="0"/>
-          <a:lstStyle/>
-          <a:p>
-            <a:endParaRPr/>
-          </a:p>
-        </p:txBody>
-      </p:sp>
-      <p:grpSp>
-        <p:nvGrpSpPr>
-          <p:cNvPr id="38" name="object 38"/>
-          <p:cNvGrpSpPr/>
-          <p:nvPr/>
-        </p:nvGrpSpPr>
-        <p:grpSpPr>
-          <a:xfrm>
-            <a:off x="7615047" y="5369062"/>
-            <a:ext cx="1891664" cy="527685"/>
-            <a:chOff x="6769607" y="4454687"/>
-            <a:chExt cx="1891664" cy="527685"/>
-          </a:xfrm>
-        </p:grpSpPr>
-        <p:pic>
-          <p:nvPicPr>
-            <p:cNvPr id="39" name="object 39"/>
-            <p:cNvPicPr/>
-            <p:nvPr/>
-          </p:nvPicPr>
-          <p:blipFill>
-            <a:blip r:embed="rId2" cstate="print"/>
-            <a:stretch>
-              <a:fillRect/>
-            </a:stretch>
-          </p:blipFill>
-          <p:spPr>
-            <a:xfrm>
-              <a:off x="6960107" y="4454687"/>
-              <a:ext cx="1700783" cy="527268"/>
-            </a:xfrm>
-            <a:prstGeom prst="rect">
-              <a:avLst/>
-            </a:prstGeom>
-          </p:spPr>
-        </p:pic>
-        <p:pic>
-          <p:nvPicPr>
-            <p:cNvPr id="40" name="object 40"/>
-            <p:cNvPicPr/>
-            <p:nvPr/>
-          </p:nvPicPr>
-          <p:blipFill>
-            <a:blip r:embed="rId9" cstate="print"/>
-            <a:stretch>
-              <a:fillRect/>
-            </a:stretch>
-          </p:blipFill>
-          <p:spPr>
-            <a:xfrm>
-              <a:off x="6998207" y="4466843"/>
-              <a:ext cx="1629155" cy="461771"/>
-            </a:xfrm>
-            <a:prstGeom prst="rect">
-              <a:avLst/>
-            </a:prstGeom>
-          </p:spPr>
-        </p:pic>
-        <p:sp>
-          <p:nvSpPr>
-            <p:cNvPr id="41" name="object 41"/>
-            <p:cNvSpPr/>
-            <p:nvPr/>
-          </p:nvSpPr>
-          <p:spPr>
-            <a:xfrm>
-              <a:off x="6998207" y="4466843"/>
-              <a:ext cx="1629410" cy="461645"/>
-            </a:xfrm>
-            <a:custGeom>
-              <a:avLst/>
-              <a:gdLst/>
-              <a:ahLst/>
-              <a:cxnLst/>
-              <a:rect l="l" t="t" r="r" b="b"/>
-              <a:pathLst>
-                <a:path w="1629409" h="461645">
-                  <a:moveTo>
-                    <a:pt x="0" y="76834"/>
-                  </a:moveTo>
-                  <a:lnTo>
-                    <a:pt x="6096" y="46989"/>
-                  </a:lnTo>
-                  <a:lnTo>
-                    <a:pt x="22478" y="22478"/>
-                  </a:lnTo>
-                  <a:lnTo>
-                    <a:pt x="46990" y="6095"/>
-                  </a:lnTo>
-                  <a:lnTo>
-                    <a:pt x="76962" y="0"/>
-                  </a:lnTo>
-                  <a:lnTo>
-                    <a:pt x="1551940" y="0"/>
-                  </a:lnTo>
-                  <a:lnTo>
-                    <a:pt x="1581912" y="6095"/>
-                  </a:lnTo>
-                  <a:lnTo>
-                    <a:pt x="1606423" y="22478"/>
-                  </a:lnTo>
-                  <a:lnTo>
-                    <a:pt x="1622806" y="46989"/>
-                  </a:lnTo>
-                  <a:lnTo>
-                    <a:pt x="1628902" y="76834"/>
-                  </a:lnTo>
-                  <a:lnTo>
-                    <a:pt x="1628902" y="384428"/>
-                  </a:lnTo>
-                  <a:lnTo>
-                    <a:pt x="1622806" y="414273"/>
-                  </a:lnTo>
-                  <a:lnTo>
-                    <a:pt x="1606423" y="438784"/>
-                  </a:lnTo>
-                  <a:lnTo>
-                    <a:pt x="1581912" y="455167"/>
-                  </a:lnTo>
-                  <a:lnTo>
-                    <a:pt x="1551940" y="461263"/>
-                  </a:lnTo>
-                  <a:lnTo>
-                    <a:pt x="76962" y="461263"/>
-                  </a:lnTo>
-                  <a:lnTo>
-                    <a:pt x="46990" y="455167"/>
-                  </a:lnTo>
-                  <a:lnTo>
-                    <a:pt x="22478" y="438784"/>
-                  </a:lnTo>
-                  <a:lnTo>
-                    <a:pt x="6096" y="414273"/>
-                  </a:lnTo>
-                  <a:lnTo>
-                    <a:pt x="0" y="384428"/>
-                  </a:lnTo>
-                  <a:lnTo>
-                    <a:pt x="0" y="76834"/>
-                  </a:lnTo>
-                  <a:close/>
-                </a:path>
-              </a:pathLst>
-            </a:custGeom>
-            <a:ln w="9523">
-              <a:solidFill>
-                <a:srgbClr val="96B852"/>
-              </a:solidFill>
-            </a:ln>
-          </p:spPr>
-          <p:txBody>
-            <a:bodyPr wrap="square" lIns="0" tIns="0" rIns="0" bIns="0" rtlCol="0"/>
-            <a:lstStyle/>
-            <a:p>
-              <a:endParaRPr/>
-            </a:p>
-          </p:txBody>
-        </p:sp>
-        <p:sp>
-          <p:nvSpPr>
-            <p:cNvPr id="42" name="object 42"/>
-            <p:cNvSpPr/>
-            <p:nvPr/>
-          </p:nvSpPr>
-          <p:spPr>
-            <a:xfrm>
-              <a:off x="6769607" y="4698491"/>
-              <a:ext cx="228600" cy="0"/>
-            </a:xfrm>
-            <a:custGeom>
-              <a:avLst/>
-              <a:gdLst/>
-              <a:ahLst/>
-              <a:cxnLst/>
-              <a:rect l="l" t="t" r="r" b="b"/>
-              <a:pathLst>
-                <a:path w="228600">
-                  <a:moveTo>
-                    <a:pt x="0" y="0"/>
-                  </a:moveTo>
-                  <a:lnTo>
-                    <a:pt x="228219" y="0"/>
-                  </a:lnTo>
-                </a:path>
-              </a:pathLst>
-            </a:custGeom>
-            <a:ln w="9525">
-              <a:solidFill>
-                <a:srgbClr val="000000"/>
-              </a:solidFill>
-            </a:ln>
-          </p:spPr>
-          <p:txBody>
-            <a:bodyPr wrap="square" lIns="0" tIns="0" rIns="0" bIns="0" rtlCol="0"/>
-            <a:lstStyle/>
-            <a:p>
-              <a:endParaRPr/>
-            </a:p>
-          </p:txBody>
-        </p:sp>
-      </p:grpSp>
-      <p:sp>
-        <p:nvSpPr>
-          <p:cNvPr id="43" name="object 36">
+          <p:cNvPr id="28" name="object 6">
             <a:extLst>
               <a:ext uri="{FF2B5EF4-FFF2-40B4-BE49-F238E27FC236}">
-                <a16:creationId xmlns:a16="http://schemas.microsoft.com/office/drawing/2014/main" id="{0E7E3E3A-70D7-F87E-4BD0-D2792B478C8C}"/>
-              </a:ext>
-            </a:extLst>
-          </p:cNvPr>
-          <p:cNvSpPr txBox="1"/>
-          <p:nvPr/>
-        </p:nvSpPr>
-        <p:spPr>
-          <a:xfrm>
-            <a:off x="7997571" y="5431065"/>
-            <a:ext cx="1382269" cy="382156"/>
-          </a:xfrm>
-          <a:prstGeom prst="rect">
-            <a:avLst/>
-          </a:prstGeom>
-        </p:spPr>
-        <p:txBody>
-          <a:bodyPr vert="horz" wrap="square" lIns="0" tIns="12700" rIns="0" bIns="0" rtlCol="0">
-            <a:spAutoFit/>
-          </a:bodyPr>
-          <a:lstStyle/>
-          <a:p>
-            <a:pPr algn="ctr">
-              <a:lnSpc>
-                <a:spcPct val="100000"/>
-              </a:lnSpc>
-              <a:spcBef>
-                <a:spcPts val="100"/>
-              </a:spcBef>
-            </a:pPr>
-            <a:r>
-              <a:rPr lang="pt-BR" sz="1200" b="1" u="sng">
-                <a:uFill>
-                  <a:solidFill>
-                    <a:srgbClr val="000000"/>
-                  </a:solidFill>
-                </a:uFill>
-                <a:latin typeface="Arial"/>
-                <a:cs typeface="Arial"/>
-              </a:rPr>
-              <a:t>Leandro Pinto</a:t>
-            </a:r>
-          </a:p>
-          <a:p>
-            <a:pPr algn="ctr">
-              <a:lnSpc>
-                <a:spcPct val="100000"/>
-              </a:lnSpc>
-              <a:spcBef>
-                <a:spcPts val="5"/>
-              </a:spcBef>
-            </a:pPr>
-            <a:r>
-              <a:rPr sz="1200" i="1" spc="-10">
-                <a:solidFill>
-                  <a:srgbClr val="001F5F"/>
-                </a:solidFill>
-                <a:latin typeface="Arial"/>
-                <a:cs typeface="Arial"/>
-              </a:rPr>
-              <a:t>Analista</a:t>
-            </a:r>
-            <a:r>
-              <a:rPr sz="1200" i="1" spc="-5">
-                <a:solidFill>
-                  <a:srgbClr val="001F5F"/>
-                </a:solidFill>
-                <a:latin typeface="Arial"/>
-                <a:cs typeface="Arial"/>
-              </a:rPr>
-              <a:t> </a:t>
-            </a:r>
-            <a:r>
-              <a:rPr sz="1200" i="1">
-                <a:solidFill>
-                  <a:srgbClr val="001F5F"/>
-                </a:solidFill>
-                <a:latin typeface="Arial"/>
-                <a:cs typeface="Arial"/>
-              </a:rPr>
-              <a:t>de</a:t>
-            </a:r>
-            <a:r>
-              <a:rPr sz="1200" i="1" spc="-50">
-                <a:solidFill>
-                  <a:srgbClr val="001F5F"/>
-                </a:solidFill>
-                <a:latin typeface="Arial"/>
-                <a:cs typeface="Arial"/>
-              </a:rPr>
-              <a:t> </a:t>
-            </a:r>
-            <a:r>
-              <a:rPr sz="1200" i="1" spc="-10">
-                <a:solidFill>
-                  <a:srgbClr val="001F5F"/>
-                </a:solidFill>
-                <a:latin typeface="Arial"/>
-                <a:cs typeface="Arial"/>
-              </a:rPr>
-              <a:t>Suporte</a:t>
-            </a:r>
-            <a:endParaRPr sz="1200">
-              <a:latin typeface="Arial"/>
-              <a:cs typeface="Arial"/>
-            </a:endParaRPr>
-          </a:p>
-        </p:txBody>
-      </p:sp>
-      <p:grpSp>
-        <p:nvGrpSpPr>
-          <p:cNvPr id="59" name="object 6">
-            <a:extLst>
-              <a:ext uri="{FF2B5EF4-FFF2-40B4-BE49-F238E27FC236}">
-                <a16:creationId xmlns:a16="http://schemas.microsoft.com/office/drawing/2014/main" id="{95C7757E-9759-47B6-CCAD-1419B7EF67EF}"/>
+                <a16:creationId xmlns:a16="http://schemas.microsoft.com/office/drawing/2014/main" id="{9DABF232-1A39-081B-1234-F556590ECC0B}"/>
               </a:ext>
             </a:extLst>
           </p:cNvPr>
@@ -5576,7 +3734,7 @@
         </p:nvGrpSpPr>
         <p:grpSpPr>
           <a:xfrm>
-            <a:off x="2239709" y="5369062"/>
+            <a:off x="4106964" y="4154546"/>
             <a:ext cx="1701164" cy="527685"/>
             <a:chOff x="5105400" y="4454687"/>
             <a:chExt cx="1701164" cy="527685"/>
@@ -5584,10 +3742,10 @@
         </p:grpSpPr>
         <p:pic>
           <p:nvPicPr>
-            <p:cNvPr id="60" name="object 7">
+            <p:cNvPr id="30" name="object 7">
               <a:extLst>
                 <a:ext uri="{FF2B5EF4-FFF2-40B4-BE49-F238E27FC236}">
-                  <a16:creationId xmlns:a16="http://schemas.microsoft.com/office/drawing/2014/main" id="{89B8A6C7-980F-878B-37BD-EC9469C2ABF4}"/>
+                  <a16:creationId xmlns:a16="http://schemas.microsoft.com/office/drawing/2014/main" id="{2CDEAAD6-B46C-7E09-9ABC-8AE5EF9CA04D}"/>
                 </a:ext>
               </a:extLst>
             </p:cNvPr>
@@ -5595,7 +3753,7 @@
             <p:nvPr/>
           </p:nvPicPr>
           <p:blipFill>
-            <a:blip r:embed="rId2" cstate="print"/>
+            <a:blip r:embed="rId3" cstate="print"/>
             <a:stretch>
               <a:fillRect/>
             </a:stretch>
@@ -5612,10 +3770,10 @@
         </p:pic>
         <p:pic>
           <p:nvPicPr>
-            <p:cNvPr id="61" name="object 8">
+            <p:cNvPr id="33" name="object 8">
               <a:extLst>
                 <a:ext uri="{FF2B5EF4-FFF2-40B4-BE49-F238E27FC236}">
-                  <a16:creationId xmlns:a16="http://schemas.microsoft.com/office/drawing/2014/main" id="{40325FD6-B40F-0368-F56B-46596D220FA5}"/>
+                  <a16:creationId xmlns:a16="http://schemas.microsoft.com/office/drawing/2014/main" id="{98F16CA9-4730-F666-B6DE-16ABF6474431}"/>
                 </a:ext>
               </a:extLst>
             </p:cNvPr>
@@ -5623,7 +3781,7 @@
             <p:nvPr/>
           </p:nvPicPr>
           <p:blipFill>
-            <a:blip r:embed="rId4" cstate="print"/>
+            <a:blip r:embed="rId5" cstate="print"/>
             <a:stretch>
               <a:fillRect/>
             </a:stretch>
@@ -5640,10 +3798,10 @@
         </p:pic>
         <p:sp>
           <p:nvSpPr>
-            <p:cNvPr id="62" name="object 9">
+            <p:cNvPr id="55" name="object 9">
               <a:extLst>
                 <a:ext uri="{FF2B5EF4-FFF2-40B4-BE49-F238E27FC236}">
-                  <a16:creationId xmlns:a16="http://schemas.microsoft.com/office/drawing/2014/main" id="{823621DA-1708-D35C-CEB8-9CF458876242}"/>
+                  <a16:creationId xmlns:a16="http://schemas.microsoft.com/office/drawing/2014/main" id="{59325567-6DE6-489B-6E88-F87901657746}"/>
                 </a:ext>
               </a:extLst>
             </p:cNvPr>
@@ -5745,90 +3903,195 @@
           </p:txBody>
         </p:sp>
       </p:grpSp>
-      <p:sp>
-        <p:nvSpPr>
-          <p:cNvPr id="63" name="object 36">
+      <p:grpSp>
+        <p:nvGrpSpPr>
+          <p:cNvPr id="56" name="object 10">
             <a:extLst>
               <a:ext uri="{FF2B5EF4-FFF2-40B4-BE49-F238E27FC236}">
-                <a16:creationId xmlns:a16="http://schemas.microsoft.com/office/drawing/2014/main" id="{291368F5-588D-77F9-A721-A6535B42C01F}"/>
+                <a16:creationId xmlns:a16="http://schemas.microsoft.com/office/drawing/2014/main" id="{DAD79035-5B51-C47D-A3BC-978637A1A748}"/>
               </a:ext>
             </a:extLst>
           </p:cNvPr>
-          <p:cNvSpPr txBox="1"/>
+          <p:cNvGrpSpPr/>
           <p:nvPr/>
-        </p:nvSpPr>
-        <p:spPr>
+        </p:nvGrpSpPr>
+        <p:grpSpPr>
           <a:xfrm>
-            <a:off x="2317432" y="5377408"/>
-            <a:ext cx="1539495" cy="366767"/>
+            <a:off x="2250731" y="4154546"/>
+            <a:ext cx="1701164" cy="527685"/>
+            <a:chOff x="3249167" y="4454687"/>
+            <a:chExt cx="1701164" cy="527685"/>
           </a:xfrm>
-          <a:prstGeom prst="rect">
-            <a:avLst/>
-          </a:prstGeom>
-        </p:spPr>
-        <p:txBody>
-          <a:bodyPr vert="horz" wrap="square" lIns="0" tIns="12700" rIns="0" bIns="0" rtlCol="0">
-            <a:spAutoFit/>
-          </a:bodyPr>
-          <a:lstStyle/>
-          <a:p>
-            <a:pPr algn="ctr">
-              <a:lnSpc>
-                <a:spcPct val="100000"/>
-              </a:lnSpc>
-              <a:spcBef>
-                <a:spcPts val="100"/>
-              </a:spcBef>
-            </a:pPr>
-            <a:r>
-              <a:rPr lang="pt-BR" sz="1200" b="1" u="sng">
-                <a:uFill>
-                  <a:solidFill>
-                    <a:srgbClr val="000000"/>
-                  </a:solidFill>
-                </a:uFill>
-                <a:latin typeface="Arial"/>
-                <a:cs typeface="Arial"/>
-              </a:rPr>
-              <a:t>Ricardo Mazzo</a:t>
-            </a:r>
-            <a:endParaRPr sz="1200">
-              <a:latin typeface="Arial"/>
-              <a:cs typeface="Arial"/>
-            </a:endParaRPr>
-          </a:p>
-          <a:p>
-            <a:pPr algn="ctr">
-              <a:lnSpc>
-                <a:spcPct val="100000"/>
-              </a:lnSpc>
-              <a:spcBef>
-                <a:spcPts val="5"/>
-              </a:spcBef>
-            </a:pPr>
-            <a:r>
-              <a:rPr lang="pt-BR" sz="1100" i="1" spc="-10">
-                <a:solidFill>
-                  <a:srgbClr val="001F5F"/>
-                </a:solidFill>
-                <a:latin typeface="Arial"/>
-                <a:cs typeface="Arial"/>
-              </a:rPr>
-              <a:t>Jovem Aprendiz</a:t>
-            </a:r>
-            <a:endParaRPr sz="1100">
-              <a:latin typeface="Arial"/>
-              <a:cs typeface="Arial"/>
-            </a:endParaRPr>
-          </a:p>
-        </p:txBody>
-      </p:sp>
+        </p:grpSpPr>
+        <p:pic>
+          <p:nvPicPr>
+            <p:cNvPr id="57" name="object 11">
+              <a:extLst>
+                <a:ext uri="{FF2B5EF4-FFF2-40B4-BE49-F238E27FC236}">
+                  <a16:creationId xmlns:a16="http://schemas.microsoft.com/office/drawing/2014/main" id="{9A10626D-EFBA-DBC5-806E-8A757A3F655B}"/>
+                </a:ext>
+              </a:extLst>
+            </p:cNvPr>
+            <p:cNvPicPr/>
+            <p:nvPr/>
+          </p:nvPicPr>
+          <p:blipFill>
+            <a:blip r:embed="rId3" cstate="print"/>
+            <a:stretch>
+              <a:fillRect/>
+            </a:stretch>
+          </p:blipFill>
+          <p:spPr>
+            <a:xfrm>
+              <a:off x="3249167" y="4454687"/>
+              <a:ext cx="1700783" cy="527268"/>
+            </a:xfrm>
+            <a:prstGeom prst="rect">
+              <a:avLst/>
+            </a:prstGeom>
+          </p:spPr>
+        </p:pic>
+        <p:pic>
+          <p:nvPicPr>
+            <p:cNvPr id="58" name="object 12">
+              <a:extLst>
+                <a:ext uri="{FF2B5EF4-FFF2-40B4-BE49-F238E27FC236}">
+                  <a16:creationId xmlns:a16="http://schemas.microsoft.com/office/drawing/2014/main" id="{32C15A94-D7A9-EA42-7C36-701307FFAD26}"/>
+                </a:ext>
+              </a:extLst>
+            </p:cNvPr>
+            <p:cNvPicPr/>
+            <p:nvPr/>
+          </p:nvPicPr>
+          <p:blipFill>
+            <a:blip r:embed="rId5" cstate="print"/>
+            <a:stretch>
+              <a:fillRect/>
+            </a:stretch>
+          </p:blipFill>
+          <p:spPr>
+            <a:xfrm>
+              <a:off x="3287267" y="4466843"/>
+              <a:ext cx="1629156" cy="461771"/>
+            </a:xfrm>
+            <a:prstGeom prst="rect">
+              <a:avLst/>
+            </a:prstGeom>
+          </p:spPr>
+        </p:pic>
+        <p:sp>
+          <p:nvSpPr>
+            <p:cNvPr id="64" name="object 13">
+              <a:extLst>
+                <a:ext uri="{FF2B5EF4-FFF2-40B4-BE49-F238E27FC236}">
+                  <a16:creationId xmlns:a16="http://schemas.microsoft.com/office/drawing/2014/main" id="{A433EB25-CE52-BB3C-8DA4-0883D40A5021}"/>
+                </a:ext>
+              </a:extLst>
+            </p:cNvPr>
+            <p:cNvSpPr/>
+            <p:nvPr/>
+          </p:nvSpPr>
+          <p:spPr>
+            <a:xfrm>
+              <a:off x="3287267" y="4466843"/>
+              <a:ext cx="1629410" cy="461645"/>
+            </a:xfrm>
+            <a:custGeom>
+              <a:avLst/>
+              <a:gdLst/>
+              <a:ahLst/>
+              <a:cxnLst/>
+              <a:rect l="l" t="t" r="r" b="b"/>
+              <a:pathLst>
+                <a:path w="1629410" h="461645">
+                  <a:moveTo>
+                    <a:pt x="0" y="76834"/>
+                  </a:moveTo>
+                  <a:lnTo>
+                    <a:pt x="6096" y="46989"/>
+                  </a:lnTo>
+                  <a:lnTo>
+                    <a:pt x="22479" y="22478"/>
+                  </a:lnTo>
+                  <a:lnTo>
+                    <a:pt x="46990" y="6095"/>
+                  </a:lnTo>
+                  <a:lnTo>
+                    <a:pt x="76962" y="0"/>
+                  </a:lnTo>
+                  <a:lnTo>
+                    <a:pt x="1551940" y="0"/>
+                  </a:lnTo>
+                  <a:lnTo>
+                    <a:pt x="1581912" y="6095"/>
+                  </a:lnTo>
+                  <a:lnTo>
+                    <a:pt x="1606423" y="22478"/>
+                  </a:lnTo>
+                  <a:lnTo>
+                    <a:pt x="1622806" y="46989"/>
+                  </a:lnTo>
+                  <a:lnTo>
+                    <a:pt x="1628902" y="76834"/>
+                  </a:lnTo>
+                  <a:lnTo>
+                    <a:pt x="1628902" y="384428"/>
+                  </a:lnTo>
+                  <a:lnTo>
+                    <a:pt x="1622806" y="414273"/>
+                  </a:lnTo>
+                  <a:lnTo>
+                    <a:pt x="1606423" y="438784"/>
+                  </a:lnTo>
+                  <a:lnTo>
+                    <a:pt x="1581912" y="455167"/>
+                  </a:lnTo>
+                  <a:lnTo>
+                    <a:pt x="1551940" y="461263"/>
+                  </a:lnTo>
+                  <a:lnTo>
+                    <a:pt x="76962" y="461263"/>
+                  </a:lnTo>
+                  <a:lnTo>
+                    <a:pt x="46990" y="455167"/>
+                  </a:lnTo>
+                  <a:lnTo>
+                    <a:pt x="22479" y="438784"/>
+                  </a:lnTo>
+                  <a:lnTo>
+                    <a:pt x="6096" y="414273"/>
+                  </a:lnTo>
+                  <a:lnTo>
+                    <a:pt x="0" y="384428"/>
+                  </a:lnTo>
+                  <a:lnTo>
+                    <a:pt x="0" y="76834"/>
+                  </a:lnTo>
+                  <a:close/>
+                </a:path>
+              </a:pathLst>
+            </a:custGeom>
+            <a:ln w="9524">
+              <a:solidFill>
+                <a:srgbClr val="96B852"/>
+              </a:solidFill>
+            </a:ln>
+          </p:spPr>
+          <p:txBody>
+            <a:bodyPr wrap="square" lIns="0" tIns="0" rIns="0" bIns="0" rtlCol="0"/>
+            <a:lstStyle/>
+            <a:p>
+              <a:endParaRPr/>
+            </a:p>
+          </p:txBody>
+        </p:sp>
+      </p:grpSp>
       <p:sp>
         <p:nvSpPr>
-          <p:cNvPr id="65" name="object 37">
+          <p:cNvPr id="68" name="object 14">
             <a:extLst>
               <a:ext uri="{FF2B5EF4-FFF2-40B4-BE49-F238E27FC236}">
-                <a16:creationId xmlns:a16="http://schemas.microsoft.com/office/drawing/2014/main" id="{ED39A315-CCDC-D646-EF51-F0F93561B662}"/>
+                <a16:creationId xmlns:a16="http://schemas.microsoft.com/office/drawing/2014/main" id="{D7FB809C-6EB5-1AEF-707A-08721E04D73F}"/>
               </a:ext>
             </a:extLst>
           </p:cNvPr>
@@ -5837,8 +4100,8 @@
         </p:nvSpPr>
         <p:spPr>
           <a:xfrm>
-            <a:off x="3904107" y="5612866"/>
-            <a:ext cx="228600" cy="0"/>
+            <a:off x="4003711" y="3704956"/>
+            <a:ext cx="76200" cy="693390"/>
           </a:xfrm>
           <a:custGeom>
             <a:avLst/>
@@ -5847,21 +4110,41 @@
             <a:cxnLst/>
             <a:rect l="l" t="t" r="r" b="b"/>
             <a:pathLst>
-              <a:path w="228600">
+              <a:path w="76200" h="461645">
                 <a:moveTo>
-                  <a:pt x="0" y="0"/>
+                  <a:pt x="76200" y="385038"/>
                 </a:moveTo>
                 <a:lnTo>
-                  <a:pt x="228218" y="0"/>
-                </a:lnTo>
+                  <a:pt x="44450" y="385038"/>
+                </a:lnTo>
+                <a:lnTo>
+                  <a:pt x="44450" y="0"/>
+                </a:lnTo>
+                <a:lnTo>
+                  <a:pt x="31750" y="0"/>
+                </a:lnTo>
+                <a:lnTo>
+                  <a:pt x="31750" y="385038"/>
+                </a:lnTo>
+                <a:lnTo>
+                  <a:pt x="0" y="385038"/>
+                </a:lnTo>
+                <a:lnTo>
+                  <a:pt x="38100" y="461238"/>
+                </a:lnTo>
+                <a:lnTo>
+                  <a:pt x="69850" y="397738"/>
+                </a:lnTo>
+                <a:lnTo>
+                  <a:pt x="76200" y="385038"/>
+                </a:lnTo>
+                <a:close/>
               </a:path>
             </a:pathLst>
           </a:custGeom>
-          <a:ln w="9525">
-            <a:solidFill>
-              <a:srgbClr val="000000"/>
-            </a:solidFill>
-          </a:ln>
+          <a:solidFill>
+            <a:srgbClr val="000000"/>
+          </a:solidFill>
         </p:spPr>
         <p:txBody>
           <a:bodyPr wrap="square" lIns="0" tIns="0" rIns="0" bIns="0" rtlCol="0"/>
@@ -5873,10 +4156,10 @@
       </p:sp>
       <p:grpSp>
         <p:nvGrpSpPr>
-          <p:cNvPr id="45" name="object 18">
+          <p:cNvPr id="69" name="object 18">
             <a:extLst>
               <a:ext uri="{FF2B5EF4-FFF2-40B4-BE49-F238E27FC236}">
-                <a16:creationId xmlns:a16="http://schemas.microsoft.com/office/drawing/2014/main" id="{AD1008C5-BF2E-E89E-D25F-660D4E28A252}"/>
+                <a16:creationId xmlns:a16="http://schemas.microsoft.com/office/drawing/2014/main" id="{A68BA049-20D1-CC06-9781-957B62956DAC}"/>
               </a:ext>
             </a:extLst>
           </p:cNvPr>
@@ -5885,18 +4168,18 @@
         </p:nvGrpSpPr>
         <p:grpSpPr>
           <a:xfrm>
-            <a:off x="4918135" y="2569841"/>
-            <a:ext cx="1917767" cy="527268"/>
+            <a:off x="3116710" y="2290527"/>
+            <a:ext cx="2018062" cy="527268"/>
             <a:chOff x="5049011" y="2583214"/>
             <a:chExt cx="1700784" cy="527268"/>
           </a:xfrm>
         </p:grpSpPr>
         <p:pic>
           <p:nvPicPr>
-            <p:cNvPr id="46" name="object 19">
+            <p:cNvPr id="70" name="object 19">
               <a:extLst>
                 <a:ext uri="{FF2B5EF4-FFF2-40B4-BE49-F238E27FC236}">
-                  <a16:creationId xmlns:a16="http://schemas.microsoft.com/office/drawing/2014/main" id="{17216AAE-C6B2-7136-3E8C-D64DCF75B73D}"/>
+                  <a16:creationId xmlns:a16="http://schemas.microsoft.com/office/drawing/2014/main" id="{88F99BFB-4E11-A49A-35B3-AB48D4A54DF3}"/>
                 </a:ext>
               </a:extLst>
             </p:cNvPr>
@@ -5904,7 +4187,7 @@
             <p:nvPr/>
           </p:nvPicPr>
           <p:blipFill>
-            <a:blip r:embed="rId2" cstate="print"/>
+            <a:blip r:embed="rId3" cstate="print"/>
             <a:stretch>
               <a:fillRect/>
             </a:stretch>
@@ -5921,10 +4204,10 @@
         </p:pic>
         <p:pic>
           <p:nvPicPr>
-            <p:cNvPr id="47" name="object 20">
+            <p:cNvPr id="71" name="object 20">
               <a:extLst>
                 <a:ext uri="{FF2B5EF4-FFF2-40B4-BE49-F238E27FC236}">
-                  <a16:creationId xmlns:a16="http://schemas.microsoft.com/office/drawing/2014/main" id="{11D1A34D-01A6-49CE-4489-AE3F53F2A91F}"/>
+                  <a16:creationId xmlns:a16="http://schemas.microsoft.com/office/drawing/2014/main" id="{E3130B75-0986-FD44-367C-566A5A1823CA}"/>
                 </a:ext>
               </a:extLst>
             </p:cNvPr>
@@ -5949,10 +4232,10 @@
         </p:pic>
         <p:sp>
           <p:nvSpPr>
-            <p:cNvPr id="48" name="object 21">
+            <p:cNvPr id="74" name="object 21">
               <a:extLst>
                 <a:ext uri="{FF2B5EF4-FFF2-40B4-BE49-F238E27FC236}">
-                  <a16:creationId xmlns:a16="http://schemas.microsoft.com/office/drawing/2014/main" id="{97968AC2-2C0B-595D-AE9D-27494869EF4B}"/>
+                  <a16:creationId xmlns:a16="http://schemas.microsoft.com/office/drawing/2014/main" id="{159BAF51-84E8-49BA-5012-B60888C08983}"/>
                 </a:ext>
               </a:extLst>
             </p:cNvPr>
@@ -6056,10 +4339,10 @@
       </p:grpSp>
       <p:sp>
         <p:nvSpPr>
-          <p:cNvPr id="49" name="object 23">
+          <p:cNvPr id="75" name="object 23">
             <a:extLst>
               <a:ext uri="{FF2B5EF4-FFF2-40B4-BE49-F238E27FC236}">
-                <a16:creationId xmlns:a16="http://schemas.microsoft.com/office/drawing/2014/main" id="{0AE0C4D8-4448-50B5-73B8-EB3AF3E9541C}"/>
+                <a16:creationId xmlns:a16="http://schemas.microsoft.com/office/drawing/2014/main" id="{F46B0854-2245-20AB-E784-8F297BC9EC6B}"/>
               </a:ext>
             </a:extLst>
           </p:cNvPr>
@@ -6068,7 +4351,1467 @@
         </p:nvSpPr>
         <p:spPr>
           <a:xfrm>
-            <a:off x="4913691" y="2616085"/>
+            <a:off x="3171144" y="2335929"/>
+            <a:ext cx="1917767" cy="382156"/>
+          </a:xfrm>
+          <a:prstGeom prst="rect">
+            <a:avLst/>
+          </a:prstGeom>
+        </p:spPr>
+        <p:txBody>
+          <a:bodyPr vert="horz" wrap="square" lIns="0" tIns="12700" rIns="0" bIns="0" rtlCol="0">
+            <a:spAutoFit/>
+          </a:bodyPr>
+          <a:lstStyle/>
+          <a:p>
+            <a:pPr algn="ctr">
+              <a:lnSpc>
+                <a:spcPct val="100000"/>
+              </a:lnSpc>
+              <a:spcBef>
+                <a:spcPts val="100"/>
+              </a:spcBef>
+            </a:pPr>
+            <a:r>
+              <a:rPr sz="1200" b="1" u="sng" dirty="0">
+                <a:uFill>
+                  <a:solidFill>
+                    <a:srgbClr val="000000"/>
+                  </a:solidFill>
+                </a:uFill>
+                <a:latin typeface="Arial"/>
+                <a:cs typeface="Arial"/>
+              </a:rPr>
+              <a:t>Renato</a:t>
+            </a:r>
+            <a:r>
+              <a:rPr sz="1200" b="1" u="sng" spc="-70" dirty="0">
+                <a:uFill>
+                  <a:solidFill>
+                    <a:srgbClr val="000000"/>
+                  </a:solidFill>
+                </a:uFill>
+                <a:latin typeface="Arial"/>
+                <a:cs typeface="Arial"/>
+              </a:rPr>
+              <a:t> </a:t>
+            </a:r>
+            <a:r>
+              <a:rPr sz="1200" b="1" u="sng" spc="-10" dirty="0">
+                <a:uFill>
+                  <a:solidFill>
+                    <a:srgbClr val="000000"/>
+                  </a:solidFill>
+                </a:uFill>
+                <a:latin typeface="Arial"/>
+                <a:cs typeface="Arial"/>
+              </a:rPr>
+              <a:t>Constancio</a:t>
+            </a:r>
+            <a:endParaRPr sz="1200" dirty="0">
+              <a:latin typeface="Arial"/>
+              <a:cs typeface="Arial"/>
+            </a:endParaRPr>
+          </a:p>
+          <a:p>
+            <a:pPr algn="ctr">
+              <a:lnSpc>
+                <a:spcPct val="100000"/>
+              </a:lnSpc>
+            </a:pPr>
+            <a:r>
+              <a:rPr sz="1200" i="1" dirty="0" err="1">
+                <a:solidFill>
+                  <a:srgbClr val="001F5F"/>
+                </a:solidFill>
+                <a:latin typeface="Arial"/>
+                <a:cs typeface="Arial"/>
+              </a:rPr>
+              <a:t>Gerente</a:t>
+            </a:r>
+            <a:r>
+              <a:rPr lang="pt-BR" sz="1200" i="1" dirty="0">
+                <a:solidFill>
+                  <a:srgbClr val="001F5F"/>
+                </a:solidFill>
+                <a:latin typeface="Arial"/>
+                <a:cs typeface="Arial"/>
+              </a:rPr>
+              <a:t> Operacional</a:t>
+            </a:r>
+            <a:r>
+              <a:rPr sz="1200" i="1" spc="-55" dirty="0">
+                <a:solidFill>
+                  <a:srgbClr val="001F5F"/>
+                </a:solidFill>
+                <a:latin typeface="Arial"/>
+                <a:cs typeface="Arial"/>
+              </a:rPr>
+              <a:t> </a:t>
+            </a:r>
+            <a:r>
+              <a:rPr sz="1200" i="1" dirty="0">
+                <a:solidFill>
+                  <a:srgbClr val="001F5F"/>
+                </a:solidFill>
+                <a:latin typeface="Arial"/>
+                <a:cs typeface="Arial"/>
+              </a:rPr>
+              <a:t>de</a:t>
+            </a:r>
+            <a:r>
+              <a:rPr sz="1200" i="1" spc="-50" dirty="0">
+                <a:solidFill>
+                  <a:srgbClr val="001F5F"/>
+                </a:solidFill>
+                <a:latin typeface="Arial"/>
+                <a:cs typeface="Arial"/>
+              </a:rPr>
+              <a:t> </a:t>
+            </a:r>
+            <a:r>
+              <a:rPr sz="1200" i="1" spc="-35" dirty="0">
+                <a:solidFill>
+                  <a:srgbClr val="001F5F"/>
+                </a:solidFill>
+                <a:latin typeface="Arial"/>
+                <a:cs typeface="Arial"/>
+              </a:rPr>
+              <a:t>TI</a:t>
+            </a:r>
+            <a:endParaRPr sz="1200" dirty="0">
+              <a:latin typeface="Arial"/>
+              <a:cs typeface="Arial"/>
+            </a:endParaRPr>
+          </a:p>
+        </p:txBody>
+      </p:sp>
+      <p:sp>
+        <p:nvSpPr>
+          <p:cNvPr id="76" name="object 32">
+            <a:extLst>
+              <a:ext uri="{FF2B5EF4-FFF2-40B4-BE49-F238E27FC236}">
+                <a16:creationId xmlns:a16="http://schemas.microsoft.com/office/drawing/2014/main" id="{D32EE31F-C24B-4183-44DB-408148D56B63}"/>
+              </a:ext>
+            </a:extLst>
+          </p:cNvPr>
+          <p:cNvSpPr txBox="1"/>
+          <p:nvPr/>
+        </p:nvSpPr>
+        <p:spPr>
+          <a:xfrm>
+            <a:off x="3459074" y="3267042"/>
+            <a:ext cx="1354200" cy="382156"/>
+          </a:xfrm>
+          <a:prstGeom prst="rect">
+            <a:avLst/>
+          </a:prstGeom>
+        </p:spPr>
+        <p:txBody>
+          <a:bodyPr vert="horz" wrap="square" lIns="0" tIns="12700" rIns="0" bIns="0" rtlCol="0">
+            <a:spAutoFit/>
+          </a:bodyPr>
+          <a:lstStyle/>
+          <a:p>
+            <a:pPr marL="33655" algn="ctr">
+              <a:lnSpc>
+                <a:spcPct val="100000"/>
+              </a:lnSpc>
+              <a:spcBef>
+                <a:spcPts val="100"/>
+              </a:spcBef>
+            </a:pPr>
+            <a:r>
+              <a:rPr sz="1200" b="1" u="sng" spc="-10">
+                <a:uFill>
+                  <a:solidFill>
+                    <a:srgbClr val="000000"/>
+                  </a:solidFill>
+                </a:uFill>
+                <a:latin typeface="Arial"/>
+                <a:cs typeface="Arial"/>
+              </a:rPr>
+              <a:t>Marco</a:t>
+            </a:r>
+            <a:r>
+              <a:rPr sz="1200" b="1" u="sng" spc="-40">
+                <a:uFill>
+                  <a:solidFill>
+                    <a:srgbClr val="000000"/>
+                  </a:solidFill>
+                </a:uFill>
+                <a:latin typeface="Arial"/>
+                <a:cs typeface="Arial"/>
+              </a:rPr>
+              <a:t> </a:t>
+            </a:r>
+            <a:r>
+              <a:rPr sz="1200" b="1" u="sng" spc="-10">
+                <a:uFill>
+                  <a:solidFill>
+                    <a:srgbClr val="000000"/>
+                  </a:solidFill>
+                </a:uFill>
+                <a:latin typeface="Arial"/>
+                <a:cs typeface="Arial"/>
+              </a:rPr>
+              <a:t>Borges</a:t>
+            </a:r>
+            <a:endParaRPr lang="pt-BR" sz="1200" b="1" u="sng" spc="-10">
+              <a:uFill>
+                <a:solidFill>
+                  <a:srgbClr val="000000"/>
+                </a:solidFill>
+              </a:uFill>
+              <a:latin typeface="Arial"/>
+              <a:cs typeface="Arial"/>
+            </a:endParaRPr>
+          </a:p>
+          <a:p>
+            <a:pPr marL="12700" algn="ctr">
+              <a:lnSpc>
+                <a:spcPct val="100000"/>
+              </a:lnSpc>
+              <a:spcBef>
+                <a:spcPts val="5"/>
+              </a:spcBef>
+            </a:pPr>
+            <a:r>
+              <a:rPr sz="1200" i="1" spc="-10">
+                <a:solidFill>
+                  <a:srgbClr val="001F5F"/>
+                </a:solidFill>
+                <a:latin typeface="Arial"/>
+                <a:cs typeface="Arial"/>
+              </a:rPr>
+              <a:t>Coordenador</a:t>
+            </a:r>
+            <a:r>
+              <a:rPr sz="1200" i="1" spc="-20">
+                <a:solidFill>
+                  <a:srgbClr val="001F5F"/>
+                </a:solidFill>
+                <a:latin typeface="Arial"/>
+                <a:cs typeface="Arial"/>
+              </a:rPr>
+              <a:t> </a:t>
+            </a:r>
+            <a:r>
+              <a:rPr sz="1200" i="1">
+                <a:solidFill>
+                  <a:srgbClr val="001F5F"/>
+                </a:solidFill>
+                <a:latin typeface="Arial"/>
+                <a:cs typeface="Arial"/>
+              </a:rPr>
+              <a:t>de</a:t>
+            </a:r>
+            <a:r>
+              <a:rPr sz="1200" i="1" spc="-25">
+                <a:solidFill>
+                  <a:srgbClr val="001F5F"/>
+                </a:solidFill>
+                <a:latin typeface="Arial"/>
+                <a:cs typeface="Arial"/>
+              </a:rPr>
+              <a:t> TI</a:t>
+            </a:r>
+            <a:endParaRPr sz="1200">
+              <a:latin typeface="Arial"/>
+              <a:cs typeface="Arial"/>
+            </a:endParaRPr>
+          </a:p>
+        </p:txBody>
+      </p:sp>
+      <p:sp>
+        <p:nvSpPr>
+          <p:cNvPr id="77" name="object 34">
+            <a:extLst>
+              <a:ext uri="{FF2B5EF4-FFF2-40B4-BE49-F238E27FC236}">
+                <a16:creationId xmlns:a16="http://schemas.microsoft.com/office/drawing/2014/main" id="{ABB1CF7D-D002-50F8-C417-65C67646AB95}"/>
+              </a:ext>
+            </a:extLst>
+          </p:cNvPr>
+          <p:cNvSpPr txBox="1"/>
+          <p:nvPr/>
+        </p:nvSpPr>
+        <p:spPr>
+          <a:xfrm>
+            <a:off x="2653262" y="4206446"/>
+            <a:ext cx="943227" cy="382156"/>
+          </a:xfrm>
+          <a:prstGeom prst="rect">
+            <a:avLst/>
+          </a:prstGeom>
+        </p:spPr>
+        <p:txBody>
+          <a:bodyPr vert="horz" wrap="square" lIns="0" tIns="12700" rIns="0" bIns="0" rtlCol="0">
+            <a:spAutoFit/>
+          </a:bodyPr>
+          <a:lstStyle/>
+          <a:p>
+            <a:pPr marL="12700" algn="ctr">
+              <a:lnSpc>
+                <a:spcPct val="100000"/>
+              </a:lnSpc>
+              <a:spcBef>
+                <a:spcPts val="100"/>
+              </a:spcBef>
+            </a:pPr>
+            <a:r>
+              <a:rPr sz="1200" b="1" u="sng">
+                <a:uFill>
+                  <a:solidFill>
+                    <a:srgbClr val="000000"/>
+                  </a:solidFill>
+                </a:uFill>
+                <a:latin typeface="Arial"/>
+                <a:cs typeface="Arial"/>
+              </a:rPr>
+              <a:t>Kayky</a:t>
+            </a:r>
+            <a:r>
+              <a:rPr sz="1200" b="1" u="sng" spc="-90">
+                <a:uFill>
+                  <a:solidFill>
+                    <a:srgbClr val="000000"/>
+                  </a:solidFill>
+                </a:uFill>
+                <a:latin typeface="Arial"/>
+                <a:cs typeface="Arial"/>
+              </a:rPr>
+              <a:t> </a:t>
+            </a:r>
+            <a:r>
+              <a:rPr sz="1200" b="1" u="sng" spc="-10">
+                <a:uFill>
+                  <a:solidFill>
+                    <a:srgbClr val="000000"/>
+                  </a:solidFill>
+                </a:uFill>
+                <a:latin typeface="Arial"/>
+                <a:cs typeface="Arial"/>
+              </a:rPr>
+              <a:t>Silva</a:t>
+            </a:r>
+            <a:endParaRPr lang="pt-BR" sz="1200" b="1" u="sng" spc="-10">
+              <a:uFill>
+                <a:solidFill>
+                  <a:srgbClr val="000000"/>
+                </a:solidFill>
+              </a:uFill>
+              <a:latin typeface="Arial"/>
+              <a:cs typeface="Arial"/>
+            </a:endParaRPr>
+          </a:p>
+          <a:p>
+            <a:pPr marL="65405" algn="ctr">
+              <a:lnSpc>
+                <a:spcPct val="100000"/>
+              </a:lnSpc>
+              <a:spcBef>
+                <a:spcPts val="5"/>
+              </a:spcBef>
+            </a:pPr>
+            <a:r>
+              <a:rPr sz="1200" i="1">
+                <a:solidFill>
+                  <a:srgbClr val="001F5F"/>
+                </a:solidFill>
+                <a:latin typeface="Arial"/>
+                <a:cs typeface="Arial"/>
+              </a:rPr>
+              <a:t>Auxiliar</a:t>
+            </a:r>
+            <a:r>
+              <a:rPr sz="1200" i="1" spc="-35">
+                <a:solidFill>
+                  <a:srgbClr val="001F5F"/>
+                </a:solidFill>
+                <a:latin typeface="Arial"/>
+                <a:cs typeface="Arial"/>
+              </a:rPr>
+              <a:t> </a:t>
+            </a:r>
+            <a:r>
+              <a:rPr sz="1200" i="1" spc="-10">
+                <a:solidFill>
+                  <a:srgbClr val="001F5F"/>
+                </a:solidFill>
+                <a:latin typeface="Arial"/>
+                <a:cs typeface="Arial"/>
+              </a:rPr>
+              <a:t>de</a:t>
+            </a:r>
+            <a:r>
+              <a:rPr sz="1200" i="1" spc="-65">
+                <a:solidFill>
+                  <a:srgbClr val="001F5F"/>
+                </a:solidFill>
+                <a:latin typeface="Arial"/>
+                <a:cs typeface="Arial"/>
+              </a:rPr>
+              <a:t> </a:t>
+            </a:r>
+            <a:r>
+              <a:rPr sz="1200" i="1" spc="-25">
+                <a:solidFill>
+                  <a:srgbClr val="001F5F"/>
+                </a:solidFill>
+                <a:latin typeface="Arial"/>
+                <a:cs typeface="Arial"/>
+              </a:rPr>
+              <a:t>TI</a:t>
+            </a:r>
+            <a:endParaRPr sz="1200">
+              <a:latin typeface="Arial"/>
+              <a:cs typeface="Arial"/>
+            </a:endParaRPr>
+          </a:p>
+        </p:txBody>
+      </p:sp>
+      <p:sp>
+        <p:nvSpPr>
+          <p:cNvPr id="78" name="object 36">
+            <a:extLst>
+              <a:ext uri="{FF2B5EF4-FFF2-40B4-BE49-F238E27FC236}">
+                <a16:creationId xmlns:a16="http://schemas.microsoft.com/office/drawing/2014/main" id="{61917B7A-A6E7-32DA-3EEF-14F4A4485E59}"/>
+              </a:ext>
+            </a:extLst>
+          </p:cNvPr>
+          <p:cNvSpPr txBox="1"/>
+          <p:nvPr/>
+        </p:nvSpPr>
+        <p:spPr>
+          <a:xfrm>
+            <a:off x="4184687" y="4162892"/>
+            <a:ext cx="1539495" cy="366767"/>
+          </a:xfrm>
+          <a:prstGeom prst="rect">
+            <a:avLst/>
+          </a:prstGeom>
+        </p:spPr>
+        <p:txBody>
+          <a:bodyPr vert="horz" wrap="square" lIns="0" tIns="12700" rIns="0" bIns="0" rtlCol="0">
+            <a:spAutoFit/>
+          </a:bodyPr>
+          <a:lstStyle/>
+          <a:p>
+            <a:pPr algn="ctr">
+              <a:lnSpc>
+                <a:spcPct val="100000"/>
+              </a:lnSpc>
+              <a:spcBef>
+                <a:spcPts val="100"/>
+              </a:spcBef>
+            </a:pPr>
+            <a:r>
+              <a:rPr sz="1200" b="1" u="sng">
+                <a:uFill>
+                  <a:solidFill>
+                    <a:srgbClr val="000000"/>
+                  </a:solidFill>
+                </a:uFill>
+                <a:latin typeface="Arial"/>
+                <a:cs typeface="Arial"/>
+              </a:rPr>
+              <a:t>Vitor</a:t>
+            </a:r>
+            <a:r>
+              <a:rPr sz="1200" b="1" u="sng" spc="-75">
+                <a:uFill>
+                  <a:solidFill>
+                    <a:srgbClr val="000000"/>
+                  </a:solidFill>
+                </a:uFill>
+                <a:latin typeface="Arial"/>
+                <a:cs typeface="Arial"/>
+              </a:rPr>
+              <a:t> </a:t>
+            </a:r>
+            <a:r>
+              <a:rPr sz="1200" b="1" u="sng" spc="-10">
+                <a:uFill>
+                  <a:solidFill>
+                    <a:srgbClr val="000000"/>
+                  </a:solidFill>
+                </a:uFill>
+                <a:latin typeface="Arial"/>
+                <a:cs typeface="Arial"/>
+              </a:rPr>
+              <a:t>Silva</a:t>
+            </a:r>
+            <a:endParaRPr sz="1200">
+              <a:latin typeface="Arial"/>
+              <a:cs typeface="Arial"/>
+            </a:endParaRPr>
+          </a:p>
+          <a:p>
+            <a:pPr algn="ctr">
+              <a:lnSpc>
+                <a:spcPct val="100000"/>
+              </a:lnSpc>
+              <a:spcBef>
+                <a:spcPts val="5"/>
+              </a:spcBef>
+            </a:pPr>
+            <a:r>
+              <a:rPr sz="1100" i="1" spc="-10">
+                <a:solidFill>
+                  <a:srgbClr val="001F5F"/>
+                </a:solidFill>
+                <a:latin typeface="Arial"/>
+                <a:cs typeface="Arial"/>
+              </a:rPr>
+              <a:t>Analista</a:t>
+            </a:r>
+            <a:r>
+              <a:rPr sz="1100" i="1" spc="-5">
+                <a:solidFill>
+                  <a:srgbClr val="001F5F"/>
+                </a:solidFill>
+                <a:latin typeface="Arial"/>
+                <a:cs typeface="Arial"/>
+              </a:rPr>
+              <a:t> </a:t>
+            </a:r>
+            <a:r>
+              <a:rPr sz="1100" i="1">
+                <a:solidFill>
+                  <a:srgbClr val="001F5F"/>
+                </a:solidFill>
+                <a:latin typeface="Arial"/>
+                <a:cs typeface="Arial"/>
+              </a:rPr>
+              <a:t>de</a:t>
+            </a:r>
+            <a:r>
+              <a:rPr sz="1100" i="1" spc="-50">
+                <a:solidFill>
+                  <a:srgbClr val="001F5F"/>
+                </a:solidFill>
+                <a:latin typeface="Arial"/>
+                <a:cs typeface="Arial"/>
+              </a:rPr>
+              <a:t> </a:t>
+            </a:r>
+            <a:r>
+              <a:rPr lang="pt-BR" sz="1100" i="1" spc="-10">
+                <a:solidFill>
+                  <a:srgbClr val="001F5F"/>
+                </a:solidFill>
+                <a:latin typeface="Arial"/>
+                <a:cs typeface="Arial"/>
+              </a:rPr>
+              <a:t>Infraestrutura</a:t>
+            </a:r>
+            <a:endParaRPr sz="1100">
+              <a:latin typeface="Arial"/>
+              <a:cs typeface="Arial"/>
+            </a:endParaRPr>
+          </a:p>
+        </p:txBody>
+      </p:sp>
+      <p:sp>
+        <p:nvSpPr>
+          <p:cNvPr id="79" name="object 37">
+            <a:extLst>
+              <a:ext uri="{FF2B5EF4-FFF2-40B4-BE49-F238E27FC236}">
+                <a16:creationId xmlns:a16="http://schemas.microsoft.com/office/drawing/2014/main" id="{D297FA97-E3BB-8A1F-FDBF-04BFACE509AD}"/>
+              </a:ext>
+            </a:extLst>
+          </p:cNvPr>
+          <p:cNvSpPr/>
+          <p:nvPr/>
+        </p:nvSpPr>
+        <p:spPr>
+          <a:xfrm>
+            <a:off x="3917987" y="4398350"/>
+            <a:ext cx="228600" cy="0"/>
+          </a:xfrm>
+          <a:custGeom>
+            <a:avLst/>
+            <a:gdLst/>
+            <a:ahLst/>
+            <a:cxnLst/>
+            <a:rect l="l" t="t" r="r" b="b"/>
+            <a:pathLst>
+              <a:path w="228600">
+                <a:moveTo>
+                  <a:pt x="0" y="0"/>
+                </a:moveTo>
+                <a:lnTo>
+                  <a:pt x="228218" y="0"/>
+                </a:lnTo>
+              </a:path>
+            </a:pathLst>
+          </a:custGeom>
+          <a:ln w="9525">
+            <a:solidFill>
+              <a:srgbClr val="000000"/>
+            </a:solidFill>
+          </a:ln>
+        </p:spPr>
+        <p:txBody>
+          <a:bodyPr wrap="square" lIns="0" tIns="0" rIns="0" bIns="0" rtlCol="0"/>
+          <a:lstStyle/>
+          <a:p>
+            <a:endParaRPr/>
+          </a:p>
+        </p:txBody>
+      </p:sp>
+      <p:grpSp>
+        <p:nvGrpSpPr>
+          <p:cNvPr id="80" name="object 38">
+            <a:extLst>
+              <a:ext uri="{FF2B5EF4-FFF2-40B4-BE49-F238E27FC236}">
+                <a16:creationId xmlns:a16="http://schemas.microsoft.com/office/drawing/2014/main" id="{66BBFA0B-33EE-D08E-AD48-9A1C1F65F747}"/>
+              </a:ext>
+            </a:extLst>
+          </p:cNvPr>
+          <p:cNvGrpSpPr/>
+          <p:nvPr/>
+        </p:nvGrpSpPr>
+        <p:grpSpPr>
+          <a:xfrm>
+            <a:off x="5771171" y="4154546"/>
+            <a:ext cx="1891664" cy="527685"/>
+            <a:chOff x="6769607" y="4454687"/>
+            <a:chExt cx="1891664" cy="527685"/>
+          </a:xfrm>
+        </p:grpSpPr>
+        <p:pic>
+          <p:nvPicPr>
+            <p:cNvPr id="81" name="object 39">
+              <a:extLst>
+                <a:ext uri="{FF2B5EF4-FFF2-40B4-BE49-F238E27FC236}">
+                  <a16:creationId xmlns:a16="http://schemas.microsoft.com/office/drawing/2014/main" id="{D700FF1E-B0E8-3D18-4382-0C3758667486}"/>
+                </a:ext>
+              </a:extLst>
+            </p:cNvPr>
+            <p:cNvPicPr/>
+            <p:nvPr/>
+          </p:nvPicPr>
+          <p:blipFill>
+            <a:blip r:embed="rId3" cstate="print"/>
+            <a:stretch>
+              <a:fillRect/>
+            </a:stretch>
+          </p:blipFill>
+          <p:spPr>
+            <a:xfrm>
+              <a:off x="6960107" y="4454687"/>
+              <a:ext cx="1700783" cy="527268"/>
+            </a:xfrm>
+            <a:prstGeom prst="rect">
+              <a:avLst/>
+            </a:prstGeom>
+          </p:spPr>
+        </p:pic>
+        <p:pic>
+          <p:nvPicPr>
+            <p:cNvPr id="82" name="object 40">
+              <a:extLst>
+                <a:ext uri="{FF2B5EF4-FFF2-40B4-BE49-F238E27FC236}">
+                  <a16:creationId xmlns:a16="http://schemas.microsoft.com/office/drawing/2014/main" id="{8E7DC739-CC27-1EA4-DE04-F68F1B310DB2}"/>
+                </a:ext>
+              </a:extLst>
+            </p:cNvPr>
+            <p:cNvPicPr/>
+            <p:nvPr/>
+          </p:nvPicPr>
+          <p:blipFill>
+            <a:blip r:embed="rId7" cstate="print"/>
+            <a:stretch>
+              <a:fillRect/>
+            </a:stretch>
+          </p:blipFill>
+          <p:spPr>
+            <a:xfrm>
+              <a:off x="6998207" y="4466843"/>
+              <a:ext cx="1629155" cy="461771"/>
+            </a:xfrm>
+            <a:prstGeom prst="rect">
+              <a:avLst/>
+            </a:prstGeom>
+          </p:spPr>
+        </p:pic>
+        <p:sp>
+          <p:nvSpPr>
+            <p:cNvPr id="83" name="object 41">
+              <a:extLst>
+                <a:ext uri="{FF2B5EF4-FFF2-40B4-BE49-F238E27FC236}">
+                  <a16:creationId xmlns:a16="http://schemas.microsoft.com/office/drawing/2014/main" id="{9B36EAE2-6770-F573-19E0-968D5772DFC0}"/>
+                </a:ext>
+              </a:extLst>
+            </p:cNvPr>
+            <p:cNvSpPr/>
+            <p:nvPr/>
+          </p:nvSpPr>
+          <p:spPr>
+            <a:xfrm>
+              <a:off x="6998207" y="4466843"/>
+              <a:ext cx="1629410" cy="461645"/>
+            </a:xfrm>
+            <a:custGeom>
+              <a:avLst/>
+              <a:gdLst/>
+              <a:ahLst/>
+              <a:cxnLst/>
+              <a:rect l="l" t="t" r="r" b="b"/>
+              <a:pathLst>
+                <a:path w="1629409" h="461645">
+                  <a:moveTo>
+                    <a:pt x="0" y="76834"/>
+                  </a:moveTo>
+                  <a:lnTo>
+                    <a:pt x="6096" y="46989"/>
+                  </a:lnTo>
+                  <a:lnTo>
+                    <a:pt x="22478" y="22478"/>
+                  </a:lnTo>
+                  <a:lnTo>
+                    <a:pt x="46990" y="6095"/>
+                  </a:lnTo>
+                  <a:lnTo>
+                    <a:pt x="76962" y="0"/>
+                  </a:lnTo>
+                  <a:lnTo>
+                    <a:pt x="1551940" y="0"/>
+                  </a:lnTo>
+                  <a:lnTo>
+                    <a:pt x="1581912" y="6095"/>
+                  </a:lnTo>
+                  <a:lnTo>
+                    <a:pt x="1606423" y="22478"/>
+                  </a:lnTo>
+                  <a:lnTo>
+                    <a:pt x="1622806" y="46989"/>
+                  </a:lnTo>
+                  <a:lnTo>
+                    <a:pt x="1628902" y="76834"/>
+                  </a:lnTo>
+                  <a:lnTo>
+                    <a:pt x="1628902" y="384428"/>
+                  </a:lnTo>
+                  <a:lnTo>
+                    <a:pt x="1622806" y="414273"/>
+                  </a:lnTo>
+                  <a:lnTo>
+                    <a:pt x="1606423" y="438784"/>
+                  </a:lnTo>
+                  <a:lnTo>
+                    <a:pt x="1581912" y="455167"/>
+                  </a:lnTo>
+                  <a:lnTo>
+                    <a:pt x="1551940" y="461263"/>
+                  </a:lnTo>
+                  <a:lnTo>
+                    <a:pt x="76962" y="461263"/>
+                  </a:lnTo>
+                  <a:lnTo>
+                    <a:pt x="46990" y="455167"/>
+                  </a:lnTo>
+                  <a:lnTo>
+                    <a:pt x="22478" y="438784"/>
+                  </a:lnTo>
+                  <a:lnTo>
+                    <a:pt x="6096" y="414273"/>
+                  </a:lnTo>
+                  <a:lnTo>
+                    <a:pt x="0" y="384428"/>
+                  </a:lnTo>
+                  <a:lnTo>
+                    <a:pt x="0" y="76834"/>
+                  </a:lnTo>
+                  <a:close/>
+                </a:path>
+              </a:pathLst>
+            </a:custGeom>
+            <a:ln w="9523">
+              <a:solidFill>
+                <a:srgbClr val="96B852"/>
+              </a:solidFill>
+            </a:ln>
+          </p:spPr>
+          <p:txBody>
+            <a:bodyPr wrap="square" lIns="0" tIns="0" rIns="0" bIns="0" rtlCol="0"/>
+            <a:lstStyle/>
+            <a:p>
+              <a:endParaRPr/>
+            </a:p>
+          </p:txBody>
+        </p:sp>
+        <p:sp>
+          <p:nvSpPr>
+            <p:cNvPr id="84" name="object 42">
+              <a:extLst>
+                <a:ext uri="{FF2B5EF4-FFF2-40B4-BE49-F238E27FC236}">
+                  <a16:creationId xmlns:a16="http://schemas.microsoft.com/office/drawing/2014/main" id="{A8209FE1-8363-69CB-27BA-C08C50BCA1E6}"/>
+                </a:ext>
+              </a:extLst>
+            </p:cNvPr>
+            <p:cNvSpPr/>
+            <p:nvPr/>
+          </p:nvSpPr>
+          <p:spPr>
+            <a:xfrm>
+              <a:off x="6769607" y="4698491"/>
+              <a:ext cx="228600" cy="0"/>
+            </a:xfrm>
+            <a:custGeom>
+              <a:avLst/>
+              <a:gdLst/>
+              <a:ahLst/>
+              <a:cxnLst/>
+              <a:rect l="l" t="t" r="r" b="b"/>
+              <a:pathLst>
+                <a:path w="228600">
+                  <a:moveTo>
+                    <a:pt x="0" y="0"/>
+                  </a:moveTo>
+                  <a:lnTo>
+                    <a:pt x="228219" y="0"/>
+                  </a:lnTo>
+                </a:path>
+              </a:pathLst>
+            </a:custGeom>
+            <a:ln w="9525">
+              <a:solidFill>
+                <a:srgbClr val="000000"/>
+              </a:solidFill>
+            </a:ln>
+          </p:spPr>
+          <p:txBody>
+            <a:bodyPr wrap="square" lIns="0" tIns="0" rIns="0" bIns="0" rtlCol="0"/>
+            <a:lstStyle/>
+            <a:p>
+              <a:endParaRPr dirty="0"/>
+            </a:p>
+          </p:txBody>
+        </p:sp>
+      </p:grpSp>
+      <p:sp>
+        <p:nvSpPr>
+          <p:cNvPr id="85" name="object 36">
+            <a:extLst>
+              <a:ext uri="{FF2B5EF4-FFF2-40B4-BE49-F238E27FC236}">
+                <a16:creationId xmlns:a16="http://schemas.microsoft.com/office/drawing/2014/main" id="{853D348E-F05C-D0C8-D0B4-EBDE9D9C4F5B}"/>
+              </a:ext>
+            </a:extLst>
+          </p:cNvPr>
+          <p:cNvSpPr txBox="1"/>
+          <p:nvPr/>
+        </p:nvSpPr>
+        <p:spPr>
+          <a:xfrm>
+            <a:off x="6153695" y="4216549"/>
+            <a:ext cx="1382269" cy="382156"/>
+          </a:xfrm>
+          <a:prstGeom prst="rect">
+            <a:avLst/>
+          </a:prstGeom>
+        </p:spPr>
+        <p:txBody>
+          <a:bodyPr vert="horz" wrap="square" lIns="0" tIns="12700" rIns="0" bIns="0" rtlCol="0">
+            <a:spAutoFit/>
+          </a:bodyPr>
+          <a:lstStyle/>
+          <a:p>
+            <a:pPr algn="ctr">
+              <a:lnSpc>
+                <a:spcPct val="100000"/>
+              </a:lnSpc>
+              <a:spcBef>
+                <a:spcPts val="100"/>
+              </a:spcBef>
+            </a:pPr>
+            <a:r>
+              <a:rPr lang="pt-BR" sz="1200" b="1" u="sng">
+                <a:uFill>
+                  <a:solidFill>
+                    <a:srgbClr val="000000"/>
+                  </a:solidFill>
+                </a:uFill>
+                <a:latin typeface="Arial"/>
+                <a:cs typeface="Arial"/>
+              </a:rPr>
+              <a:t>Leandro Pinto</a:t>
+            </a:r>
+          </a:p>
+          <a:p>
+            <a:pPr algn="ctr">
+              <a:lnSpc>
+                <a:spcPct val="100000"/>
+              </a:lnSpc>
+              <a:spcBef>
+                <a:spcPts val="5"/>
+              </a:spcBef>
+            </a:pPr>
+            <a:r>
+              <a:rPr sz="1200" i="1" spc="-10">
+                <a:solidFill>
+                  <a:srgbClr val="001F5F"/>
+                </a:solidFill>
+                <a:latin typeface="Arial"/>
+                <a:cs typeface="Arial"/>
+              </a:rPr>
+              <a:t>Analista</a:t>
+            </a:r>
+            <a:r>
+              <a:rPr sz="1200" i="1" spc="-5">
+                <a:solidFill>
+                  <a:srgbClr val="001F5F"/>
+                </a:solidFill>
+                <a:latin typeface="Arial"/>
+                <a:cs typeface="Arial"/>
+              </a:rPr>
+              <a:t> </a:t>
+            </a:r>
+            <a:r>
+              <a:rPr sz="1200" i="1">
+                <a:solidFill>
+                  <a:srgbClr val="001F5F"/>
+                </a:solidFill>
+                <a:latin typeface="Arial"/>
+                <a:cs typeface="Arial"/>
+              </a:rPr>
+              <a:t>de</a:t>
+            </a:r>
+            <a:r>
+              <a:rPr sz="1200" i="1" spc="-50">
+                <a:solidFill>
+                  <a:srgbClr val="001F5F"/>
+                </a:solidFill>
+                <a:latin typeface="Arial"/>
+                <a:cs typeface="Arial"/>
+              </a:rPr>
+              <a:t> </a:t>
+            </a:r>
+            <a:r>
+              <a:rPr sz="1200" i="1" spc="-10">
+                <a:solidFill>
+                  <a:srgbClr val="001F5F"/>
+                </a:solidFill>
+                <a:latin typeface="Arial"/>
+                <a:cs typeface="Arial"/>
+              </a:rPr>
+              <a:t>Suporte</a:t>
+            </a:r>
+            <a:endParaRPr sz="1200">
+              <a:latin typeface="Arial"/>
+              <a:cs typeface="Arial"/>
+            </a:endParaRPr>
+          </a:p>
+        </p:txBody>
+      </p:sp>
+      <p:grpSp>
+        <p:nvGrpSpPr>
+          <p:cNvPr id="86" name="object 6">
+            <a:extLst>
+              <a:ext uri="{FF2B5EF4-FFF2-40B4-BE49-F238E27FC236}">
+                <a16:creationId xmlns:a16="http://schemas.microsoft.com/office/drawing/2014/main" id="{B7D9B385-BA07-4E90-8BCD-5DC48A2D0B50}"/>
+              </a:ext>
+            </a:extLst>
+          </p:cNvPr>
+          <p:cNvGrpSpPr/>
+          <p:nvPr/>
+        </p:nvGrpSpPr>
+        <p:grpSpPr>
+          <a:xfrm>
+            <a:off x="395833" y="4154546"/>
+            <a:ext cx="1701164" cy="527685"/>
+            <a:chOff x="5105400" y="4454687"/>
+            <a:chExt cx="1701164" cy="527685"/>
+          </a:xfrm>
+        </p:grpSpPr>
+        <p:pic>
+          <p:nvPicPr>
+            <p:cNvPr id="87" name="object 7">
+              <a:extLst>
+                <a:ext uri="{FF2B5EF4-FFF2-40B4-BE49-F238E27FC236}">
+                  <a16:creationId xmlns:a16="http://schemas.microsoft.com/office/drawing/2014/main" id="{CBC8A296-C2CB-8174-C0CB-1D382E97D3EB}"/>
+                </a:ext>
+              </a:extLst>
+            </p:cNvPr>
+            <p:cNvPicPr/>
+            <p:nvPr/>
+          </p:nvPicPr>
+          <p:blipFill>
+            <a:blip r:embed="rId3" cstate="print"/>
+            <a:stretch>
+              <a:fillRect/>
+            </a:stretch>
+          </p:blipFill>
+          <p:spPr>
+            <a:xfrm>
+              <a:off x="5105400" y="4454687"/>
+              <a:ext cx="1700783" cy="527268"/>
+            </a:xfrm>
+            <a:prstGeom prst="rect">
+              <a:avLst/>
+            </a:prstGeom>
+          </p:spPr>
+        </p:pic>
+        <p:pic>
+          <p:nvPicPr>
+            <p:cNvPr id="88" name="object 8">
+              <a:extLst>
+                <a:ext uri="{FF2B5EF4-FFF2-40B4-BE49-F238E27FC236}">
+                  <a16:creationId xmlns:a16="http://schemas.microsoft.com/office/drawing/2014/main" id="{03BD01B1-FAA5-8B86-A0D7-CC990E9F91B5}"/>
+                </a:ext>
+              </a:extLst>
+            </p:cNvPr>
+            <p:cNvPicPr/>
+            <p:nvPr/>
+          </p:nvPicPr>
+          <p:blipFill>
+            <a:blip r:embed="rId5" cstate="print"/>
+            <a:stretch>
+              <a:fillRect/>
+            </a:stretch>
+          </p:blipFill>
+          <p:spPr>
+            <a:xfrm>
+              <a:off x="5143500" y="4466843"/>
+              <a:ext cx="1629155" cy="461771"/>
+            </a:xfrm>
+            <a:prstGeom prst="rect">
+              <a:avLst/>
+            </a:prstGeom>
+          </p:spPr>
+        </p:pic>
+        <p:sp>
+          <p:nvSpPr>
+            <p:cNvPr id="89" name="object 9">
+              <a:extLst>
+                <a:ext uri="{FF2B5EF4-FFF2-40B4-BE49-F238E27FC236}">
+                  <a16:creationId xmlns:a16="http://schemas.microsoft.com/office/drawing/2014/main" id="{4E8B3694-AB55-7399-9079-8FB01A622D8E}"/>
+                </a:ext>
+              </a:extLst>
+            </p:cNvPr>
+            <p:cNvSpPr/>
+            <p:nvPr/>
+          </p:nvSpPr>
+          <p:spPr>
+            <a:xfrm>
+              <a:off x="5143500" y="4466843"/>
+              <a:ext cx="1629410" cy="461645"/>
+            </a:xfrm>
+            <a:custGeom>
+              <a:avLst/>
+              <a:gdLst/>
+              <a:ahLst/>
+              <a:cxnLst/>
+              <a:rect l="l" t="t" r="r" b="b"/>
+              <a:pathLst>
+                <a:path w="1629409" h="461645">
+                  <a:moveTo>
+                    <a:pt x="0" y="76834"/>
+                  </a:moveTo>
+                  <a:lnTo>
+                    <a:pt x="6096" y="46989"/>
+                  </a:lnTo>
+                  <a:lnTo>
+                    <a:pt x="22478" y="22478"/>
+                  </a:lnTo>
+                  <a:lnTo>
+                    <a:pt x="46989" y="6095"/>
+                  </a:lnTo>
+                  <a:lnTo>
+                    <a:pt x="76962" y="0"/>
+                  </a:lnTo>
+                  <a:lnTo>
+                    <a:pt x="1551940" y="0"/>
+                  </a:lnTo>
+                  <a:lnTo>
+                    <a:pt x="1581911" y="6095"/>
+                  </a:lnTo>
+                  <a:lnTo>
+                    <a:pt x="1606423" y="22478"/>
+                  </a:lnTo>
+                  <a:lnTo>
+                    <a:pt x="1622805" y="46989"/>
+                  </a:lnTo>
+                  <a:lnTo>
+                    <a:pt x="1628902" y="76834"/>
+                  </a:lnTo>
+                  <a:lnTo>
+                    <a:pt x="1628902" y="384428"/>
+                  </a:lnTo>
+                  <a:lnTo>
+                    <a:pt x="1622805" y="414273"/>
+                  </a:lnTo>
+                  <a:lnTo>
+                    <a:pt x="1606423" y="438784"/>
+                  </a:lnTo>
+                  <a:lnTo>
+                    <a:pt x="1581911" y="455167"/>
+                  </a:lnTo>
+                  <a:lnTo>
+                    <a:pt x="1551940" y="461263"/>
+                  </a:lnTo>
+                  <a:lnTo>
+                    <a:pt x="76962" y="461263"/>
+                  </a:lnTo>
+                  <a:lnTo>
+                    <a:pt x="46989" y="455167"/>
+                  </a:lnTo>
+                  <a:lnTo>
+                    <a:pt x="22478" y="438784"/>
+                  </a:lnTo>
+                  <a:lnTo>
+                    <a:pt x="6096" y="414273"/>
+                  </a:lnTo>
+                  <a:lnTo>
+                    <a:pt x="0" y="384428"/>
+                  </a:lnTo>
+                  <a:lnTo>
+                    <a:pt x="0" y="76834"/>
+                  </a:lnTo>
+                  <a:close/>
+                </a:path>
+              </a:pathLst>
+            </a:custGeom>
+            <a:ln w="9523">
+              <a:solidFill>
+                <a:srgbClr val="96B852"/>
+              </a:solidFill>
+            </a:ln>
+          </p:spPr>
+          <p:txBody>
+            <a:bodyPr wrap="square" lIns="0" tIns="0" rIns="0" bIns="0" rtlCol="0"/>
+            <a:lstStyle/>
+            <a:p>
+              <a:endParaRPr/>
+            </a:p>
+          </p:txBody>
+        </p:sp>
+      </p:grpSp>
+      <p:sp>
+        <p:nvSpPr>
+          <p:cNvPr id="90" name="object 36">
+            <a:extLst>
+              <a:ext uri="{FF2B5EF4-FFF2-40B4-BE49-F238E27FC236}">
+                <a16:creationId xmlns:a16="http://schemas.microsoft.com/office/drawing/2014/main" id="{7D501EC8-2AEA-ACD6-FCC2-D3C730E9945C}"/>
+              </a:ext>
+            </a:extLst>
+          </p:cNvPr>
+          <p:cNvSpPr txBox="1"/>
+          <p:nvPr/>
+        </p:nvSpPr>
+        <p:spPr>
+          <a:xfrm>
+            <a:off x="473556" y="4162892"/>
+            <a:ext cx="1539495" cy="366767"/>
+          </a:xfrm>
+          <a:prstGeom prst="rect">
+            <a:avLst/>
+          </a:prstGeom>
+        </p:spPr>
+        <p:txBody>
+          <a:bodyPr vert="horz" wrap="square" lIns="0" tIns="12700" rIns="0" bIns="0" rtlCol="0">
+            <a:spAutoFit/>
+          </a:bodyPr>
+          <a:lstStyle/>
+          <a:p>
+            <a:pPr algn="ctr">
+              <a:lnSpc>
+                <a:spcPct val="100000"/>
+              </a:lnSpc>
+              <a:spcBef>
+                <a:spcPts val="100"/>
+              </a:spcBef>
+            </a:pPr>
+            <a:r>
+              <a:rPr lang="pt-BR" sz="1200" b="1" u="sng">
+                <a:uFill>
+                  <a:solidFill>
+                    <a:srgbClr val="000000"/>
+                  </a:solidFill>
+                </a:uFill>
+                <a:latin typeface="Arial"/>
+                <a:cs typeface="Arial"/>
+              </a:rPr>
+              <a:t>Ricardo Mazzo</a:t>
+            </a:r>
+            <a:endParaRPr sz="1200">
+              <a:latin typeface="Arial"/>
+              <a:cs typeface="Arial"/>
+            </a:endParaRPr>
+          </a:p>
+          <a:p>
+            <a:pPr algn="ctr">
+              <a:lnSpc>
+                <a:spcPct val="100000"/>
+              </a:lnSpc>
+              <a:spcBef>
+                <a:spcPts val="5"/>
+              </a:spcBef>
+            </a:pPr>
+            <a:r>
+              <a:rPr lang="pt-BR" sz="1100" i="1" spc="-10">
+                <a:solidFill>
+                  <a:srgbClr val="001F5F"/>
+                </a:solidFill>
+                <a:latin typeface="Arial"/>
+                <a:cs typeface="Arial"/>
+              </a:rPr>
+              <a:t>Jovem Aprendiz</a:t>
+            </a:r>
+            <a:endParaRPr sz="1100">
+              <a:latin typeface="Arial"/>
+              <a:cs typeface="Arial"/>
+            </a:endParaRPr>
+          </a:p>
+        </p:txBody>
+      </p:sp>
+      <p:sp>
+        <p:nvSpPr>
+          <p:cNvPr id="91" name="object 37">
+            <a:extLst>
+              <a:ext uri="{FF2B5EF4-FFF2-40B4-BE49-F238E27FC236}">
+                <a16:creationId xmlns:a16="http://schemas.microsoft.com/office/drawing/2014/main" id="{2906D1F7-1E0B-754B-C394-CC112215A6F6}"/>
+              </a:ext>
+            </a:extLst>
+          </p:cNvPr>
+          <p:cNvSpPr/>
+          <p:nvPr/>
+        </p:nvSpPr>
+        <p:spPr>
+          <a:xfrm>
+            <a:off x="2060231" y="4398350"/>
+            <a:ext cx="228600" cy="0"/>
+          </a:xfrm>
+          <a:custGeom>
+            <a:avLst/>
+            <a:gdLst/>
+            <a:ahLst/>
+            <a:cxnLst/>
+            <a:rect l="l" t="t" r="r" b="b"/>
+            <a:pathLst>
+              <a:path w="228600">
+                <a:moveTo>
+                  <a:pt x="0" y="0"/>
+                </a:moveTo>
+                <a:lnTo>
+                  <a:pt x="228218" y="0"/>
+                </a:lnTo>
+              </a:path>
+            </a:pathLst>
+          </a:custGeom>
+          <a:ln w="9525">
+            <a:solidFill>
+              <a:srgbClr val="000000"/>
+            </a:solidFill>
+          </a:ln>
+        </p:spPr>
+        <p:txBody>
+          <a:bodyPr wrap="square" lIns="0" tIns="0" rIns="0" bIns="0" rtlCol="0"/>
+          <a:lstStyle/>
+          <a:p>
+            <a:endParaRPr/>
+          </a:p>
+        </p:txBody>
+      </p:sp>
+      <p:grpSp>
+        <p:nvGrpSpPr>
+          <p:cNvPr id="92" name="object 18">
+            <a:extLst>
+              <a:ext uri="{FF2B5EF4-FFF2-40B4-BE49-F238E27FC236}">
+                <a16:creationId xmlns:a16="http://schemas.microsoft.com/office/drawing/2014/main" id="{4A61907B-18AB-FDA3-0A48-20D33278D837}"/>
+              </a:ext>
+            </a:extLst>
+          </p:cNvPr>
+          <p:cNvGrpSpPr/>
+          <p:nvPr/>
+        </p:nvGrpSpPr>
+        <p:grpSpPr>
+          <a:xfrm>
+            <a:off x="5685252" y="1592154"/>
+            <a:ext cx="1917767" cy="527268"/>
+            <a:chOff x="5049011" y="2583214"/>
+            <a:chExt cx="1700784" cy="527268"/>
+          </a:xfrm>
+        </p:grpSpPr>
+        <p:pic>
+          <p:nvPicPr>
+            <p:cNvPr id="93" name="object 19">
+              <a:extLst>
+                <a:ext uri="{FF2B5EF4-FFF2-40B4-BE49-F238E27FC236}">
+                  <a16:creationId xmlns:a16="http://schemas.microsoft.com/office/drawing/2014/main" id="{112F5E7A-A235-3729-9698-392869E784A0}"/>
+                </a:ext>
+              </a:extLst>
+            </p:cNvPr>
+            <p:cNvPicPr/>
+            <p:nvPr/>
+          </p:nvPicPr>
+          <p:blipFill>
+            <a:blip r:embed="rId3" cstate="print"/>
+            <a:stretch>
+              <a:fillRect/>
+            </a:stretch>
+          </p:blipFill>
+          <p:spPr>
+            <a:xfrm>
+              <a:off x="5049011" y="2583214"/>
+              <a:ext cx="1700784" cy="527268"/>
+            </a:xfrm>
+            <a:prstGeom prst="rect">
+              <a:avLst/>
+            </a:prstGeom>
+          </p:spPr>
+        </p:pic>
+        <p:pic>
+          <p:nvPicPr>
+            <p:cNvPr id="94" name="object 20">
+              <a:extLst>
+                <a:ext uri="{FF2B5EF4-FFF2-40B4-BE49-F238E27FC236}">
+                  <a16:creationId xmlns:a16="http://schemas.microsoft.com/office/drawing/2014/main" id="{FDAFE8D2-4A86-DD44-4B93-F4FF7F9874B4}"/>
+                </a:ext>
+              </a:extLst>
+            </p:cNvPr>
+            <p:cNvPicPr/>
+            <p:nvPr/>
+          </p:nvPicPr>
+          <p:blipFill>
+            <a:blip r:embed="rId6" cstate="print"/>
+            <a:stretch>
+              <a:fillRect/>
+            </a:stretch>
+          </p:blipFill>
+          <p:spPr>
+            <a:xfrm>
+              <a:off x="5087111" y="2595371"/>
+              <a:ext cx="1629156" cy="461772"/>
+            </a:xfrm>
+            <a:prstGeom prst="rect">
+              <a:avLst/>
+            </a:prstGeom>
+          </p:spPr>
+        </p:pic>
+        <p:sp>
+          <p:nvSpPr>
+            <p:cNvPr id="95" name="object 21">
+              <a:extLst>
+                <a:ext uri="{FF2B5EF4-FFF2-40B4-BE49-F238E27FC236}">
+                  <a16:creationId xmlns:a16="http://schemas.microsoft.com/office/drawing/2014/main" id="{0BA63764-A0BC-A731-7874-9560A53F5CFA}"/>
+                </a:ext>
+              </a:extLst>
+            </p:cNvPr>
+            <p:cNvSpPr/>
+            <p:nvPr/>
+          </p:nvSpPr>
+          <p:spPr>
+            <a:xfrm>
+              <a:off x="5087111" y="2595371"/>
+              <a:ext cx="1629410" cy="461645"/>
+            </a:xfrm>
+            <a:custGeom>
+              <a:avLst/>
+              <a:gdLst/>
+              <a:ahLst/>
+              <a:cxnLst/>
+              <a:rect l="l" t="t" r="r" b="b"/>
+              <a:pathLst>
+                <a:path w="1629409" h="461644">
+                  <a:moveTo>
+                    <a:pt x="0" y="76835"/>
+                  </a:moveTo>
+                  <a:lnTo>
+                    <a:pt x="6096" y="46989"/>
+                  </a:lnTo>
+                  <a:lnTo>
+                    <a:pt x="22478" y="22478"/>
+                  </a:lnTo>
+                  <a:lnTo>
+                    <a:pt x="46989" y="6095"/>
+                  </a:lnTo>
+                  <a:lnTo>
+                    <a:pt x="76962" y="0"/>
+                  </a:lnTo>
+                  <a:lnTo>
+                    <a:pt x="1551939" y="0"/>
+                  </a:lnTo>
+                  <a:lnTo>
+                    <a:pt x="1581912" y="6095"/>
+                  </a:lnTo>
+                  <a:lnTo>
+                    <a:pt x="1606422" y="22478"/>
+                  </a:lnTo>
+                  <a:lnTo>
+                    <a:pt x="1622806" y="46989"/>
+                  </a:lnTo>
+                  <a:lnTo>
+                    <a:pt x="1628902" y="76835"/>
+                  </a:lnTo>
+                  <a:lnTo>
+                    <a:pt x="1628902" y="384428"/>
+                  </a:lnTo>
+                  <a:lnTo>
+                    <a:pt x="1622806" y="414274"/>
+                  </a:lnTo>
+                  <a:lnTo>
+                    <a:pt x="1606422" y="438785"/>
+                  </a:lnTo>
+                  <a:lnTo>
+                    <a:pt x="1581912" y="455167"/>
+                  </a:lnTo>
+                  <a:lnTo>
+                    <a:pt x="1551939" y="461263"/>
+                  </a:lnTo>
+                  <a:lnTo>
+                    <a:pt x="76962" y="461263"/>
+                  </a:lnTo>
+                  <a:lnTo>
+                    <a:pt x="46989" y="455167"/>
+                  </a:lnTo>
+                  <a:lnTo>
+                    <a:pt x="22478" y="438785"/>
+                  </a:lnTo>
+                  <a:lnTo>
+                    <a:pt x="6096" y="414274"/>
+                  </a:lnTo>
+                  <a:lnTo>
+                    <a:pt x="0" y="384428"/>
+                  </a:lnTo>
+                  <a:lnTo>
+                    <a:pt x="0" y="76835"/>
+                  </a:lnTo>
+                  <a:close/>
+                </a:path>
+              </a:pathLst>
+            </a:custGeom>
+            <a:ln w="9524">
+              <a:solidFill>
+                <a:srgbClr val="96B852"/>
+              </a:solidFill>
+            </a:ln>
+          </p:spPr>
+          <p:txBody>
+            <a:bodyPr wrap="square" lIns="0" tIns="0" rIns="0" bIns="0" rtlCol="0"/>
+            <a:lstStyle/>
+            <a:p>
+              <a:endParaRPr/>
+            </a:p>
+          </p:txBody>
+        </p:sp>
+      </p:grpSp>
+      <p:sp>
+        <p:nvSpPr>
+          <p:cNvPr id="96" name="object 23">
+            <a:extLst>
+              <a:ext uri="{FF2B5EF4-FFF2-40B4-BE49-F238E27FC236}">
+                <a16:creationId xmlns:a16="http://schemas.microsoft.com/office/drawing/2014/main" id="{61276A41-92F5-AD83-F629-D3F6848B7B37}"/>
+              </a:ext>
+            </a:extLst>
+          </p:cNvPr>
+          <p:cNvSpPr txBox="1"/>
+          <p:nvPr/>
+        </p:nvSpPr>
+        <p:spPr>
+          <a:xfrm>
+            <a:off x="5680808" y="1638398"/>
             <a:ext cx="1867791" cy="382156"/>
           </a:xfrm>
           <a:prstGeom prst="rect">
@@ -6113,34 +5856,14 @@
               </a:lnSpc>
             </a:pPr>
             <a:r>
-              <a:rPr sz="1200" i="1" dirty="0" err="1">
+              <a:rPr lang="pt-BR" sz="1200" i="1" dirty="0">
                 <a:solidFill>
                   <a:srgbClr val="001F5F"/>
                 </a:solidFill>
                 <a:latin typeface="Arial"/>
                 <a:cs typeface="Arial"/>
               </a:rPr>
-              <a:t>Gerente</a:t>
-            </a:r>
-            <a:r>
-              <a:rPr lang="pt-BR" sz="1200" i="1" dirty="0">
-                <a:solidFill>
-                  <a:srgbClr val="001F5F"/>
-                </a:solidFill>
-                <a:latin typeface="Arial"/>
-                <a:cs typeface="Arial"/>
-              </a:rPr>
-              <a:t> Executivo</a:t>
-            </a:r>
-            <a:r>
-              <a:rPr sz="1200" i="1" spc="-55" dirty="0">
-                <a:solidFill>
-                  <a:srgbClr val="001F5F"/>
-                </a:solidFill>
-                <a:latin typeface="Arial"/>
-                <a:cs typeface="Arial"/>
-              </a:rPr>
-              <a:t> </a:t>
+              <a:t>Diretor </a:t>
             </a:r>
             <a:r>
               <a:rPr sz="1200" i="1" dirty="0">
@@ -6181,10 +5904,10 @@
       </p:sp>
       <p:sp>
         <p:nvSpPr>
-          <p:cNvPr id="50" name="object 33">
+          <p:cNvPr id="97" name="object 33">
             <a:extLst>
               <a:ext uri="{FF2B5EF4-FFF2-40B4-BE49-F238E27FC236}">
-                <a16:creationId xmlns:a16="http://schemas.microsoft.com/office/drawing/2014/main" id="{0505C672-72BE-C25D-9B8F-187CD4B46457}"/>
+                <a16:creationId xmlns:a16="http://schemas.microsoft.com/office/drawing/2014/main" id="{05B522BE-6D44-4D26-C279-81A776E21E33}"/>
               </a:ext>
             </a:extLst>
           </p:cNvPr>
@@ -6193,7 +5916,7 @@
         </p:nvSpPr>
         <p:spPr>
           <a:xfrm>
-            <a:off x="5847587" y="3049548"/>
+            <a:off x="6614704" y="2071861"/>
             <a:ext cx="76200" cy="461645"/>
           </a:xfrm>
           <a:custGeom>
@@ -6244,6 +5967,1371 @@
           <a:lstStyle/>
           <a:p>
             <a:endParaRPr/>
+          </a:p>
+        </p:txBody>
+      </p:sp>
+      <p:grpSp>
+        <p:nvGrpSpPr>
+          <p:cNvPr id="98" name="object 18">
+            <a:extLst>
+              <a:ext uri="{FF2B5EF4-FFF2-40B4-BE49-F238E27FC236}">
+                <a16:creationId xmlns:a16="http://schemas.microsoft.com/office/drawing/2014/main" id="{0D62E9F2-6E70-8E19-DA7E-B782617C5664}"/>
+              </a:ext>
+            </a:extLst>
+          </p:cNvPr>
+          <p:cNvGrpSpPr/>
+          <p:nvPr/>
+        </p:nvGrpSpPr>
+        <p:grpSpPr>
+          <a:xfrm>
+            <a:off x="8058635" y="2302684"/>
+            <a:ext cx="2018062" cy="527268"/>
+            <a:chOff x="5049011" y="2583214"/>
+            <a:chExt cx="1700784" cy="527268"/>
+          </a:xfrm>
+        </p:grpSpPr>
+        <p:pic>
+          <p:nvPicPr>
+            <p:cNvPr id="99" name="object 19">
+              <a:extLst>
+                <a:ext uri="{FF2B5EF4-FFF2-40B4-BE49-F238E27FC236}">
+                  <a16:creationId xmlns:a16="http://schemas.microsoft.com/office/drawing/2014/main" id="{15BDB46E-F8B4-49D6-ED52-6B6373E5972D}"/>
+                </a:ext>
+              </a:extLst>
+            </p:cNvPr>
+            <p:cNvPicPr/>
+            <p:nvPr/>
+          </p:nvPicPr>
+          <p:blipFill>
+            <a:blip r:embed="rId3" cstate="print"/>
+            <a:stretch>
+              <a:fillRect/>
+            </a:stretch>
+          </p:blipFill>
+          <p:spPr>
+            <a:xfrm>
+              <a:off x="5049011" y="2583214"/>
+              <a:ext cx="1700784" cy="527268"/>
+            </a:xfrm>
+            <a:prstGeom prst="rect">
+              <a:avLst/>
+            </a:prstGeom>
+          </p:spPr>
+        </p:pic>
+        <p:pic>
+          <p:nvPicPr>
+            <p:cNvPr id="100" name="object 20">
+              <a:extLst>
+                <a:ext uri="{FF2B5EF4-FFF2-40B4-BE49-F238E27FC236}">
+                  <a16:creationId xmlns:a16="http://schemas.microsoft.com/office/drawing/2014/main" id="{8537CFF9-18C1-6B53-E97D-206A2DF93F85}"/>
+                </a:ext>
+              </a:extLst>
+            </p:cNvPr>
+            <p:cNvPicPr/>
+            <p:nvPr/>
+          </p:nvPicPr>
+          <p:blipFill>
+            <a:blip r:embed="rId6" cstate="print"/>
+            <a:stretch>
+              <a:fillRect/>
+            </a:stretch>
+          </p:blipFill>
+          <p:spPr>
+            <a:xfrm>
+              <a:off x="5087111" y="2595371"/>
+              <a:ext cx="1629156" cy="461772"/>
+            </a:xfrm>
+            <a:prstGeom prst="rect">
+              <a:avLst/>
+            </a:prstGeom>
+          </p:spPr>
+        </p:pic>
+        <p:sp>
+          <p:nvSpPr>
+            <p:cNvPr id="101" name="object 21">
+              <a:extLst>
+                <a:ext uri="{FF2B5EF4-FFF2-40B4-BE49-F238E27FC236}">
+                  <a16:creationId xmlns:a16="http://schemas.microsoft.com/office/drawing/2014/main" id="{33AEE8B4-F5AB-ED1D-A6E4-80795FE0EEBC}"/>
+                </a:ext>
+              </a:extLst>
+            </p:cNvPr>
+            <p:cNvSpPr/>
+            <p:nvPr/>
+          </p:nvSpPr>
+          <p:spPr>
+            <a:xfrm>
+              <a:off x="5087111" y="2595371"/>
+              <a:ext cx="1629410" cy="461645"/>
+            </a:xfrm>
+            <a:custGeom>
+              <a:avLst/>
+              <a:gdLst/>
+              <a:ahLst/>
+              <a:cxnLst/>
+              <a:rect l="l" t="t" r="r" b="b"/>
+              <a:pathLst>
+                <a:path w="1629409" h="461644">
+                  <a:moveTo>
+                    <a:pt x="0" y="76835"/>
+                  </a:moveTo>
+                  <a:lnTo>
+                    <a:pt x="6096" y="46989"/>
+                  </a:lnTo>
+                  <a:lnTo>
+                    <a:pt x="22478" y="22478"/>
+                  </a:lnTo>
+                  <a:lnTo>
+                    <a:pt x="46989" y="6095"/>
+                  </a:lnTo>
+                  <a:lnTo>
+                    <a:pt x="76962" y="0"/>
+                  </a:lnTo>
+                  <a:lnTo>
+                    <a:pt x="1551939" y="0"/>
+                  </a:lnTo>
+                  <a:lnTo>
+                    <a:pt x="1581912" y="6095"/>
+                  </a:lnTo>
+                  <a:lnTo>
+                    <a:pt x="1606422" y="22478"/>
+                  </a:lnTo>
+                  <a:lnTo>
+                    <a:pt x="1622806" y="46989"/>
+                  </a:lnTo>
+                  <a:lnTo>
+                    <a:pt x="1628902" y="76835"/>
+                  </a:lnTo>
+                  <a:lnTo>
+                    <a:pt x="1628902" y="384428"/>
+                  </a:lnTo>
+                  <a:lnTo>
+                    <a:pt x="1622806" y="414274"/>
+                  </a:lnTo>
+                  <a:lnTo>
+                    <a:pt x="1606422" y="438785"/>
+                  </a:lnTo>
+                  <a:lnTo>
+                    <a:pt x="1581912" y="455167"/>
+                  </a:lnTo>
+                  <a:lnTo>
+                    <a:pt x="1551939" y="461263"/>
+                  </a:lnTo>
+                  <a:lnTo>
+                    <a:pt x="76962" y="461263"/>
+                  </a:lnTo>
+                  <a:lnTo>
+                    <a:pt x="46989" y="455167"/>
+                  </a:lnTo>
+                  <a:lnTo>
+                    <a:pt x="22478" y="438785"/>
+                  </a:lnTo>
+                  <a:lnTo>
+                    <a:pt x="6096" y="414274"/>
+                  </a:lnTo>
+                  <a:lnTo>
+                    <a:pt x="0" y="384428"/>
+                  </a:lnTo>
+                  <a:lnTo>
+                    <a:pt x="0" y="76835"/>
+                  </a:lnTo>
+                  <a:close/>
+                </a:path>
+              </a:pathLst>
+            </a:custGeom>
+            <a:ln w="9524">
+              <a:solidFill>
+                <a:srgbClr val="96B852"/>
+              </a:solidFill>
+            </a:ln>
+          </p:spPr>
+          <p:txBody>
+            <a:bodyPr wrap="square" lIns="0" tIns="0" rIns="0" bIns="0" rtlCol="0"/>
+            <a:lstStyle/>
+            <a:p>
+              <a:endParaRPr/>
+            </a:p>
+          </p:txBody>
+        </p:sp>
+      </p:grpSp>
+      <p:sp>
+        <p:nvSpPr>
+          <p:cNvPr id="102" name="object 23">
+            <a:extLst>
+              <a:ext uri="{FF2B5EF4-FFF2-40B4-BE49-F238E27FC236}">
+                <a16:creationId xmlns:a16="http://schemas.microsoft.com/office/drawing/2014/main" id="{12529544-FBB2-F9F4-D899-5F17CF1A0B90}"/>
+              </a:ext>
+            </a:extLst>
+          </p:cNvPr>
+          <p:cNvSpPr txBox="1"/>
+          <p:nvPr/>
+        </p:nvSpPr>
+        <p:spPr>
+          <a:xfrm>
+            <a:off x="8113069" y="2348086"/>
+            <a:ext cx="1917767" cy="382156"/>
+          </a:xfrm>
+          <a:prstGeom prst="rect">
+            <a:avLst/>
+          </a:prstGeom>
+        </p:spPr>
+        <p:txBody>
+          <a:bodyPr vert="horz" wrap="square" lIns="0" tIns="12700" rIns="0" bIns="0" rtlCol="0">
+            <a:spAutoFit/>
+          </a:bodyPr>
+          <a:lstStyle/>
+          <a:p>
+            <a:pPr algn="ctr">
+              <a:lnSpc>
+                <a:spcPct val="100000"/>
+              </a:lnSpc>
+              <a:spcBef>
+                <a:spcPts val="100"/>
+              </a:spcBef>
+            </a:pPr>
+            <a:r>
+              <a:rPr lang="pt-BR" sz="1200" b="1" u="sng" dirty="0">
+                <a:uFill>
+                  <a:solidFill>
+                    <a:srgbClr val="000000"/>
+                  </a:solidFill>
+                </a:uFill>
+                <a:latin typeface="Arial"/>
+                <a:cs typeface="Arial"/>
+              </a:rPr>
+              <a:t>Leandro Rafael</a:t>
+            </a:r>
+            <a:endParaRPr sz="1200" dirty="0">
+              <a:latin typeface="Arial"/>
+              <a:cs typeface="Arial"/>
+            </a:endParaRPr>
+          </a:p>
+          <a:p>
+            <a:pPr algn="ctr">
+              <a:lnSpc>
+                <a:spcPct val="100000"/>
+              </a:lnSpc>
+            </a:pPr>
+            <a:r>
+              <a:rPr sz="1200" i="1" dirty="0">
+                <a:solidFill>
+                  <a:srgbClr val="001F5F"/>
+                </a:solidFill>
+                <a:latin typeface="Arial"/>
+                <a:cs typeface="Arial"/>
+              </a:rPr>
+              <a:t>Gerente</a:t>
+            </a:r>
+            <a:r>
+              <a:rPr lang="pt-BR" sz="1200" i="1" dirty="0">
+                <a:solidFill>
+                  <a:srgbClr val="001F5F"/>
+                </a:solidFill>
+                <a:latin typeface="Arial"/>
+                <a:cs typeface="Arial"/>
+              </a:rPr>
+              <a:t> Corporativo PMO</a:t>
+            </a:r>
+            <a:endParaRPr sz="1200" dirty="0">
+              <a:latin typeface="Arial"/>
+              <a:cs typeface="Arial"/>
+            </a:endParaRPr>
+          </a:p>
+        </p:txBody>
+      </p:sp>
+      <p:grpSp>
+        <p:nvGrpSpPr>
+          <p:cNvPr id="103" name="object 2">
+            <a:extLst>
+              <a:ext uri="{FF2B5EF4-FFF2-40B4-BE49-F238E27FC236}">
+                <a16:creationId xmlns:a16="http://schemas.microsoft.com/office/drawing/2014/main" id="{5BDAF4AF-32B8-AAA2-9F61-90ADD947D825}"/>
+              </a:ext>
+            </a:extLst>
+          </p:cNvPr>
+          <p:cNvGrpSpPr/>
+          <p:nvPr/>
+        </p:nvGrpSpPr>
+        <p:grpSpPr>
+          <a:xfrm>
+            <a:off x="1359779" y="3175714"/>
+            <a:ext cx="1701164" cy="727498"/>
+            <a:chOff x="5055108" y="3532666"/>
+            <a:chExt cx="1701164" cy="527685"/>
+          </a:xfrm>
+        </p:grpSpPr>
+        <p:pic>
+          <p:nvPicPr>
+            <p:cNvPr id="104" name="object 3">
+              <a:extLst>
+                <a:ext uri="{FF2B5EF4-FFF2-40B4-BE49-F238E27FC236}">
+                  <a16:creationId xmlns:a16="http://schemas.microsoft.com/office/drawing/2014/main" id="{879126D4-3716-AACF-F807-B755308799FE}"/>
+                </a:ext>
+              </a:extLst>
+            </p:cNvPr>
+            <p:cNvPicPr/>
+            <p:nvPr/>
+          </p:nvPicPr>
+          <p:blipFill>
+            <a:blip r:embed="rId3" cstate="print"/>
+            <a:stretch>
+              <a:fillRect/>
+            </a:stretch>
+          </p:blipFill>
+          <p:spPr>
+            <a:xfrm>
+              <a:off x="5055108" y="3532666"/>
+              <a:ext cx="1700784" cy="527268"/>
+            </a:xfrm>
+            <a:prstGeom prst="rect">
+              <a:avLst/>
+            </a:prstGeom>
+          </p:spPr>
+        </p:pic>
+        <p:pic>
+          <p:nvPicPr>
+            <p:cNvPr id="105" name="object 4">
+              <a:extLst>
+                <a:ext uri="{FF2B5EF4-FFF2-40B4-BE49-F238E27FC236}">
+                  <a16:creationId xmlns:a16="http://schemas.microsoft.com/office/drawing/2014/main" id="{7D6A1662-909F-96D7-0420-BCCA104D8DB0}"/>
+                </a:ext>
+              </a:extLst>
+            </p:cNvPr>
+            <p:cNvPicPr/>
+            <p:nvPr/>
+          </p:nvPicPr>
+          <p:blipFill>
+            <a:blip r:embed="rId4" cstate="print"/>
+            <a:stretch>
+              <a:fillRect/>
+            </a:stretch>
+          </p:blipFill>
+          <p:spPr>
+            <a:xfrm>
+              <a:off x="5093208" y="3544823"/>
+              <a:ext cx="1629156" cy="461771"/>
+            </a:xfrm>
+            <a:prstGeom prst="rect">
+              <a:avLst/>
+            </a:prstGeom>
+          </p:spPr>
+        </p:pic>
+        <p:sp>
+          <p:nvSpPr>
+            <p:cNvPr id="106" name="object 5">
+              <a:extLst>
+                <a:ext uri="{FF2B5EF4-FFF2-40B4-BE49-F238E27FC236}">
+                  <a16:creationId xmlns:a16="http://schemas.microsoft.com/office/drawing/2014/main" id="{97BC3FC5-49F6-BA1B-C9F5-4172FD46D89E}"/>
+                </a:ext>
+              </a:extLst>
+            </p:cNvPr>
+            <p:cNvSpPr/>
+            <p:nvPr/>
+          </p:nvSpPr>
+          <p:spPr>
+            <a:xfrm>
+              <a:off x="5093208" y="3544823"/>
+              <a:ext cx="1629410" cy="461645"/>
+            </a:xfrm>
+            <a:custGeom>
+              <a:avLst/>
+              <a:gdLst/>
+              <a:ahLst/>
+              <a:cxnLst/>
+              <a:rect l="l" t="t" r="r" b="b"/>
+              <a:pathLst>
+                <a:path w="1629409" h="461645">
+                  <a:moveTo>
+                    <a:pt x="0" y="76834"/>
+                  </a:moveTo>
+                  <a:lnTo>
+                    <a:pt x="6095" y="46989"/>
+                  </a:lnTo>
+                  <a:lnTo>
+                    <a:pt x="22478" y="22478"/>
+                  </a:lnTo>
+                  <a:lnTo>
+                    <a:pt x="46989" y="6096"/>
+                  </a:lnTo>
+                  <a:lnTo>
+                    <a:pt x="76962" y="0"/>
+                  </a:lnTo>
+                  <a:lnTo>
+                    <a:pt x="1551939" y="0"/>
+                  </a:lnTo>
+                  <a:lnTo>
+                    <a:pt x="1581912" y="6096"/>
+                  </a:lnTo>
+                  <a:lnTo>
+                    <a:pt x="1606422" y="22478"/>
+                  </a:lnTo>
+                  <a:lnTo>
+                    <a:pt x="1622806" y="46989"/>
+                  </a:lnTo>
+                  <a:lnTo>
+                    <a:pt x="1628901" y="76834"/>
+                  </a:lnTo>
+                  <a:lnTo>
+                    <a:pt x="1628901" y="384428"/>
+                  </a:lnTo>
+                  <a:lnTo>
+                    <a:pt x="1622806" y="414274"/>
+                  </a:lnTo>
+                  <a:lnTo>
+                    <a:pt x="1606422" y="438784"/>
+                  </a:lnTo>
+                  <a:lnTo>
+                    <a:pt x="1581912" y="455168"/>
+                  </a:lnTo>
+                  <a:lnTo>
+                    <a:pt x="1551939" y="461263"/>
+                  </a:lnTo>
+                  <a:lnTo>
+                    <a:pt x="76962" y="461263"/>
+                  </a:lnTo>
+                  <a:lnTo>
+                    <a:pt x="46989" y="455168"/>
+                  </a:lnTo>
+                  <a:lnTo>
+                    <a:pt x="22478" y="438784"/>
+                  </a:lnTo>
+                  <a:lnTo>
+                    <a:pt x="6095" y="414274"/>
+                  </a:lnTo>
+                  <a:lnTo>
+                    <a:pt x="0" y="384428"/>
+                  </a:lnTo>
+                  <a:lnTo>
+                    <a:pt x="0" y="76834"/>
+                  </a:lnTo>
+                  <a:close/>
+                </a:path>
+              </a:pathLst>
+            </a:custGeom>
+            <a:ln w="9524">
+              <a:solidFill>
+                <a:srgbClr val="96B852"/>
+              </a:solidFill>
+            </a:ln>
+          </p:spPr>
+          <p:txBody>
+            <a:bodyPr wrap="square" lIns="0" tIns="0" rIns="0" bIns="0" rtlCol="0"/>
+            <a:lstStyle/>
+            <a:p>
+              <a:endParaRPr/>
+            </a:p>
+          </p:txBody>
+        </p:sp>
+      </p:grpSp>
+      <p:sp>
+        <p:nvSpPr>
+          <p:cNvPr id="107" name="object 32">
+            <a:extLst>
+              <a:ext uri="{FF2B5EF4-FFF2-40B4-BE49-F238E27FC236}">
+                <a16:creationId xmlns:a16="http://schemas.microsoft.com/office/drawing/2014/main" id="{6ABEDAAA-9030-9E2D-7FC1-13E65499D312}"/>
+              </a:ext>
+            </a:extLst>
+          </p:cNvPr>
+          <p:cNvSpPr txBox="1"/>
+          <p:nvPr/>
+        </p:nvSpPr>
+        <p:spPr>
+          <a:xfrm>
+            <a:off x="1562471" y="3222415"/>
+            <a:ext cx="1354200" cy="566822"/>
+          </a:xfrm>
+          <a:prstGeom prst="rect">
+            <a:avLst/>
+          </a:prstGeom>
+        </p:spPr>
+        <p:txBody>
+          <a:bodyPr vert="horz" wrap="square" lIns="0" tIns="12700" rIns="0" bIns="0" rtlCol="0">
+            <a:spAutoFit/>
+          </a:bodyPr>
+          <a:lstStyle/>
+          <a:p>
+            <a:pPr marL="33655" algn="ctr">
+              <a:lnSpc>
+                <a:spcPct val="100000"/>
+              </a:lnSpc>
+              <a:spcBef>
+                <a:spcPts val="100"/>
+              </a:spcBef>
+            </a:pPr>
+            <a:r>
+              <a:rPr lang="pt-BR" sz="1200" b="1" u="sng" spc="-10" dirty="0">
+                <a:uFill>
+                  <a:solidFill>
+                    <a:srgbClr val="000000"/>
+                  </a:solidFill>
+                </a:uFill>
+                <a:latin typeface="Arial"/>
+                <a:cs typeface="Arial"/>
+              </a:rPr>
+              <a:t>Ivan Ferreira</a:t>
+            </a:r>
+          </a:p>
+          <a:p>
+            <a:pPr marL="12700" algn="ctr">
+              <a:lnSpc>
+                <a:spcPct val="100000"/>
+              </a:lnSpc>
+              <a:spcBef>
+                <a:spcPts val="5"/>
+              </a:spcBef>
+            </a:pPr>
+            <a:r>
+              <a:rPr sz="1200" i="1" spc="-10" dirty="0" err="1">
+                <a:solidFill>
+                  <a:srgbClr val="001F5F"/>
+                </a:solidFill>
+                <a:latin typeface="Arial"/>
+                <a:cs typeface="Arial"/>
+              </a:rPr>
+              <a:t>Coordenador</a:t>
+            </a:r>
+            <a:r>
+              <a:rPr sz="1200" i="1" spc="-20" dirty="0">
+                <a:solidFill>
+                  <a:srgbClr val="001F5F"/>
+                </a:solidFill>
+                <a:latin typeface="Arial"/>
+                <a:cs typeface="Arial"/>
+              </a:rPr>
+              <a:t> </a:t>
+            </a:r>
+            <a:r>
+              <a:rPr sz="1200" i="1" dirty="0">
+                <a:solidFill>
+                  <a:srgbClr val="001F5F"/>
+                </a:solidFill>
+                <a:latin typeface="Arial"/>
+                <a:cs typeface="Arial"/>
+              </a:rPr>
+              <a:t>de</a:t>
+            </a:r>
+            <a:r>
+              <a:rPr sz="1200" i="1" spc="-25" dirty="0">
+                <a:solidFill>
+                  <a:srgbClr val="001F5F"/>
+                </a:solidFill>
+                <a:latin typeface="Arial"/>
+                <a:cs typeface="Arial"/>
+              </a:rPr>
+              <a:t> </a:t>
+            </a:r>
+            <a:r>
+              <a:rPr lang="pt-BR" sz="1200" i="1" spc="-25" dirty="0">
+                <a:solidFill>
+                  <a:srgbClr val="001F5F"/>
+                </a:solidFill>
+                <a:latin typeface="Arial"/>
+                <a:cs typeface="Arial"/>
+              </a:rPr>
+              <a:t>Sistemas</a:t>
+            </a:r>
+            <a:endParaRPr sz="1200" dirty="0">
+              <a:latin typeface="Arial"/>
+              <a:cs typeface="Arial"/>
+            </a:endParaRPr>
+          </a:p>
+        </p:txBody>
+      </p:sp>
+      <p:sp>
+        <p:nvSpPr>
+          <p:cNvPr id="108" name="object 42">
+            <a:extLst>
+              <a:ext uri="{FF2B5EF4-FFF2-40B4-BE49-F238E27FC236}">
+                <a16:creationId xmlns:a16="http://schemas.microsoft.com/office/drawing/2014/main" id="{D5A347E7-40F7-A86D-30C0-D970C4572C47}"/>
+              </a:ext>
+            </a:extLst>
+          </p:cNvPr>
+          <p:cNvSpPr/>
+          <p:nvPr/>
+        </p:nvSpPr>
+        <p:spPr>
+          <a:xfrm flipV="1">
+            <a:off x="3028529" y="3394467"/>
+            <a:ext cx="266700" cy="45719"/>
+          </a:xfrm>
+          <a:custGeom>
+            <a:avLst/>
+            <a:gdLst/>
+            <a:ahLst/>
+            <a:cxnLst/>
+            <a:rect l="l" t="t" r="r" b="b"/>
+            <a:pathLst>
+              <a:path w="228600">
+                <a:moveTo>
+                  <a:pt x="0" y="0"/>
+                </a:moveTo>
+                <a:lnTo>
+                  <a:pt x="228219" y="0"/>
+                </a:lnTo>
+              </a:path>
+            </a:pathLst>
+          </a:custGeom>
+          <a:ln w="9525">
+            <a:solidFill>
+              <a:srgbClr val="000000"/>
+            </a:solidFill>
+          </a:ln>
+        </p:spPr>
+        <p:txBody>
+          <a:bodyPr wrap="square" lIns="0" tIns="0" rIns="0" bIns="0" rtlCol="0"/>
+          <a:lstStyle/>
+          <a:p>
+            <a:endParaRPr dirty="0"/>
+          </a:p>
+        </p:txBody>
+      </p:sp>
+      <p:sp>
+        <p:nvSpPr>
+          <p:cNvPr id="109" name="object 42">
+            <a:extLst>
+              <a:ext uri="{FF2B5EF4-FFF2-40B4-BE49-F238E27FC236}">
+                <a16:creationId xmlns:a16="http://schemas.microsoft.com/office/drawing/2014/main" id="{157A38AB-5793-D724-4D86-5367568C1A02}"/>
+              </a:ext>
+            </a:extLst>
+          </p:cNvPr>
+          <p:cNvSpPr/>
+          <p:nvPr/>
+        </p:nvSpPr>
+        <p:spPr>
+          <a:xfrm flipV="1">
+            <a:off x="4918698" y="3389324"/>
+            <a:ext cx="266700" cy="45719"/>
+          </a:xfrm>
+          <a:custGeom>
+            <a:avLst/>
+            <a:gdLst/>
+            <a:ahLst/>
+            <a:cxnLst/>
+            <a:rect l="l" t="t" r="r" b="b"/>
+            <a:pathLst>
+              <a:path w="228600">
+                <a:moveTo>
+                  <a:pt x="0" y="0"/>
+                </a:moveTo>
+                <a:lnTo>
+                  <a:pt x="228219" y="0"/>
+                </a:lnTo>
+              </a:path>
+            </a:pathLst>
+          </a:custGeom>
+          <a:ln w="9525">
+            <a:solidFill>
+              <a:srgbClr val="000000"/>
+            </a:solidFill>
+          </a:ln>
+        </p:spPr>
+        <p:txBody>
+          <a:bodyPr wrap="square" lIns="0" tIns="0" rIns="0" bIns="0" rtlCol="0"/>
+          <a:lstStyle/>
+          <a:p>
+            <a:endParaRPr dirty="0"/>
+          </a:p>
+        </p:txBody>
+      </p:sp>
+      <p:sp>
+        <p:nvSpPr>
+          <p:cNvPr id="110" name="object 33">
+            <a:extLst>
+              <a:ext uri="{FF2B5EF4-FFF2-40B4-BE49-F238E27FC236}">
+                <a16:creationId xmlns:a16="http://schemas.microsoft.com/office/drawing/2014/main" id="{D4884DC2-E25C-0577-3CAE-9B7902EE5555}"/>
+              </a:ext>
+            </a:extLst>
+          </p:cNvPr>
+          <p:cNvSpPr/>
+          <p:nvPr/>
+        </p:nvSpPr>
+        <p:spPr>
+          <a:xfrm>
+            <a:off x="4030764" y="2758696"/>
+            <a:ext cx="76200" cy="461645"/>
+          </a:xfrm>
+          <a:custGeom>
+            <a:avLst/>
+            <a:gdLst/>
+            <a:ahLst/>
+            <a:cxnLst/>
+            <a:rect l="l" t="t" r="r" b="b"/>
+            <a:pathLst>
+              <a:path w="76200" h="461645">
+                <a:moveTo>
+                  <a:pt x="76200" y="385051"/>
+                </a:moveTo>
+                <a:lnTo>
+                  <a:pt x="44450" y="385051"/>
+                </a:lnTo>
+                <a:lnTo>
+                  <a:pt x="44450" y="0"/>
+                </a:lnTo>
+                <a:lnTo>
+                  <a:pt x="31750" y="0"/>
+                </a:lnTo>
+                <a:lnTo>
+                  <a:pt x="31750" y="385051"/>
+                </a:lnTo>
+                <a:lnTo>
+                  <a:pt x="0" y="385051"/>
+                </a:lnTo>
+                <a:lnTo>
+                  <a:pt x="38100" y="461251"/>
+                </a:lnTo>
+                <a:lnTo>
+                  <a:pt x="69850" y="397751"/>
+                </a:lnTo>
+                <a:lnTo>
+                  <a:pt x="76200" y="385051"/>
+                </a:lnTo>
+                <a:close/>
+              </a:path>
+            </a:pathLst>
+          </a:custGeom>
+          <a:solidFill>
+            <a:srgbClr val="000000"/>
+          </a:solidFill>
+        </p:spPr>
+        <p:txBody>
+          <a:bodyPr wrap="square" lIns="0" tIns="0" rIns="0" bIns="0" rtlCol="0"/>
+          <a:lstStyle/>
+          <a:p>
+            <a:endParaRPr/>
+          </a:p>
+        </p:txBody>
+      </p:sp>
+      <p:sp>
+        <p:nvSpPr>
+          <p:cNvPr id="111" name="object 42">
+            <a:extLst>
+              <a:ext uri="{FF2B5EF4-FFF2-40B4-BE49-F238E27FC236}">
+                <a16:creationId xmlns:a16="http://schemas.microsoft.com/office/drawing/2014/main" id="{1294E78A-B94F-9AEA-A20E-245FBDCD56ED}"/>
+              </a:ext>
+            </a:extLst>
+          </p:cNvPr>
+          <p:cNvSpPr/>
+          <p:nvPr/>
+        </p:nvSpPr>
+        <p:spPr>
+          <a:xfrm flipV="1">
+            <a:off x="5095290" y="2450080"/>
+            <a:ext cx="3012213" cy="94090"/>
+          </a:xfrm>
+          <a:custGeom>
+            <a:avLst/>
+            <a:gdLst/>
+            <a:ahLst/>
+            <a:cxnLst/>
+            <a:rect l="l" t="t" r="r" b="b"/>
+            <a:pathLst>
+              <a:path w="228600">
+                <a:moveTo>
+                  <a:pt x="0" y="0"/>
+                </a:moveTo>
+                <a:lnTo>
+                  <a:pt x="228219" y="0"/>
+                </a:lnTo>
+              </a:path>
+            </a:pathLst>
+          </a:custGeom>
+          <a:ln w="9525">
+            <a:solidFill>
+              <a:srgbClr val="000000"/>
+            </a:solidFill>
+          </a:ln>
+        </p:spPr>
+        <p:txBody>
+          <a:bodyPr wrap="square" lIns="0" tIns="0" rIns="0" bIns="0" rtlCol="0"/>
+          <a:lstStyle/>
+          <a:p>
+            <a:endParaRPr dirty="0"/>
+          </a:p>
+        </p:txBody>
+      </p:sp>
+      <p:grpSp>
+        <p:nvGrpSpPr>
+          <p:cNvPr id="112" name="object 2">
+            <a:extLst>
+              <a:ext uri="{FF2B5EF4-FFF2-40B4-BE49-F238E27FC236}">
+                <a16:creationId xmlns:a16="http://schemas.microsoft.com/office/drawing/2014/main" id="{7F60143D-0EA4-8627-1C78-7132C3A1D624}"/>
+              </a:ext>
+            </a:extLst>
+          </p:cNvPr>
+          <p:cNvGrpSpPr/>
+          <p:nvPr/>
+        </p:nvGrpSpPr>
+        <p:grpSpPr>
+          <a:xfrm>
+            <a:off x="5152605" y="3176289"/>
+            <a:ext cx="1701164" cy="727498"/>
+            <a:chOff x="5055108" y="3532666"/>
+            <a:chExt cx="1701164" cy="527685"/>
+          </a:xfrm>
+        </p:grpSpPr>
+        <p:pic>
+          <p:nvPicPr>
+            <p:cNvPr id="113" name="object 3">
+              <a:extLst>
+                <a:ext uri="{FF2B5EF4-FFF2-40B4-BE49-F238E27FC236}">
+                  <a16:creationId xmlns:a16="http://schemas.microsoft.com/office/drawing/2014/main" id="{7C37CE01-0F24-6B50-6E14-27590500AB31}"/>
+                </a:ext>
+              </a:extLst>
+            </p:cNvPr>
+            <p:cNvPicPr/>
+            <p:nvPr/>
+          </p:nvPicPr>
+          <p:blipFill>
+            <a:blip r:embed="rId3" cstate="print"/>
+            <a:stretch>
+              <a:fillRect/>
+            </a:stretch>
+          </p:blipFill>
+          <p:spPr>
+            <a:xfrm>
+              <a:off x="5055108" y="3532666"/>
+              <a:ext cx="1700784" cy="527268"/>
+            </a:xfrm>
+            <a:prstGeom prst="rect">
+              <a:avLst/>
+            </a:prstGeom>
+          </p:spPr>
+        </p:pic>
+        <p:pic>
+          <p:nvPicPr>
+            <p:cNvPr id="114" name="object 4">
+              <a:extLst>
+                <a:ext uri="{FF2B5EF4-FFF2-40B4-BE49-F238E27FC236}">
+                  <a16:creationId xmlns:a16="http://schemas.microsoft.com/office/drawing/2014/main" id="{4DAA5769-B60E-60EF-D85C-DDE6A5F67DB2}"/>
+                </a:ext>
+              </a:extLst>
+            </p:cNvPr>
+            <p:cNvPicPr/>
+            <p:nvPr/>
+          </p:nvPicPr>
+          <p:blipFill>
+            <a:blip r:embed="rId4" cstate="print"/>
+            <a:stretch>
+              <a:fillRect/>
+            </a:stretch>
+          </p:blipFill>
+          <p:spPr>
+            <a:xfrm>
+              <a:off x="5093208" y="3544823"/>
+              <a:ext cx="1629156" cy="461771"/>
+            </a:xfrm>
+            <a:prstGeom prst="rect">
+              <a:avLst/>
+            </a:prstGeom>
+          </p:spPr>
+        </p:pic>
+        <p:sp>
+          <p:nvSpPr>
+            <p:cNvPr id="115" name="object 5">
+              <a:extLst>
+                <a:ext uri="{FF2B5EF4-FFF2-40B4-BE49-F238E27FC236}">
+                  <a16:creationId xmlns:a16="http://schemas.microsoft.com/office/drawing/2014/main" id="{2385C26E-9A05-B8AD-575B-53BCE1C046A5}"/>
+                </a:ext>
+              </a:extLst>
+            </p:cNvPr>
+            <p:cNvSpPr/>
+            <p:nvPr/>
+          </p:nvSpPr>
+          <p:spPr>
+            <a:xfrm>
+              <a:off x="5093208" y="3544823"/>
+              <a:ext cx="1629410" cy="461645"/>
+            </a:xfrm>
+            <a:custGeom>
+              <a:avLst/>
+              <a:gdLst/>
+              <a:ahLst/>
+              <a:cxnLst/>
+              <a:rect l="l" t="t" r="r" b="b"/>
+              <a:pathLst>
+                <a:path w="1629409" h="461645">
+                  <a:moveTo>
+                    <a:pt x="0" y="76834"/>
+                  </a:moveTo>
+                  <a:lnTo>
+                    <a:pt x="6095" y="46989"/>
+                  </a:lnTo>
+                  <a:lnTo>
+                    <a:pt x="22478" y="22478"/>
+                  </a:lnTo>
+                  <a:lnTo>
+                    <a:pt x="46989" y="6096"/>
+                  </a:lnTo>
+                  <a:lnTo>
+                    <a:pt x="76962" y="0"/>
+                  </a:lnTo>
+                  <a:lnTo>
+                    <a:pt x="1551939" y="0"/>
+                  </a:lnTo>
+                  <a:lnTo>
+                    <a:pt x="1581912" y="6096"/>
+                  </a:lnTo>
+                  <a:lnTo>
+                    <a:pt x="1606422" y="22478"/>
+                  </a:lnTo>
+                  <a:lnTo>
+                    <a:pt x="1622806" y="46989"/>
+                  </a:lnTo>
+                  <a:lnTo>
+                    <a:pt x="1628901" y="76834"/>
+                  </a:lnTo>
+                  <a:lnTo>
+                    <a:pt x="1628901" y="384428"/>
+                  </a:lnTo>
+                  <a:lnTo>
+                    <a:pt x="1622806" y="414274"/>
+                  </a:lnTo>
+                  <a:lnTo>
+                    <a:pt x="1606422" y="438784"/>
+                  </a:lnTo>
+                  <a:lnTo>
+                    <a:pt x="1581912" y="455168"/>
+                  </a:lnTo>
+                  <a:lnTo>
+                    <a:pt x="1551939" y="461263"/>
+                  </a:lnTo>
+                  <a:lnTo>
+                    <a:pt x="76962" y="461263"/>
+                  </a:lnTo>
+                  <a:lnTo>
+                    <a:pt x="46989" y="455168"/>
+                  </a:lnTo>
+                  <a:lnTo>
+                    <a:pt x="22478" y="438784"/>
+                  </a:lnTo>
+                  <a:lnTo>
+                    <a:pt x="6095" y="414274"/>
+                  </a:lnTo>
+                  <a:lnTo>
+                    <a:pt x="0" y="384428"/>
+                  </a:lnTo>
+                  <a:lnTo>
+                    <a:pt x="0" y="76834"/>
+                  </a:lnTo>
+                  <a:close/>
+                </a:path>
+              </a:pathLst>
+            </a:custGeom>
+            <a:ln w="9524">
+              <a:solidFill>
+                <a:srgbClr val="96B852"/>
+              </a:solidFill>
+            </a:ln>
+          </p:spPr>
+          <p:txBody>
+            <a:bodyPr wrap="square" lIns="0" tIns="0" rIns="0" bIns="0" rtlCol="0"/>
+            <a:lstStyle/>
+            <a:p>
+              <a:endParaRPr/>
+            </a:p>
+          </p:txBody>
+        </p:sp>
+      </p:grpSp>
+      <p:sp>
+        <p:nvSpPr>
+          <p:cNvPr id="116" name="object 32">
+            <a:extLst>
+              <a:ext uri="{FF2B5EF4-FFF2-40B4-BE49-F238E27FC236}">
+                <a16:creationId xmlns:a16="http://schemas.microsoft.com/office/drawing/2014/main" id="{D0DA68EE-8136-BBEA-29CB-5AC462C5DBCE}"/>
+              </a:ext>
+            </a:extLst>
+          </p:cNvPr>
+          <p:cNvSpPr txBox="1"/>
+          <p:nvPr/>
+        </p:nvSpPr>
+        <p:spPr>
+          <a:xfrm>
+            <a:off x="5353520" y="3209926"/>
+            <a:ext cx="1354200" cy="566822"/>
+          </a:xfrm>
+          <a:prstGeom prst="rect">
+            <a:avLst/>
+          </a:prstGeom>
+        </p:spPr>
+        <p:txBody>
+          <a:bodyPr vert="horz" wrap="square" lIns="0" tIns="12700" rIns="0" bIns="0" rtlCol="0">
+            <a:spAutoFit/>
+          </a:bodyPr>
+          <a:lstStyle/>
+          <a:p>
+            <a:pPr marL="33655" algn="ctr">
+              <a:lnSpc>
+                <a:spcPct val="100000"/>
+              </a:lnSpc>
+              <a:spcBef>
+                <a:spcPts val="100"/>
+              </a:spcBef>
+            </a:pPr>
+            <a:r>
+              <a:rPr lang="pt-BR" sz="1200" b="1" u="sng" spc="-10" dirty="0">
+                <a:uFill>
+                  <a:solidFill>
+                    <a:srgbClr val="000000"/>
+                  </a:solidFill>
+                </a:uFill>
+                <a:latin typeface="Arial"/>
+                <a:cs typeface="Arial"/>
+              </a:rPr>
+              <a:t>Jose Ribeiro</a:t>
+            </a:r>
+          </a:p>
+          <a:p>
+            <a:pPr marL="12700" algn="ctr">
+              <a:lnSpc>
+                <a:spcPct val="100000"/>
+              </a:lnSpc>
+              <a:spcBef>
+                <a:spcPts val="5"/>
+              </a:spcBef>
+            </a:pPr>
+            <a:r>
+              <a:rPr lang="pt-BR" sz="1200" i="1" spc="-10" dirty="0">
+                <a:solidFill>
+                  <a:srgbClr val="001F5F"/>
+                </a:solidFill>
+                <a:latin typeface="Arial"/>
+                <a:cs typeface="Arial"/>
+              </a:rPr>
+              <a:t>Coordenador</a:t>
+            </a:r>
+            <a:r>
+              <a:rPr lang="pt-BR" sz="1200" i="1" spc="-20" dirty="0">
+                <a:solidFill>
+                  <a:srgbClr val="001F5F"/>
+                </a:solidFill>
+                <a:latin typeface="Arial"/>
+                <a:cs typeface="Arial"/>
+              </a:rPr>
+              <a:t> </a:t>
+            </a:r>
+            <a:r>
+              <a:rPr lang="pt-BR" sz="1200" i="1" dirty="0">
+                <a:solidFill>
+                  <a:srgbClr val="001F5F"/>
+                </a:solidFill>
+                <a:latin typeface="Arial"/>
+                <a:cs typeface="Arial"/>
+              </a:rPr>
+              <a:t>de</a:t>
+            </a:r>
+            <a:r>
+              <a:rPr lang="pt-BR" sz="1200" i="1" spc="-25" dirty="0">
+                <a:solidFill>
+                  <a:srgbClr val="001F5F"/>
+                </a:solidFill>
+                <a:latin typeface="Arial"/>
+                <a:cs typeface="Arial"/>
+              </a:rPr>
+              <a:t> Sistemas</a:t>
+            </a:r>
+            <a:endParaRPr lang="pt-BR" sz="1200" dirty="0">
+              <a:latin typeface="Arial"/>
+              <a:cs typeface="Arial"/>
+            </a:endParaRPr>
+          </a:p>
+        </p:txBody>
+      </p:sp>
+      <p:sp>
+        <p:nvSpPr>
+          <p:cNvPr id="117" name="object 33">
+            <a:extLst>
+              <a:ext uri="{FF2B5EF4-FFF2-40B4-BE49-F238E27FC236}">
+                <a16:creationId xmlns:a16="http://schemas.microsoft.com/office/drawing/2014/main" id="{CEFE731A-757A-C6E8-DAED-6173D461714C}"/>
+              </a:ext>
+            </a:extLst>
+          </p:cNvPr>
+          <p:cNvSpPr/>
+          <p:nvPr/>
+        </p:nvSpPr>
+        <p:spPr>
+          <a:xfrm>
+            <a:off x="9086443" y="2782133"/>
+            <a:ext cx="76200" cy="461645"/>
+          </a:xfrm>
+          <a:custGeom>
+            <a:avLst/>
+            <a:gdLst/>
+            <a:ahLst/>
+            <a:cxnLst/>
+            <a:rect l="l" t="t" r="r" b="b"/>
+            <a:pathLst>
+              <a:path w="76200" h="461645">
+                <a:moveTo>
+                  <a:pt x="76200" y="385051"/>
+                </a:moveTo>
+                <a:lnTo>
+                  <a:pt x="44450" y="385051"/>
+                </a:lnTo>
+                <a:lnTo>
+                  <a:pt x="44450" y="0"/>
+                </a:lnTo>
+                <a:lnTo>
+                  <a:pt x="31750" y="0"/>
+                </a:lnTo>
+                <a:lnTo>
+                  <a:pt x="31750" y="385051"/>
+                </a:lnTo>
+                <a:lnTo>
+                  <a:pt x="0" y="385051"/>
+                </a:lnTo>
+                <a:lnTo>
+                  <a:pt x="38100" y="461251"/>
+                </a:lnTo>
+                <a:lnTo>
+                  <a:pt x="69850" y="397751"/>
+                </a:lnTo>
+                <a:lnTo>
+                  <a:pt x="76200" y="385051"/>
+                </a:lnTo>
+                <a:close/>
+              </a:path>
+            </a:pathLst>
+          </a:custGeom>
+          <a:solidFill>
+            <a:srgbClr val="000000"/>
+          </a:solidFill>
+        </p:spPr>
+        <p:txBody>
+          <a:bodyPr wrap="square" lIns="0" tIns="0" rIns="0" bIns="0" rtlCol="0"/>
+          <a:lstStyle/>
+          <a:p>
+            <a:endParaRPr/>
+          </a:p>
+        </p:txBody>
+      </p:sp>
+      <p:grpSp>
+        <p:nvGrpSpPr>
+          <p:cNvPr id="118" name="object 38">
+            <a:extLst>
+              <a:ext uri="{FF2B5EF4-FFF2-40B4-BE49-F238E27FC236}">
+                <a16:creationId xmlns:a16="http://schemas.microsoft.com/office/drawing/2014/main" id="{C85003F2-DB8F-845F-607A-111FD5C35E03}"/>
+              </a:ext>
+            </a:extLst>
+          </p:cNvPr>
+          <p:cNvGrpSpPr/>
+          <p:nvPr/>
+        </p:nvGrpSpPr>
+        <p:grpSpPr>
+          <a:xfrm>
+            <a:off x="8249135" y="3243778"/>
+            <a:ext cx="1700783" cy="527268"/>
+            <a:chOff x="6960107" y="4454687"/>
+            <a:chExt cx="1700783" cy="527268"/>
+          </a:xfrm>
+        </p:grpSpPr>
+        <p:pic>
+          <p:nvPicPr>
+            <p:cNvPr id="119" name="object 39">
+              <a:extLst>
+                <a:ext uri="{FF2B5EF4-FFF2-40B4-BE49-F238E27FC236}">
+                  <a16:creationId xmlns:a16="http://schemas.microsoft.com/office/drawing/2014/main" id="{9133506D-6844-69DF-D088-8BF7D1A5D60E}"/>
+                </a:ext>
+              </a:extLst>
+            </p:cNvPr>
+            <p:cNvPicPr/>
+            <p:nvPr/>
+          </p:nvPicPr>
+          <p:blipFill>
+            <a:blip r:embed="rId3" cstate="print"/>
+            <a:stretch>
+              <a:fillRect/>
+            </a:stretch>
+          </p:blipFill>
+          <p:spPr>
+            <a:xfrm>
+              <a:off x="6960107" y="4454687"/>
+              <a:ext cx="1700783" cy="527268"/>
+            </a:xfrm>
+            <a:prstGeom prst="rect">
+              <a:avLst/>
+            </a:prstGeom>
+          </p:spPr>
+        </p:pic>
+        <p:pic>
+          <p:nvPicPr>
+            <p:cNvPr id="120" name="object 40">
+              <a:extLst>
+                <a:ext uri="{FF2B5EF4-FFF2-40B4-BE49-F238E27FC236}">
+                  <a16:creationId xmlns:a16="http://schemas.microsoft.com/office/drawing/2014/main" id="{291A0214-0B6A-6EE0-BAAF-AE1A831EEC1C}"/>
+                </a:ext>
+              </a:extLst>
+            </p:cNvPr>
+            <p:cNvPicPr/>
+            <p:nvPr/>
+          </p:nvPicPr>
+          <p:blipFill>
+            <a:blip r:embed="rId7" cstate="print"/>
+            <a:stretch>
+              <a:fillRect/>
+            </a:stretch>
+          </p:blipFill>
+          <p:spPr>
+            <a:xfrm>
+              <a:off x="6998207" y="4466843"/>
+              <a:ext cx="1629155" cy="461771"/>
+            </a:xfrm>
+            <a:prstGeom prst="rect">
+              <a:avLst/>
+            </a:prstGeom>
+          </p:spPr>
+        </p:pic>
+        <p:sp>
+          <p:nvSpPr>
+            <p:cNvPr id="121" name="object 41">
+              <a:extLst>
+                <a:ext uri="{FF2B5EF4-FFF2-40B4-BE49-F238E27FC236}">
+                  <a16:creationId xmlns:a16="http://schemas.microsoft.com/office/drawing/2014/main" id="{77391DC3-3853-790A-9BDB-87E4566DEC48}"/>
+                </a:ext>
+              </a:extLst>
+            </p:cNvPr>
+            <p:cNvSpPr/>
+            <p:nvPr/>
+          </p:nvSpPr>
+          <p:spPr>
+            <a:xfrm>
+              <a:off x="6998207" y="4466843"/>
+              <a:ext cx="1629410" cy="461645"/>
+            </a:xfrm>
+            <a:custGeom>
+              <a:avLst/>
+              <a:gdLst/>
+              <a:ahLst/>
+              <a:cxnLst/>
+              <a:rect l="l" t="t" r="r" b="b"/>
+              <a:pathLst>
+                <a:path w="1629409" h="461645">
+                  <a:moveTo>
+                    <a:pt x="0" y="76834"/>
+                  </a:moveTo>
+                  <a:lnTo>
+                    <a:pt x="6096" y="46989"/>
+                  </a:lnTo>
+                  <a:lnTo>
+                    <a:pt x="22478" y="22478"/>
+                  </a:lnTo>
+                  <a:lnTo>
+                    <a:pt x="46990" y="6095"/>
+                  </a:lnTo>
+                  <a:lnTo>
+                    <a:pt x="76962" y="0"/>
+                  </a:lnTo>
+                  <a:lnTo>
+                    <a:pt x="1551940" y="0"/>
+                  </a:lnTo>
+                  <a:lnTo>
+                    <a:pt x="1581912" y="6095"/>
+                  </a:lnTo>
+                  <a:lnTo>
+                    <a:pt x="1606423" y="22478"/>
+                  </a:lnTo>
+                  <a:lnTo>
+                    <a:pt x="1622806" y="46989"/>
+                  </a:lnTo>
+                  <a:lnTo>
+                    <a:pt x="1628902" y="76834"/>
+                  </a:lnTo>
+                  <a:lnTo>
+                    <a:pt x="1628902" y="384428"/>
+                  </a:lnTo>
+                  <a:lnTo>
+                    <a:pt x="1622806" y="414273"/>
+                  </a:lnTo>
+                  <a:lnTo>
+                    <a:pt x="1606423" y="438784"/>
+                  </a:lnTo>
+                  <a:lnTo>
+                    <a:pt x="1581912" y="455167"/>
+                  </a:lnTo>
+                  <a:lnTo>
+                    <a:pt x="1551940" y="461263"/>
+                  </a:lnTo>
+                  <a:lnTo>
+                    <a:pt x="76962" y="461263"/>
+                  </a:lnTo>
+                  <a:lnTo>
+                    <a:pt x="46990" y="455167"/>
+                  </a:lnTo>
+                  <a:lnTo>
+                    <a:pt x="22478" y="438784"/>
+                  </a:lnTo>
+                  <a:lnTo>
+                    <a:pt x="6096" y="414273"/>
+                  </a:lnTo>
+                  <a:lnTo>
+                    <a:pt x="0" y="384428"/>
+                  </a:lnTo>
+                  <a:lnTo>
+                    <a:pt x="0" y="76834"/>
+                  </a:lnTo>
+                  <a:close/>
+                </a:path>
+              </a:pathLst>
+            </a:custGeom>
+            <a:ln w="9523">
+              <a:solidFill>
+                <a:srgbClr val="96B852"/>
+              </a:solidFill>
+            </a:ln>
+          </p:spPr>
+          <p:txBody>
+            <a:bodyPr wrap="square" lIns="0" tIns="0" rIns="0" bIns="0" rtlCol="0"/>
+            <a:lstStyle/>
+            <a:p>
+              <a:endParaRPr/>
+            </a:p>
+          </p:txBody>
+        </p:sp>
+      </p:grpSp>
+      <p:sp>
+        <p:nvSpPr>
+          <p:cNvPr id="122" name="object 36">
+            <a:extLst>
+              <a:ext uri="{FF2B5EF4-FFF2-40B4-BE49-F238E27FC236}">
+                <a16:creationId xmlns:a16="http://schemas.microsoft.com/office/drawing/2014/main" id="{A03CF491-65A2-82F2-7731-B6FAE0D7BEB3}"/>
+              </a:ext>
+            </a:extLst>
+          </p:cNvPr>
+          <p:cNvSpPr txBox="1"/>
+          <p:nvPr/>
+        </p:nvSpPr>
+        <p:spPr>
+          <a:xfrm>
+            <a:off x="8441159" y="3305781"/>
+            <a:ext cx="1382269" cy="197490"/>
+          </a:xfrm>
+          <a:prstGeom prst="rect">
+            <a:avLst/>
+          </a:prstGeom>
+        </p:spPr>
+        <p:txBody>
+          <a:bodyPr vert="horz" wrap="square" lIns="0" tIns="12700" rIns="0" bIns="0" rtlCol="0">
+            <a:spAutoFit/>
+          </a:bodyPr>
+          <a:lstStyle/>
+          <a:p>
+            <a:pPr algn="ctr">
+              <a:lnSpc>
+                <a:spcPct val="100000"/>
+              </a:lnSpc>
+              <a:spcBef>
+                <a:spcPts val="100"/>
+              </a:spcBef>
+            </a:pPr>
+            <a:r>
+              <a:rPr lang="pt-BR" sz="1200" b="1" u="sng" dirty="0">
+                <a:uFill>
+                  <a:solidFill>
+                    <a:srgbClr val="000000"/>
+                  </a:solidFill>
+                </a:uFill>
+                <a:latin typeface="Arial"/>
+                <a:cs typeface="Arial"/>
+              </a:rPr>
+              <a:t>Nathaly Nunes</a:t>
+            </a:r>
           </a:p>
         </p:txBody>
       </p:sp>
@@ -16773,7 +17861,7 @@
               <a:t> </a:t>
             </a:r>
             <a:r>
-              <a:rPr lang="pt-BR" sz="1800" dirty="0">
+              <a:rPr lang="pt-BR" sz="1800">
                 <a:solidFill>
                   <a:srgbClr val="7D7D7D"/>
                 </a:solidFill>
@@ -16783,24 +17871,34 @@
               <a:t>de</a:t>
             </a:r>
             <a:r>
-              <a:rPr lang="pt-BR" sz="1800" spc="-45" dirty="0">
-                <a:solidFill>
-                  <a:srgbClr val="7D7D7D"/>
-                </a:solidFill>
-                <a:latin typeface="Calibri"/>
-                <a:cs typeface="Calibri"/>
-              </a:rPr>
-              <a:t> </a:t>
-            </a:r>
-            <a:r>
-              <a:rPr lang="pt-BR" sz="1800" spc="-20" dirty="0">
-                <a:solidFill>
-                  <a:srgbClr val="7D7D7D"/>
-                </a:solidFill>
-                <a:latin typeface="Calibri"/>
-                <a:cs typeface="Calibri"/>
-              </a:rPr>
-              <a:t>rede</a:t>
+              <a:rPr lang="pt-BR" sz="1800" spc="-45">
+                <a:solidFill>
+                  <a:srgbClr val="7D7D7D"/>
+                </a:solidFill>
+                <a:latin typeface="Calibri"/>
+                <a:cs typeface="Calibri"/>
+              </a:rPr>
+              <a:t> </a:t>
+            </a:r>
+            <a:r>
+              <a:rPr lang="pt-BR" spc="-20" dirty="0">
+                <a:solidFill>
+                  <a:srgbClr val="7D7D7D"/>
+                </a:solidFill>
+                <a:latin typeface="Calibri"/>
+                <a:cs typeface="Calibri"/>
+              </a:rPr>
+              <a:t>R</a:t>
+            </a:r>
+            <a:r>
+              <a:rPr lang="pt-BR" sz="1800" spc="-20">
+                <a:solidFill>
+                  <a:srgbClr val="7D7D7D"/>
+                </a:solidFill>
+                <a:latin typeface="Calibri"/>
+                <a:cs typeface="Calibri"/>
+              </a:rPr>
+              <a:t>ede</a:t>
             </a:r>
             <a:endParaRPr lang="pt-BR" sz="1800" dirty="0">
               <a:latin typeface="Calibri"/>
@@ -19009,6 +20107,36 @@
           </a:prstGeom>
         </p:spPr>
       </p:pic>
+      <p:pic>
+        <p:nvPicPr>
+          <p:cNvPr id="6" name="img_wmw">
+            <a:extLst>
+              <a:ext uri="{FF2B5EF4-FFF2-40B4-BE49-F238E27FC236}">
+                <a16:creationId xmlns:a16="http://schemas.microsoft.com/office/drawing/2014/main" id="{A9B37C30-517C-CD39-9812-D2DC5469EDC4}"/>
+              </a:ext>
+            </a:extLst>
+          </p:cNvPr>
+          <p:cNvPicPr>
+            <a:picLocks noChangeAspect="1"/>
+          </p:cNvPicPr>
+          <p:nvPr/>
+        </p:nvPicPr>
+        <p:blipFill>
+          <a:blip r:embed="rId3"/>
+          <a:stretch>
+            <a:fillRect/>
+          </a:stretch>
+        </p:blipFill>
+        <p:spPr>
+          <a:xfrm>
+            <a:off x="9978633" y="3612505"/>
+            <a:ext cx="1021980" cy="904059"/>
+          </a:xfrm>
+          <a:prstGeom prst="rect">
+            <a:avLst/>
+          </a:prstGeom>
+        </p:spPr>
+      </p:pic>
       <p:sp>
         <p:nvSpPr>
           <p:cNvPr id="19" name="ct_wmw">
@@ -19217,7 +20345,7 @@
                 </a:solidFill>
                 <a:latin typeface="Calibri"/>
                 <a:cs typeface="Calibri"/>
-                <a:hlinkClick r:id="rId3"/>
+                <a:hlinkClick r:id="rId4"/>
               </a:rPr>
               <a:t>WMW</a:t>
             </a:r>
@@ -19583,7 +20711,7 @@
           <p:nvPr/>
         </p:nvPicPr>
         <p:blipFill>
-          <a:blip r:embed="rId4"/>
+          <a:blip r:embed="rId5"/>
           <a:stretch>
             <a:fillRect/>
           </a:stretch>
@@ -19826,7 +20954,7 @@
                 </a:solidFill>
                 <a:latin typeface="Calibri"/>
                 <a:cs typeface="Calibri"/>
-                <a:hlinkClick r:id="rId5"/>
+                <a:hlinkClick r:id="rId6"/>
               </a:rPr>
               <a:t>Power BI</a:t>
             </a:r>
